--- a/output/wordlabs-logy-3day.pptx
+++ b/output/wordlabs-logy-3day.pptx
@@ -5622,7 +5622,7 @@
                 <a:ea typeface="Trebuchet MS" pitchFamily="34" charset="-122"/>
                 <a:cs typeface="Trebuchet MS" pitchFamily="34" charset="-120"/>
               </a:rPr>
-              <a:t>0</a:t>
+              <a:t>2</a:t>
             </a:r>
             <a:pPr algn="ctr" indent="0" marL="0">
               <a:buNone/>
@@ -5636,7 +5636,7 @@
                 <a:ea typeface="Trebuchet MS" pitchFamily="34" charset="-122"/>
                 <a:cs typeface="Trebuchet MS" pitchFamily="34" charset="-120"/>
               </a:rPr>
-              <a:t>  punctuation mark</a:t>
+              <a:t>  punctuation marks</a:t>
             </a:r>
             <a:endParaRPr lang="en-US" sz="2800" dirty="0"/>
           </a:p>
@@ -6040,7 +6040,7 @@
                 <a:ea typeface="Calibri" pitchFamily="34" charset="-122"/>
                 <a:cs typeface="Calibri" pitchFamily="34" charset="-120"/>
               </a:rPr>
-              <a:t>Our </a:t>
+              <a:t>In </a:t>
             </a:r>
             <a:pPr algn="l" indent="0" marL="0">
               <a:buNone/>
@@ -6057,7 +6057,7 @@
                 <a:ea typeface="Calibri" pitchFamily="34" charset="-122"/>
                 <a:cs typeface="Calibri" pitchFamily="34" charset="-120"/>
               </a:rPr>
-              <a:t>biology</a:t>
+              <a:t>geology</a:t>
             </a:r>
             <a:pPr algn="l" indent="0" marL="0">
               <a:buNone/>
@@ -6071,7 +6071,7 @@
                 <a:ea typeface="Calibri" pitchFamily="34" charset="-122"/>
                 <a:cs typeface="Calibri" pitchFamily="34" charset="-120"/>
               </a:rPr>
-              <a:t> teacher explained that </a:t>
+              <a:t>, scientists study rocks, but in </a:t>
             </a:r>
             <a:pPr algn="l" indent="0" marL="0">
               <a:buNone/>
@@ -6088,7 +6088,7 @@
                 <a:ea typeface="Calibri" pitchFamily="34" charset="-122"/>
                 <a:cs typeface="Calibri" pitchFamily="34" charset="-120"/>
               </a:rPr>
-              <a:t>ecology</a:t>
+              <a:t>zoology</a:t>
             </a:r>
             <a:pPr algn="l" indent="0" marL="0">
               <a:buNone/>
@@ -6102,7 +6102,7 @@
                 <a:ea typeface="Calibri" pitchFamily="34" charset="-122"/>
                 <a:cs typeface="Calibri" pitchFamily="34" charset="-120"/>
               </a:rPr>
-              <a:t> helps us understand how all living things are connected.</a:t>
+              <a:t>, they study animals.</a:t>
             </a:r>
             <a:endParaRPr lang="en-US" sz="1800" dirty="0"/>
           </a:p>
@@ -6257,7 +6257,7 @@
                 <a:ea typeface="Trebuchet MS" pitchFamily="34" charset="-122"/>
                 <a:cs typeface="Trebuchet MS" pitchFamily="34" charset="-120"/>
               </a:rPr>
-              <a:t>biology</a:t>
+              <a:t>geology</a:t>
             </a:r>
             <a:endParaRPr lang="en-US" sz="1400" dirty="0"/>
           </a:p>
@@ -6385,7 +6385,7 @@
                 <a:ea typeface="Trebuchet MS" pitchFamily="34" charset="-122"/>
                 <a:cs typeface="Trebuchet MS" pitchFamily="34" charset="-120"/>
               </a:rPr>
-              <a:t>ecology</a:t>
+              <a:t>zoology</a:t>
             </a:r>
             <a:endParaRPr lang="en-US" sz="1400" dirty="0"/>
           </a:p>
@@ -6855,7 +6855,7 @@
                 <a:ea typeface="Trebuchet MS" pitchFamily="34" charset="-122"/>
                 <a:cs typeface="Trebuchet MS" pitchFamily="34" charset="-120"/>
               </a:rPr>
-              <a:t>biology</a:t>
+              <a:t>geology</a:t>
             </a:r>
             <a:endParaRPr lang="en-US" sz="2800" dirty="0"/>
           </a:p>
@@ -7682,7 +7682,7 @@
                 <a:ea typeface="Trebuchet MS" pitchFamily="34" charset="-122"/>
                 <a:cs typeface="Trebuchet MS" pitchFamily="34" charset="-120"/>
               </a:rPr>
-              <a:t>biology</a:t>
+              <a:t>geology</a:t>
             </a:r>
             <a:endParaRPr lang="en-US" sz="2800" dirty="0"/>
           </a:p>
@@ -7821,7 +7821,7 @@
                 <a:ea typeface="Trebuchet MS" pitchFamily="34" charset="-122"/>
                 <a:cs typeface="Trebuchet MS" pitchFamily="34" charset="-120"/>
               </a:rPr>
-              <a:t>bio</a:t>
+              <a:t>geo</a:t>
             </a:r>
             <a:endParaRPr lang="en-US" sz="1300" dirty="0"/>
           </a:p>
@@ -7860,7 +7860,7 @@
                 <a:ea typeface="Calibri" pitchFamily="34" charset="-122"/>
                 <a:cs typeface="Calibri" pitchFamily="34" charset="-120"/>
               </a:rPr>
-              <a:t>life</a:t>
+              <a:t>earth</a:t>
             </a:r>
             <a:endParaRPr lang="en-US" sz="850" dirty="0"/>
           </a:p>
@@ -8667,7 +8667,7 @@
                 <a:ea typeface="Trebuchet MS" pitchFamily="34" charset="-122"/>
                 <a:cs typeface="Trebuchet MS" pitchFamily="34" charset="-120"/>
               </a:rPr>
-              <a:t>biology</a:t>
+              <a:t>geology</a:t>
             </a:r>
             <a:endParaRPr lang="en-US" sz="2800" dirty="0"/>
           </a:p>
@@ -8806,7 +8806,7 @@
                 <a:ea typeface="Trebuchet MS" pitchFamily="34" charset="-122"/>
                 <a:cs typeface="Trebuchet MS" pitchFamily="34" charset="-120"/>
               </a:rPr>
-              <a:t>bio</a:t>
+              <a:t>geo</a:t>
             </a:r>
             <a:endParaRPr lang="en-US" sz="1300" dirty="0"/>
           </a:p>
@@ -8845,7 +8845,7 @@
                 <a:ea typeface="Calibri" pitchFamily="34" charset="-122"/>
                 <a:cs typeface="Calibri" pitchFamily="34" charset="-120"/>
               </a:rPr>
-              <a:t>life</a:t>
+              <a:t>earth</a:t>
             </a:r>
             <a:endParaRPr lang="en-US" sz="850" dirty="0"/>
           </a:p>
@@ -9116,7 +9116,7 @@
                 <a:ea typeface="Trebuchet MS" pitchFamily="34" charset="-122"/>
                 <a:cs typeface="Trebuchet MS" pitchFamily="34" charset="-120"/>
               </a:rPr>
-              <a:t>bi</a:t>
+              <a:t>ge</a:t>
             </a:r>
             <a:endParaRPr lang="en-US" sz="1400" dirty="0"/>
           </a:p>
@@ -9994,7 +9994,7 @@
                 <a:ea typeface="Trebuchet MS" pitchFamily="34" charset="-122"/>
                 <a:cs typeface="Trebuchet MS" pitchFamily="34" charset="-120"/>
               </a:rPr>
-              <a:t>biology</a:t>
+              <a:t>geology</a:t>
             </a:r>
             <a:endParaRPr lang="en-US" sz="2800" dirty="0"/>
           </a:p>
@@ -10133,7 +10133,7 @@
                 <a:ea typeface="Trebuchet MS" pitchFamily="34" charset="-122"/>
                 <a:cs typeface="Trebuchet MS" pitchFamily="34" charset="-120"/>
               </a:rPr>
-              <a:t>bio</a:t>
+              <a:t>geo</a:t>
             </a:r>
             <a:endParaRPr lang="en-US" sz="1300" dirty="0"/>
           </a:p>
@@ -10172,7 +10172,7 @@
                 <a:ea typeface="Calibri" pitchFamily="34" charset="-122"/>
                 <a:cs typeface="Calibri" pitchFamily="34" charset="-120"/>
               </a:rPr>
-              <a:t>life</a:t>
+              <a:t>earth</a:t>
             </a:r>
             <a:endParaRPr lang="en-US" sz="850" dirty="0"/>
           </a:p>
@@ -10443,7 +10443,7 @@
                 <a:ea typeface="Trebuchet MS" pitchFamily="34" charset="-122"/>
                 <a:cs typeface="Trebuchet MS" pitchFamily="34" charset="-120"/>
               </a:rPr>
-              <a:t>bi</a:t>
+              <a:t>ge</a:t>
             </a:r>
             <a:endParaRPr lang="en-US" sz="1400" dirty="0"/>
           </a:p>
@@ -10839,11 +10839,11 @@
         <p:spPr>
           <a:xfrm>
             <a:off x="1874520" y="4096512"/>
-            <a:ext cx="6903720" cy="804672"/>
+            <a:ext cx="6903720" cy="658368"/>
           </a:xfrm>
           <a:prstGeom prst="rect">
             <a:avLst>
-              <a:gd name="adj" fmla="val 6818"/>
+              <a:gd name="adj" fmla="val 8333"/>
             </a:avLst>
           </a:prstGeom>
           <a:solidFill>
@@ -10866,11 +10866,11 @@
         <p:spPr>
           <a:xfrm>
             <a:off x="2254649" y="4169664"/>
-            <a:ext cx="685800" cy="384048"/>
+            <a:ext cx="685800" cy="475488"/>
           </a:xfrm>
           <a:prstGeom prst="rect">
             <a:avLst>
-              <a:gd name="adj" fmla="val 9524"/>
+              <a:gd name="adj" fmla="val 7692"/>
             </a:avLst>
           </a:prstGeom>
           <a:solidFill>
@@ -10893,7 +10893,7 @@
         <p:spPr>
           <a:xfrm>
             <a:off x="2254649" y="4169664"/>
-            <a:ext cx="685800" cy="384048"/>
+            <a:ext cx="685800" cy="475488"/>
           </a:xfrm>
           <a:prstGeom prst="rect">
             <a:avLst/>
@@ -10917,7 +10917,7 @@
                 <a:ea typeface="Trebuchet MS" pitchFamily="34" charset="-122"/>
                 <a:cs typeface="Trebuchet MS" pitchFamily="34" charset="-120"/>
               </a:rPr>
-              <a:t>b</a:t>
+              <a:t>g</a:t>
             </a:r>
             <a:endParaRPr lang="en-US" sz="900" dirty="0"/>
           </a:p>
@@ -10932,11 +10932,11 @@
         <p:spPr>
           <a:xfrm>
             <a:off x="3293146" y="4169664"/>
-            <a:ext cx="685800" cy="384048"/>
+            <a:ext cx="685800" cy="475488"/>
           </a:xfrm>
           <a:prstGeom prst="rect">
             <a:avLst>
-              <a:gd name="adj" fmla="val 9524"/>
+              <a:gd name="adj" fmla="val 7692"/>
             </a:avLst>
           </a:prstGeom>
           <a:solidFill>
@@ -10959,7 +10959,7 @@
         <p:spPr>
           <a:xfrm>
             <a:off x="3293146" y="4169664"/>
-            <a:ext cx="685800" cy="384048"/>
+            <a:ext cx="685800" cy="475488"/>
           </a:xfrm>
           <a:prstGeom prst="rect">
             <a:avLst/>
@@ -10983,7 +10983,7 @@
                 <a:ea typeface="Trebuchet MS" pitchFamily="34" charset="-122"/>
                 <a:cs typeface="Trebuchet MS" pitchFamily="34" charset="-120"/>
               </a:rPr>
-              <a:t>i</a:t>
+              <a:t>e</a:t>
             </a:r>
             <a:endParaRPr lang="en-US" sz="900" dirty="0"/>
           </a:p>
@@ -10998,11 +10998,11 @@
         <p:spPr>
           <a:xfrm>
             <a:off x="4331643" y="4169664"/>
-            <a:ext cx="685800" cy="384048"/>
+            <a:ext cx="685800" cy="475488"/>
           </a:xfrm>
           <a:prstGeom prst="rect">
             <a:avLst>
-              <a:gd name="adj" fmla="val 9524"/>
+              <a:gd name="adj" fmla="val 7692"/>
             </a:avLst>
           </a:prstGeom>
           <a:solidFill>
@@ -11025,7 +11025,7 @@
         <p:spPr>
           <a:xfrm>
             <a:off x="4331643" y="4169664"/>
-            <a:ext cx="685800" cy="384048"/>
+            <a:ext cx="685800" cy="475488"/>
           </a:xfrm>
           <a:prstGeom prst="rect">
             <a:avLst/>
@@ -11064,11 +11064,11 @@
         <p:spPr>
           <a:xfrm>
             <a:off x="5370141" y="4169664"/>
-            <a:ext cx="685800" cy="384048"/>
+            <a:ext cx="685800" cy="475488"/>
           </a:xfrm>
           <a:prstGeom prst="rect">
             <a:avLst>
-              <a:gd name="adj" fmla="val 9524"/>
+              <a:gd name="adj" fmla="val 7692"/>
             </a:avLst>
           </a:prstGeom>
           <a:solidFill>
@@ -11091,7 +11091,7 @@
         <p:spPr>
           <a:xfrm>
             <a:off x="5370141" y="4169664"/>
-            <a:ext cx="685800" cy="384048"/>
+            <a:ext cx="685800" cy="475488"/>
           </a:xfrm>
           <a:prstGeom prst="rect">
             <a:avLst/>
@@ -11130,11 +11130,11 @@
         <p:spPr>
           <a:xfrm>
             <a:off x="6408638" y="4169664"/>
-            <a:ext cx="685800" cy="384048"/>
+            <a:ext cx="685800" cy="475488"/>
           </a:xfrm>
           <a:prstGeom prst="rect">
             <a:avLst>
-              <a:gd name="adj" fmla="val 9524"/>
+              <a:gd name="adj" fmla="val 7692"/>
             </a:avLst>
           </a:prstGeom>
           <a:solidFill>
@@ -11157,7 +11157,7 @@
         <p:spPr>
           <a:xfrm>
             <a:off x="6408638" y="4169664"/>
-            <a:ext cx="685800" cy="384048"/>
+            <a:ext cx="685800" cy="475488"/>
           </a:xfrm>
           <a:prstGeom prst="rect">
             <a:avLst/>
@@ -11196,11 +11196,11 @@
         <p:spPr>
           <a:xfrm>
             <a:off x="7447135" y="4169664"/>
-            <a:ext cx="685800" cy="384048"/>
+            <a:ext cx="685800" cy="475488"/>
           </a:xfrm>
           <a:prstGeom prst="rect">
             <a:avLst>
-              <a:gd name="adj" fmla="val 9524"/>
+              <a:gd name="adj" fmla="val 7692"/>
             </a:avLst>
           </a:prstGeom>
           <a:solidFill>
@@ -11223,7 +11223,7 @@
         <p:spPr>
           <a:xfrm>
             <a:off x="7447135" y="4169664"/>
-            <a:ext cx="685800" cy="384048"/>
+            <a:ext cx="685800" cy="475488"/>
           </a:xfrm>
           <a:prstGeom prst="rect">
             <a:avLst/>
@@ -11250,45 +11250,6 @@
               <a:t>gy</a:t>
             </a:r>
             <a:endParaRPr lang="en-US" sz="900" dirty="0"/>
-          </a:p>
-        </p:txBody>
-      </p:sp>
-      <p:sp>
-        <p:nvSpPr>
-          <p:cNvPr id="51" name="Text 49"/>
-          <p:cNvSpPr/>
-          <p:nvPr/>
-        </p:nvSpPr>
-        <p:spPr>
-          <a:xfrm>
-            <a:off x="7447135" y="4572000"/>
-            <a:ext cx="685800" cy="219456"/>
-          </a:xfrm>
-          <a:prstGeom prst="rect">
-            <a:avLst/>
-          </a:prstGeom>
-          <a:noFill/>
-          <a:ln/>
-        </p:spPr>
-        <p:txBody>
-          <a:bodyPr wrap="square" lIns="0" tIns="0" rIns="0" bIns="0" rtlCol="0" anchor="t"/>
-          <a:lstStyle/>
-          <a:p>
-            <a:pPr algn="ctr" indent="0" marL="0">
-              <a:buNone/>
-            </a:pPr>
-            <a:r>
-              <a:rPr lang="en-US" sz="750" i="1" dirty="0">
-                <a:solidFill>
-                  <a:srgbClr val="94A3B8"/>
-                </a:solidFill>
-                <a:latin typeface="Calibri" pitchFamily="34" charset="0"/>
-                <a:ea typeface="Calibri" pitchFamily="34" charset="-122"/>
-                <a:cs typeface="Calibri" pitchFamily="34" charset="-120"/>
-              </a:rPr>
-              <a:t>/jee/</a:t>
-            </a:r>
-            <a:endParaRPr lang="en-US" sz="750" dirty="0"/>
           </a:p>
         </p:txBody>
       </p:sp>
@@ -11717,7 +11678,7 @@
                 <a:ea typeface="Trebuchet MS" pitchFamily="34" charset="-122"/>
                 <a:cs typeface="Trebuchet MS" pitchFamily="34" charset="-120"/>
               </a:rPr>
-              <a:t>ecology</a:t>
+              <a:t>zoology</a:t>
             </a:r>
             <a:endParaRPr lang="en-US" sz="2800" dirty="0"/>
           </a:p>
@@ -12544,7 +12505,7 @@
                 <a:ea typeface="Trebuchet MS" pitchFamily="34" charset="-122"/>
                 <a:cs typeface="Trebuchet MS" pitchFamily="34" charset="-120"/>
               </a:rPr>
-              <a:t>ecology</a:t>
+              <a:t>zoology</a:t>
             </a:r>
             <a:endParaRPr lang="en-US" sz="2800" dirty="0"/>
           </a:p>
@@ -12683,7 +12644,7 @@
                 <a:ea typeface="Trebuchet MS" pitchFamily="34" charset="-122"/>
                 <a:cs typeface="Trebuchet MS" pitchFamily="34" charset="-120"/>
               </a:rPr>
-              <a:t>eco</a:t>
+              <a:t>zoo</a:t>
             </a:r>
             <a:endParaRPr lang="en-US" sz="1300" dirty="0"/>
           </a:p>
@@ -12722,7 +12683,7 @@
                 <a:ea typeface="Calibri" pitchFamily="34" charset="-122"/>
                 <a:cs typeface="Calibri" pitchFamily="34" charset="-120"/>
               </a:rPr>
-              <a:t>house or environment</a:t>
+              <a:t>animal, living being</a:t>
             </a:r>
             <a:endParaRPr lang="en-US" sz="850" dirty="0"/>
           </a:p>
@@ -13529,7 +13490,7 @@
                 <a:ea typeface="Trebuchet MS" pitchFamily="34" charset="-122"/>
                 <a:cs typeface="Trebuchet MS" pitchFamily="34" charset="-120"/>
               </a:rPr>
-              <a:t>ecology</a:t>
+              <a:t>zoology</a:t>
             </a:r>
             <a:endParaRPr lang="en-US" sz="2800" dirty="0"/>
           </a:p>
@@ -13668,7 +13629,7 @@
                 <a:ea typeface="Trebuchet MS" pitchFamily="34" charset="-122"/>
                 <a:cs typeface="Trebuchet MS" pitchFamily="34" charset="-120"/>
               </a:rPr>
-              <a:t>eco</a:t>
+              <a:t>zoo</a:t>
             </a:r>
             <a:endParaRPr lang="en-US" sz="1300" dirty="0"/>
           </a:p>
@@ -13707,7 +13668,7 @@
                 <a:ea typeface="Calibri" pitchFamily="34" charset="-122"/>
                 <a:cs typeface="Calibri" pitchFamily="34" charset="-120"/>
               </a:rPr>
-              <a:t>house or environment</a:t>
+              <a:t>animal, living being</a:t>
             </a:r>
             <a:endParaRPr lang="en-US" sz="850" dirty="0"/>
           </a:p>
@@ -13978,7 +13939,7 @@
                 <a:ea typeface="Trebuchet MS" pitchFamily="34" charset="-122"/>
                 <a:cs typeface="Trebuchet MS" pitchFamily="34" charset="-120"/>
               </a:rPr>
-              <a:t>e</a:t>
+              <a:t>zo</a:t>
             </a:r>
             <a:endParaRPr lang="en-US" sz="1400" dirty="0"/>
           </a:p>
@@ -14083,7 +14044,7 @@
                 <a:ea typeface="Trebuchet MS" pitchFamily="34" charset="-122"/>
                 <a:cs typeface="Trebuchet MS" pitchFamily="34" charset="-120"/>
               </a:rPr>
-              <a:t>col</a:t>
+              <a:t>ol</a:t>
             </a:r>
             <a:endParaRPr lang="en-US" sz="1400" dirty="0"/>
           </a:p>
@@ -15121,7 +15082,7 @@
                 <a:ea typeface="Trebuchet MS" pitchFamily="34" charset="-122"/>
                 <a:cs typeface="Trebuchet MS" pitchFamily="34" charset="-120"/>
               </a:rPr>
-              <a:t>ecology</a:t>
+              <a:t>zoology</a:t>
             </a:r>
             <a:endParaRPr lang="en-US" sz="2800" dirty="0"/>
           </a:p>
@@ -15260,7 +15221,7 @@
                 <a:ea typeface="Trebuchet MS" pitchFamily="34" charset="-122"/>
                 <a:cs typeface="Trebuchet MS" pitchFamily="34" charset="-120"/>
               </a:rPr>
-              <a:t>eco</a:t>
+              <a:t>zoo</a:t>
             </a:r>
             <a:endParaRPr lang="en-US" sz="1300" dirty="0"/>
           </a:p>
@@ -15299,7 +15260,7 @@
                 <a:ea typeface="Calibri" pitchFamily="34" charset="-122"/>
                 <a:cs typeface="Calibri" pitchFamily="34" charset="-120"/>
               </a:rPr>
-              <a:t>house or environment</a:t>
+              <a:t>animal, living being</a:t>
             </a:r>
             <a:endParaRPr lang="en-US" sz="850" dirty="0"/>
           </a:p>
@@ -15570,7 +15531,7 @@
                 <a:ea typeface="Trebuchet MS" pitchFamily="34" charset="-122"/>
                 <a:cs typeface="Trebuchet MS" pitchFamily="34" charset="-120"/>
               </a:rPr>
-              <a:t>e</a:t>
+              <a:t>zo</a:t>
             </a:r>
             <a:endParaRPr lang="en-US" sz="1400" dirty="0"/>
           </a:p>
@@ -15675,7 +15636,7 @@
                 <a:ea typeface="Trebuchet MS" pitchFamily="34" charset="-122"/>
                 <a:cs typeface="Trebuchet MS" pitchFamily="34" charset="-120"/>
               </a:rPr>
-              <a:t>col</a:t>
+              <a:t>ol</a:t>
             </a:r>
             <a:endParaRPr lang="en-US" sz="1400" dirty="0"/>
           </a:p>
@@ -15966,11 +15927,11 @@
         <p:spPr>
           <a:xfrm>
             <a:off x="1874520" y="4096512"/>
-            <a:ext cx="6903720" cy="804672"/>
+            <a:ext cx="6903720" cy="658368"/>
           </a:xfrm>
           <a:prstGeom prst="rect">
             <a:avLst>
-              <a:gd name="adj" fmla="val 6818"/>
+              <a:gd name="adj" fmla="val 8333"/>
             </a:avLst>
           </a:prstGeom>
           <a:solidFill>
@@ -15993,11 +15954,11 @@
         <p:spPr>
           <a:xfrm>
             <a:off x="2254649" y="4169664"/>
-            <a:ext cx="685800" cy="384048"/>
+            <a:ext cx="685800" cy="475488"/>
           </a:xfrm>
           <a:prstGeom prst="rect">
             <a:avLst>
-              <a:gd name="adj" fmla="val 9524"/>
+              <a:gd name="adj" fmla="val 7692"/>
             </a:avLst>
           </a:prstGeom>
           <a:solidFill>
@@ -16020,7 +15981,7 @@
         <p:spPr>
           <a:xfrm>
             <a:off x="2254649" y="4169664"/>
-            <a:ext cx="685800" cy="384048"/>
+            <a:ext cx="685800" cy="475488"/>
           </a:xfrm>
           <a:prstGeom prst="rect">
             <a:avLst/>
@@ -16044,7 +16005,7 @@
                 <a:ea typeface="Trebuchet MS" pitchFamily="34" charset="-122"/>
                 <a:cs typeface="Trebuchet MS" pitchFamily="34" charset="-120"/>
               </a:rPr>
-              <a:t>e</a:t>
+              <a:t>z</a:t>
             </a:r>
             <a:endParaRPr lang="en-US" sz="900" dirty="0"/>
           </a:p>
@@ -16059,11 +16020,11 @@
         <p:spPr>
           <a:xfrm>
             <a:off x="3293146" y="4169664"/>
-            <a:ext cx="685800" cy="384048"/>
+            <a:ext cx="685800" cy="475488"/>
           </a:xfrm>
           <a:prstGeom prst="rect">
             <a:avLst>
-              <a:gd name="adj" fmla="val 9524"/>
+              <a:gd name="adj" fmla="val 7692"/>
             </a:avLst>
           </a:prstGeom>
           <a:solidFill>
@@ -16086,7 +16047,7 @@
         <p:spPr>
           <a:xfrm>
             <a:off x="3293146" y="4169664"/>
-            <a:ext cx="685800" cy="384048"/>
+            <a:ext cx="685800" cy="475488"/>
           </a:xfrm>
           <a:prstGeom prst="rect">
             <a:avLst/>
@@ -16110,7 +16071,7 @@
                 <a:ea typeface="Trebuchet MS" pitchFamily="34" charset="-122"/>
                 <a:cs typeface="Trebuchet MS" pitchFamily="34" charset="-120"/>
               </a:rPr>
-              <a:t>c</a:t>
+              <a:t>oo</a:t>
             </a:r>
             <a:endParaRPr lang="en-US" sz="900" dirty="0"/>
           </a:p>
@@ -16118,57 +16079,18 @@
       </p:sp>
       <p:sp>
         <p:nvSpPr>
-          <p:cNvPr id="43" name="Text 41"/>
-          <p:cNvSpPr/>
-          <p:nvPr/>
-        </p:nvSpPr>
-        <p:spPr>
-          <a:xfrm>
-            <a:off x="3293146" y="4572000"/>
-            <a:ext cx="685800" cy="219456"/>
-          </a:xfrm>
-          <a:prstGeom prst="rect">
-            <a:avLst/>
-          </a:prstGeom>
-          <a:noFill/>
-          <a:ln/>
-        </p:spPr>
-        <p:txBody>
-          <a:bodyPr wrap="square" lIns="0" tIns="0" rIns="0" bIns="0" rtlCol="0" anchor="t"/>
-          <a:lstStyle/>
-          <a:p>
-            <a:pPr algn="ctr" indent="0" marL="0">
-              <a:buNone/>
-            </a:pPr>
-            <a:r>
-              <a:rPr lang="en-US" sz="750" i="1" dirty="0">
-                <a:solidFill>
-                  <a:srgbClr val="94A3B8"/>
-                </a:solidFill>
-                <a:latin typeface="Calibri" pitchFamily="34" charset="0"/>
-                <a:ea typeface="Calibri" pitchFamily="34" charset="-122"/>
-                <a:cs typeface="Calibri" pitchFamily="34" charset="-120"/>
-              </a:rPr>
-              <a:t>/k/</a:t>
-            </a:r>
-            <a:endParaRPr lang="en-US" sz="750" dirty="0"/>
-          </a:p>
-        </p:txBody>
-      </p:sp>
-      <p:sp>
-        <p:nvSpPr>
-          <p:cNvPr id="44" name="Shape 42"/>
+          <p:cNvPr id="43" name="Shape 41"/>
           <p:cNvSpPr/>
           <p:nvPr/>
         </p:nvSpPr>
         <p:spPr>
           <a:xfrm>
             <a:off x="4331643" y="4169664"/>
-            <a:ext cx="685800" cy="384048"/>
+            <a:ext cx="685800" cy="475488"/>
           </a:xfrm>
           <a:prstGeom prst="rect">
             <a:avLst>
-              <a:gd name="adj" fmla="val 9524"/>
+              <a:gd name="adj" fmla="val 7692"/>
             </a:avLst>
           </a:prstGeom>
           <a:solidFill>
@@ -16184,14 +16106,14 @@
       </p:sp>
       <p:sp>
         <p:nvSpPr>
-          <p:cNvPr id="45" name="Text 43"/>
+          <p:cNvPr id="44" name="Text 42"/>
           <p:cNvSpPr/>
           <p:nvPr/>
         </p:nvSpPr>
         <p:spPr>
           <a:xfrm>
             <a:off x="4331643" y="4169664"/>
-            <a:ext cx="685800" cy="384048"/>
+            <a:ext cx="685800" cy="475488"/>
           </a:xfrm>
           <a:prstGeom prst="rect">
             <a:avLst/>
@@ -16223,18 +16145,18 @@
       </p:sp>
       <p:sp>
         <p:nvSpPr>
-          <p:cNvPr id="46" name="Shape 44"/>
+          <p:cNvPr id="45" name="Shape 43"/>
           <p:cNvSpPr/>
           <p:nvPr/>
         </p:nvSpPr>
         <p:spPr>
           <a:xfrm>
             <a:off x="5370141" y="4169664"/>
-            <a:ext cx="685800" cy="384048"/>
+            <a:ext cx="685800" cy="475488"/>
           </a:xfrm>
           <a:prstGeom prst="rect">
             <a:avLst>
-              <a:gd name="adj" fmla="val 9524"/>
+              <a:gd name="adj" fmla="val 7692"/>
             </a:avLst>
           </a:prstGeom>
           <a:solidFill>
@@ -16250,14 +16172,14 @@
       </p:sp>
       <p:sp>
         <p:nvSpPr>
-          <p:cNvPr id="47" name="Text 45"/>
+          <p:cNvPr id="46" name="Text 44"/>
           <p:cNvSpPr/>
           <p:nvPr/>
         </p:nvSpPr>
         <p:spPr>
           <a:xfrm>
             <a:off x="5370141" y="4169664"/>
-            <a:ext cx="685800" cy="384048"/>
+            <a:ext cx="685800" cy="475488"/>
           </a:xfrm>
           <a:prstGeom prst="rect">
             <a:avLst/>
@@ -16289,18 +16211,18 @@
       </p:sp>
       <p:sp>
         <p:nvSpPr>
-          <p:cNvPr id="48" name="Shape 46"/>
+          <p:cNvPr id="47" name="Shape 45"/>
           <p:cNvSpPr/>
           <p:nvPr/>
         </p:nvSpPr>
         <p:spPr>
           <a:xfrm>
             <a:off x="6408638" y="4169664"/>
-            <a:ext cx="685800" cy="384048"/>
+            <a:ext cx="685800" cy="475488"/>
           </a:xfrm>
           <a:prstGeom prst="rect">
             <a:avLst>
-              <a:gd name="adj" fmla="val 9524"/>
+              <a:gd name="adj" fmla="val 7692"/>
             </a:avLst>
           </a:prstGeom>
           <a:solidFill>
@@ -16316,14 +16238,14 @@
       </p:sp>
       <p:sp>
         <p:nvSpPr>
-          <p:cNvPr id="49" name="Text 47"/>
+          <p:cNvPr id="48" name="Text 46"/>
           <p:cNvSpPr/>
           <p:nvPr/>
         </p:nvSpPr>
         <p:spPr>
           <a:xfrm>
             <a:off x="6408638" y="4169664"/>
-            <a:ext cx="685800" cy="384048"/>
+            <a:ext cx="685800" cy="475488"/>
           </a:xfrm>
           <a:prstGeom prst="rect">
             <a:avLst/>
@@ -16355,18 +16277,18 @@
       </p:sp>
       <p:sp>
         <p:nvSpPr>
-          <p:cNvPr id="50" name="Shape 48"/>
+          <p:cNvPr id="49" name="Shape 47"/>
           <p:cNvSpPr/>
           <p:nvPr/>
         </p:nvSpPr>
         <p:spPr>
           <a:xfrm>
             <a:off x="7447135" y="4169664"/>
-            <a:ext cx="685800" cy="384048"/>
+            <a:ext cx="685800" cy="475488"/>
           </a:xfrm>
           <a:prstGeom prst="rect">
             <a:avLst>
-              <a:gd name="adj" fmla="val 9524"/>
+              <a:gd name="adj" fmla="val 7692"/>
             </a:avLst>
           </a:prstGeom>
           <a:solidFill>
@@ -16382,14 +16304,14 @@
       </p:sp>
       <p:sp>
         <p:nvSpPr>
-          <p:cNvPr id="51" name="Text 49"/>
+          <p:cNvPr id="50" name="Text 48"/>
           <p:cNvSpPr/>
           <p:nvPr/>
         </p:nvSpPr>
         <p:spPr>
           <a:xfrm>
             <a:off x="7447135" y="4169664"/>
-            <a:ext cx="685800" cy="384048"/>
+            <a:ext cx="685800" cy="475488"/>
           </a:xfrm>
           <a:prstGeom prst="rect">
             <a:avLst/>
@@ -16416,45 +16338,6 @@
               <a:t>gy</a:t>
             </a:r>
             <a:endParaRPr lang="en-US" sz="900" dirty="0"/>
-          </a:p>
-        </p:txBody>
-      </p:sp>
-      <p:sp>
-        <p:nvSpPr>
-          <p:cNvPr id="52" name="Text 50"/>
-          <p:cNvSpPr/>
-          <p:nvPr/>
-        </p:nvSpPr>
-        <p:spPr>
-          <a:xfrm>
-            <a:off x="7447135" y="4572000"/>
-            <a:ext cx="685800" cy="219456"/>
-          </a:xfrm>
-          <a:prstGeom prst="rect">
-            <a:avLst/>
-          </a:prstGeom>
-          <a:noFill/>
-          <a:ln/>
-        </p:spPr>
-        <p:txBody>
-          <a:bodyPr wrap="square" lIns="0" tIns="0" rIns="0" bIns="0" rtlCol="0" anchor="t"/>
-          <a:lstStyle/>
-          <a:p>
-            <a:pPr algn="ctr" indent="0" marL="0">
-              <a:buNone/>
-            </a:pPr>
-            <a:r>
-              <a:rPr lang="en-US" sz="750" i="1" dirty="0">
-                <a:solidFill>
-                  <a:srgbClr val="94A3B8"/>
-                </a:solidFill>
-                <a:latin typeface="Calibri" pitchFamily="34" charset="0"/>
-                <a:ea typeface="Calibri" pitchFamily="34" charset="-122"/>
-                <a:cs typeface="Calibri" pitchFamily="34" charset="-120"/>
-              </a:rPr>
-              <a:t>/jee/</a:t>
-            </a:r>
-            <a:endParaRPr lang="en-US" sz="750" dirty="0"/>
           </a:p>
         </p:txBody>
       </p:sp>
@@ -17360,7 +17243,7 @@
                 <a:ea typeface="Trebuchet MS" pitchFamily="34" charset="-122"/>
                 <a:cs typeface="Trebuchet MS" pitchFamily="34" charset="-120"/>
               </a:rPr>
-              <a:t>1</a:t>
+              <a:t>2</a:t>
             </a:r>
             <a:pPr algn="ctr" indent="0" marL="0">
               <a:buNone/>
@@ -17374,7 +17257,7 @@
                 <a:ea typeface="Trebuchet MS" pitchFamily="34" charset="-122"/>
                 <a:cs typeface="Trebuchet MS" pitchFamily="34" charset="-120"/>
               </a:rPr>
-              <a:t>  punctuation mark</a:t>
+              <a:t>  punctuation marks</a:t>
             </a:r>
             <a:endParaRPr lang="en-US" sz="2800" dirty="0"/>
           </a:p>
@@ -17778,7 +17661,7 @@
                 <a:ea typeface="Calibri" pitchFamily="34" charset="-122"/>
                 <a:cs typeface="Calibri" pitchFamily="34" charset="-120"/>
               </a:rPr>
-              <a:t>In </a:t>
+              <a:t>She studied </a:t>
             </a:r>
             <a:pPr algn="l" indent="0" marL="0">
               <a:buNone/>
@@ -17809,7 +17692,7 @@
                 <a:ea typeface="Calibri" pitchFamily="34" charset="-122"/>
                 <a:cs typeface="Calibri" pitchFamily="34" charset="-120"/>
               </a:rPr>
-              <a:t> class, we learned that </a:t>
+              <a:t> and </a:t>
             </a:r>
             <a:pPr algn="l" indent="0" marL="0">
               <a:buNone/>
@@ -17826,7 +17709,7 @@
                 <a:ea typeface="Calibri" pitchFamily="34" charset="-122"/>
                 <a:cs typeface="Calibri" pitchFamily="34" charset="-120"/>
               </a:rPr>
-              <a:t>zoology</a:t>
+              <a:t>ecology</a:t>
             </a:r>
             <a:pPr algn="l" indent="0" marL="0">
               <a:buNone/>
@@ -17840,7 +17723,7 @@
                 <a:ea typeface="Calibri" pitchFamily="34" charset="-122"/>
                 <a:cs typeface="Calibri" pitchFamily="34" charset="-120"/>
               </a:rPr>
-              <a:t> and </a:t>
+              <a:t> at school, and her favourite topic in </a:t>
             </a:r>
             <a:pPr algn="l" indent="0" marL="0">
               <a:buNone/>
@@ -17857,7 +17740,7 @@
                 <a:ea typeface="Calibri" pitchFamily="34" charset="-122"/>
                 <a:cs typeface="Calibri" pitchFamily="34" charset="-120"/>
               </a:rPr>
-              <a:t>ecology</a:t>
+              <a:t>meteorology</a:t>
             </a:r>
             <a:pPr algn="l" indent="0" marL="0">
               <a:buNone/>
@@ -17871,7 +17754,7 @@
                 <a:ea typeface="Calibri" pitchFamily="34" charset="-122"/>
                 <a:cs typeface="Calibri" pitchFamily="34" charset="-120"/>
               </a:rPr>
-              <a:t> are both important branches of science.</a:t>
+              <a:t> was thunderstorms!</a:t>
             </a:r>
             <a:endParaRPr lang="en-US" sz="1800" dirty="0"/>
           </a:p>
@@ -18154,7 +18037,7 @@
                 <a:ea typeface="Trebuchet MS" pitchFamily="34" charset="-122"/>
                 <a:cs typeface="Trebuchet MS" pitchFamily="34" charset="-120"/>
               </a:rPr>
-              <a:t>zoology</a:t>
+              <a:t>ecology</a:t>
             </a:r>
             <a:endParaRPr lang="en-US" sz="1400" dirty="0"/>
           </a:p>
@@ -18282,7 +18165,7 @@
                 <a:ea typeface="Trebuchet MS" pitchFamily="34" charset="-122"/>
                 <a:cs typeface="Trebuchet MS" pitchFamily="34" charset="-120"/>
               </a:rPr>
-              <a:t>ecology</a:t>
+              <a:t>meteorology</a:t>
             </a:r>
             <a:endParaRPr lang="en-US" sz="1400" dirty="0"/>
           </a:p>
@@ -22736,11 +22619,11 @@
         <p:spPr>
           <a:xfrm>
             <a:off x="1874520" y="4096512"/>
-            <a:ext cx="6903720" cy="804672"/>
+            <a:ext cx="6903720" cy="658368"/>
           </a:xfrm>
           <a:prstGeom prst="rect">
             <a:avLst>
-              <a:gd name="adj" fmla="val 6818"/>
+              <a:gd name="adj" fmla="val 8333"/>
             </a:avLst>
           </a:prstGeom>
           <a:solidFill>
@@ -22763,11 +22646,11 @@
         <p:spPr>
           <a:xfrm>
             <a:off x="2254649" y="4169664"/>
-            <a:ext cx="685800" cy="384048"/>
+            <a:ext cx="685800" cy="475488"/>
           </a:xfrm>
           <a:prstGeom prst="rect">
             <a:avLst>
-              <a:gd name="adj" fmla="val 9524"/>
+              <a:gd name="adj" fmla="val 7692"/>
             </a:avLst>
           </a:prstGeom>
           <a:solidFill>
@@ -22790,7 +22673,7 @@
         <p:spPr>
           <a:xfrm>
             <a:off x="2254649" y="4169664"/>
-            <a:ext cx="685800" cy="384048"/>
+            <a:ext cx="685800" cy="475488"/>
           </a:xfrm>
           <a:prstGeom prst="rect">
             <a:avLst/>
@@ -22829,11 +22712,11 @@
         <p:spPr>
           <a:xfrm>
             <a:off x="3293146" y="4169664"/>
-            <a:ext cx="685800" cy="384048"/>
+            <a:ext cx="685800" cy="475488"/>
           </a:xfrm>
           <a:prstGeom prst="rect">
             <a:avLst>
-              <a:gd name="adj" fmla="val 9524"/>
+              <a:gd name="adj" fmla="val 7692"/>
             </a:avLst>
           </a:prstGeom>
           <a:solidFill>
@@ -22856,7 +22739,7 @@
         <p:spPr>
           <a:xfrm>
             <a:off x="3293146" y="4169664"/>
-            <a:ext cx="685800" cy="384048"/>
+            <a:ext cx="685800" cy="475488"/>
           </a:xfrm>
           <a:prstGeom prst="rect">
             <a:avLst/>
@@ -22895,11 +22778,11 @@
         <p:spPr>
           <a:xfrm>
             <a:off x="4331643" y="4169664"/>
-            <a:ext cx="685800" cy="384048"/>
+            <a:ext cx="685800" cy="475488"/>
           </a:xfrm>
           <a:prstGeom prst="rect">
             <a:avLst>
-              <a:gd name="adj" fmla="val 9524"/>
+              <a:gd name="adj" fmla="val 7692"/>
             </a:avLst>
           </a:prstGeom>
           <a:solidFill>
@@ -22922,7 +22805,7 @@
         <p:spPr>
           <a:xfrm>
             <a:off x="4331643" y="4169664"/>
-            <a:ext cx="685800" cy="384048"/>
+            <a:ext cx="685800" cy="475488"/>
           </a:xfrm>
           <a:prstGeom prst="rect">
             <a:avLst/>
@@ -22961,11 +22844,11 @@
         <p:spPr>
           <a:xfrm>
             <a:off x="5370141" y="4169664"/>
-            <a:ext cx="685800" cy="384048"/>
+            <a:ext cx="685800" cy="475488"/>
           </a:xfrm>
           <a:prstGeom prst="rect">
             <a:avLst>
-              <a:gd name="adj" fmla="val 9524"/>
+              <a:gd name="adj" fmla="val 7692"/>
             </a:avLst>
           </a:prstGeom>
           <a:solidFill>
@@ -22988,7 +22871,7 @@
         <p:spPr>
           <a:xfrm>
             <a:off x="5370141" y="4169664"/>
-            <a:ext cx="685800" cy="384048"/>
+            <a:ext cx="685800" cy="475488"/>
           </a:xfrm>
           <a:prstGeom prst="rect">
             <a:avLst/>
@@ -23027,11 +22910,11 @@
         <p:spPr>
           <a:xfrm>
             <a:off x="6408638" y="4169664"/>
-            <a:ext cx="685800" cy="384048"/>
+            <a:ext cx="685800" cy="475488"/>
           </a:xfrm>
           <a:prstGeom prst="rect">
             <a:avLst>
-              <a:gd name="adj" fmla="val 9524"/>
+              <a:gd name="adj" fmla="val 7692"/>
             </a:avLst>
           </a:prstGeom>
           <a:solidFill>
@@ -23054,7 +22937,7 @@
         <p:spPr>
           <a:xfrm>
             <a:off x="6408638" y="4169664"/>
-            <a:ext cx="685800" cy="384048"/>
+            <a:ext cx="685800" cy="475488"/>
           </a:xfrm>
           <a:prstGeom prst="rect">
             <a:avLst/>
@@ -23093,11 +22976,11 @@
         <p:spPr>
           <a:xfrm>
             <a:off x="7447135" y="4169664"/>
-            <a:ext cx="685800" cy="384048"/>
+            <a:ext cx="685800" cy="475488"/>
           </a:xfrm>
           <a:prstGeom prst="rect">
             <a:avLst>
-              <a:gd name="adj" fmla="val 9524"/>
+              <a:gd name="adj" fmla="val 7692"/>
             </a:avLst>
           </a:prstGeom>
           <a:solidFill>
@@ -23120,7 +23003,7 @@
         <p:spPr>
           <a:xfrm>
             <a:off x="7447135" y="4169664"/>
-            <a:ext cx="685800" cy="384048"/>
+            <a:ext cx="685800" cy="475488"/>
           </a:xfrm>
           <a:prstGeom prst="rect">
             <a:avLst/>
@@ -23147,45 +23030,6 @@
               <a:t>gy</a:t>
             </a:r>
             <a:endParaRPr lang="en-US" sz="900" dirty="0"/>
-          </a:p>
-        </p:txBody>
-      </p:sp>
-      <p:sp>
-        <p:nvSpPr>
-          <p:cNvPr id="51" name="Text 49"/>
-          <p:cNvSpPr/>
-          <p:nvPr/>
-        </p:nvSpPr>
-        <p:spPr>
-          <a:xfrm>
-            <a:off x="7447135" y="4572000"/>
-            <a:ext cx="685800" cy="219456"/>
-          </a:xfrm>
-          <a:prstGeom prst="rect">
-            <a:avLst/>
-          </a:prstGeom>
-          <a:noFill/>
-          <a:ln/>
-        </p:spPr>
-        <p:txBody>
-          <a:bodyPr wrap="square" lIns="0" tIns="0" rIns="0" bIns="0" rtlCol="0" anchor="t"/>
-          <a:lstStyle/>
-          <a:p>
-            <a:pPr algn="ctr" indent="0" marL="0">
-              <a:buNone/>
-            </a:pPr>
-            <a:r>
-              <a:rPr lang="en-US" sz="750" i="1" dirty="0">
-                <a:solidFill>
-                  <a:srgbClr val="94A3B8"/>
-                </a:solidFill>
-                <a:latin typeface="Calibri" pitchFamily="34" charset="0"/>
-                <a:ea typeface="Calibri" pitchFamily="34" charset="-122"/>
-                <a:cs typeface="Calibri" pitchFamily="34" charset="-120"/>
-              </a:rPr>
-              <a:t>/jee/</a:t>
-            </a:r>
-            <a:endParaRPr lang="en-US" sz="750" dirty="0"/>
           </a:p>
         </p:txBody>
       </p:sp>
@@ -23614,7 +23458,7 @@
                 <a:ea typeface="Trebuchet MS" pitchFamily="34" charset="-122"/>
                 <a:cs typeface="Trebuchet MS" pitchFamily="34" charset="-120"/>
               </a:rPr>
-              <a:t>zoology</a:t>
+              <a:t>ecology</a:t>
             </a:r>
             <a:endParaRPr lang="en-US" sz="2800" dirty="0"/>
           </a:p>
@@ -24441,7 +24285,7 @@
                 <a:ea typeface="Trebuchet MS" pitchFamily="34" charset="-122"/>
                 <a:cs typeface="Trebuchet MS" pitchFamily="34" charset="-120"/>
               </a:rPr>
-              <a:t>zoology</a:t>
+              <a:t>ecology</a:t>
             </a:r>
             <a:endParaRPr lang="en-US" sz="2800" dirty="0"/>
           </a:p>
@@ -24580,7 +24424,7 @@
                 <a:ea typeface="Trebuchet MS" pitchFamily="34" charset="-122"/>
                 <a:cs typeface="Trebuchet MS" pitchFamily="34" charset="-120"/>
               </a:rPr>
-              <a:t>zoo</a:t>
+              <a:t>eco</a:t>
             </a:r>
             <a:endParaRPr lang="en-US" sz="1300" dirty="0"/>
           </a:p>
@@ -24619,7 +24463,7 @@
                 <a:ea typeface="Calibri" pitchFamily="34" charset="-122"/>
                 <a:cs typeface="Calibri" pitchFamily="34" charset="-120"/>
               </a:rPr>
-              <a:t>animal</a:t>
+              <a:t>home, environment</a:t>
             </a:r>
             <a:endParaRPr lang="en-US" sz="850" dirty="0"/>
           </a:p>
@@ -26145,7 +25989,7 @@
                 <a:ea typeface="Trebuchet MS" pitchFamily="34" charset="-122"/>
                 <a:cs typeface="Trebuchet MS" pitchFamily="34" charset="-120"/>
               </a:rPr>
-              <a:t>zoology</a:t>
+              <a:t>ecology</a:t>
             </a:r>
             <a:endParaRPr lang="en-US" sz="2800" dirty="0"/>
           </a:p>
@@ -26284,7 +26128,7 @@
                 <a:ea typeface="Trebuchet MS" pitchFamily="34" charset="-122"/>
                 <a:cs typeface="Trebuchet MS" pitchFamily="34" charset="-120"/>
               </a:rPr>
-              <a:t>zoo</a:t>
+              <a:t>eco</a:t>
             </a:r>
             <a:endParaRPr lang="en-US" sz="1300" dirty="0"/>
           </a:p>
@@ -26323,7 +26167,7 @@
                 <a:ea typeface="Calibri" pitchFamily="34" charset="-122"/>
                 <a:cs typeface="Calibri" pitchFamily="34" charset="-120"/>
               </a:rPr>
-              <a:t>animal</a:t>
+              <a:t>home, environment</a:t>
             </a:r>
             <a:endParaRPr lang="en-US" sz="850" dirty="0"/>
           </a:p>
@@ -26594,7 +26438,7 @@
                 <a:ea typeface="Trebuchet MS" pitchFamily="34" charset="-122"/>
                 <a:cs typeface="Trebuchet MS" pitchFamily="34" charset="-120"/>
               </a:rPr>
-              <a:t>zo</a:t>
+              <a:t>e</a:t>
             </a:r>
             <a:endParaRPr lang="en-US" sz="1400" dirty="0"/>
           </a:p>
@@ -26699,7 +26543,7 @@
                 <a:ea typeface="Trebuchet MS" pitchFamily="34" charset="-122"/>
                 <a:cs typeface="Trebuchet MS" pitchFamily="34" charset="-120"/>
               </a:rPr>
-              <a:t>ol</a:t>
+              <a:t>col</a:t>
             </a:r>
             <a:endParaRPr lang="en-US" sz="1400" dirty="0"/>
           </a:p>
@@ -27472,7 +27316,7 @@
                 <a:ea typeface="Trebuchet MS" pitchFamily="34" charset="-122"/>
                 <a:cs typeface="Trebuchet MS" pitchFamily="34" charset="-120"/>
               </a:rPr>
-              <a:t>zoology</a:t>
+              <a:t>ecology</a:t>
             </a:r>
             <a:endParaRPr lang="en-US" sz="2800" dirty="0"/>
           </a:p>
@@ -27611,7 +27455,7 @@
                 <a:ea typeface="Trebuchet MS" pitchFamily="34" charset="-122"/>
                 <a:cs typeface="Trebuchet MS" pitchFamily="34" charset="-120"/>
               </a:rPr>
-              <a:t>zoo</a:t>
+              <a:t>eco</a:t>
             </a:r>
             <a:endParaRPr lang="en-US" sz="1300" dirty="0"/>
           </a:p>
@@ -27650,7 +27494,7 @@
                 <a:ea typeface="Calibri" pitchFamily="34" charset="-122"/>
                 <a:cs typeface="Calibri" pitchFamily="34" charset="-120"/>
               </a:rPr>
-              <a:t>animal</a:t>
+              <a:t>home, environment</a:t>
             </a:r>
             <a:endParaRPr lang="en-US" sz="850" dirty="0"/>
           </a:p>
@@ -27921,7 +27765,7 @@
                 <a:ea typeface="Trebuchet MS" pitchFamily="34" charset="-122"/>
                 <a:cs typeface="Trebuchet MS" pitchFamily="34" charset="-120"/>
               </a:rPr>
-              <a:t>zo</a:t>
+              <a:t>e</a:t>
             </a:r>
             <a:endParaRPr lang="en-US" sz="1400" dirty="0"/>
           </a:p>
@@ -28026,7 +27870,7 @@
                 <a:ea typeface="Trebuchet MS" pitchFamily="34" charset="-122"/>
                 <a:cs typeface="Trebuchet MS" pitchFamily="34" charset="-120"/>
               </a:rPr>
-              <a:t>ol</a:t>
+              <a:t>col</a:t>
             </a:r>
             <a:endParaRPr lang="en-US" sz="1400" dirty="0"/>
           </a:p>
@@ -28395,7 +28239,7 @@
                 <a:ea typeface="Trebuchet MS" pitchFamily="34" charset="-122"/>
                 <a:cs typeface="Trebuchet MS" pitchFamily="34" charset="-120"/>
               </a:rPr>
-              <a:t>z</a:t>
+              <a:t>e</a:t>
             </a:r>
             <a:endParaRPr lang="en-US" sz="900" dirty="0"/>
           </a:p>
@@ -28461,7 +28305,7 @@
                 <a:ea typeface="Trebuchet MS" pitchFamily="34" charset="-122"/>
                 <a:cs typeface="Trebuchet MS" pitchFamily="34" charset="-120"/>
               </a:rPr>
-              <a:t>oo</a:t>
+              <a:t>c</a:t>
             </a:r>
             <a:endParaRPr lang="en-US" sz="900" dirty="0"/>
           </a:p>
@@ -28469,7 +28313,46 @@
       </p:sp>
       <p:sp>
         <p:nvSpPr>
-          <p:cNvPr id="43" name="Shape 41"/>
+          <p:cNvPr id="43" name="Text 41"/>
+          <p:cNvSpPr/>
+          <p:nvPr/>
+        </p:nvSpPr>
+        <p:spPr>
+          <a:xfrm>
+            <a:off x="3293146" y="4572000"/>
+            <a:ext cx="685800" cy="219456"/>
+          </a:xfrm>
+          <a:prstGeom prst="rect">
+            <a:avLst/>
+          </a:prstGeom>
+          <a:noFill/>
+          <a:ln/>
+        </p:spPr>
+        <p:txBody>
+          <a:bodyPr wrap="square" lIns="0" tIns="0" rIns="0" bIns="0" rtlCol="0" anchor="t"/>
+          <a:lstStyle/>
+          <a:p>
+            <a:pPr algn="ctr" indent="0" marL="0">
+              <a:buNone/>
+            </a:pPr>
+            <a:r>
+              <a:rPr lang="en-US" sz="750" i="1" dirty="0">
+                <a:solidFill>
+                  <a:srgbClr val="94A3B8"/>
+                </a:solidFill>
+                <a:latin typeface="Calibri" pitchFamily="34" charset="0"/>
+                <a:ea typeface="Calibri" pitchFamily="34" charset="-122"/>
+                <a:cs typeface="Calibri" pitchFamily="34" charset="-120"/>
+              </a:rPr>
+              <a:t>/k/</a:t>
+            </a:r>
+            <a:endParaRPr lang="en-US" sz="750" dirty="0"/>
+          </a:p>
+        </p:txBody>
+      </p:sp>
+      <p:sp>
+        <p:nvSpPr>
+          <p:cNvPr id="44" name="Shape 42"/>
           <p:cNvSpPr/>
           <p:nvPr/>
         </p:nvSpPr>
@@ -28496,7 +28379,7 @@
       </p:sp>
       <p:sp>
         <p:nvSpPr>
-          <p:cNvPr id="44" name="Text 42"/>
+          <p:cNvPr id="45" name="Text 43"/>
           <p:cNvSpPr/>
           <p:nvPr/>
         </p:nvSpPr>
@@ -28535,7 +28418,7 @@
       </p:sp>
       <p:sp>
         <p:nvSpPr>
-          <p:cNvPr id="45" name="Shape 43"/>
+          <p:cNvPr id="46" name="Shape 44"/>
           <p:cNvSpPr/>
           <p:nvPr/>
         </p:nvSpPr>
@@ -28562,7 +28445,7 @@
       </p:sp>
       <p:sp>
         <p:nvSpPr>
-          <p:cNvPr id="46" name="Text 44"/>
+          <p:cNvPr id="47" name="Text 45"/>
           <p:cNvSpPr/>
           <p:nvPr/>
         </p:nvSpPr>
@@ -28601,7 +28484,7 @@
       </p:sp>
       <p:sp>
         <p:nvSpPr>
-          <p:cNvPr id="47" name="Shape 45"/>
+          <p:cNvPr id="48" name="Shape 46"/>
           <p:cNvSpPr/>
           <p:nvPr/>
         </p:nvSpPr>
@@ -28628,7 +28511,7 @@
       </p:sp>
       <p:sp>
         <p:nvSpPr>
-          <p:cNvPr id="48" name="Text 46"/>
+          <p:cNvPr id="49" name="Text 47"/>
           <p:cNvSpPr/>
           <p:nvPr/>
         </p:nvSpPr>
@@ -28667,7 +28550,7 @@
       </p:sp>
       <p:sp>
         <p:nvSpPr>
-          <p:cNvPr id="49" name="Shape 47"/>
+          <p:cNvPr id="50" name="Shape 48"/>
           <p:cNvSpPr/>
           <p:nvPr/>
         </p:nvSpPr>
@@ -28694,7 +28577,7 @@
       </p:sp>
       <p:sp>
         <p:nvSpPr>
-          <p:cNvPr id="50" name="Text 48"/>
+          <p:cNvPr id="51" name="Text 49"/>
           <p:cNvSpPr/>
           <p:nvPr/>
         </p:nvSpPr>
@@ -28728,45 +28611,6 @@
               <a:t>gy</a:t>
             </a:r>
             <a:endParaRPr lang="en-US" sz="900" dirty="0"/>
-          </a:p>
-        </p:txBody>
-      </p:sp>
-      <p:sp>
-        <p:nvSpPr>
-          <p:cNvPr id="51" name="Text 49"/>
-          <p:cNvSpPr/>
-          <p:nvPr/>
-        </p:nvSpPr>
-        <p:spPr>
-          <a:xfrm>
-            <a:off x="7447135" y="4572000"/>
-            <a:ext cx="685800" cy="219456"/>
-          </a:xfrm>
-          <a:prstGeom prst="rect">
-            <a:avLst/>
-          </a:prstGeom>
-          <a:noFill/>
-          <a:ln/>
-        </p:spPr>
-        <p:txBody>
-          <a:bodyPr wrap="square" lIns="0" tIns="0" rIns="0" bIns="0" rtlCol="0" anchor="t"/>
-          <a:lstStyle/>
-          <a:p>
-            <a:pPr algn="ctr" indent="0" marL="0">
-              <a:buNone/>
-            </a:pPr>
-            <a:r>
-              <a:rPr lang="en-US" sz="750" i="1" dirty="0">
-                <a:solidFill>
-                  <a:srgbClr val="94A3B8"/>
-                </a:solidFill>
-                <a:latin typeface="Calibri" pitchFamily="34" charset="0"/>
-                <a:ea typeface="Calibri" pitchFamily="34" charset="-122"/>
-                <a:cs typeface="Calibri" pitchFamily="34" charset="-120"/>
-              </a:rPr>
-              <a:t>/jee/</a:t>
-            </a:r>
-            <a:endParaRPr lang="en-US" sz="750" dirty="0"/>
           </a:p>
         </p:txBody>
       </p:sp>
@@ -29195,7 +29039,7 @@
                 <a:ea typeface="Trebuchet MS" pitchFamily="34" charset="-122"/>
                 <a:cs typeface="Trebuchet MS" pitchFamily="34" charset="-120"/>
               </a:rPr>
-              <a:t>ecology</a:t>
+              <a:t>meteorology</a:t>
             </a:r>
             <a:endParaRPr lang="en-US" sz="2800" dirty="0"/>
           </a:p>
@@ -30022,7 +29866,7 @@
                 <a:ea typeface="Trebuchet MS" pitchFamily="34" charset="-122"/>
                 <a:cs typeface="Trebuchet MS" pitchFamily="34" charset="-120"/>
               </a:rPr>
-              <a:t>ecology</a:t>
+              <a:t>meteorology</a:t>
             </a:r>
             <a:endParaRPr lang="en-US" sz="2800" dirty="0"/>
           </a:p>
@@ -30102,7 +29946,7 @@
         </p:nvSpPr>
         <p:spPr>
           <a:xfrm>
-            <a:off x="2938272" y="2258568"/>
+            <a:off x="2221992" y="2258568"/>
             <a:ext cx="1828800" cy="292608"/>
           </a:xfrm>
           <a:prstGeom prst="rect">
@@ -30136,7 +29980,7 @@
         </p:nvSpPr>
         <p:spPr>
           <a:xfrm>
-            <a:off x="2938272" y="2258568"/>
+            <a:off x="2221992" y="2258568"/>
             <a:ext cx="1828800" cy="292608"/>
           </a:xfrm>
           <a:prstGeom prst="rect">
@@ -30161,7 +30005,7 @@
                 <a:ea typeface="Trebuchet MS" pitchFamily="34" charset="-122"/>
                 <a:cs typeface="Trebuchet MS" pitchFamily="34" charset="-120"/>
               </a:rPr>
-              <a:t>eco</a:t>
+              <a:t>meteor</a:t>
             </a:r>
             <a:endParaRPr lang="en-US" sz="1300" dirty="0"/>
           </a:p>
@@ -30175,7 +30019,7 @@
         </p:nvSpPr>
         <p:spPr>
           <a:xfrm>
-            <a:off x="2938272" y="2569464"/>
+            <a:off x="2221992" y="2569464"/>
             <a:ext cx="1828800" cy="201168"/>
           </a:xfrm>
           <a:prstGeom prst="rect">
@@ -30200,7 +30044,7 @@
                 <a:ea typeface="Calibri" pitchFamily="34" charset="-122"/>
                 <a:cs typeface="Calibri" pitchFamily="34" charset="-120"/>
               </a:rPr>
-              <a:t>house or environment</a:t>
+              <a:t>atmosphere, sky phenomenon</a:t>
             </a:r>
             <a:endParaRPr lang="en-US" sz="850" dirty="0"/>
           </a:p>
@@ -30214,7 +30058,7 @@
         </p:nvSpPr>
         <p:spPr>
           <a:xfrm>
-            <a:off x="5803392" y="2258568"/>
+            <a:off x="4370832" y="2258568"/>
             <a:ext cx="1828800" cy="292608"/>
           </a:xfrm>
           <a:prstGeom prst="rect">
@@ -30223,11 +30067,11 @@
             </a:avLst>
           </a:prstGeom>
           <a:solidFill>
-            <a:srgbClr val="CCFBF1"/>
+            <a:srgbClr val="FCE7F3"/>
           </a:solidFill>
           <a:ln w="19050">
             <a:solidFill>
-              <a:srgbClr val="0D9488"/>
+              <a:srgbClr val="DB2777"/>
             </a:solidFill>
             <a:prstDash val="solid"/>
           </a:ln>
@@ -30248,7 +30092,7 @@
         </p:nvSpPr>
         <p:spPr>
           <a:xfrm>
-            <a:off x="5803392" y="2258568"/>
+            <a:off x="4370832" y="2258568"/>
             <a:ext cx="1828800" cy="292608"/>
           </a:xfrm>
           <a:prstGeom prst="rect">
@@ -30267,13 +30111,13 @@
             <a:r>
               <a:rPr lang="en-US" sz="1300" b="1" dirty="0">
                 <a:solidFill>
-                  <a:srgbClr val="0F766E"/>
+                  <a:srgbClr val="9D174D"/>
                 </a:solidFill>
                 <a:latin typeface="Trebuchet MS" pitchFamily="34" charset="0"/>
                 <a:ea typeface="Trebuchet MS" pitchFamily="34" charset="-122"/>
                 <a:cs typeface="Trebuchet MS" pitchFamily="34" charset="-120"/>
               </a:rPr>
-              <a:t>logy</a:t>
+              <a:t>o</a:t>
             </a:r>
             <a:endParaRPr lang="en-US" sz="1300" dirty="0"/>
           </a:p>
@@ -30287,7 +30131,7 @@
         </p:nvSpPr>
         <p:spPr>
           <a:xfrm>
-            <a:off x="5803392" y="2569464"/>
+            <a:off x="4370832" y="2569464"/>
             <a:ext cx="1828800" cy="201168"/>
           </a:xfrm>
           <a:prstGeom prst="rect">
@@ -30312,6 +30156,157 @@
                 <a:ea typeface="Calibri" pitchFamily="34" charset="-122"/>
                 <a:cs typeface="Calibri" pitchFamily="34" charset="-120"/>
               </a:rPr>
+              <a:t>connecting vowel</a:t>
+            </a:r>
+            <a:endParaRPr lang="en-US" sz="850" dirty="0"/>
+          </a:p>
+        </p:txBody>
+      </p:sp>
+      <p:sp>
+        <p:nvSpPr>
+          <p:cNvPr id="22" name="Text 20"/>
+          <p:cNvSpPr/>
+          <p:nvPr/>
+        </p:nvSpPr>
+        <p:spPr>
+          <a:xfrm>
+            <a:off x="4370832" y="2752344"/>
+            <a:ext cx="1828800" cy="182880"/>
+          </a:xfrm>
+          <a:prstGeom prst="rect">
+            <a:avLst/>
+          </a:prstGeom>
+          <a:noFill/>
+          <a:ln/>
+        </p:spPr>
+        <p:txBody>
+          <a:bodyPr wrap="square" lIns="0" tIns="0" rIns="0" bIns="0" rtlCol="0" anchor="t"/>
+          <a:lstStyle/>
+          <a:p>
+            <a:pPr algn="ctr" indent="0" marL="0">
+              <a:buNone/>
+            </a:pPr>
+            <a:r>
+              <a:rPr lang="en-US" sz="700" i="1" dirty="0">
+                <a:solidFill>
+                  <a:srgbClr val="94A3B8"/>
+                </a:solidFill>
+                <a:latin typeface="Calibri" pitchFamily="34" charset="0"/>
+                <a:ea typeface="Calibri" pitchFamily="34" charset="-122"/>
+                <a:cs typeface="Calibri" pitchFamily="34" charset="-120"/>
+              </a:rPr>
+              <a:t>links base to suffix</a:t>
+            </a:r>
+            <a:endParaRPr lang="en-US" sz="700" dirty="0"/>
+          </a:p>
+        </p:txBody>
+      </p:sp>
+      <p:sp>
+        <p:nvSpPr>
+          <p:cNvPr id="23" name="Shape 21"/>
+          <p:cNvSpPr/>
+          <p:nvPr/>
+        </p:nvSpPr>
+        <p:spPr>
+          <a:xfrm>
+            <a:off x="6519672" y="2258568"/>
+            <a:ext cx="1828800" cy="292608"/>
+          </a:xfrm>
+          <a:prstGeom prst="rect">
+            <a:avLst>
+              <a:gd name="adj" fmla="val 25000"/>
+            </a:avLst>
+          </a:prstGeom>
+          <a:solidFill>
+            <a:srgbClr val="CCFBF1"/>
+          </a:solidFill>
+          <a:ln w="19050">
+            <a:solidFill>
+              <a:srgbClr val="0D9488"/>
+            </a:solidFill>
+            <a:prstDash val="solid"/>
+          </a:ln>
+          <a:effectLst>
+            <a:outerShdw sx="100000" sy="100000" kx="0" ky="0" algn="bl" rotWithShape="0" blurRad="101600" dist="38100" dir="8100000">
+              <a:srgbClr val="000000">
+                <a:alpha val="12000"/>
+              </a:srgbClr>
+            </a:outerShdw>
+          </a:effectLst>
+        </p:spPr>
+      </p:sp>
+      <p:sp>
+        <p:nvSpPr>
+          <p:cNvPr id="24" name="Text 22"/>
+          <p:cNvSpPr/>
+          <p:nvPr/>
+        </p:nvSpPr>
+        <p:spPr>
+          <a:xfrm>
+            <a:off x="6519672" y="2258568"/>
+            <a:ext cx="1828800" cy="292608"/>
+          </a:xfrm>
+          <a:prstGeom prst="rect">
+            <a:avLst/>
+          </a:prstGeom>
+          <a:noFill/>
+          <a:ln/>
+        </p:spPr>
+        <p:txBody>
+          <a:bodyPr wrap="square" lIns="0" tIns="0" rIns="0" bIns="0" rtlCol="0" anchor="ctr"/>
+          <a:lstStyle/>
+          <a:p>
+            <a:pPr algn="ctr" indent="0" marL="0">
+              <a:buNone/>
+            </a:pPr>
+            <a:r>
+              <a:rPr lang="en-US" sz="1300" b="1" dirty="0">
+                <a:solidFill>
+                  <a:srgbClr val="0F766E"/>
+                </a:solidFill>
+                <a:latin typeface="Trebuchet MS" pitchFamily="34" charset="0"/>
+                <a:ea typeface="Trebuchet MS" pitchFamily="34" charset="-122"/>
+                <a:cs typeface="Trebuchet MS" pitchFamily="34" charset="-120"/>
+              </a:rPr>
+              <a:t>logy</a:t>
+            </a:r>
+            <a:endParaRPr lang="en-US" sz="1300" dirty="0"/>
+          </a:p>
+        </p:txBody>
+      </p:sp>
+      <p:sp>
+        <p:nvSpPr>
+          <p:cNvPr id="25" name="Text 23"/>
+          <p:cNvSpPr/>
+          <p:nvPr/>
+        </p:nvSpPr>
+        <p:spPr>
+          <a:xfrm>
+            <a:off x="6519672" y="2569464"/>
+            <a:ext cx="1828800" cy="201168"/>
+          </a:xfrm>
+          <a:prstGeom prst="rect">
+            <a:avLst/>
+          </a:prstGeom>
+          <a:noFill/>
+          <a:ln/>
+        </p:spPr>
+        <p:txBody>
+          <a:bodyPr wrap="square" lIns="0" tIns="0" rIns="0" bIns="0" rtlCol="0" anchor="t"/>
+          <a:lstStyle/>
+          <a:p>
+            <a:pPr algn="ctr" indent="0" marL="0">
+              <a:buNone/>
+            </a:pPr>
+            <a:r>
+              <a:rPr lang="en-US" sz="850" dirty="0">
+                <a:solidFill>
+                  <a:srgbClr val="475569"/>
+                </a:solidFill>
+                <a:latin typeface="Calibri" pitchFamily="34" charset="0"/>
+                <a:ea typeface="Calibri" pitchFamily="34" charset="-122"/>
+                <a:cs typeface="Calibri" pitchFamily="34" charset="-120"/>
+              </a:rPr>
               <a:t>study of</a:t>
             </a:r>
             <a:endParaRPr lang="en-US" sz="850" dirty="0"/>
@@ -30320,7 +30315,7 @@
       </p:sp>
       <p:sp>
         <p:nvSpPr>
-          <p:cNvPr id="22" name="Shape 20"/>
+          <p:cNvPr id="26" name="Shape 24"/>
           <p:cNvSpPr/>
           <p:nvPr/>
         </p:nvSpPr>
@@ -30347,7 +30342,7 @@
       </p:sp>
       <p:sp>
         <p:nvSpPr>
-          <p:cNvPr id="23" name="Text 21"/>
+          <p:cNvPr id="27" name="Text 25"/>
           <p:cNvSpPr/>
           <p:nvPr/>
         </p:nvSpPr>
@@ -30386,7 +30381,7 @@
       </p:sp>
       <p:sp>
         <p:nvSpPr>
-          <p:cNvPr id="24" name="Shape 22"/>
+          <p:cNvPr id="28" name="Shape 26"/>
           <p:cNvSpPr/>
           <p:nvPr/>
         </p:nvSpPr>
@@ -30413,7 +30408,7 @@
       </p:sp>
       <p:sp>
         <p:nvSpPr>
-          <p:cNvPr id="25" name="Text 23"/>
+          <p:cNvPr id="29" name="Text 27"/>
           <p:cNvSpPr/>
           <p:nvPr/>
         </p:nvSpPr>
@@ -30452,7 +30447,7 @@
       </p:sp>
       <p:sp>
         <p:nvSpPr>
-          <p:cNvPr id="26" name="Shape 24"/>
+          <p:cNvPr id="30" name="Shape 28"/>
           <p:cNvSpPr/>
           <p:nvPr/>
         </p:nvSpPr>
@@ -30479,7 +30474,7 @@
       </p:sp>
       <p:sp>
         <p:nvSpPr>
-          <p:cNvPr id="27" name="Text 25"/>
+          <p:cNvPr id="31" name="Text 29"/>
           <p:cNvSpPr/>
           <p:nvPr/>
         </p:nvSpPr>
@@ -30518,7 +30513,7 @@
       </p:sp>
       <p:sp>
         <p:nvSpPr>
-          <p:cNvPr id="28" name="Shape 26"/>
+          <p:cNvPr id="32" name="Shape 30"/>
           <p:cNvSpPr/>
           <p:nvPr/>
         </p:nvSpPr>
@@ -30545,7 +30540,7 @@
       </p:sp>
       <p:sp>
         <p:nvSpPr>
-          <p:cNvPr id="29" name="Text 27"/>
+          <p:cNvPr id="33" name="Text 31"/>
           <p:cNvSpPr/>
           <p:nvPr/>
         </p:nvSpPr>
@@ -31007,7 +31002,7 @@
                 <a:ea typeface="Trebuchet MS" pitchFamily="34" charset="-122"/>
                 <a:cs typeface="Trebuchet MS" pitchFamily="34" charset="-120"/>
               </a:rPr>
-              <a:t>ecology</a:t>
+              <a:t>meteorology</a:t>
             </a:r>
             <a:endParaRPr lang="en-US" sz="2800" dirty="0"/>
           </a:p>
@@ -31087,7 +31082,7 @@
         </p:nvSpPr>
         <p:spPr>
           <a:xfrm>
-            <a:off x="2938272" y="2258568"/>
+            <a:off x="2221992" y="2258568"/>
             <a:ext cx="1828800" cy="292608"/>
           </a:xfrm>
           <a:prstGeom prst="rect">
@@ -31121,7 +31116,7 @@
         </p:nvSpPr>
         <p:spPr>
           <a:xfrm>
-            <a:off x="2938272" y="2258568"/>
+            <a:off x="2221992" y="2258568"/>
             <a:ext cx="1828800" cy="292608"/>
           </a:xfrm>
           <a:prstGeom prst="rect">
@@ -31146,7 +31141,7 @@
                 <a:ea typeface="Trebuchet MS" pitchFamily="34" charset="-122"/>
                 <a:cs typeface="Trebuchet MS" pitchFamily="34" charset="-120"/>
               </a:rPr>
-              <a:t>eco</a:t>
+              <a:t>meteor</a:t>
             </a:r>
             <a:endParaRPr lang="en-US" sz="1300" dirty="0"/>
           </a:p>
@@ -31160,7 +31155,7 @@
         </p:nvSpPr>
         <p:spPr>
           <a:xfrm>
-            <a:off x="2938272" y="2569464"/>
+            <a:off x="2221992" y="2569464"/>
             <a:ext cx="1828800" cy="201168"/>
           </a:xfrm>
           <a:prstGeom prst="rect">
@@ -31185,7 +31180,7 @@
                 <a:ea typeface="Calibri" pitchFamily="34" charset="-122"/>
                 <a:cs typeface="Calibri" pitchFamily="34" charset="-120"/>
               </a:rPr>
-              <a:t>house or environment</a:t>
+              <a:t>atmosphere, sky phenomenon</a:t>
             </a:r>
             <a:endParaRPr lang="en-US" sz="850" dirty="0"/>
           </a:p>
@@ -31199,7 +31194,7 @@
         </p:nvSpPr>
         <p:spPr>
           <a:xfrm>
-            <a:off x="5803392" y="2258568"/>
+            <a:off x="4370832" y="2258568"/>
             <a:ext cx="1828800" cy="292608"/>
           </a:xfrm>
           <a:prstGeom prst="rect">
@@ -31208,11 +31203,11 @@
             </a:avLst>
           </a:prstGeom>
           <a:solidFill>
-            <a:srgbClr val="CCFBF1"/>
+            <a:srgbClr val="FCE7F3"/>
           </a:solidFill>
           <a:ln w="19050">
             <a:solidFill>
-              <a:srgbClr val="0D9488"/>
+              <a:srgbClr val="DB2777"/>
             </a:solidFill>
             <a:prstDash val="solid"/>
           </a:ln>
@@ -31233,7 +31228,7 @@
         </p:nvSpPr>
         <p:spPr>
           <a:xfrm>
-            <a:off x="5803392" y="2258568"/>
+            <a:off x="4370832" y="2258568"/>
             <a:ext cx="1828800" cy="292608"/>
           </a:xfrm>
           <a:prstGeom prst="rect">
@@ -31252,13 +31247,13 @@
             <a:r>
               <a:rPr lang="en-US" sz="1300" b="1" dirty="0">
                 <a:solidFill>
-                  <a:srgbClr val="0F766E"/>
+                  <a:srgbClr val="9D174D"/>
                 </a:solidFill>
                 <a:latin typeface="Trebuchet MS" pitchFamily="34" charset="0"/>
                 <a:ea typeface="Trebuchet MS" pitchFamily="34" charset="-122"/>
                 <a:cs typeface="Trebuchet MS" pitchFamily="34" charset="-120"/>
               </a:rPr>
-              <a:t>logy</a:t>
+              <a:t>o</a:t>
             </a:r>
             <a:endParaRPr lang="en-US" sz="1300" dirty="0"/>
           </a:p>
@@ -31272,7 +31267,7 @@
         </p:nvSpPr>
         <p:spPr>
           <a:xfrm>
-            <a:off x="5803392" y="2569464"/>
+            <a:off x="4370832" y="2569464"/>
             <a:ext cx="1828800" cy="201168"/>
           </a:xfrm>
           <a:prstGeom prst="rect">
@@ -31297,6 +31292,157 @@
                 <a:ea typeface="Calibri" pitchFamily="34" charset="-122"/>
                 <a:cs typeface="Calibri" pitchFamily="34" charset="-120"/>
               </a:rPr>
+              <a:t>connecting vowel</a:t>
+            </a:r>
+            <a:endParaRPr lang="en-US" sz="850" dirty="0"/>
+          </a:p>
+        </p:txBody>
+      </p:sp>
+      <p:sp>
+        <p:nvSpPr>
+          <p:cNvPr id="22" name="Text 20"/>
+          <p:cNvSpPr/>
+          <p:nvPr/>
+        </p:nvSpPr>
+        <p:spPr>
+          <a:xfrm>
+            <a:off x="4370832" y="2752344"/>
+            <a:ext cx="1828800" cy="182880"/>
+          </a:xfrm>
+          <a:prstGeom prst="rect">
+            <a:avLst/>
+          </a:prstGeom>
+          <a:noFill/>
+          <a:ln/>
+        </p:spPr>
+        <p:txBody>
+          <a:bodyPr wrap="square" lIns="0" tIns="0" rIns="0" bIns="0" rtlCol="0" anchor="t"/>
+          <a:lstStyle/>
+          <a:p>
+            <a:pPr algn="ctr" indent="0" marL="0">
+              <a:buNone/>
+            </a:pPr>
+            <a:r>
+              <a:rPr lang="en-US" sz="700" i="1" dirty="0">
+                <a:solidFill>
+                  <a:srgbClr val="94A3B8"/>
+                </a:solidFill>
+                <a:latin typeface="Calibri" pitchFamily="34" charset="0"/>
+                <a:ea typeface="Calibri" pitchFamily="34" charset="-122"/>
+                <a:cs typeface="Calibri" pitchFamily="34" charset="-120"/>
+              </a:rPr>
+              <a:t>links base to suffix</a:t>
+            </a:r>
+            <a:endParaRPr lang="en-US" sz="700" dirty="0"/>
+          </a:p>
+        </p:txBody>
+      </p:sp>
+      <p:sp>
+        <p:nvSpPr>
+          <p:cNvPr id="23" name="Shape 21"/>
+          <p:cNvSpPr/>
+          <p:nvPr/>
+        </p:nvSpPr>
+        <p:spPr>
+          <a:xfrm>
+            <a:off x="6519672" y="2258568"/>
+            <a:ext cx="1828800" cy="292608"/>
+          </a:xfrm>
+          <a:prstGeom prst="rect">
+            <a:avLst>
+              <a:gd name="adj" fmla="val 25000"/>
+            </a:avLst>
+          </a:prstGeom>
+          <a:solidFill>
+            <a:srgbClr val="CCFBF1"/>
+          </a:solidFill>
+          <a:ln w="19050">
+            <a:solidFill>
+              <a:srgbClr val="0D9488"/>
+            </a:solidFill>
+            <a:prstDash val="solid"/>
+          </a:ln>
+          <a:effectLst>
+            <a:outerShdw sx="100000" sy="100000" kx="0" ky="0" algn="bl" rotWithShape="0" blurRad="101600" dist="38100" dir="8100000">
+              <a:srgbClr val="000000">
+                <a:alpha val="12000"/>
+              </a:srgbClr>
+            </a:outerShdw>
+          </a:effectLst>
+        </p:spPr>
+      </p:sp>
+      <p:sp>
+        <p:nvSpPr>
+          <p:cNvPr id="24" name="Text 22"/>
+          <p:cNvSpPr/>
+          <p:nvPr/>
+        </p:nvSpPr>
+        <p:spPr>
+          <a:xfrm>
+            <a:off x="6519672" y="2258568"/>
+            <a:ext cx="1828800" cy="292608"/>
+          </a:xfrm>
+          <a:prstGeom prst="rect">
+            <a:avLst/>
+          </a:prstGeom>
+          <a:noFill/>
+          <a:ln/>
+        </p:spPr>
+        <p:txBody>
+          <a:bodyPr wrap="square" lIns="0" tIns="0" rIns="0" bIns="0" rtlCol="0" anchor="ctr"/>
+          <a:lstStyle/>
+          <a:p>
+            <a:pPr algn="ctr" indent="0" marL="0">
+              <a:buNone/>
+            </a:pPr>
+            <a:r>
+              <a:rPr lang="en-US" sz="1300" b="1" dirty="0">
+                <a:solidFill>
+                  <a:srgbClr val="0F766E"/>
+                </a:solidFill>
+                <a:latin typeface="Trebuchet MS" pitchFamily="34" charset="0"/>
+                <a:ea typeface="Trebuchet MS" pitchFamily="34" charset="-122"/>
+                <a:cs typeface="Trebuchet MS" pitchFamily="34" charset="-120"/>
+              </a:rPr>
+              <a:t>logy</a:t>
+            </a:r>
+            <a:endParaRPr lang="en-US" sz="1300" dirty="0"/>
+          </a:p>
+        </p:txBody>
+      </p:sp>
+      <p:sp>
+        <p:nvSpPr>
+          <p:cNvPr id="25" name="Text 23"/>
+          <p:cNvSpPr/>
+          <p:nvPr/>
+        </p:nvSpPr>
+        <p:spPr>
+          <a:xfrm>
+            <a:off x="6519672" y="2569464"/>
+            <a:ext cx="1828800" cy="201168"/>
+          </a:xfrm>
+          <a:prstGeom prst="rect">
+            <a:avLst/>
+          </a:prstGeom>
+          <a:noFill/>
+          <a:ln/>
+        </p:spPr>
+        <p:txBody>
+          <a:bodyPr wrap="square" lIns="0" tIns="0" rIns="0" bIns="0" rtlCol="0" anchor="t"/>
+          <a:lstStyle/>
+          <a:p>
+            <a:pPr algn="ctr" indent="0" marL="0">
+              <a:buNone/>
+            </a:pPr>
+            <a:r>
+              <a:rPr lang="en-US" sz="850" dirty="0">
+                <a:solidFill>
+                  <a:srgbClr val="475569"/>
+                </a:solidFill>
+                <a:latin typeface="Calibri" pitchFamily="34" charset="0"/>
+                <a:ea typeface="Calibri" pitchFamily="34" charset="-122"/>
+                <a:cs typeface="Calibri" pitchFamily="34" charset="-120"/>
+              </a:rPr>
               <a:t>study of</a:t>
             </a:r>
             <a:endParaRPr lang="en-US" sz="850" dirty="0"/>
@@ -31305,7 +31451,7 @@
       </p:sp>
       <p:sp>
         <p:nvSpPr>
-          <p:cNvPr id="22" name="Shape 20"/>
+          <p:cNvPr id="26" name="Shape 24"/>
           <p:cNvSpPr/>
           <p:nvPr/>
         </p:nvSpPr>
@@ -31332,7 +31478,7 @@
       </p:sp>
       <p:sp>
         <p:nvSpPr>
-          <p:cNvPr id="23" name="Text 21"/>
+          <p:cNvPr id="27" name="Text 25"/>
           <p:cNvSpPr/>
           <p:nvPr/>
         </p:nvSpPr>
@@ -31371,7 +31517,7 @@
       </p:sp>
       <p:sp>
         <p:nvSpPr>
-          <p:cNvPr id="24" name="Shape 22"/>
+          <p:cNvPr id="28" name="Shape 26"/>
           <p:cNvSpPr/>
           <p:nvPr/>
         </p:nvSpPr>
@@ -31398,14 +31544,14 @@
       </p:sp>
       <p:sp>
         <p:nvSpPr>
-          <p:cNvPr id="25" name="Shape 23"/>
-          <p:cNvSpPr/>
-          <p:nvPr/>
-        </p:nvSpPr>
-        <p:spPr>
-          <a:xfrm>
-            <a:off x="1975104" y="3364992"/>
-            <a:ext cx="1554480" cy="475488"/>
+          <p:cNvPr id="29" name="Shape 27"/>
+          <p:cNvSpPr/>
+          <p:nvPr/>
+        </p:nvSpPr>
+        <p:spPr>
+          <a:xfrm>
+            <a:off x="1980329" y="3364992"/>
+            <a:ext cx="1005840" cy="475488"/>
           </a:xfrm>
           <a:prstGeom prst="rect">
             <a:avLst>
@@ -31425,14 +31571,14 @@
       </p:sp>
       <p:sp>
         <p:nvSpPr>
-          <p:cNvPr id="26" name="Text 24"/>
-          <p:cNvSpPr/>
-          <p:nvPr/>
-        </p:nvSpPr>
-        <p:spPr>
-          <a:xfrm>
-            <a:off x="1975104" y="3364992"/>
-            <a:ext cx="1554480" cy="475488"/>
+          <p:cNvPr id="30" name="Text 28"/>
+          <p:cNvSpPr/>
+          <p:nvPr/>
+        </p:nvSpPr>
+        <p:spPr>
+          <a:xfrm>
+            <a:off x="1980329" y="3364992"/>
+            <a:ext cx="1005840" cy="475488"/>
           </a:xfrm>
           <a:prstGeom prst="rect">
             <a:avLst/>
@@ -31456,7 +31602,7 @@
                 <a:ea typeface="Trebuchet MS" pitchFamily="34" charset="-122"/>
                 <a:cs typeface="Trebuchet MS" pitchFamily="34" charset="-120"/>
               </a:rPr>
-              <a:t>e</a:t>
+              <a:t>me</a:t>
             </a:r>
             <a:endParaRPr lang="en-US" sz="1400" dirty="0"/>
           </a:p>
@@ -31464,14 +31610,14 @@
       </p:sp>
       <p:sp>
         <p:nvSpPr>
-          <p:cNvPr id="27" name="Text 25"/>
-          <p:cNvSpPr/>
-          <p:nvPr/>
-        </p:nvSpPr>
-        <p:spPr>
-          <a:xfrm>
-            <a:off x="3529584" y="3364992"/>
-            <a:ext cx="73152" cy="475488"/>
+          <p:cNvPr id="31" name="Text 29"/>
+          <p:cNvSpPr/>
+          <p:nvPr/>
+        </p:nvSpPr>
+        <p:spPr>
+          <a:xfrm>
+            <a:off x="2986169" y="3364992"/>
+            <a:ext cx="78377" cy="475488"/>
           </a:xfrm>
           <a:prstGeom prst="rect">
             <a:avLst/>
@@ -31503,14 +31649,14 @@
       </p:sp>
       <p:sp>
         <p:nvSpPr>
-          <p:cNvPr id="28" name="Shape 26"/>
-          <p:cNvSpPr/>
-          <p:nvPr/>
-        </p:nvSpPr>
-        <p:spPr>
-          <a:xfrm>
-            <a:off x="3602736" y="3364992"/>
-            <a:ext cx="1554480" cy="475488"/>
+          <p:cNvPr id="32" name="Shape 30"/>
+          <p:cNvSpPr/>
+          <p:nvPr/>
+        </p:nvSpPr>
+        <p:spPr>
+          <a:xfrm>
+            <a:off x="3064546" y="3364992"/>
+            <a:ext cx="1005840" cy="475488"/>
           </a:xfrm>
           <a:prstGeom prst="rect">
             <a:avLst>
@@ -31530,14 +31676,14 @@
       </p:sp>
       <p:sp>
         <p:nvSpPr>
-          <p:cNvPr id="29" name="Text 27"/>
-          <p:cNvSpPr/>
-          <p:nvPr/>
-        </p:nvSpPr>
-        <p:spPr>
-          <a:xfrm>
-            <a:off x="3602736" y="3364992"/>
-            <a:ext cx="1554480" cy="475488"/>
+          <p:cNvPr id="33" name="Text 31"/>
+          <p:cNvSpPr/>
+          <p:nvPr/>
+        </p:nvSpPr>
+        <p:spPr>
+          <a:xfrm>
+            <a:off x="3064546" y="3364992"/>
+            <a:ext cx="1005840" cy="475488"/>
           </a:xfrm>
           <a:prstGeom prst="rect">
             <a:avLst/>
@@ -31561,7 +31707,7 @@
                 <a:ea typeface="Trebuchet MS" pitchFamily="34" charset="-122"/>
                 <a:cs typeface="Trebuchet MS" pitchFamily="34" charset="-120"/>
               </a:rPr>
-              <a:t>col</a:t>
+              <a:t>te</a:t>
             </a:r>
             <a:endParaRPr lang="en-US" sz="1400" dirty="0"/>
           </a:p>
@@ -31569,14 +31715,14 @@
       </p:sp>
       <p:sp>
         <p:nvSpPr>
-          <p:cNvPr id="30" name="Text 28"/>
-          <p:cNvSpPr/>
-          <p:nvPr/>
-        </p:nvSpPr>
-        <p:spPr>
-          <a:xfrm>
-            <a:off x="5157216" y="3364992"/>
-            <a:ext cx="73152" cy="475488"/>
+          <p:cNvPr id="34" name="Text 32"/>
+          <p:cNvSpPr/>
+          <p:nvPr/>
+        </p:nvSpPr>
+        <p:spPr>
+          <a:xfrm>
+            <a:off x="4070386" y="3364992"/>
+            <a:ext cx="78377" cy="475488"/>
           </a:xfrm>
           <a:prstGeom prst="rect">
             <a:avLst/>
@@ -31608,14 +31754,14 @@
       </p:sp>
       <p:sp>
         <p:nvSpPr>
-          <p:cNvPr id="31" name="Shape 29"/>
-          <p:cNvSpPr/>
-          <p:nvPr/>
-        </p:nvSpPr>
-        <p:spPr>
-          <a:xfrm>
-            <a:off x="5230368" y="3364992"/>
-            <a:ext cx="1554480" cy="475488"/>
+          <p:cNvPr id="35" name="Shape 33"/>
+          <p:cNvSpPr/>
+          <p:nvPr/>
+        </p:nvSpPr>
+        <p:spPr>
+          <a:xfrm>
+            <a:off x="4148763" y="3364992"/>
+            <a:ext cx="1005840" cy="475488"/>
           </a:xfrm>
           <a:prstGeom prst="rect">
             <a:avLst>
@@ -31635,14 +31781,14 @@
       </p:sp>
       <p:sp>
         <p:nvSpPr>
-          <p:cNvPr id="32" name="Text 30"/>
-          <p:cNvSpPr/>
-          <p:nvPr/>
-        </p:nvSpPr>
-        <p:spPr>
-          <a:xfrm>
-            <a:off x="5230368" y="3364992"/>
-            <a:ext cx="1554480" cy="475488"/>
+          <p:cNvPr id="36" name="Text 34"/>
+          <p:cNvSpPr/>
+          <p:nvPr/>
+        </p:nvSpPr>
+        <p:spPr>
+          <a:xfrm>
+            <a:off x="4148763" y="3364992"/>
+            <a:ext cx="1005840" cy="475488"/>
           </a:xfrm>
           <a:prstGeom prst="rect">
             <a:avLst/>
@@ -31666,7 +31812,7 @@
                 <a:ea typeface="Trebuchet MS" pitchFamily="34" charset="-122"/>
                 <a:cs typeface="Trebuchet MS" pitchFamily="34" charset="-120"/>
               </a:rPr>
-              <a:t>o</a:t>
+              <a:t>or</a:t>
             </a:r>
             <a:endParaRPr lang="en-US" sz="1400" dirty="0"/>
           </a:p>
@@ -31674,14 +31820,14 @@
       </p:sp>
       <p:sp>
         <p:nvSpPr>
-          <p:cNvPr id="33" name="Text 31"/>
-          <p:cNvSpPr/>
-          <p:nvPr/>
-        </p:nvSpPr>
-        <p:spPr>
-          <a:xfrm>
-            <a:off x="6784848" y="3364992"/>
-            <a:ext cx="73152" cy="475488"/>
+          <p:cNvPr id="37" name="Text 35"/>
+          <p:cNvSpPr/>
+          <p:nvPr/>
+        </p:nvSpPr>
+        <p:spPr>
+          <a:xfrm>
+            <a:off x="5154603" y="3364992"/>
+            <a:ext cx="78377" cy="475488"/>
           </a:xfrm>
           <a:prstGeom prst="rect">
             <a:avLst/>
@@ -31713,14 +31859,14 @@
       </p:sp>
       <p:sp>
         <p:nvSpPr>
-          <p:cNvPr id="34" name="Shape 32"/>
-          <p:cNvSpPr/>
-          <p:nvPr/>
-        </p:nvSpPr>
-        <p:spPr>
-          <a:xfrm>
-            <a:off x="6858000" y="3364992"/>
-            <a:ext cx="1554480" cy="475488"/>
+          <p:cNvPr id="38" name="Shape 36"/>
+          <p:cNvSpPr/>
+          <p:nvPr/>
+        </p:nvSpPr>
+        <p:spPr>
+          <a:xfrm>
+            <a:off x="5232981" y="3364992"/>
+            <a:ext cx="1005840" cy="475488"/>
           </a:xfrm>
           <a:prstGeom prst="rect">
             <a:avLst>
@@ -31740,14 +31886,14 @@
       </p:sp>
       <p:sp>
         <p:nvSpPr>
-          <p:cNvPr id="35" name="Text 33"/>
-          <p:cNvSpPr/>
-          <p:nvPr/>
-        </p:nvSpPr>
-        <p:spPr>
-          <a:xfrm>
-            <a:off x="6858000" y="3364992"/>
-            <a:ext cx="1554480" cy="475488"/>
+          <p:cNvPr id="39" name="Text 37"/>
+          <p:cNvSpPr/>
+          <p:nvPr/>
+        </p:nvSpPr>
+        <p:spPr>
+          <a:xfrm>
+            <a:off x="5232981" y="3364992"/>
+            <a:ext cx="1005840" cy="475488"/>
           </a:xfrm>
           <a:prstGeom prst="rect">
             <a:avLst/>
@@ -31771,6 +31917,216 @@
                 <a:ea typeface="Trebuchet MS" pitchFamily="34" charset="-122"/>
                 <a:cs typeface="Trebuchet MS" pitchFamily="34" charset="-120"/>
               </a:rPr>
+              <a:t>ol</a:t>
+            </a:r>
+            <a:endParaRPr lang="en-US" sz="1400" dirty="0"/>
+          </a:p>
+        </p:txBody>
+      </p:sp>
+      <p:sp>
+        <p:nvSpPr>
+          <p:cNvPr id="40" name="Text 38"/>
+          <p:cNvSpPr/>
+          <p:nvPr/>
+        </p:nvSpPr>
+        <p:spPr>
+          <a:xfrm>
+            <a:off x="6238821" y="3364992"/>
+            <a:ext cx="78377" cy="475488"/>
+          </a:xfrm>
+          <a:prstGeom prst="rect">
+            <a:avLst/>
+          </a:prstGeom>
+          <a:noFill/>
+          <a:ln/>
+        </p:spPr>
+        <p:txBody>
+          <a:bodyPr wrap="square" lIns="0" tIns="0" rIns="0" bIns="0" rtlCol="0" anchor="ctr"/>
+          <a:lstStyle/>
+          <a:p>
+            <a:pPr algn="ctr" indent="0" marL="0">
+              <a:buNone/>
+            </a:pPr>
+            <a:r>
+              <a:rPr lang="en-US" sz="1600" b="1" dirty="0">
+                <a:solidFill>
+                  <a:srgbClr val="0D9488"/>
+                </a:solidFill>
+                <a:latin typeface="Trebuchet MS" pitchFamily="34" charset="0"/>
+                <a:ea typeface="Trebuchet MS" pitchFamily="34" charset="-122"/>
+                <a:cs typeface="Trebuchet MS" pitchFamily="34" charset="-120"/>
+              </a:rPr>
+              <a:t>·</a:t>
+            </a:r>
+            <a:endParaRPr lang="en-US" sz="1600" dirty="0"/>
+          </a:p>
+        </p:txBody>
+      </p:sp>
+      <p:sp>
+        <p:nvSpPr>
+          <p:cNvPr id="41" name="Shape 39"/>
+          <p:cNvSpPr/>
+          <p:nvPr/>
+        </p:nvSpPr>
+        <p:spPr>
+          <a:xfrm>
+            <a:off x="6317198" y="3364992"/>
+            <a:ext cx="1005840" cy="475488"/>
+          </a:xfrm>
+          <a:prstGeom prst="rect">
+            <a:avLst>
+              <a:gd name="adj" fmla="val 9615"/>
+            </a:avLst>
+          </a:prstGeom>
+          <a:solidFill>
+            <a:srgbClr val="FFFFFF"/>
+          </a:solidFill>
+          <a:ln w="12700">
+            <a:solidFill>
+              <a:srgbClr val="0D9488"/>
+            </a:solidFill>
+            <a:prstDash val="solid"/>
+          </a:ln>
+        </p:spPr>
+      </p:sp>
+      <p:sp>
+        <p:nvSpPr>
+          <p:cNvPr id="42" name="Text 40"/>
+          <p:cNvSpPr/>
+          <p:nvPr/>
+        </p:nvSpPr>
+        <p:spPr>
+          <a:xfrm>
+            <a:off x="6317198" y="3364992"/>
+            <a:ext cx="1005840" cy="475488"/>
+          </a:xfrm>
+          <a:prstGeom prst="rect">
+            <a:avLst/>
+          </a:prstGeom>
+          <a:noFill/>
+          <a:ln/>
+        </p:spPr>
+        <p:txBody>
+          <a:bodyPr wrap="square" lIns="0" tIns="0" rIns="0" bIns="0" rtlCol="0" anchor="ctr"/>
+          <a:lstStyle/>
+          <a:p>
+            <a:pPr algn="ctr" indent="0" marL="0">
+              <a:buNone/>
+            </a:pPr>
+            <a:r>
+              <a:rPr lang="en-US" sz="1400" b="1" dirty="0">
+                <a:solidFill>
+                  <a:srgbClr val="0D9488"/>
+                </a:solidFill>
+                <a:latin typeface="Trebuchet MS" pitchFamily="34" charset="0"/>
+                <a:ea typeface="Trebuchet MS" pitchFamily="34" charset="-122"/>
+                <a:cs typeface="Trebuchet MS" pitchFamily="34" charset="-120"/>
+              </a:rPr>
+              <a:t>o</a:t>
+            </a:r>
+            <a:endParaRPr lang="en-US" sz="1400" dirty="0"/>
+          </a:p>
+        </p:txBody>
+      </p:sp>
+      <p:sp>
+        <p:nvSpPr>
+          <p:cNvPr id="43" name="Text 41"/>
+          <p:cNvSpPr/>
+          <p:nvPr/>
+        </p:nvSpPr>
+        <p:spPr>
+          <a:xfrm>
+            <a:off x="7323038" y="3364992"/>
+            <a:ext cx="78377" cy="475488"/>
+          </a:xfrm>
+          <a:prstGeom prst="rect">
+            <a:avLst/>
+          </a:prstGeom>
+          <a:noFill/>
+          <a:ln/>
+        </p:spPr>
+        <p:txBody>
+          <a:bodyPr wrap="square" lIns="0" tIns="0" rIns="0" bIns="0" rtlCol="0" anchor="ctr"/>
+          <a:lstStyle/>
+          <a:p>
+            <a:pPr algn="ctr" indent="0" marL="0">
+              <a:buNone/>
+            </a:pPr>
+            <a:r>
+              <a:rPr lang="en-US" sz="1600" b="1" dirty="0">
+                <a:solidFill>
+                  <a:srgbClr val="0D9488"/>
+                </a:solidFill>
+                <a:latin typeface="Trebuchet MS" pitchFamily="34" charset="0"/>
+                <a:ea typeface="Trebuchet MS" pitchFamily="34" charset="-122"/>
+                <a:cs typeface="Trebuchet MS" pitchFamily="34" charset="-120"/>
+              </a:rPr>
+              <a:t>·</a:t>
+            </a:r>
+            <a:endParaRPr lang="en-US" sz="1600" dirty="0"/>
+          </a:p>
+        </p:txBody>
+      </p:sp>
+      <p:sp>
+        <p:nvSpPr>
+          <p:cNvPr id="44" name="Shape 42"/>
+          <p:cNvSpPr/>
+          <p:nvPr/>
+        </p:nvSpPr>
+        <p:spPr>
+          <a:xfrm>
+            <a:off x="7401415" y="3364992"/>
+            <a:ext cx="1005840" cy="475488"/>
+          </a:xfrm>
+          <a:prstGeom prst="rect">
+            <a:avLst>
+              <a:gd name="adj" fmla="val 9615"/>
+            </a:avLst>
+          </a:prstGeom>
+          <a:solidFill>
+            <a:srgbClr val="FFFFFF"/>
+          </a:solidFill>
+          <a:ln w="12700">
+            <a:solidFill>
+              <a:srgbClr val="0D9488"/>
+            </a:solidFill>
+            <a:prstDash val="solid"/>
+          </a:ln>
+        </p:spPr>
+      </p:sp>
+      <p:sp>
+        <p:nvSpPr>
+          <p:cNvPr id="45" name="Text 43"/>
+          <p:cNvSpPr/>
+          <p:nvPr/>
+        </p:nvSpPr>
+        <p:spPr>
+          <a:xfrm>
+            <a:off x="7401415" y="3364992"/>
+            <a:ext cx="1005840" cy="475488"/>
+          </a:xfrm>
+          <a:prstGeom prst="rect">
+            <a:avLst/>
+          </a:prstGeom>
+          <a:noFill/>
+          <a:ln/>
+        </p:spPr>
+        <p:txBody>
+          <a:bodyPr wrap="square" lIns="0" tIns="0" rIns="0" bIns="0" rtlCol="0" anchor="ctr"/>
+          <a:lstStyle/>
+          <a:p>
+            <a:pPr algn="ctr" indent="0" marL="0">
+              <a:buNone/>
+            </a:pPr>
+            <a:r>
+              <a:rPr lang="en-US" sz="1400" b="1" dirty="0">
+                <a:solidFill>
+                  <a:srgbClr val="0D9488"/>
+                </a:solidFill>
+                <a:latin typeface="Trebuchet MS" pitchFamily="34" charset="0"/>
+                <a:ea typeface="Trebuchet MS" pitchFamily="34" charset="-122"/>
+                <a:cs typeface="Trebuchet MS" pitchFamily="34" charset="-120"/>
+              </a:rPr>
               <a:t>gy</a:t>
             </a:r>
             <a:endParaRPr lang="en-US" sz="1400" dirty="0"/>
@@ -31779,7 +32135,7 @@
       </p:sp>
       <p:sp>
         <p:nvSpPr>
-          <p:cNvPr id="36" name="Shape 34"/>
+          <p:cNvPr id="46" name="Shape 44"/>
           <p:cNvSpPr/>
           <p:nvPr/>
         </p:nvSpPr>
@@ -31806,7 +32162,7 @@
       </p:sp>
       <p:sp>
         <p:nvSpPr>
-          <p:cNvPr id="37" name="Text 35"/>
+          <p:cNvPr id="47" name="Text 45"/>
           <p:cNvSpPr/>
           <p:nvPr/>
         </p:nvSpPr>
@@ -31845,7 +32201,7 @@
       </p:sp>
       <p:sp>
         <p:nvSpPr>
-          <p:cNvPr id="38" name="Shape 36"/>
+          <p:cNvPr id="48" name="Shape 46"/>
           <p:cNvSpPr/>
           <p:nvPr/>
         </p:nvSpPr>
@@ -31872,7 +32228,7 @@
       </p:sp>
       <p:sp>
         <p:nvSpPr>
-          <p:cNvPr id="39" name="Text 37"/>
+          <p:cNvPr id="49" name="Text 47"/>
           <p:cNvSpPr/>
           <p:nvPr/>
         </p:nvSpPr>
@@ -32334,7 +32690,7 @@
                 <a:ea typeface="Trebuchet MS" pitchFamily="34" charset="-122"/>
                 <a:cs typeface="Trebuchet MS" pitchFamily="34" charset="-120"/>
               </a:rPr>
-              <a:t>ecology</a:t>
+              <a:t>meteorology</a:t>
             </a:r>
             <a:endParaRPr lang="en-US" sz="2800" dirty="0"/>
           </a:p>
@@ -32414,7 +32770,7 @@
         </p:nvSpPr>
         <p:spPr>
           <a:xfrm>
-            <a:off x="2938272" y="2258568"/>
+            <a:off x="2221992" y="2258568"/>
             <a:ext cx="1828800" cy="292608"/>
           </a:xfrm>
           <a:prstGeom prst="rect">
@@ -32448,7 +32804,7 @@
         </p:nvSpPr>
         <p:spPr>
           <a:xfrm>
-            <a:off x="2938272" y="2258568"/>
+            <a:off x="2221992" y="2258568"/>
             <a:ext cx="1828800" cy="292608"/>
           </a:xfrm>
           <a:prstGeom prst="rect">
@@ -32473,7 +32829,7 @@
                 <a:ea typeface="Trebuchet MS" pitchFamily="34" charset="-122"/>
                 <a:cs typeface="Trebuchet MS" pitchFamily="34" charset="-120"/>
               </a:rPr>
-              <a:t>eco</a:t>
+              <a:t>meteor</a:t>
             </a:r>
             <a:endParaRPr lang="en-US" sz="1300" dirty="0"/>
           </a:p>
@@ -32487,7 +32843,7 @@
         </p:nvSpPr>
         <p:spPr>
           <a:xfrm>
-            <a:off x="2938272" y="2569464"/>
+            <a:off x="2221992" y="2569464"/>
             <a:ext cx="1828800" cy="201168"/>
           </a:xfrm>
           <a:prstGeom prst="rect">
@@ -32512,7 +32868,7 @@
                 <a:ea typeface="Calibri" pitchFamily="34" charset="-122"/>
                 <a:cs typeface="Calibri" pitchFamily="34" charset="-120"/>
               </a:rPr>
-              <a:t>house or environment</a:t>
+              <a:t>atmosphere, sky phenomenon</a:t>
             </a:r>
             <a:endParaRPr lang="en-US" sz="850" dirty="0"/>
           </a:p>
@@ -32526,7 +32882,7 @@
         </p:nvSpPr>
         <p:spPr>
           <a:xfrm>
-            <a:off x="5803392" y="2258568"/>
+            <a:off x="4370832" y="2258568"/>
             <a:ext cx="1828800" cy="292608"/>
           </a:xfrm>
           <a:prstGeom prst="rect">
@@ -32535,11 +32891,11 @@
             </a:avLst>
           </a:prstGeom>
           <a:solidFill>
-            <a:srgbClr val="CCFBF1"/>
+            <a:srgbClr val="FCE7F3"/>
           </a:solidFill>
           <a:ln w="19050">
             <a:solidFill>
-              <a:srgbClr val="0D9488"/>
+              <a:srgbClr val="DB2777"/>
             </a:solidFill>
             <a:prstDash val="solid"/>
           </a:ln>
@@ -32560,7 +32916,7 @@
         </p:nvSpPr>
         <p:spPr>
           <a:xfrm>
-            <a:off x="5803392" y="2258568"/>
+            <a:off x="4370832" y="2258568"/>
             <a:ext cx="1828800" cy="292608"/>
           </a:xfrm>
           <a:prstGeom prst="rect">
@@ -32579,13 +32935,13 @@
             <a:r>
               <a:rPr lang="en-US" sz="1300" b="1" dirty="0">
                 <a:solidFill>
-                  <a:srgbClr val="0F766E"/>
+                  <a:srgbClr val="9D174D"/>
                 </a:solidFill>
                 <a:latin typeface="Trebuchet MS" pitchFamily="34" charset="0"/>
                 <a:ea typeface="Trebuchet MS" pitchFamily="34" charset="-122"/>
                 <a:cs typeface="Trebuchet MS" pitchFamily="34" charset="-120"/>
               </a:rPr>
-              <a:t>logy</a:t>
+              <a:t>o</a:t>
             </a:r>
             <a:endParaRPr lang="en-US" sz="1300" dirty="0"/>
           </a:p>
@@ -32599,7 +32955,7 @@
         </p:nvSpPr>
         <p:spPr>
           <a:xfrm>
-            <a:off x="5803392" y="2569464"/>
+            <a:off x="4370832" y="2569464"/>
             <a:ext cx="1828800" cy="201168"/>
           </a:xfrm>
           <a:prstGeom prst="rect">
@@ -32624,6 +32980,157 @@
                 <a:ea typeface="Calibri" pitchFamily="34" charset="-122"/>
                 <a:cs typeface="Calibri" pitchFamily="34" charset="-120"/>
               </a:rPr>
+              <a:t>connecting vowel</a:t>
+            </a:r>
+            <a:endParaRPr lang="en-US" sz="850" dirty="0"/>
+          </a:p>
+        </p:txBody>
+      </p:sp>
+      <p:sp>
+        <p:nvSpPr>
+          <p:cNvPr id="22" name="Text 20"/>
+          <p:cNvSpPr/>
+          <p:nvPr/>
+        </p:nvSpPr>
+        <p:spPr>
+          <a:xfrm>
+            <a:off x="4370832" y="2752344"/>
+            <a:ext cx="1828800" cy="182880"/>
+          </a:xfrm>
+          <a:prstGeom prst="rect">
+            <a:avLst/>
+          </a:prstGeom>
+          <a:noFill/>
+          <a:ln/>
+        </p:spPr>
+        <p:txBody>
+          <a:bodyPr wrap="square" lIns="0" tIns="0" rIns="0" bIns="0" rtlCol="0" anchor="t"/>
+          <a:lstStyle/>
+          <a:p>
+            <a:pPr algn="ctr" indent="0" marL="0">
+              <a:buNone/>
+            </a:pPr>
+            <a:r>
+              <a:rPr lang="en-US" sz="700" i="1" dirty="0">
+                <a:solidFill>
+                  <a:srgbClr val="94A3B8"/>
+                </a:solidFill>
+                <a:latin typeface="Calibri" pitchFamily="34" charset="0"/>
+                <a:ea typeface="Calibri" pitchFamily="34" charset="-122"/>
+                <a:cs typeface="Calibri" pitchFamily="34" charset="-120"/>
+              </a:rPr>
+              <a:t>links base to suffix</a:t>
+            </a:r>
+            <a:endParaRPr lang="en-US" sz="700" dirty="0"/>
+          </a:p>
+        </p:txBody>
+      </p:sp>
+      <p:sp>
+        <p:nvSpPr>
+          <p:cNvPr id="23" name="Shape 21"/>
+          <p:cNvSpPr/>
+          <p:nvPr/>
+        </p:nvSpPr>
+        <p:spPr>
+          <a:xfrm>
+            <a:off x="6519672" y="2258568"/>
+            <a:ext cx="1828800" cy="292608"/>
+          </a:xfrm>
+          <a:prstGeom prst="rect">
+            <a:avLst>
+              <a:gd name="adj" fmla="val 25000"/>
+            </a:avLst>
+          </a:prstGeom>
+          <a:solidFill>
+            <a:srgbClr val="CCFBF1"/>
+          </a:solidFill>
+          <a:ln w="19050">
+            <a:solidFill>
+              <a:srgbClr val="0D9488"/>
+            </a:solidFill>
+            <a:prstDash val="solid"/>
+          </a:ln>
+          <a:effectLst>
+            <a:outerShdw sx="100000" sy="100000" kx="0" ky="0" algn="bl" rotWithShape="0" blurRad="101600" dist="38100" dir="8100000">
+              <a:srgbClr val="000000">
+                <a:alpha val="12000"/>
+              </a:srgbClr>
+            </a:outerShdw>
+          </a:effectLst>
+        </p:spPr>
+      </p:sp>
+      <p:sp>
+        <p:nvSpPr>
+          <p:cNvPr id="24" name="Text 22"/>
+          <p:cNvSpPr/>
+          <p:nvPr/>
+        </p:nvSpPr>
+        <p:spPr>
+          <a:xfrm>
+            <a:off x="6519672" y="2258568"/>
+            <a:ext cx="1828800" cy="292608"/>
+          </a:xfrm>
+          <a:prstGeom prst="rect">
+            <a:avLst/>
+          </a:prstGeom>
+          <a:noFill/>
+          <a:ln/>
+        </p:spPr>
+        <p:txBody>
+          <a:bodyPr wrap="square" lIns="0" tIns="0" rIns="0" bIns="0" rtlCol="0" anchor="ctr"/>
+          <a:lstStyle/>
+          <a:p>
+            <a:pPr algn="ctr" indent="0" marL="0">
+              <a:buNone/>
+            </a:pPr>
+            <a:r>
+              <a:rPr lang="en-US" sz="1300" b="1" dirty="0">
+                <a:solidFill>
+                  <a:srgbClr val="0F766E"/>
+                </a:solidFill>
+                <a:latin typeface="Trebuchet MS" pitchFamily="34" charset="0"/>
+                <a:ea typeface="Trebuchet MS" pitchFamily="34" charset="-122"/>
+                <a:cs typeface="Trebuchet MS" pitchFamily="34" charset="-120"/>
+              </a:rPr>
+              <a:t>logy</a:t>
+            </a:r>
+            <a:endParaRPr lang="en-US" sz="1300" dirty="0"/>
+          </a:p>
+        </p:txBody>
+      </p:sp>
+      <p:sp>
+        <p:nvSpPr>
+          <p:cNvPr id="25" name="Text 23"/>
+          <p:cNvSpPr/>
+          <p:nvPr/>
+        </p:nvSpPr>
+        <p:spPr>
+          <a:xfrm>
+            <a:off x="6519672" y="2569464"/>
+            <a:ext cx="1828800" cy="201168"/>
+          </a:xfrm>
+          <a:prstGeom prst="rect">
+            <a:avLst/>
+          </a:prstGeom>
+          <a:noFill/>
+          <a:ln/>
+        </p:spPr>
+        <p:txBody>
+          <a:bodyPr wrap="square" lIns="0" tIns="0" rIns="0" bIns="0" rtlCol="0" anchor="t"/>
+          <a:lstStyle/>
+          <a:p>
+            <a:pPr algn="ctr" indent="0" marL="0">
+              <a:buNone/>
+            </a:pPr>
+            <a:r>
+              <a:rPr lang="en-US" sz="850" dirty="0">
+                <a:solidFill>
+                  <a:srgbClr val="475569"/>
+                </a:solidFill>
+                <a:latin typeface="Calibri" pitchFamily="34" charset="0"/>
+                <a:ea typeface="Calibri" pitchFamily="34" charset="-122"/>
+                <a:cs typeface="Calibri" pitchFamily="34" charset="-120"/>
+              </a:rPr>
               <a:t>study of</a:t>
             </a:r>
             <a:endParaRPr lang="en-US" sz="850" dirty="0"/>
@@ -32632,7 +33139,7 @@
       </p:sp>
       <p:sp>
         <p:nvSpPr>
-          <p:cNvPr id="22" name="Shape 20"/>
+          <p:cNvPr id="26" name="Shape 24"/>
           <p:cNvSpPr/>
           <p:nvPr/>
         </p:nvSpPr>
@@ -32659,7 +33166,7 @@
       </p:sp>
       <p:sp>
         <p:nvSpPr>
-          <p:cNvPr id="23" name="Text 21"/>
+          <p:cNvPr id="27" name="Text 25"/>
           <p:cNvSpPr/>
           <p:nvPr/>
         </p:nvSpPr>
@@ -32698,7 +33205,7 @@
       </p:sp>
       <p:sp>
         <p:nvSpPr>
-          <p:cNvPr id="24" name="Shape 22"/>
+          <p:cNvPr id="28" name="Shape 26"/>
           <p:cNvSpPr/>
           <p:nvPr/>
         </p:nvSpPr>
@@ -32725,14 +33232,14 @@
       </p:sp>
       <p:sp>
         <p:nvSpPr>
-          <p:cNvPr id="25" name="Shape 23"/>
-          <p:cNvSpPr/>
-          <p:nvPr/>
-        </p:nvSpPr>
-        <p:spPr>
-          <a:xfrm>
-            <a:off x="1975104" y="3364992"/>
-            <a:ext cx="1554480" cy="475488"/>
+          <p:cNvPr id="29" name="Shape 27"/>
+          <p:cNvSpPr/>
+          <p:nvPr/>
+        </p:nvSpPr>
+        <p:spPr>
+          <a:xfrm>
+            <a:off x="1980329" y="3364992"/>
+            <a:ext cx="1005840" cy="475488"/>
           </a:xfrm>
           <a:prstGeom prst="rect">
             <a:avLst>
@@ -32752,14 +33259,14 @@
       </p:sp>
       <p:sp>
         <p:nvSpPr>
-          <p:cNvPr id="26" name="Text 24"/>
-          <p:cNvSpPr/>
-          <p:nvPr/>
-        </p:nvSpPr>
-        <p:spPr>
-          <a:xfrm>
-            <a:off x="1975104" y="3364992"/>
-            <a:ext cx="1554480" cy="475488"/>
+          <p:cNvPr id="30" name="Text 28"/>
+          <p:cNvSpPr/>
+          <p:nvPr/>
+        </p:nvSpPr>
+        <p:spPr>
+          <a:xfrm>
+            <a:off x="1980329" y="3364992"/>
+            <a:ext cx="1005840" cy="475488"/>
           </a:xfrm>
           <a:prstGeom prst="rect">
             <a:avLst/>
@@ -32783,7 +33290,7 @@
                 <a:ea typeface="Trebuchet MS" pitchFamily="34" charset="-122"/>
                 <a:cs typeface="Trebuchet MS" pitchFamily="34" charset="-120"/>
               </a:rPr>
-              <a:t>e</a:t>
+              <a:t>me</a:t>
             </a:r>
             <a:endParaRPr lang="en-US" sz="1400" dirty="0"/>
           </a:p>
@@ -32791,14 +33298,14 @@
       </p:sp>
       <p:sp>
         <p:nvSpPr>
-          <p:cNvPr id="27" name="Text 25"/>
-          <p:cNvSpPr/>
-          <p:nvPr/>
-        </p:nvSpPr>
-        <p:spPr>
-          <a:xfrm>
-            <a:off x="3529584" y="3364992"/>
-            <a:ext cx="73152" cy="475488"/>
+          <p:cNvPr id="31" name="Text 29"/>
+          <p:cNvSpPr/>
+          <p:nvPr/>
+        </p:nvSpPr>
+        <p:spPr>
+          <a:xfrm>
+            <a:off x="2986169" y="3364992"/>
+            <a:ext cx="78377" cy="475488"/>
           </a:xfrm>
           <a:prstGeom prst="rect">
             <a:avLst/>
@@ -32830,14 +33337,14 @@
       </p:sp>
       <p:sp>
         <p:nvSpPr>
-          <p:cNvPr id="28" name="Shape 26"/>
-          <p:cNvSpPr/>
-          <p:nvPr/>
-        </p:nvSpPr>
-        <p:spPr>
-          <a:xfrm>
-            <a:off x="3602736" y="3364992"/>
-            <a:ext cx="1554480" cy="475488"/>
+          <p:cNvPr id="32" name="Shape 30"/>
+          <p:cNvSpPr/>
+          <p:nvPr/>
+        </p:nvSpPr>
+        <p:spPr>
+          <a:xfrm>
+            <a:off x="3064546" y="3364992"/>
+            <a:ext cx="1005840" cy="475488"/>
           </a:xfrm>
           <a:prstGeom prst="rect">
             <a:avLst>
@@ -32857,14 +33364,14 @@
       </p:sp>
       <p:sp>
         <p:nvSpPr>
-          <p:cNvPr id="29" name="Text 27"/>
-          <p:cNvSpPr/>
-          <p:nvPr/>
-        </p:nvSpPr>
-        <p:spPr>
-          <a:xfrm>
-            <a:off x="3602736" y="3364992"/>
-            <a:ext cx="1554480" cy="475488"/>
+          <p:cNvPr id="33" name="Text 31"/>
+          <p:cNvSpPr/>
+          <p:nvPr/>
+        </p:nvSpPr>
+        <p:spPr>
+          <a:xfrm>
+            <a:off x="3064546" y="3364992"/>
+            <a:ext cx="1005840" cy="475488"/>
           </a:xfrm>
           <a:prstGeom prst="rect">
             <a:avLst/>
@@ -32888,7 +33395,7 @@
                 <a:ea typeface="Trebuchet MS" pitchFamily="34" charset="-122"/>
                 <a:cs typeface="Trebuchet MS" pitchFamily="34" charset="-120"/>
               </a:rPr>
-              <a:t>col</a:t>
+              <a:t>te</a:t>
             </a:r>
             <a:endParaRPr lang="en-US" sz="1400" dirty="0"/>
           </a:p>
@@ -32896,14 +33403,14 @@
       </p:sp>
       <p:sp>
         <p:nvSpPr>
-          <p:cNvPr id="30" name="Text 28"/>
-          <p:cNvSpPr/>
-          <p:nvPr/>
-        </p:nvSpPr>
-        <p:spPr>
-          <a:xfrm>
-            <a:off x="5157216" y="3364992"/>
-            <a:ext cx="73152" cy="475488"/>
+          <p:cNvPr id="34" name="Text 32"/>
+          <p:cNvSpPr/>
+          <p:nvPr/>
+        </p:nvSpPr>
+        <p:spPr>
+          <a:xfrm>
+            <a:off x="4070386" y="3364992"/>
+            <a:ext cx="78377" cy="475488"/>
           </a:xfrm>
           <a:prstGeom prst="rect">
             <a:avLst/>
@@ -32935,14 +33442,14 @@
       </p:sp>
       <p:sp>
         <p:nvSpPr>
-          <p:cNvPr id="31" name="Shape 29"/>
-          <p:cNvSpPr/>
-          <p:nvPr/>
-        </p:nvSpPr>
-        <p:spPr>
-          <a:xfrm>
-            <a:off x="5230368" y="3364992"/>
-            <a:ext cx="1554480" cy="475488"/>
+          <p:cNvPr id="35" name="Shape 33"/>
+          <p:cNvSpPr/>
+          <p:nvPr/>
+        </p:nvSpPr>
+        <p:spPr>
+          <a:xfrm>
+            <a:off x="4148763" y="3364992"/>
+            <a:ext cx="1005840" cy="475488"/>
           </a:xfrm>
           <a:prstGeom prst="rect">
             <a:avLst>
@@ -32962,14 +33469,14 @@
       </p:sp>
       <p:sp>
         <p:nvSpPr>
-          <p:cNvPr id="32" name="Text 30"/>
-          <p:cNvSpPr/>
-          <p:nvPr/>
-        </p:nvSpPr>
-        <p:spPr>
-          <a:xfrm>
-            <a:off x="5230368" y="3364992"/>
-            <a:ext cx="1554480" cy="475488"/>
+          <p:cNvPr id="36" name="Text 34"/>
+          <p:cNvSpPr/>
+          <p:nvPr/>
+        </p:nvSpPr>
+        <p:spPr>
+          <a:xfrm>
+            <a:off x="4148763" y="3364992"/>
+            <a:ext cx="1005840" cy="475488"/>
           </a:xfrm>
           <a:prstGeom prst="rect">
             <a:avLst/>
@@ -32993,7 +33500,7 @@
                 <a:ea typeface="Trebuchet MS" pitchFamily="34" charset="-122"/>
                 <a:cs typeface="Trebuchet MS" pitchFamily="34" charset="-120"/>
               </a:rPr>
-              <a:t>o</a:t>
+              <a:t>or</a:t>
             </a:r>
             <a:endParaRPr lang="en-US" sz="1400" dirty="0"/>
           </a:p>
@@ -33001,14 +33508,14 @@
       </p:sp>
       <p:sp>
         <p:nvSpPr>
-          <p:cNvPr id="33" name="Text 31"/>
-          <p:cNvSpPr/>
-          <p:nvPr/>
-        </p:nvSpPr>
-        <p:spPr>
-          <a:xfrm>
-            <a:off x="6784848" y="3364992"/>
-            <a:ext cx="73152" cy="475488"/>
+          <p:cNvPr id="37" name="Text 35"/>
+          <p:cNvSpPr/>
+          <p:nvPr/>
+        </p:nvSpPr>
+        <p:spPr>
+          <a:xfrm>
+            <a:off x="5154603" y="3364992"/>
+            <a:ext cx="78377" cy="475488"/>
           </a:xfrm>
           <a:prstGeom prst="rect">
             <a:avLst/>
@@ -33040,14 +33547,14 @@
       </p:sp>
       <p:sp>
         <p:nvSpPr>
-          <p:cNvPr id="34" name="Shape 32"/>
-          <p:cNvSpPr/>
-          <p:nvPr/>
-        </p:nvSpPr>
-        <p:spPr>
-          <a:xfrm>
-            <a:off x="6858000" y="3364992"/>
-            <a:ext cx="1554480" cy="475488"/>
+          <p:cNvPr id="38" name="Shape 36"/>
+          <p:cNvSpPr/>
+          <p:nvPr/>
+        </p:nvSpPr>
+        <p:spPr>
+          <a:xfrm>
+            <a:off x="5232981" y="3364992"/>
+            <a:ext cx="1005840" cy="475488"/>
           </a:xfrm>
           <a:prstGeom prst="rect">
             <a:avLst>
@@ -33067,14 +33574,14 @@
       </p:sp>
       <p:sp>
         <p:nvSpPr>
-          <p:cNvPr id="35" name="Text 33"/>
-          <p:cNvSpPr/>
-          <p:nvPr/>
-        </p:nvSpPr>
-        <p:spPr>
-          <a:xfrm>
-            <a:off x="6858000" y="3364992"/>
-            <a:ext cx="1554480" cy="475488"/>
+          <p:cNvPr id="39" name="Text 37"/>
+          <p:cNvSpPr/>
+          <p:nvPr/>
+        </p:nvSpPr>
+        <p:spPr>
+          <a:xfrm>
+            <a:off x="5232981" y="3364992"/>
+            <a:ext cx="1005840" cy="475488"/>
           </a:xfrm>
           <a:prstGeom prst="rect">
             <a:avLst/>
@@ -33098,6 +33605,216 @@
                 <a:ea typeface="Trebuchet MS" pitchFamily="34" charset="-122"/>
                 <a:cs typeface="Trebuchet MS" pitchFamily="34" charset="-120"/>
               </a:rPr>
+              <a:t>ol</a:t>
+            </a:r>
+            <a:endParaRPr lang="en-US" sz="1400" dirty="0"/>
+          </a:p>
+        </p:txBody>
+      </p:sp>
+      <p:sp>
+        <p:nvSpPr>
+          <p:cNvPr id="40" name="Text 38"/>
+          <p:cNvSpPr/>
+          <p:nvPr/>
+        </p:nvSpPr>
+        <p:spPr>
+          <a:xfrm>
+            <a:off x="6238821" y="3364992"/>
+            <a:ext cx="78377" cy="475488"/>
+          </a:xfrm>
+          <a:prstGeom prst="rect">
+            <a:avLst/>
+          </a:prstGeom>
+          <a:noFill/>
+          <a:ln/>
+        </p:spPr>
+        <p:txBody>
+          <a:bodyPr wrap="square" lIns="0" tIns="0" rIns="0" bIns="0" rtlCol="0" anchor="ctr"/>
+          <a:lstStyle/>
+          <a:p>
+            <a:pPr algn="ctr" indent="0" marL="0">
+              <a:buNone/>
+            </a:pPr>
+            <a:r>
+              <a:rPr lang="en-US" sz="1600" b="1" dirty="0">
+                <a:solidFill>
+                  <a:srgbClr val="0D9488"/>
+                </a:solidFill>
+                <a:latin typeface="Trebuchet MS" pitchFamily="34" charset="0"/>
+                <a:ea typeface="Trebuchet MS" pitchFamily="34" charset="-122"/>
+                <a:cs typeface="Trebuchet MS" pitchFamily="34" charset="-120"/>
+              </a:rPr>
+              <a:t>·</a:t>
+            </a:r>
+            <a:endParaRPr lang="en-US" sz="1600" dirty="0"/>
+          </a:p>
+        </p:txBody>
+      </p:sp>
+      <p:sp>
+        <p:nvSpPr>
+          <p:cNvPr id="41" name="Shape 39"/>
+          <p:cNvSpPr/>
+          <p:nvPr/>
+        </p:nvSpPr>
+        <p:spPr>
+          <a:xfrm>
+            <a:off x="6317198" y="3364992"/>
+            <a:ext cx="1005840" cy="475488"/>
+          </a:xfrm>
+          <a:prstGeom prst="rect">
+            <a:avLst>
+              <a:gd name="adj" fmla="val 9615"/>
+            </a:avLst>
+          </a:prstGeom>
+          <a:solidFill>
+            <a:srgbClr val="FFFFFF"/>
+          </a:solidFill>
+          <a:ln w="12700">
+            <a:solidFill>
+              <a:srgbClr val="0D9488"/>
+            </a:solidFill>
+            <a:prstDash val="solid"/>
+          </a:ln>
+        </p:spPr>
+      </p:sp>
+      <p:sp>
+        <p:nvSpPr>
+          <p:cNvPr id="42" name="Text 40"/>
+          <p:cNvSpPr/>
+          <p:nvPr/>
+        </p:nvSpPr>
+        <p:spPr>
+          <a:xfrm>
+            <a:off x="6317198" y="3364992"/>
+            <a:ext cx="1005840" cy="475488"/>
+          </a:xfrm>
+          <a:prstGeom prst="rect">
+            <a:avLst/>
+          </a:prstGeom>
+          <a:noFill/>
+          <a:ln/>
+        </p:spPr>
+        <p:txBody>
+          <a:bodyPr wrap="square" lIns="0" tIns="0" rIns="0" bIns="0" rtlCol="0" anchor="ctr"/>
+          <a:lstStyle/>
+          <a:p>
+            <a:pPr algn="ctr" indent="0" marL="0">
+              <a:buNone/>
+            </a:pPr>
+            <a:r>
+              <a:rPr lang="en-US" sz="1400" b="1" dirty="0">
+                <a:solidFill>
+                  <a:srgbClr val="0D9488"/>
+                </a:solidFill>
+                <a:latin typeface="Trebuchet MS" pitchFamily="34" charset="0"/>
+                <a:ea typeface="Trebuchet MS" pitchFamily="34" charset="-122"/>
+                <a:cs typeface="Trebuchet MS" pitchFamily="34" charset="-120"/>
+              </a:rPr>
+              <a:t>o</a:t>
+            </a:r>
+            <a:endParaRPr lang="en-US" sz="1400" dirty="0"/>
+          </a:p>
+        </p:txBody>
+      </p:sp>
+      <p:sp>
+        <p:nvSpPr>
+          <p:cNvPr id="43" name="Text 41"/>
+          <p:cNvSpPr/>
+          <p:nvPr/>
+        </p:nvSpPr>
+        <p:spPr>
+          <a:xfrm>
+            <a:off x="7323038" y="3364992"/>
+            <a:ext cx="78377" cy="475488"/>
+          </a:xfrm>
+          <a:prstGeom prst="rect">
+            <a:avLst/>
+          </a:prstGeom>
+          <a:noFill/>
+          <a:ln/>
+        </p:spPr>
+        <p:txBody>
+          <a:bodyPr wrap="square" lIns="0" tIns="0" rIns="0" bIns="0" rtlCol="0" anchor="ctr"/>
+          <a:lstStyle/>
+          <a:p>
+            <a:pPr algn="ctr" indent="0" marL="0">
+              <a:buNone/>
+            </a:pPr>
+            <a:r>
+              <a:rPr lang="en-US" sz="1600" b="1" dirty="0">
+                <a:solidFill>
+                  <a:srgbClr val="0D9488"/>
+                </a:solidFill>
+                <a:latin typeface="Trebuchet MS" pitchFamily="34" charset="0"/>
+                <a:ea typeface="Trebuchet MS" pitchFamily="34" charset="-122"/>
+                <a:cs typeface="Trebuchet MS" pitchFamily="34" charset="-120"/>
+              </a:rPr>
+              <a:t>·</a:t>
+            </a:r>
+            <a:endParaRPr lang="en-US" sz="1600" dirty="0"/>
+          </a:p>
+        </p:txBody>
+      </p:sp>
+      <p:sp>
+        <p:nvSpPr>
+          <p:cNvPr id="44" name="Shape 42"/>
+          <p:cNvSpPr/>
+          <p:nvPr/>
+        </p:nvSpPr>
+        <p:spPr>
+          <a:xfrm>
+            <a:off x="7401415" y="3364992"/>
+            <a:ext cx="1005840" cy="475488"/>
+          </a:xfrm>
+          <a:prstGeom prst="rect">
+            <a:avLst>
+              <a:gd name="adj" fmla="val 9615"/>
+            </a:avLst>
+          </a:prstGeom>
+          <a:solidFill>
+            <a:srgbClr val="FFFFFF"/>
+          </a:solidFill>
+          <a:ln w="12700">
+            <a:solidFill>
+              <a:srgbClr val="0D9488"/>
+            </a:solidFill>
+            <a:prstDash val="solid"/>
+          </a:ln>
+        </p:spPr>
+      </p:sp>
+      <p:sp>
+        <p:nvSpPr>
+          <p:cNvPr id="45" name="Text 43"/>
+          <p:cNvSpPr/>
+          <p:nvPr/>
+        </p:nvSpPr>
+        <p:spPr>
+          <a:xfrm>
+            <a:off x="7401415" y="3364992"/>
+            <a:ext cx="1005840" cy="475488"/>
+          </a:xfrm>
+          <a:prstGeom prst="rect">
+            <a:avLst/>
+          </a:prstGeom>
+          <a:noFill/>
+          <a:ln/>
+        </p:spPr>
+        <p:txBody>
+          <a:bodyPr wrap="square" lIns="0" tIns="0" rIns="0" bIns="0" rtlCol="0" anchor="ctr"/>
+          <a:lstStyle/>
+          <a:p>
+            <a:pPr algn="ctr" indent="0" marL="0">
+              <a:buNone/>
+            </a:pPr>
+            <a:r>
+              <a:rPr lang="en-US" sz="1400" b="1" dirty="0">
+                <a:solidFill>
+                  <a:srgbClr val="0D9488"/>
+                </a:solidFill>
+                <a:latin typeface="Trebuchet MS" pitchFamily="34" charset="0"/>
+                <a:ea typeface="Trebuchet MS" pitchFamily="34" charset="-122"/>
+                <a:cs typeface="Trebuchet MS" pitchFamily="34" charset="-120"/>
+              </a:rPr>
               <a:t>gy</a:t>
             </a:r>
             <a:endParaRPr lang="en-US" sz="1400" dirty="0"/>
@@ -33106,7 +33823,7 @@
       </p:sp>
       <p:sp>
         <p:nvSpPr>
-          <p:cNvPr id="36" name="Shape 34"/>
+          <p:cNvPr id="46" name="Shape 44"/>
           <p:cNvSpPr/>
           <p:nvPr/>
         </p:nvSpPr>
@@ -33133,7 +33850,7 @@
       </p:sp>
       <p:sp>
         <p:nvSpPr>
-          <p:cNvPr id="37" name="Text 35"/>
+          <p:cNvPr id="47" name="Text 45"/>
           <p:cNvSpPr/>
           <p:nvPr/>
         </p:nvSpPr>
@@ -33172,18 +33889,18 @@
       </p:sp>
       <p:sp>
         <p:nvSpPr>
-          <p:cNvPr id="38" name="Shape 36"/>
+          <p:cNvPr id="48" name="Shape 46"/>
           <p:cNvSpPr/>
           <p:nvPr/>
         </p:nvSpPr>
         <p:spPr>
           <a:xfrm>
             <a:off x="1874520" y="4096512"/>
-            <a:ext cx="6903720" cy="804672"/>
+            <a:ext cx="6903720" cy="658368"/>
           </a:xfrm>
           <a:prstGeom prst="rect">
             <a:avLst>
-              <a:gd name="adj" fmla="val 6818"/>
+              <a:gd name="adj" fmla="val 8333"/>
             </a:avLst>
           </a:prstGeom>
           <a:solidFill>
@@ -33199,18 +33916,18 @@
       </p:sp>
       <p:sp>
         <p:nvSpPr>
-          <p:cNvPr id="39" name="Shape 37"/>
-          <p:cNvSpPr/>
-          <p:nvPr/>
-        </p:nvSpPr>
-        <p:spPr>
-          <a:xfrm>
-            <a:off x="2254649" y="4169664"/>
-            <a:ext cx="685800" cy="384048"/>
+          <p:cNvPr id="49" name="Shape 47"/>
+          <p:cNvSpPr/>
+          <p:nvPr/>
+        </p:nvSpPr>
+        <p:spPr>
+          <a:xfrm>
+            <a:off x="1951330" y="4169664"/>
+            <a:ext cx="676656" cy="475488"/>
           </a:xfrm>
           <a:prstGeom prst="rect">
             <a:avLst>
-              <a:gd name="adj" fmla="val 9524"/>
+              <a:gd name="adj" fmla="val 7692"/>
             </a:avLst>
           </a:prstGeom>
           <a:solidFill>
@@ -33226,14 +33943,14 @@
       </p:sp>
       <p:sp>
         <p:nvSpPr>
-          <p:cNvPr id="40" name="Text 38"/>
-          <p:cNvSpPr/>
-          <p:nvPr/>
-        </p:nvSpPr>
-        <p:spPr>
-          <a:xfrm>
-            <a:off x="2254649" y="4169664"/>
-            <a:ext cx="685800" cy="384048"/>
+          <p:cNvPr id="50" name="Text 48"/>
+          <p:cNvSpPr/>
+          <p:nvPr/>
+        </p:nvSpPr>
+        <p:spPr>
+          <a:xfrm>
+            <a:off x="1951330" y="4169664"/>
+            <a:ext cx="676656" cy="475488"/>
           </a:xfrm>
           <a:prstGeom prst="rect">
             <a:avLst/>
@@ -33257,7 +33974,7 @@
                 <a:ea typeface="Trebuchet MS" pitchFamily="34" charset="-122"/>
                 <a:cs typeface="Trebuchet MS" pitchFamily="34" charset="-120"/>
               </a:rPr>
-              <a:t>e</a:t>
+              <a:t>m</a:t>
             </a:r>
             <a:endParaRPr lang="en-US" sz="900" dirty="0"/>
           </a:p>
@@ -33265,18 +33982,18 @@
       </p:sp>
       <p:sp>
         <p:nvSpPr>
-          <p:cNvPr id="41" name="Shape 39"/>
-          <p:cNvSpPr/>
-          <p:nvPr/>
-        </p:nvSpPr>
-        <p:spPr>
-          <a:xfrm>
-            <a:off x="3293146" y="4169664"/>
-            <a:ext cx="685800" cy="384048"/>
+          <p:cNvPr id="51" name="Shape 49"/>
+          <p:cNvSpPr/>
+          <p:nvPr/>
+        </p:nvSpPr>
+        <p:spPr>
+          <a:xfrm>
+            <a:off x="2677363" y="4169664"/>
+            <a:ext cx="676656" cy="475488"/>
           </a:xfrm>
           <a:prstGeom prst="rect">
             <a:avLst>
-              <a:gd name="adj" fmla="val 9524"/>
+              <a:gd name="adj" fmla="val 7692"/>
             </a:avLst>
           </a:prstGeom>
           <a:solidFill>
@@ -33292,14 +34009,14 @@
       </p:sp>
       <p:sp>
         <p:nvSpPr>
-          <p:cNvPr id="42" name="Text 40"/>
-          <p:cNvSpPr/>
-          <p:nvPr/>
-        </p:nvSpPr>
-        <p:spPr>
-          <a:xfrm>
-            <a:off x="3293146" y="4169664"/>
-            <a:ext cx="685800" cy="384048"/>
+          <p:cNvPr id="52" name="Text 50"/>
+          <p:cNvSpPr/>
+          <p:nvPr/>
+        </p:nvSpPr>
+        <p:spPr>
+          <a:xfrm>
+            <a:off x="2677363" y="4169664"/>
+            <a:ext cx="676656" cy="475488"/>
           </a:xfrm>
           <a:prstGeom prst="rect">
             <a:avLst/>
@@ -33323,7 +34040,7 @@
                 <a:ea typeface="Trebuchet MS" pitchFamily="34" charset="-122"/>
                 <a:cs typeface="Trebuchet MS" pitchFamily="34" charset="-120"/>
               </a:rPr>
-              <a:t>c</a:t>
+              <a:t>e</a:t>
             </a:r>
             <a:endParaRPr lang="en-US" sz="900" dirty="0"/>
           </a:p>
@@ -33331,57 +34048,18 @@
       </p:sp>
       <p:sp>
         <p:nvSpPr>
-          <p:cNvPr id="43" name="Text 41"/>
-          <p:cNvSpPr/>
-          <p:nvPr/>
-        </p:nvSpPr>
-        <p:spPr>
-          <a:xfrm>
-            <a:off x="3293146" y="4572000"/>
-            <a:ext cx="685800" cy="219456"/>
-          </a:xfrm>
-          <a:prstGeom prst="rect">
-            <a:avLst/>
-          </a:prstGeom>
-          <a:noFill/>
-          <a:ln/>
-        </p:spPr>
-        <p:txBody>
-          <a:bodyPr wrap="square" lIns="0" tIns="0" rIns="0" bIns="0" rtlCol="0" anchor="t"/>
-          <a:lstStyle/>
-          <a:p>
-            <a:pPr algn="ctr" indent="0" marL="0">
-              <a:buNone/>
-            </a:pPr>
-            <a:r>
-              <a:rPr lang="en-US" sz="750" i="1" dirty="0">
-                <a:solidFill>
-                  <a:srgbClr val="94A3B8"/>
-                </a:solidFill>
-                <a:latin typeface="Calibri" pitchFamily="34" charset="0"/>
-                <a:ea typeface="Calibri" pitchFamily="34" charset="-122"/>
-                <a:cs typeface="Calibri" pitchFamily="34" charset="-120"/>
-              </a:rPr>
-              <a:t>/k/</a:t>
-            </a:r>
-            <a:endParaRPr lang="en-US" sz="750" dirty="0"/>
-          </a:p>
-        </p:txBody>
-      </p:sp>
-      <p:sp>
-        <p:nvSpPr>
-          <p:cNvPr id="44" name="Shape 42"/>
-          <p:cNvSpPr/>
-          <p:nvPr/>
-        </p:nvSpPr>
-        <p:spPr>
-          <a:xfrm>
-            <a:off x="4331643" y="4169664"/>
-            <a:ext cx="685800" cy="384048"/>
+          <p:cNvPr id="53" name="Shape 51"/>
+          <p:cNvSpPr/>
+          <p:nvPr/>
+        </p:nvSpPr>
+        <p:spPr>
+          <a:xfrm>
+            <a:off x="3403397" y="4169664"/>
+            <a:ext cx="676656" cy="475488"/>
           </a:xfrm>
           <a:prstGeom prst="rect">
             <a:avLst>
-              <a:gd name="adj" fmla="val 9524"/>
+              <a:gd name="adj" fmla="val 7692"/>
             </a:avLst>
           </a:prstGeom>
           <a:solidFill>
@@ -33397,14 +34075,14 @@
       </p:sp>
       <p:sp>
         <p:nvSpPr>
-          <p:cNvPr id="45" name="Text 43"/>
-          <p:cNvSpPr/>
-          <p:nvPr/>
-        </p:nvSpPr>
-        <p:spPr>
-          <a:xfrm>
-            <a:off x="4331643" y="4169664"/>
-            <a:ext cx="685800" cy="384048"/>
+          <p:cNvPr id="54" name="Text 52"/>
+          <p:cNvSpPr/>
+          <p:nvPr/>
+        </p:nvSpPr>
+        <p:spPr>
+          <a:xfrm>
+            <a:off x="3403397" y="4169664"/>
+            <a:ext cx="676656" cy="475488"/>
           </a:xfrm>
           <a:prstGeom prst="rect">
             <a:avLst/>
@@ -33428,7 +34106,7 @@
                 <a:ea typeface="Trebuchet MS" pitchFamily="34" charset="-122"/>
                 <a:cs typeface="Trebuchet MS" pitchFamily="34" charset="-120"/>
               </a:rPr>
-              <a:t>o</a:t>
+              <a:t>t</a:t>
             </a:r>
             <a:endParaRPr lang="en-US" sz="900" dirty="0"/>
           </a:p>
@@ -33436,18 +34114,18 @@
       </p:sp>
       <p:sp>
         <p:nvSpPr>
-          <p:cNvPr id="46" name="Shape 44"/>
-          <p:cNvSpPr/>
-          <p:nvPr/>
-        </p:nvSpPr>
-        <p:spPr>
-          <a:xfrm>
-            <a:off x="5370141" y="4169664"/>
-            <a:ext cx="685800" cy="384048"/>
+          <p:cNvPr id="55" name="Shape 53"/>
+          <p:cNvSpPr/>
+          <p:nvPr/>
+        </p:nvSpPr>
+        <p:spPr>
+          <a:xfrm>
+            <a:off x="4129430" y="4169664"/>
+            <a:ext cx="676656" cy="475488"/>
           </a:xfrm>
           <a:prstGeom prst="rect">
             <a:avLst>
-              <a:gd name="adj" fmla="val 9524"/>
+              <a:gd name="adj" fmla="val 7692"/>
             </a:avLst>
           </a:prstGeom>
           <a:solidFill>
@@ -33463,14 +34141,14 @@
       </p:sp>
       <p:sp>
         <p:nvSpPr>
-          <p:cNvPr id="47" name="Text 45"/>
-          <p:cNvSpPr/>
-          <p:nvPr/>
-        </p:nvSpPr>
-        <p:spPr>
-          <a:xfrm>
-            <a:off x="5370141" y="4169664"/>
-            <a:ext cx="685800" cy="384048"/>
+          <p:cNvPr id="56" name="Text 54"/>
+          <p:cNvSpPr/>
+          <p:nvPr/>
+        </p:nvSpPr>
+        <p:spPr>
+          <a:xfrm>
+            <a:off x="4129430" y="4169664"/>
+            <a:ext cx="676656" cy="475488"/>
           </a:xfrm>
           <a:prstGeom prst="rect">
             <a:avLst/>
@@ -33494,7 +34172,7 @@
                 <a:ea typeface="Trebuchet MS" pitchFamily="34" charset="-122"/>
                 <a:cs typeface="Trebuchet MS" pitchFamily="34" charset="-120"/>
               </a:rPr>
-              <a:t>l</a:t>
+              <a:t>e</a:t>
             </a:r>
             <a:endParaRPr lang="en-US" sz="900" dirty="0"/>
           </a:p>
@@ -33502,18 +34180,18 @@
       </p:sp>
       <p:sp>
         <p:nvSpPr>
-          <p:cNvPr id="48" name="Shape 46"/>
-          <p:cNvSpPr/>
-          <p:nvPr/>
-        </p:nvSpPr>
-        <p:spPr>
-          <a:xfrm>
-            <a:off x="6408638" y="4169664"/>
-            <a:ext cx="685800" cy="384048"/>
+          <p:cNvPr id="57" name="Shape 55"/>
+          <p:cNvSpPr/>
+          <p:nvPr/>
+        </p:nvSpPr>
+        <p:spPr>
+          <a:xfrm>
+            <a:off x="4855464" y="4169664"/>
+            <a:ext cx="676656" cy="475488"/>
           </a:xfrm>
           <a:prstGeom prst="rect">
             <a:avLst>
-              <a:gd name="adj" fmla="val 9524"/>
+              <a:gd name="adj" fmla="val 7692"/>
             </a:avLst>
           </a:prstGeom>
           <a:solidFill>
@@ -33529,14 +34207,14 @@
       </p:sp>
       <p:sp>
         <p:nvSpPr>
-          <p:cNvPr id="49" name="Text 47"/>
-          <p:cNvSpPr/>
-          <p:nvPr/>
-        </p:nvSpPr>
-        <p:spPr>
-          <a:xfrm>
-            <a:off x="6408638" y="4169664"/>
-            <a:ext cx="685800" cy="384048"/>
+          <p:cNvPr id="58" name="Text 56"/>
+          <p:cNvSpPr/>
+          <p:nvPr/>
+        </p:nvSpPr>
+        <p:spPr>
+          <a:xfrm>
+            <a:off x="4855464" y="4169664"/>
+            <a:ext cx="676656" cy="475488"/>
           </a:xfrm>
           <a:prstGeom prst="rect">
             <a:avLst/>
@@ -33560,7 +34238,7 @@
                 <a:ea typeface="Trebuchet MS" pitchFamily="34" charset="-122"/>
                 <a:cs typeface="Trebuchet MS" pitchFamily="34" charset="-120"/>
               </a:rPr>
-              <a:t>o</a:t>
+              <a:t>or</a:t>
             </a:r>
             <a:endParaRPr lang="en-US" sz="900" dirty="0"/>
           </a:p>
@@ -33568,18 +34246,18 @@
       </p:sp>
       <p:sp>
         <p:nvSpPr>
-          <p:cNvPr id="50" name="Shape 48"/>
-          <p:cNvSpPr/>
-          <p:nvPr/>
-        </p:nvSpPr>
-        <p:spPr>
-          <a:xfrm>
-            <a:off x="7447135" y="4169664"/>
-            <a:ext cx="685800" cy="384048"/>
+          <p:cNvPr id="59" name="Shape 57"/>
+          <p:cNvSpPr/>
+          <p:nvPr/>
+        </p:nvSpPr>
+        <p:spPr>
+          <a:xfrm>
+            <a:off x="5581498" y="4169664"/>
+            <a:ext cx="676656" cy="475488"/>
           </a:xfrm>
           <a:prstGeom prst="rect">
             <a:avLst>
-              <a:gd name="adj" fmla="val 9524"/>
+              <a:gd name="adj" fmla="val 7692"/>
             </a:avLst>
           </a:prstGeom>
           <a:solidFill>
@@ -33595,14 +34273,14 @@
       </p:sp>
       <p:sp>
         <p:nvSpPr>
-          <p:cNvPr id="51" name="Text 49"/>
-          <p:cNvSpPr/>
-          <p:nvPr/>
-        </p:nvSpPr>
-        <p:spPr>
-          <a:xfrm>
-            <a:off x="7447135" y="4169664"/>
-            <a:ext cx="685800" cy="384048"/>
+          <p:cNvPr id="60" name="Text 58"/>
+          <p:cNvSpPr/>
+          <p:nvPr/>
+        </p:nvSpPr>
+        <p:spPr>
+          <a:xfrm>
+            <a:off x="5581498" y="4169664"/>
+            <a:ext cx="676656" cy="475488"/>
           </a:xfrm>
           <a:prstGeom prst="rect">
             <a:avLst/>
@@ -33626,48 +34304,207 @@
                 <a:ea typeface="Trebuchet MS" pitchFamily="34" charset="-122"/>
                 <a:cs typeface="Trebuchet MS" pitchFamily="34" charset="-120"/>
               </a:rPr>
+              <a:t>o</a:t>
+            </a:r>
+            <a:endParaRPr lang="en-US" sz="900" dirty="0"/>
+          </a:p>
+        </p:txBody>
+      </p:sp>
+      <p:sp>
+        <p:nvSpPr>
+          <p:cNvPr id="61" name="Shape 59"/>
+          <p:cNvSpPr/>
+          <p:nvPr/>
+        </p:nvSpPr>
+        <p:spPr>
+          <a:xfrm>
+            <a:off x="6307531" y="4169664"/>
+            <a:ext cx="676656" cy="475488"/>
+          </a:xfrm>
+          <a:prstGeom prst="rect">
+            <a:avLst>
+              <a:gd name="adj" fmla="val 7692"/>
+            </a:avLst>
+          </a:prstGeom>
+          <a:solidFill>
+            <a:srgbClr val="FFFFFF"/>
+          </a:solidFill>
+          <a:ln w="12700">
+            <a:solidFill>
+              <a:srgbClr val="DB2777"/>
+            </a:solidFill>
+            <a:prstDash val="solid"/>
+          </a:ln>
+        </p:spPr>
+      </p:sp>
+      <p:sp>
+        <p:nvSpPr>
+          <p:cNvPr id="62" name="Text 60"/>
+          <p:cNvSpPr/>
+          <p:nvPr/>
+        </p:nvSpPr>
+        <p:spPr>
+          <a:xfrm>
+            <a:off x="6307531" y="4169664"/>
+            <a:ext cx="676656" cy="475488"/>
+          </a:xfrm>
+          <a:prstGeom prst="rect">
+            <a:avLst/>
+          </a:prstGeom>
+          <a:noFill/>
+          <a:ln/>
+        </p:spPr>
+        <p:txBody>
+          <a:bodyPr wrap="square" lIns="0" tIns="0" rIns="0" bIns="0" rtlCol="0" anchor="ctr"/>
+          <a:lstStyle/>
+          <a:p>
+            <a:pPr algn="ctr" indent="0" marL="0">
+              <a:buNone/>
+            </a:pPr>
+            <a:r>
+              <a:rPr lang="en-US" sz="900" b="1" dirty="0">
+                <a:solidFill>
+                  <a:srgbClr val="9D174D"/>
+                </a:solidFill>
+                <a:latin typeface="Trebuchet MS" pitchFamily="34" charset="0"/>
+                <a:ea typeface="Trebuchet MS" pitchFamily="34" charset="-122"/>
+                <a:cs typeface="Trebuchet MS" pitchFamily="34" charset="-120"/>
+              </a:rPr>
+              <a:t>l</a:t>
+            </a:r>
+            <a:endParaRPr lang="en-US" sz="900" dirty="0"/>
+          </a:p>
+        </p:txBody>
+      </p:sp>
+      <p:sp>
+        <p:nvSpPr>
+          <p:cNvPr id="63" name="Shape 61"/>
+          <p:cNvSpPr/>
+          <p:nvPr/>
+        </p:nvSpPr>
+        <p:spPr>
+          <a:xfrm>
+            <a:off x="7033565" y="4169664"/>
+            <a:ext cx="676656" cy="475488"/>
+          </a:xfrm>
+          <a:prstGeom prst="rect">
+            <a:avLst>
+              <a:gd name="adj" fmla="val 7692"/>
+            </a:avLst>
+          </a:prstGeom>
+          <a:solidFill>
+            <a:srgbClr val="FFFFFF"/>
+          </a:solidFill>
+          <a:ln w="12700">
+            <a:solidFill>
+              <a:srgbClr val="DB2777"/>
+            </a:solidFill>
+            <a:prstDash val="solid"/>
+          </a:ln>
+        </p:spPr>
+      </p:sp>
+      <p:sp>
+        <p:nvSpPr>
+          <p:cNvPr id="64" name="Text 62"/>
+          <p:cNvSpPr/>
+          <p:nvPr/>
+        </p:nvSpPr>
+        <p:spPr>
+          <a:xfrm>
+            <a:off x="7033565" y="4169664"/>
+            <a:ext cx="676656" cy="475488"/>
+          </a:xfrm>
+          <a:prstGeom prst="rect">
+            <a:avLst/>
+          </a:prstGeom>
+          <a:noFill/>
+          <a:ln/>
+        </p:spPr>
+        <p:txBody>
+          <a:bodyPr wrap="square" lIns="0" tIns="0" rIns="0" bIns="0" rtlCol="0" anchor="ctr"/>
+          <a:lstStyle/>
+          <a:p>
+            <a:pPr algn="ctr" indent="0" marL="0">
+              <a:buNone/>
+            </a:pPr>
+            <a:r>
+              <a:rPr lang="en-US" sz="900" b="1" dirty="0">
+                <a:solidFill>
+                  <a:srgbClr val="9D174D"/>
+                </a:solidFill>
+                <a:latin typeface="Trebuchet MS" pitchFamily="34" charset="0"/>
+                <a:ea typeface="Trebuchet MS" pitchFamily="34" charset="-122"/>
+                <a:cs typeface="Trebuchet MS" pitchFamily="34" charset="-120"/>
+              </a:rPr>
+              <a:t>o</a:t>
+            </a:r>
+            <a:endParaRPr lang="en-US" sz="900" dirty="0"/>
+          </a:p>
+        </p:txBody>
+      </p:sp>
+      <p:sp>
+        <p:nvSpPr>
+          <p:cNvPr id="65" name="Shape 63"/>
+          <p:cNvSpPr/>
+          <p:nvPr/>
+        </p:nvSpPr>
+        <p:spPr>
+          <a:xfrm>
+            <a:off x="7759598" y="4169664"/>
+            <a:ext cx="676656" cy="475488"/>
+          </a:xfrm>
+          <a:prstGeom prst="rect">
+            <a:avLst>
+              <a:gd name="adj" fmla="val 7692"/>
+            </a:avLst>
+          </a:prstGeom>
+          <a:solidFill>
+            <a:srgbClr val="FFFFFF"/>
+          </a:solidFill>
+          <a:ln w="12700">
+            <a:solidFill>
+              <a:srgbClr val="DB2777"/>
+            </a:solidFill>
+            <a:prstDash val="solid"/>
+          </a:ln>
+        </p:spPr>
+      </p:sp>
+      <p:sp>
+        <p:nvSpPr>
+          <p:cNvPr id="66" name="Text 64"/>
+          <p:cNvSpPr/>
+          <p:nvPr/>
+        </p:nvSpPr>
+        <p:spPr>
+          <a:xfrm>
+            <a:off x="7759598" y="4169664"/>
+            <a:ext cx="676656" cy="475488"/>
+          </a:xfrm>
+          <a:prstGeom prst="rect">
+            <a:avLst/>
+          </a:prstGeom>
+          <a:noFill/>
+          <a:ln/>
+        </p:spPr>
+        <p:txBody>
+          <a:bodyPr wrap="square" lIns="0" tIns="0" rIns="0" bIns="0" rtlCol="0" anchor="ctr"/>
+          <a:lstStyle/>
+          <a:p>
+            <a:pPr algn="ctr" indent="0" marL="0">
+              <a:buNone/>
+            </a:pPr>
+            <a:r>
+              <a:rPr lang="en-US" sz="900" b="1" dirty="0">
+                <a:solidFill>
+                  <a:srgbClr val="9D174D"/>
+                </a:solidFill>
+                <a:latin typeface="Trebuchet MS" pitchFamily="34" charset="0"/>
+                <a:ea typeface="Trebuchet MS" pitchFamily="34" charset="-122"/>
+                <a:cs typeface="Trebuchet MS" pitchFamily="34" charset="-120"/>
+              </a:rPr>
               <a:t>gy</a:t>
             </a:r>
             <a:endParaRPr lang="en-US" sz="900" dirty="0"/>
-          </a:p>
-        </p:txBody>
-      </p:sp>
-      <p:sp>
-        <p:nvSpPr>
-          <p:cNvPr id="52" name="Text 50"/>
-          <p:cNvSpPr/>
-          <p:nvPr/>
-        </p:nvSpPr>
-        <p:spPr>
-          <a:xfrm>
-            <a:off x="7447135" y="4572000"/>
-            <a:ext cx="685800" cy="219456"/>
-          </a:xfrm>
-          <a:prstGeom prst="rect">
-            <a:avLst/>
-          </a:prstGeom>
-          <a:noFill/>
-          <a:ln/>
-        </p:spPr>
-        <p:txBody>
-          <a:bodyPr wrap="square" lIns="0" tIns="0" rIns="0" bIns="0" rtlCol="0" anchor="t"/>
-          <a:lstStyle/>
-          <a:p>
-            <a:pPr algn="ctr" indent="0" marL="0">
-              <a:buNone/>
-            </a:pPr>
-            <a:r>
-              <a:rPr lang="en-US" sz="750" i="1" dirty="0">
-                <a:solidFill>
-                  <a:srgbClr val="94A3B8"/>
-                </a:solidFill>
-                <a:latin typeface="Calibri" pitchFamily="34" charset="0"/>
-                <a:ea typeface="Calibri" pitchFamily="34" charset="-122"/>
-                <a:cs typeface="Calibri" pitchFamily="34" charset="-120"/>
-              </a:rPr>
-              <a:t>/jee/</a:t>
-            </a:r>
-            <a:endParaRPr lang="en-US" sz="750" dirty="0"/>
           </a:p>
         </p:txBody>
       </p:sp>
@@ -35925,7 +36762,7 @@
                 <a:ea typeface="Trebuchet MS" pitchFamily="34" charset="-122"/>
                 <a:cs typeface="Trebuchet MS" pitchFamily="34" charset="-120"/>
               </a:rPr>
-              <a:t>astro-</a:t>
+              <a:t>techno-</a:t>
             </a:r>
             <a:endParaRPr lang="en-US" sz="1300" dirty="0"/>
           </a:p>
@@ -36014,7 +36851,7 @@
                 <a:ea typeface="Trebuchet MS" pitchFamily="34" charset="-122"/>
                 <a:cs typeface="Trebuchet MS" pitchFamily="34" charset="-120"/>
               </a:rPr>
-              <a:t>-y</a:t>
+              <a:t>-ists</a:t>
             </a:r>
             <a:endParaRPr lang="en-US" sz="1300" dirty="0"/>
           </a:p>
@@ -36078,7 +36915,7 @@
                 <a:ea typeface="Trebuchet MS" pitchFamily="34" charset="-122"/>
                 <a:cs typeface="Trebuchet MS" pitchFamily="34" charset="-120"/>
               </a:rPr>
-              <a:t>techno-</a:t>
+              <a:t>chrono-</a:t>
             </a:r>
             <a:endParaRPr lang="en-US" sz="1300" dirty="0"/>
           </a:p>
@@ -36536,7 +37373,7 @@
                 <a:ea typeface="Trebuchet MS" pitchFamily="34" charset="-122"/>
                 <a:cs typeface="Trebuchet MS" pitchFamily="34" charset="-120"/>
               </a:rPr>
-              <a:t>archaeology</a:t>
+              <a:t>psychology</a:t>
             </a:r>
             <a:endParaRPr lang="en-US" sz="1200" dirty="0"/>
           </a:p>
@@ -36602,7 +37439,7 @@
                 <a:ea typeface="Trebuchet MS" pitchFamily="34" charset="-122"/>
                 <a:cs typeface="Trebuchet MS" pitchFamily="34" charset="-120"/>
               </a:rPr>
-              <a:t>meteorology</a:t>
+              <a:t>ecology</a:t>
             </a:r>
             <a:endParaRPr lang="en-US" sz="1200" dirty="0"/>
           </a:p>
@@ -36668,7 +37505,7 @@
                 <a:ea typeface="Trebuchet MS" pitchFamily="34" charset="-122"/>
                 <a:cs typeface="Trebuchet MS" pitchFamily="34" charset="-120"/>
               </a:rPr>
-              <a:t>ecology</a:t>
+              <a:t>archaeology</a:t>
             </a:r>
             <a:endParaRPr lang="en-US" sz="1200" dirty="0"/>
           </a:p>
@@ -36734,7 +37571,7 @@
                 <a:ea typeface="Trebuchet MS" pitchFamily="34" charset="-122"/>
                 <a:cs typeface="Trebuchet MS" pitchFamily="34" charset="-120"/>
               </a:rPr>
-              <a:t>psychology</a:t>
+              <a:t>meteorology</a:t>
             </a:r>
             <a:endParaRPr lang="en-US" sz="1200" dirty="0"/>
           </a:p>
@@ -37922,7 +38759,7 @@
                 <a:ea typeface="Calibri" pitchFamily="34" charset="-122"/>
                 <a:cs typeface="Calibri" pitchFamily="34" charset="-120"/>
               </a:rPr>
-              <a:t>1.  The morpheme 'logy' comes from the Greek word 'logos', meaning word or study.</a:t>
+              <a:t>1.  The morpheme 'logy' means to move or travel quickly.</a:t>
             </a:r>
             <a:endParaRPr lang="en-US" sz="1300" dirty="0"/>
           </a:p>
@@ -37945,11 +38782,11 @@
             </a:avLst>
           </a:prstGeom>
           <a:solidFill>
-            <a:srgbClr val="DCFCE7"/>
-          </a:solidFill>
-          <a:ln w="12700">
-            <a:solidFill>
-              <a:srgbClr val="16A34A"/>
+            <a:srgbClr val="FEE2E2"/>
+          </a:solidFill>
+          <a:ln w="12700">
+            <a:solidFill>
+              <a:srgbClr val="DC2626"/>
             </a:solidFill>
             <a:prstDash val="solid"/>
           </a:ln>
@@ -37982,13 +38819,13 @@
             <a:r>
               <a:rPr lang="en-US" sz="1100" b="1" dirty="0">
                 <a:solidFill>
-                  <a:srgbClr val="16A34A"/>
+                  <a:srgbClr val="DC2626"/>
                 </a:solidFill>
                 <a:latin typeface="Trebuchet MS" pitchFamily="34" charset="0"/>
                 <a:ea typeface="Trebuchet MS" pitchFamily="34" charset="-122"/>
                 <a:cs typeface="Trebuchet MS" pitchFamily="34" charset="-120"/>
               </a:rPr>
-              <a:t>TRUE</a:t>
+              <a:t>FALSE</a:t>
             </a:r>
             <a:endParaRPr lang="en-US" sz="1100" dirty="0"/>
           </a:p>
@@ -38061,7 +38898,7 @@
                 <a:ea typeface="Calibri" pitchFamily="34" charset="-122"/>
                 <a:cs typeface="Calibri" pitchFamily="34" charset="-120"/>
               </a:rPr>
-              <a:t>2.  A biologist studies rocks and how the Earth was formed.</a:t>
+              <a:t>2.  The morpheme 'logy' comes from Greek and means the study of something.</a:t>
             </a:r>
             <a:endParaRPr lang="en-US" sz="1300" dirty="0"/>
           </a:p>
@@ -38084,11 +38921,11 @@
             </a:avLst>
           </a:prstGeom>
           <a:solidFill>
-            <a:srgbClr val="FEE2E2"/>
-          </a:solidFill>
-          <a:ln w="12700">
-            <a:solidFill>
-              <a:srgbClr val="DC2626"/>
+            <a:srgbClr val="DCFCE7"/>
+          </a:solidFill>
+          <a:ln w="12700">
+            <a:solidFill>
+              <a:srgbClr val="16A34A"/>
             </a:solidFill>
             <a:prstDash val="solid"/>
           </a:ln>
@@ -38121,13 +38958,13 @@
             <a:r>
               <a:rPr lang="en-US" sz="1100" b="1" dirty="0">
                 <a:solidFill>
-                  <a:srgbClr val="DC2626"/>
+                  <a:srgbClr val="16A34A"/>
                 </a:solidFill>
                 <a:latin typeface="Trebuchet MS" pitchFamily="34" charset="0"/>
                 <a:ea typeface="Trebuchet MS" pitchFamily="34" charset="-122"/>
                 <a:cs typeface="Trebuchet MS" pitchFamily="34" charset="-120"/>
               </a:rPr>
-              <a:t>FALSE</a:t>
+              <a:t>TRUE</a:t>
             </a:r>
             <a:endParaRPr lang="en-US" sz="1100" dirty="0"/>
           </a:p>
@@ -38200,7 +39037,7 @@
                 <a:ea typeface="Calibri" pitchFamily="34" charset="-122"/>
                 <a:cs typeface="Calibri" pitchFamily="34" charset="-120"/>
               </a:rPr>
-              <a:t>3.  The morpheme 'logy' appears in the word 'meteorology'.</a:t>
+              <a:t>3.  A person who studies zoology is learning about animals.</a:t>
             </a:r>
             <a:endParaRPr lang="en-US" sz="1300" dirty="0"/>
           </a:p>
@@ -38339,7 +39176,7 @@
                 <a:ea typeface="Calibri" pitchFamily="34" charset="-122"/>
                 <a:cs typeface="Calibri" pitchFamily="34" charset="-120"/>
               </a:rPr>
-              <a:t>4.  Zoology is the study of animals.</a:t>
+              <a:t>4.  The morpheme 'logy' can be found in the word 'meteorology'.</a:t>
             </a:r>
             <a:endParaRPr lang="en-US" sz="1300" dirty="0"/>
           </a:p>
@@ -38478,7 +39315,7 @@
                 <a:ea typeface="Calibri" pitchFamily="34" charset="-122"/>
                 <a:cs typeface="Calibri" pitchFamily="34" charset="-120"/>
               </a:rPr>
-              <a:t>5.  The suffix '-logy' means 'fear of' something.</a:t>
+              <a:t>5.  The word 'biology' means the study of rocks and minerals.</a:t>
             </a:r>
             <a:endParaRPr lang="en-US" sz="1300" dirty="0"/>
           </a:p>
@@ -39381,7 +40218,7 @@
                 <a:ea typeface="Trebuchet MS" pitchFamily="34" charset="-122"/>
                 <a:cs typeface="Trebuchet MS" pitchFamily="34" charset="-120"/>
               </a:rPr>
-              <a:t>archaeology</a:t>
+              <a:t>psychology</a:t>
             </a:r>
             <a:endParaRPr lang="en-US" sz="1300" dirty="0"/>
           </a:p>
@@ -39447,7 +40284,7 @@
                 <a:ea typeface="Trebuchet MS" pitchFamily="34" charset="-122"/>
                 <a:cs typeface="Trebuchet MS" pitchFamily="34" charset="-120"/>
               </a:rPr>
-              <a:t>meteorology</a:t>
+              <a:t>ecology</a:t>
             </a:r>
             <a:endParaRPr lang="en-US" sz="1300" dirty="0"/>
           </a:p>
@@ -39513,7 +40350,7 @@
                 <a:ea typeface="Trebuchet MS" pitchFamily="34" charset="-122"/>
                 <a:cs typeface="Trebuchet MS" pitchFamily="34" charset="-120"/>
               </a:rPr>
-              <a:t>ecology</a:t>
+              <a:t>archaeology</a:t>
             </a:r>
             <a:endParaRPr lang="en-US" sz="1300" dirty="0"/>
           </a:p>
@@ -40604,7 +41441,7 @@
                 <a:ea typeface="Trebuchet MS" pitchFamily="34" charset="-122"/>
                 <a:cs typeface="Trebuchet MS" pitchFamily="34" charset="-120"/>
               </a:rPr>
-              <a:t>astro-</a:t>
+              <a:t>techno-</a:t>
             </a:r>
             <a:endParaRPr lang="en-US" sz="1300" dirty="0"/>
           </a:p>
@@ -40693,7 +41530,7 @@
                 <a:ea typeface="Trebuchet MS" pitchFamily="34" charset="-122"/>
                 <a:cs typeface="Trebuchet MS" pitchFamily="34" charset="-120"/>
               </a:rPr>
-              <a:t>-y</a:t>
+              <a:t>-ists</a:t>
             </a:r>
             <a:endParaRPr lang="en-US" sz="1300" dirty="0"/>
           </a:p>
@@ -40757,7 +41594,7 @@
                 <a:ea typeface="Trebuchet MS" pitchFamily="34" charset="-122"/>
                 <a:cs typeface="Trebuchet MS" pitchFamily="34" charset="-120"/>
               </a:rPr>
-              <a:t>techno-</a:t>
+              <a:t>chrono-</a:t>
             </a:r>
             <a:endParaRPr lang="en-US" sz="1300" dirty="0"/>
           </a:p>
@@ -41757,7 +42594,7 @@
                 <a:ea typeface="Calibri" pitchFamily="34" charset="-122"/>
                 <a:cs typeface="Calibri" pitchFamily="34" charset="-120"/>
               </a:rPr>
-              <a:t>The study of living things, including plants and animals.</a:t>
+              <a:t>The study of living things, including plants, animals, and tiny organisms.</a:t>
             </a:r>
             <a:endParaRPr lang="en-US" sz="1200" dirty="0"/>
           </a:p>
@@ -41896,7 +42733,7 @@
                 <a:ea typeface="Calibri" pitchFamily="34" charset="-122"/>
                 <a:cs typeface="Calibri" pitchFamily="34" charset="-120"/>
               </a:rPr>
-              <a:t>The study of how living things interact with each other and their environment.</a:t>
+              <a:t>The study of ancient people and civilisations by digging up and examining old objects.</a:t>
             </a:r>
             <a:endParaRPr lang="en-US" sz="1200" dirty="0"/>
           </a:p>
@@ -42035,7 +42872,7 @@
                 <a:ea typeface="Calibri" pitchFamily="34" charset="-122"/>
                 <a:cs typeface="Calibri" pitchFamily="34" charset="-120"/>
               </a:rPr>
-              <a:t>The study of animals and how they live.</a:t>
+              <a:t>The study of animals and how they live and behave.</a:t>
             </a:r>
             <a:endParaRPr lang="en-US" sz="1200" dirty="0"/>
           </a:p>
@@ -42174,7 +43011,7 @@
                 <a:ea typeface="Calibri" pitchFamily="34" charset="-122"/>
                 <a:cs typeface="Calibri" pitchFamily="34" charset="-120"/>
               </a:rPr>
-              <a:t>The study of ancient people and history by digging up old objects and buildings.</a:t>
+              <a:t>The study of how people think, feel, and behave.</a:t>
             </a:r>
             <a:endParaRPr lang="en-US" sz="1200" dirty="0"/>
           </a:p>
@@ -42247,7 +43084,7 @@
                 <a:ea typeface="Trebuchet MS" pitchFamily="34" charset="-122"/>
                 <a:cs typeface="Trebuchet MS" pitchFamily="34" charset="-120"/>
               </a:rPr>
-              <a:t>archaeology</a:t>
+              <a:t>psychology</a:t>
             </a:r>
             <a:endParaRPr lang="en-US" sz="1200" dirty="0"/>
           </a:p>
@@ -42313,7 +43150,7 @@
                 <a:ea typeface="Calibri" pitchFamily="34" charset="-122"/>
                 <a:cs typeface="Calibri" pitchFamily="34" charset="-120"/>
               </a:rPr>
-              <a:t>The use of scientific knowledge to make tools and machines that help people.</a:t>
+              <a:t>The study and use of tools, machines, and inventions to solve problems.</a:t>
             </a:r>
             <a:endParaRPr lang="en-US" sz="1200" dirty="0"/>
           </a:p>
@@ -42386,7 +43223,7 @@
                 <a:ea typeface="Trebuchet MS" pitchFamily="34" charset="-122"/>
                 <a:cs typeface="Trebuchet MS" pitchFamily="34" charset="-120"/>
               </a:rPr>
-              <a:t>meteorology</a:t>
+              <a:t>ecology</a:t>
             </a:r>
             <a:endParaRPr lang="en-US" sz="1200" dirty="0"/>
           </a:p>
@@ -42452,7 +43289,7 @@
                 <a:ea typeface="Calibri" pitchFamily="34" charset="-122"/>
                 <a:cs typeface="Calibri" pitchFamily="34" charset="-120"/>
               </a:rPr>
-              <a:t>The study of the weather and what causes rain, wind, and sunshine.</a:t>
+              <a:t>The study of how living things interact with each other and their environment.</a:t>
             </a:r>
             <a:endParaRPr lang="en-US" sz="1200" dirty="0"/>
           </a:p>
@@ -42525,7 +43362,7 @@
                 <a:ea typeface="Trebuchet MS" pitchFamily="34" charset="-122"/>
                 <a:cs typeface="Trebuchet MS" pitchFamily="34" charset="-120"/>
               </a:rPr>
-              <a:t>ecology</a:t>
+              <a:t>archaeology</a:t>
             </a:r>
             <a:endParaRPr lang="en-US" sz="1200" dirty="0"/>
           </a:p>
@@ -42591,7 +43428,7 @@
                 <a:ea typeface="Calibri" pitchFamily="34" charset="-122"/>
                 <a:cs typeface="Calibri" pitchFamily="34" charset="-120"/>
               </a:rPr>
-              <a:t>The study of rocks, soil, and how the Earth was formed.</a:t>
+              <a:t>The study of rocks, minerals, and how the Earth was formed.</a:t>
             </a:r>
             <a:endParaRPr lang="en-US" sz="1200" dirty="0"/>
           </a:p>
@@ -43086,7 +43923,7 @@
                 <a:ea typeface="Calibri" pitchFamily="34" charset="-122"/>
                 <a:cs typeface="Calibri" pitchFamily="34" charset="-120"/>
               </a:rPr>
-              <a:t>In our biology lesson, we looked at how plants use sunlight to make food.</a:t>
+              <a:t>In biology class, we learned how plants make their own food using sunlight.</a:t>
             </a:r>
             <a:endParaRPr lang="en-US" sz="1500" dirty="0"/>
           </a:p>
@@ -43250,7 +44087,7 @@
                 <a:ea typeface="Calibri" pitchFamily="34" charset="-122"/>
                 <a:cs typeface="Calibri" pitchFamily="34" charset="-120"/>
               </a:rPr>
-              <a:t>The meteorology report said there would be heavy rain across the coast this weekend.</a:t>
+              <a:t>The meteorology report warned that a big storm was heading towards the coast.</a:t>
             </a:r>
             <a:endParaRPr lang="en-US" sz="1500" dirty="0"/>
           </a:p>
@@ -43414,7 +44251,7 @@
                 <a:ea typeface="Calibri" pitchFamily="34" charset="-122"/>
                 <a:cs typeface="Calibri" pitchFamily="34" charset="-120"/>
               </a:rPr>
-              <a:t>Our teacher said that ecology is the study of how animals and plants live together in nature.</a:t>
+              <a:t>Our teacher said that ecology helps us understand why we need to protect forests and rivers.</a:t>
             </a:r>
             <a:endParaRPr lang="en-US" sz="1500" dirty="0"/>
           </a:p>

--- a/output/wordlabs-logy-3day.pptx
+++ b/output/wordlabs-logy-3day.pptx
@@ -16137,7 +16137,7 @@
                 <a:ea typeface="Trebuchet MS" pitchFamily="34" charset="-122"/>
                 <a:cs typeface="Trebuchet MS" pitchFamily="34" charset="-120"/>
               </a:rPr>
-              <a:t>o</a:t>
+              <a:t>l</a:t>
             </a:r>
             <a:endParaRPr lang="en-US" sz="900" dirty="0"/>
           </a:p>
@@ -16203,7 +16203,7 @@
                 <a:ea typeface="Trebuchet MS" pitchFamily="34" charset="-122"/>
                 <a:cs typeface="Trebuchet MS" pitchFamily="34" charset="-120"/>
               </a:rPr>
-              <a:t>l</a:t>
+              <a:t>o</a:t>
             </a:r>
             <a:endParaRPr lang="en-US" sz="900" dirty="0"/>
           </a:p>
@@ -16269,7 +16269,7 @@
                 <a:ea typeface="Trebuchet MS" pitchFamily="34" charset="-122"/>
                 <a:cs typeface="Trebuchet MS" pitchFamily="34" charset="-120"/>
               </a:rPr>
-              <a:t>o</a:t>
+              <a:t>g</a:t>
             </a:r>
             <a:endParaRPr lang="en-US" sz="900" dirty="0"/>
           </a:p>
@@ -16335,7 +16335,7 @@
                 <a:ea typeface="Trebuchet MS" pitchFamily="34" charset="-122"/>
                 <a:cs typeface="Trebuchet MS" pitchFamily="34" charset="-120"/>
               </a:rPr>
-              <a:t>gy</a:t>
+              <a:t>y</a:t>
             </a:r>
             <a:endParaRPr lang="en-US" sz="900" dirty="0"/>
           </a:p>
@@ -38898,7 +38898,7 @@
                 <a:ea typeface="Calibri" pitchFamily="34" charset="-122"/>
                 <a:cs typeface="Calibri" pitchFamily="34" charset="-120"/>
               </a:rPr>
-              <a:t>2.  The morpheme 'logy' comes from Greek and means the study of something.</a:t>
+              <a:t>2.  A person who studies zoology is learning about animals.</a:t>
             </a:r>
             <a:endParaRPr lang="en-US" sz="1300" dirty="0"/>
           </a:p>
@@ -39037,7 +39037,7 @@
                 <a:ea typeface="Calibri" pitchFamily="34" charset="-122"/>
                 <a:cs typeface="Calibri" pitchFamily="34" charset="-120"/>
               </a:rPr>
-              <a:t>3.  A person who studies zoology is learning about animals.</a:t>
+              <a:t>3.  The morpheme 'logy' can be found in the word 'meteorology'.</a:t>
             </a:r>
             <a:endParaRPr lang="en-US" sz="1300" dirty="0"/>
           </a:p>
@@ -39176,7 +39176,7 @@
                 <a:ea typeface="Calibri" pitchFamily="34" charset="-122"/>
                 <a:cs typeface="Calibri" pitchFamily="34" charset="-120"/>
               </a:rPr>
-              <a:t>4.  The morpheme 'logy' can be found in the word 'meteorology'.</a:t>
+              <a:t>4.  The morpheme 'logy' comes from Greek and means the study of something.</a:t>
             </a:r>
             <a:endParaRPr lang="en-US" sz="1300" dirty="0"/>
           </a:p>

--- a/output/wordlabs-logy-3day.pptx
+++ b/output/wordlabs-logy-3day.pptx
@@ -4240,7 +4240,7 @@
                 <a:ea typeface="Calibri" pitchFamily="34" charset="-122"/>
                 <a:cs typeface="Calibri" pitchFamily="34" charset="-120"/>
               </a:rPr>
-              <a:t>"study or science of"</a:t>
+              <a:t>"study of"</a:t>
             </a:r>
             <a:endParaRPr lang="en-US" sz="2200" dirty="0"/>
           </a:p>
@@ -4279,7 +4279,7 @@
                 <a:ea typeface="Calibri" pitchFamily="34" charset="-122"/>
                 <a:cs typeface="Calibri" pitchFamily="34" charset="-120"/>
               </a:rPr>
-              <a:t>Origin: Greek: logos</a:t>
+              <a:t>Origin: Greek root</a:t>
             </a:r>
             <a:endParaRPr lang="en-US" sz="1300" dirty="0"/>
           </a:p>
@@ -5288,7 +5288,7 @@
                 <a:ea typeface="Calibri" pitchFamily="34" charset="-122"/>
                 <a:cs typeface="Calibri" pitchFamily="34" charset="-120"/>
               </a:rPr>
-              <a:t>Word Labs  •  wordlabs.app  •  Root: 'logy' = study or science of</a:t>
+              <a:t>Word Labs  •  wordlabs.app  •  Root: 'logy' = study of</a:t>
             </a:r>
             <a:endParaRPr lang="en-US" sz="800" dirty="0"/>
           </a:p>
@@ -5622,7 +5622,7 @@
                 <a:ea typeface="Trebuchet MS" pitchFamily="34" charset="-122"/>
                 <a:cs typeface="Trebuchet MS" pitchFamily="34" charset="-120"/>
               </a:rPr>
-              <a:t>2</a:t>
+              <a:t>0</a:t>
             </a:r>
             <a:pPr algn="ctr" indent="0" marL="0">
               <a:buNone/>
@@ -5636,7 +5636,7 @@
                 <a:ea typeface="Trebuchet MS" pitchFamily="34" charset="-122"/>
                 <a:cs typeface="Trebuchet MS" pitchFamily="34" charset="-120"/>
               </a:rPr>
-              <a:t>  punctuation marks</a:t>
+              <a:t>  punctuation mark</a:t>
             </a:r>
             <a:endParaRPr lang="en-US" sz="2800" dirty="0"/>
           </a:p>
@@ -5928,7 +5928,7 @@
                 <a:ea typeface="Calibri" pitchFamily="34" charset="-122"/>
                 <a:cs typeface="Calibri" pitchFamily="34" charset="-120"/>
               </a:rPr>
-              <a:t>Word Labs  •  wordlabs.app  •  Root: 'logy' = study or science of</a:t>
+              <a:t>Word Labs  •  wordlabs.app  •  Root: 'logy' = study of</a:t>
             </a:r>
             <a:endParaRPr lang="en-US" sz="800" dirty="0"/>
           </a:p>
@@ -6040,7 +6040,7 @@
                 <a:ea typeface="Calibri" pitchFamily="34" charset="-122"/>
                 <a:cs typeface="Calibri" pitchFamily="34" charset="-120"/>
               </a:rPr>
-              <a:t>In </a:t>
+              <a:t>She wants to study </a:t>
             </a:r>
             <a:pPr algn="l" indent="0" marL="0">
               <a:buNone/>
@@ -6057,7 +6057,7 @@
                 <a:ea typeface="Calibri" pitchFamily="34" charset="-122"/>
                 <a:cs typeface="Calibri" pitchFamily="34" charset="-120"/>
               </a:rPr>
-              <a:t>geology</a:t>
+              <a:t>zoology</a:t>
             </a:r>
             <a:pPr algn="l" indent="0" marL="0">
               <a:buNone/>
@@ -6071,7 +6071,7 @@
                 <a:ea typeface="Calibri" pitchFamily="34" charset="-122"/>
                 <a:cs typeface="Calibri" pitchFamily="34" charset="-120"/>
               </a:rPr>
-              <a:t>, scientists study rocks, but in </a:t>
+              <a:t> at university because she loves learning about animals. He studied </a:t>
             </a:r>
             <a:pPr algn="l" indent="0" marL="0">
               <a:buNone/>
@@ -6088,7 +6088,7 @@
                 <a:ea typeface="Calibri" pitchFamily="34" charset="-122"/>
                 <a:cs typeface="Calibri" pitchFamily="34" charset="-120"/>
               </a:rPr>
-              <a:t>zoology</a:t>
+              <a:t>horology</a:t>
             </a:r>
             <a:pPr algn="l" indent="0" marL="0">
               <a:buNone/>
@@ -6102,7 +6102,7 @@
                 <a:ea typeface="Calibri" pitchFamily="34" charset="-122"/>
                 <a:cs typeface="Calibri" pitchFamily="34" charset="-120"/>
               </a:rPr>
-              <a:t>, they study animals.</a:t>
+              <a:t> so he could learn to repair antique clocks.</a:t>
             </a:r>
             <a:endParaRPr lang="en-US" sz="1800" dirty="0"/>
           </a:p>
@@ -6257,7 +6257,7 @@
                 <a:ea typeface="Trebuchet MS" pitchFamily="34" charset="-122"/>
                 <a:cs typeface="Trebuchet MS" pitchFamily="34" charset="-120"/>
               </a:rPr>
-              <a:t>geology</a:t>
+              <a:t>zoology</a:t>
             </a:r>
             <a:endParaRPr lang="en-US" sz="1400" dirty="0"/>
           </a:p>
@@ -6385,7 +6385,7 @@
                 <a:ea typeface="Trebuchet MS" pitchFamily="34" charset="-122"/>
                 <a:cs typeface="Trebuchet MS" pitchFamily="34" charset="-120"/>
               </a:rPr>
-              <a:t>zoology</a:t>
+              <a:t>horology</a:t>
             </a:r>
             <a:endParaRPr lang="en-US" sz="1400" dirty="0"/>
           </a:p>
@@ -6716,7 +6716,7 @@
                 <a:ea typeface="Calibri" pitchFamily="34" charset="-122"/>
                 <a:cs typeface="Calibri" pitchFamily="34" charset="-120"/>
               </a:rPr>
-              <a:t>Word Labs  •  wordlabs.app  •  Root: 'logy' = study or science of</a:t>
+              <a:t>Word Labs  •  wordlabs.app  •  Root: 'logy' = study of</a:t>
             </a:r>
             <a:endParaRPr lang="en-US" sz="800" dirty="0"/>
           </a:p>
@@ -6855,7 +6855,7 @@
                 <a:ea typeface="Trebuchet MS" pitchFamily="34" charset="-122"/>
                 <a:cs typeface="Trebuchet MS" pitchFamily="34" charset="-120"/>
               </a:rPr>
-              <a:t>geology</a:t>
+              <a:t>zoology</a:t>
             </a:r>
             <a:endParaRPr lang="en-US" sz="2800" dirty="0"/>
           </a:p>
@@ -7543,7 +7543,7 @@
                 <a:ea typeface="Calibri" pitchFamily="34" charset="-122"/>
                 <a:cs typeface="Calibri" pitchFamily="34" charset="-120"/>
               </a:rPr>
-              <a:t>Word Labs  •  wordlabs.app  •  Root: 'logy' = study or science of</a:t>
+              <a:t>Word Labs  •  wordlabs.app  •  Root: 'logy' = study of</a:t>
             </a:r>
             <a:endParaRPr lang="en-US" sz="800" dirty="0"/>
           </a:p>
@@ -7682,7 +7682,7 @@
                 <a:ea typeface="Trebuchet MS" pitchFamily="34" charset="-122"/>
                 <a:cs typeface="Trebuchet MS" pitchFamily="34" charset="-120"/>
               </a:rPr>
-              <a:t>geology</a:t>
+              <a:t>zoology</a:t>
             </a:r>
             <a:endParaRPr lang="en-US" sz="2800" dirty="0"/>
           </a:p>
@@ -7821,7 +7821,7 @@
                 <a:ea typeface="Trebuchet MS" pitchFamily="34" charset="-122"/>
                 <a:cs typeface="Trebuchet MS" pitchFamily="34" charset="-120"/>
               </a:rPr>
-              <a:t>geo</a:t>
+              <a:t>zoo</a:t>
             </a:r>
             <a:endParaRPr lang="en-US" sz="1300" dirty="0"/>
           </a:p>
@@ -7860,7 +7860,7 @@
                 <a:ea typeface="Calibri" pitchFamily="34" charset="-122"/>
                 <a:cs typeface="Calibri" pitchFamily="34" charset="-120"/>
               </a:rPr>
-              <a:t>earth</a:t>
+              <a:t>animal; living being</a:t>
             </a:r>
             <a:endParaRPr lang="en-US" sz="850" dirty="0"/>
           </a:p>
@@ -8528,7 +8528,7 @@
                 <a:ea typeface="Calibri" pitchFamily="34" charset="-122"/>
                 <a:cs typeface="Calibri" pitchFamily="34" charset="-120"/>
               </a:rPr>
-              <a:t>Word Labs  •  wordlabs.app  •  Root: 'logy' = study or science of</a:t>
+              <a:t>Word Labs  •  wordlabs.app  •  Root: 'logy' = study of</a:t>
             </a:r>
             <a:endParaRPr lang="en-US" sz="800" dirty="0"/>
           </a:p>
@@ -8667,7 +8667,7 @@
                 <a:ea typeface="Trebuchet MS" pitchFamily="34" charset="-122"/>
                 <a:cs typeface="Trebuchet MS" pitchFamily="34" charset="-120"/>
               </a:rPr>
-              <a:t>geology</a:t>
+              <a:t>zoology</a:t>
             </a:r>
             <a:endParaRPr lang="en-US" sz="2800" dirty="0"/>
           </a:p>
@@ -8806,7 +8806,7 @@
                 <a:ea typeface="Trebuchet MS" pitchFamily="34" charset="-122"/>
                 <a:cs typeface="Trebuchet MS" pitchFamily="34" charset="-120"/>
               </a:rPr>
-              <a:t>geo</a:t>
+              <a:t>zoo</a:t>
             </a:r>
             <a:endParaRPr lang="en-US" sz="1300" dirty="0"/>
           </a:p>
@@ -8845,7 +8845,7 @@
                 <a:ea typeface="Calibri" pitchFamily="34" charset="-122"/>
                 <a:cs typeface="Calibri" pitchFamily="34" charset="-120"/>
               </a:rPr>
-              <a:t>earth</a:t>
+              <a:t>animal; living being</a:t>
             </a:r>
             <a:endParaRPr lang="en-US" sz="850" dirty="0"/>
           </a:p>
@@ -9116,7 +9116,7 @@
                 <a:ea typeface="Trebuchet MS" pitchFamily="34" charset="-122"/>
                 <a:cs typeface="Trebuchet MS" pitchFamily="34" charset="-120"/>
               </a:rPr>
-              <a:t>ge</a:t>
+              <a:t>zo</a:t>
             </a:r>
             <a:endParaRPr lang="en-US" sz="1400" dirty="0"/>
           </a:p>
@@ -9855,7 +9855,7 @@
                 <a:ea typeface="Calibri" pitchFamily="34" charset="-122"/>
                 <a:cs typeface="Calibri" pitchFamily="34" charset="-120"/>
               </a:rPr>
-              <a:t>Word Labs  •  wordlabs.app  •  Root: 'logy' = study or science of</a:t>
+              <a:t>Word Labs  •  wordlabs.app  •  Root: 'logy' = study of</a:t>
             </a:r>
             <a:endParaRPr lang="en-US" sz="800" dirty="0"/>
           </a:p>
@@ -9994,7 +9994,7 @@
                 <a:ea typeface="Trebuchet MS" pitchFamily="34" charset="-122"/>
                 <a:cs typeface="Trebuchet MS" pitchFamily="34" charset="-120"/>
               </a:rPr>
-              <a:t>geology</a:t>
+              <a:t>zoology</a:t>
             </a:r>
             <a:endParaRPr lang="en-US" sz="2800" dirty="0"/>
           </a:p>
@@ -10133,7 +10133,7 @@
                 <a:ea typeface="Trebuchet MS" pitchFamily="34" charset="-122"/>
                 <a:cs typeface="Trebuchet MS" pitchFamily="34" charset="-120"/>
               </a:rPr>
-              <a:t>geo</a:t>
+              <a:t>zoo</a:t>
             </a:r>
             <a:endParaRPr lang="en-US" sz="1300" dirty="0"/>
           </a:p>
@@ -10172,7 +10172,7 @@
                 <a:ea typeface="Calibri" pitchFamily="34" charset="-122"/>
                 <a:cs typeface="Calibri" pitchFamily="34" charset="-120"/>
               </a:rPr>
-              <a:t>earth</a:t>
+              <a:t>animal; living being</a:t>
             </a:r>
             <a:endParaRPr lang="en-US" sz="850" dirty="0"/>
           </a:p>
@@ -10443,7 +10443,7 @@
                 <a:ea typeface="Trebuchet MS" pitchFamily="34" charset="-122"/>
                 <a:cs typeface="Trebuchet MS" pitchFamily="34" charset="-120"/>
               </a:rPr>
-              <a:t>ge</a:t>
+              <a:t>zo</a:t>
             </a:r>
             <a:endParaRPr lang="en-US" sz="1400" dirty="0"/>
           </a:p>
@@ -10865,7 +10865,7 @@
         </p:nvSpPr>
         <p:spPr>
           <a:xfrm>
-            <a:off x="2254649" y="4169664"/>
+            <a:off x="2124837" y="4169664"/>
             <a:ext cx="685800" cy="475488"/>
           </a:xfrm>
           <a:prstGeom prst="rect">
@@ -10892,7 +10892,7 @@
         </p:nvSpPr>
         <p:spPr>
           <a:xfrm>
-            <a:off x="2254649" y="4169664"/>
+            <a:off x="2124837" y="4169664"/>
             <a:ext cx="685800" cy="475488"/>
           </a:xfrm>
           <a:prstGeom prst="rect">
@@ -10917,7 +10917,7 @@
                 <a:ea typeface="Trebuchet MS" pitchFamily="34" charset="-122"/>
                 <a:cs typeface="Trebuchet MS" pitchFamily="34" charset="-120"/>
               </a:rPr>
-              <a:t>g</a:t>
+              <a:t>z</a:t>
             </a:r>
             <a:endParaRPr lang="en-US" sz="900" dirty="0"/>
           </a:p>
@@ -10931,7 +10931,7 @@
         </p:nvSpPr>
         <p:spPr>
           <a:xfrm>
-            <a:off x="3293146" y="4169664"/>
+            <a:off x="3033522" y="4169664"/>
             <a:ext cx="685800" cy="475488"/>
           </a:xfrm>
           <a:prstGeom prst="rect">
@@ -10958,7 +10958,7 @@
         </p:nvSpPr>
         <p:spPr>
           <a:xfrm>
-            <a:off x="3293146" y="4169664"/>
+            <a:off x="3033522" y="4169664"/>
             <a:ext cx="685800" cy="475488"/>
           </a:xfrm>
           <a:prstGeom prst="rect">
@@ -10983,7 +10983,7 @@
                 <a:ea typeface="Trebuchet MS" pitchFamily="34" charset="-122"/>
                 <a:cs typeface="Trebuchet MS" pitchFamily="34" charset="-120"/>
               </a:rPr>
-              <a:t>e</a:t>
+              <a:t>o</a:t>
             </a:r>
             <a:endParaRPr lang="en-US" sz="900" dirty="0"/>
           </a:p>
@@ -10997,7 +10997,7 @@
         </p:nvSpPr>
         <p:spPr>
           <a:xfrm>
-            <a:off x="4331643" y="4169664"/>
+            <a:off x="3942207" y="4169664"/>
             <a:ext cx="685800" cy="475488"/>
           </a:xfrm>
           <a:prstGeom prst="rect">
@@ -11024,7 +11024,7 @@
         </p:nvSpPr>
         <p:spPr>
           <a:xfrm>
-            <a:off x="4331643" y="4169664"/>
+            <a:off x="3942207" y="4169664"/>
             <a:ext cx="685800" cy="475488"/>
           </a:xfrm>
           <a:prstGeom prst="rect">
@@ -11063,7 +11063,7 @@
         </p:nvSpPr>
         <p:spPr>
           <a:xfrm>
-            <a:off x="5370141" y="4169664"/>
+            <a:off x="4850892" y="4169664"/>
             <a:ext cx="685800" cy="475488"/>
           </a:xfrm>
           <a:prstGeom prst="rect">
@@ -11090,7 +11090,7 @@
         </p:nvSpPr>
         <p:spPr>
           <a:xfrm>
-            <a:off x="5370141" y="4169664"/>
+            <a:off x="4850892" y="4169664"/>
             <a:ext cx="685800" cy="475488"/>
           </a:xfrm>
           <a:prstGeom prst="rect">
@@ -11129,7 +11129,7 @@
         </p:nvSpPr>
         <p:spPr>
           <a:xfrm>
-            <a:off x="6408638" y="4169664"/>
+            <a:off x="5759577" y="4169664"/>
             <a:ext cx="685800" cy="475488"/>
           </a:xfrm>
           <a:prstGeom prst="rect">
@@ -11156,7 +11156,7 @@
         </p:nvSpPr>
         <p:spPr>
           <a:xfrm>
-            <a:off x="6408638" y="4169664"/>
+            <a:off x="5759577" y="4169664"/>
             <a:ext cx="685800" cy="475488"/>
           </a:xfrm>
           <a:prstGeom prst="rect">
@@ -11195,7 +11195,7 @@
         </p:nvSpPr>
         <p:spPr>
           <a:xfrm>
-            <a:off x="7447135" y="4169664"/>
+            <a:off x="6668262" y="4169664"/>
             <a:ext cx="685800" cy="475488"/>
           </a:xfrm>
           <a:prstGeom prst="rect">
@@ -11222,7 +11222,7 @@
         </p:nvSpPr>
         <p:spPr>
           <a:xfrm>
-            <a:off x="7447135" y="4169664"/>
+            <a:off x="6668262" y="4169664"/>
             <a:ext cx="685800" cy="475488"/>
           </a:xfrm>
           <a:prstGeom prst="rect">
@@ -11247,7 +11247,73 @@
                 <a:ea typeface="Trebuchet MS" pitchFamily="34" charset="-122"/>
                 <a:cs typeface="Trebuchet MS" pitchFamily="34" charset="-120"/>
               </a:rPr>
-              <a:t>gy</a:t>
+              <a:t>g</a:t>
+            </a:r>
+            <a:endParaRPr lang="en-US" sz="900" dirty="0"/>
+          </a:p>
+        </p:txBody>
+      </p:sp>
+      <p:sp>
+        <p:nvSpPr>
+          <p:cNvPr id="51" name="Shape 49"/>
+          <p:cNvSpPr/>
+          <p:nvPr/>
+        </p:nvSpPr>
+        <p:spPr>
+          <a:xfrm>
+            <a:off x="7576947" y="4169664"/>
+            <a:ext cx="685800" cy="475488"/>
+          </a:xfrm>
+          <a:prstGeom prst="rect">
+            <a:avLst>
+              <a:gd name="adj" fmla="val 7692"/>
+            </a:avLst>
+          </a:prstGeom>
+          <a:solidFill>
+            <a:srgbClr val="FFFFFF"/>
+          </a:solidFill>
+          <a:ln w="12700">
+            <a:solidFill>
+              <a:srgbClr val="DB2777"/>
+            </a:solidFill>
+            <a:prstDash val="solid"/>
+          </a:ln>
+        </p:spPr>
+      </p:sp>
+      <p:sp>
+        <p:nvSpPr>
+          <p:cNvPr id="52" name="Text 50"/>
+          <p:cNvSpPr/>
+          <p:nvPr/>
+        </p:nvSpPr>
+        <p:spPr>
+          <a:xfrm>
+            <a:off x="7576947" y="4169664"/>
+            <a:ext cx="685800" cy="475488"/>
+          </a:xfrm>
+          <a:prstGeom prst="rect">
+            <a:avLst/>
+          </a:prstGeom>
+          <a:noFill/>
+          <a:ln/>
+        </p:spPr>
+        <p:txBody>
+          <a:bodyPr wrap="square" lIns="0" tIns="0" rIns="0" bIns="0" rtlCol="0" anchor="ctr"/>
+          <a:lstStyle/>
+          <a:p>
+            <a:pPr algn="ctr" indent="0" marL="0">
+              <a:buNone/>
+            </a:pPr>
+            <a:r>
+              <a:rPr lang="en-US" sz="900" b="1" dirty="0">
+                <a:solidFill>
+                  <a:srgbClr val="9D174D"/>
+                </a:solidFill>
+                <a:latin typeface="Trebuchet MS" pitchFamily="34" charset="0"/>
+                <a:ea typeface="Trebuchet MS" pitchFamily="34" charset="-122"/>
+                <a:cs typeface="Trebuchet MS" pitchFamily="34" charset="-120"/>
+              </a:rPr>
+              <a:t>y</a:t>
             </a:r>
             <a:endParaRPr lang="en-US" sz="900" dirty="0"/>
           </a:p>
@@ -11539,7 +11605,7 @@
                 <a:ea typeface="Calibri" pitchFamily="34" charset="-122"/>
                 <a:cs typeface="Calibri" pitchFamily="34" charset="-120"/>
               </a:rPr>
-              <a:t>Word Labs  •  wordlabs.app  •  Root: 'logy' = study or science of</a:t>
+              <a:t>Word Labs  •  wordlabs.app  •  Root: 'logy' = study of</a:t>
             </a:r>
             <a:endParaRPr lang="en-US" sz="800" dirty="0"/>
           </a:p>
@@ -11678,7 +11744,7 @@
                 <a:ea typeface="Trebuchet MS" pitchFamily="34" charset="-122"/>
                 <a:cs typeface="Trebuchet MS" pitchFamily="34" charset="-120"/>
               </a:rPr>
-              <a:t>zoology</a:t>
+              <a:t>horology</a:t>
             </a:r>
             <a:endParaRPr lang="en-US" sz="2800" dirty="0"/>
           </a:p>
@@ -12366,7 +12432,7 @@
                 <a:ea typeface="Calibri" pitchFamily="34" charset="-122"/>
                 <a:cs typeface="Calibri" pitchFamily="34" charset="-120"/>
               </a:rPr>
-              <a:t>Word Labs  •  wordlabs.app  •  Root: 'logy' = study or science of</a:t>
+              <a:t>Word Labs  •  wordlabs.app  •  Root: 'logy' = study of</a:t>
             </a:r>
             <a:endParaRPr lang="en-US" sz="800" dirty="0"/>
           </a:p>
@@ -12505,7 +12571,7 @@
                 <a:ea typeface="Trebuchet MS" pitchFamily="34" charset="-122"/>
                 <a:cs typeface="Trebuchet MS" pitchFamily="34" charset="-120"/>
               </a:rPr>
-              <a:t>zoology</a:t>
+              <a:t>horology</a:t>
             </a:r>
             <a:endParaRPr lang="en-US" sz="2800" dirty="0"/>
           </a:p>
@@ -12644,7 +12710,7 @@
                 <a:ea typeface="Trebuchet MS" pitchFamily="34" charset="-122"/>
                 <a:cs typeface="Trebuchet MS" pitchFamily="34" charset="-120"/>
               </a:rPr>
-              <a:t>zoo</a:t>
+              <a:t>horo</a:t>
             </a:r>
             <a:endParaRPr lang="en-US" sz="1300" dirty="0"/>
           </a:p>
@@ -12683,7 +12749,7 @@
                 <a:ea typeface="Calibri" pitchFamily="34" charset="-122"/>
                 <a:cs typeface="Calibri" pitchFamily="34" charset="-120"/>
               </a:rPr>
-              <a:t>animal, living being</a:t>
+              <a:t>time; hour</a:t>
             </a:r>
             <a:endParaRPr lang="en-US" sz="850" dirty="0"/>
           </a:p>
@@ -13351,7 +13417,7 @@
                 <a:ea typeface="Calibri" pitchFamily="34" charset="-122"/>
                 <a:cs typeface="Calibri" pitchFamily="34" charset="-120"/>
               </a:rPr>
-              <a:t>Word Labs  •  wordlabs.app  •  Root: 'logy' = study or science of</a:t>
+              <a:t>Word Labs  •  wordlabs.app  •  Root: 'logy' = study of</a:t>
             </a:r>
             <a:endParaRPr lang="en-US" sz="800" dirty="0"/>
           </a:p>
@@ -13490,7 +13556,7 @@
                 <a:ea typeface="Trebuchet MS" pitchFamily="34" charset="-122"/>
                 <a:cs typeface="Trebuchet MS" pitchFamily="34" charset="-120"/>
               </a:rPr>
-              <a:t>zoology</a:t>
+              <a:t>horology</a:t>
             </a:r>
             <a:endParaRPr lang="en-US" sz="2800" dirty="0"/>
           </a:p>
@@ -13629,7 +13695,7 @@
                 <a:ea typeface="Trebuchet MS" pitchFamily="34" charset="-122"/>
                 <a:cs typeface="Trebuchet MS" pitchFamily="34" charset="-120"/>
               </a:rPr>
-              <a:t>zoo</a:t>
+              <a:t>horo</a:t>
             </a:r>
             <a:endParaRPr lang="en-US" sz="1300" dirty="0"/>
           </a:p>
@@ -13668,7 +13734,7 @@
                 <a:ea typeface="Calibri" pitchFamily="34" charset="-122"/>
                 <a:cs typeface="Calibri" pitchFamily="34" charset="-120"/>
               </a:rPr>
-              <a:t>animal, living being</a:t>
+              <a:t>time; hour</a:t>
             </a:r>
             <a:endParaRPr lang="en-US" sz="850" dirty="0"/>
           </a:p>
@@ -13939,7 +14005,7 @@
                 <a:ea typeface="Trebuchet MS" pitchFamily="34" charset="-122"/>
                 <a:cs typeface="Trebuchet MS" pitchFamily="34" charset="-120"/>
               </a:rPr>
-              <a:t>zo</a:t>
+              <a:t>ho</a:t>
             </a:r>
             <a:endParaRPr lang="en-US" sz="1400" dirty="0"/>
           </a:p>
@@ -14044,7 +14110,7 @@
                 <a:ea typeface="Trebuchet MS" pitchFamily="34" charset="-122"/>
                 <a:cs typeface="Trebuchet MS" pitchFamily="34" charset="-120"/>
               </a:rPr>
-              <a:t>ol</a:t>
+              <a:t>rol</a:t>
             </a:r>
             <a:endParaRPr lang="en-US" sz="1400" dirty="0"/>
           </a:p>
@@ -14587,7 +14653,7 @@
                 <a:ea typeface="Calibri" pitchFamily="34" charset="-122"/>
                 <a:cs typeface="Calibri" pitchFamily="34" charset="-120"/>
               </a:rPr>
-              <a:t>Root 'logy' — study or science of</a:t>
+              <a:t>Root 'logy' — study of</a:t>
             </a:r>
             <a:endParaRPr lang="en-US" sz="1600" dirty="0"/>
           </a:p>
@@ -14943,7 +15009,7 @@
                 <a:ea typeface="Calibri" pitchFamily="34" charset="-122"/>
                 <a:cs typeface="Calibri" pitchFamily="34" charset="-120"/>
               </a:rPr>
-              <a:t>Word Labs  •  wordlabs.app  •  Root: 'logy' = study or science of</a:t>
+              <a:t>Word Labs  •  wordlabs.app  •  Root: 'logy' = study of</a:t>
             </a:r>
             <a:endParaRPr lang="en-US" sz="800" dirty="0"/>
           </a:p>
@@ -15082,7 +15148,7 @@
                 <a:ea typeface="Trebuchet MS" pitchFamily="34" charset="-122"/>
                 <a:cs typeface="Trebuchet MS" pitchFamily="34" charset="-120"/>
               </a:rPr>
-              <a:t>zoology</a:t>
+              <a:t>horology</a:t>
             </a:r>
             <a:endParaRPr lang="en-US" sz="2800" dirty="0"/>
           </a:p>
@@ -15221,7 +15287,7 @@
                 <a:ea typeface="Trebuchet MS" pitchFamily="34" charset="-122"/>
                 <a:cs typeface="Trebuchet MS" pitchFamily="34" charset="-120"/>
               </a:rPr>
-              <a:t>zoo</a:t>
+              <a:t>horo</a:t>
             </a:r>
             <a:endParaRPr lang="en-US" sz="1300" dirty="0"/>
           </a:p>
@@ -15260,7 +15326,7 @@
                 <a:ea typeface="Calibri" pitchFamily="34" charset="-122"/>
                 <a:cs typeface="Calibri" pitchFamily="34" charset="-120"/>
               </a:rPr>
-              <a:t>animal, living being</a:t>
+              <a:t>time; hour</a:t>
             </a:r>
             <a:endParaRPr lang="en-US" sz="850" dirty="0"/>
           </a:p>
@@ -15531,7 +15597,7 @@
                 <a:ea typeface="Trebuchet MS" pitchFamily="34" charset="-122"/>
                 <a:cs typeface="Trebuchet MS" pitchFamily="34" charset="-120"/>
               </a:rPr>
-              <a:t>zo</a:t>
+              <a:t>ho</a:t>
             </a:r>
             <a:endParaRPr lang="en-US" sz="1400" dirty="0"/>
           </a:p>
@@ -15636,7 +15702,7 @@
                 <a:ea typeface="Trebuchet MS" pitchFamily="34" charset="-122"/>
                 <a:cs typeface="Trebuchet MS" pitchFamily="34" charset="-120"/>
               </a:rPr>
-              <a:t>ol</a:t>
+              <a:t>rol</a:t>
             </a:r>
             <a:endParaRPr lang="en-US" sz="1400" dirty="0"/>
           </a:p>
@@ -15953,7 +16019,7 @@
         </p:nvSpPr>
         <p:spPr>
           <a:xfrm>
-            <a:off x="2254649" y="4169664"/>
+            <a:off x="2124837" y="4169664"/>
             <a:ext cx="685800" cy="475488"/>
           </a:xfrm>
           <a:prstGeom prst="rect">
@@ -15980,7 +16046,7 @@
         </p:nvSpPr>
         <p:spPr>
           <a:xfrm>
-            <a:off x="2254649" y="4169664"/>
+            <a:off x="2124837" y="4169664"/>
             <a:ext cx="685800" cy="475488"/>
           </a:xfrm>
           <a:prstGeom prst="rect">
@@ -16005,7 +16071,7 @@
                 <a:ea typeface="Trebuchet MS" pitchFamily="34" charset="-122"/>
                 <a:cs typeface="Trebuchet MS" pitchFamily="34" charset="-120"/>
               </a:rPr>
-              <a:t>z</a:t>
+              <a:t>h</a:t>
             </a:r>
             <a:endParaRPr lang="en-US" sz="900" dirty="0"/>
           </a:p>
@@ -16019,7 +16085,7 @@
         </p:nvSpPr>
         <p:spPr>
           <a:xfrm>
-            <a:off x="3293146" y="4169664"/>
+            <a:off x="3033522" y="4169664"/>
             <a:ext cx="685800" cy="475488"/>
           </a:xfrm>
           <a:prstGeom prst="rect">
@@ -16046,7 +16112,7 @@
         </p:nvSpPr>
         <p:spPr>
           <a:xfrm>
-            <a:off x="3293146" y="4169664"/>
+            <a:off x="3033522" y="4169664"/>
             <a:ext cx="685800" cy="475488"/>
           </a:xfrm>
           <a:prstGeom prst="rect">
@@ -16071,7 +16137,7 @@
                 <a:ea typeface="Trebuchet MS" pitchFamily="34" charset="-122"/>
                 <a:cs typeface="Trebuchet MS" pitchFamily="34" charset="-120"/>
               </a:rPr>
-              <a:t>oo</a:t>
+              <a:t>o</a:t>
             </a:r>
             <a:endParaRPr lang="en-US" sz="900" dirty="0"/>
           </a:p>
@@ -16085,7 +16151,7 @@
         </p:nvSpPr>
         <p:spPr>
           <a:xfrm>
-            <a:off x="4331643" y="4169664"/>
+            <a:off x="3942207" y="4169664"/>
             <a:ext cx="685800" cy="475488"/>
           </a:xfrm>
           <a:prstGeom prst="rect">
@@ -16112,7 +16178,7 @@
         </p:nvSpPr>
         <p:spPr>
           <a:xfrm>
-            <a:off x="4331643" y="4169664"/>
+            <a:off x="3942207" y="4169664"/>
             <a:ext cx="685800" cy="475488"/>
           </a:xfrm>
           <a:prstGeom prst="rect">
@@ -16137,7 +16203,7 @@
                 <a:ea typeface="Trebuchet MS" pitchFamily="34" charset="-122"/>
                 <a:cs typeface="Trebuchet MS" pitchFamily="34" charset="-120"/>
               </a:rPr>
-              <a:t>l</a:t>
+              <a:t>r</a:t>
             </a:r>
             <a:endParaRPr lang="en-US" sz="900" dirty="0"/>
           </a:p>
@@ -16151,7 +16217,7 @@
         </p:nvSpPr>
         <p:spPr>
           <a:xfrm>
-            <a:off x="5370141" y="4169664"/>
+            <a:off x="4850892" y="4169664"/>
             <a:ext cx="685800" cy="475488"/>
           </a:xfrm>
           <a:prstGeom prst="rect">
@@ -16178,7 +16244,7 @@
         </p:nvSpPr>
         <p:spPr>
           <a:xfrm>
-            <a:off x="5370141" y="4169664"/>
+            <a:off x="4850892" y="4169664"/>
             <a:ext cx="685800" cy="475488"/>
           </a:xfrm>
           <a:prstGeom prst="rect">
@@ -16217,7 +16283,7 @@
         </p:nvSpPr>
         <p:spPr>
           <a:xfrm>
-            <a:off x="6408638" y="4169664"/>
+            <a:off x="5759577" y="4169664"/>
             <a:ext cx="685800" cy="475488"/>
           </a:xfrm>
           <a:prstGeom prst="rect">
@@ -16244,7 +16310,7 @@
         </p:nvSpPr>
         <p:spPr>
           <a:xfrm>
-            <a:off x="6408638" y="4169664"/>
+            <a:off x="5759577" y="4169664"/>
             <a:ext cx="685800" cy="475488"/>
           </a:xfrm>
           <a:prstGeom prst="rect">
@@ -16269,7 +16335,7 @@
                 <a:ea typeface="Trebuchet MS" pitchFamily="34" charset="-122"/>
                 <a:cs typeface="Trebuchet MS" pitchFamily="34" charset="-120"/>
               </a:rPr>
-              <a:t>g</a:t>
+              <a:t>l</a:t>
             </a:r>
             <a:endParaRPr lang="en-US" sz="900" dirty="0"/>
           </a:p>
@@ -16283,7 +16349,7 @@
         </p:nvSpPr>
         <p:spPr>
           <a:xfrm>
-            <a:off x="7447135" y="4169664"/>
+            <a:off x="6668262" y="4169664"/>
             <a:ext cx="685800" cy="475488"/>
           </a:xfrm>
           <a:prstGeom prst="rect">
@@ -16310,7 +16376,7 @@
         </p:nvSpPr>
         <p:spPr>
           <a:xfrm>
-            <a:off x="7447135" y="4169664"/>
+            <a:off x="6668262" y="4169664"/>
             <a:ext cx="685800" cy="475488"/>
           </a:xfrm>
           <a:prstGeom prst="rect">
@@ -16335,7 +16401,73 @@
                 <a:ea typeface="Trebuchet MS" pitchFamily="34" charset="-122"/>
                 <a:cs typeface="Trebuchet MS" pitchFamily="34" charset="-120"/>
               </a:rPr>
-              <a:t>y</a:t>
+              <a:t>o</a:t>
+            </a:r>
+            <a:endParaRPr lang="en-US" sz="900" dirty="0"/>
+          </a:p>
+        </p:txBody>
+      </p:sp>
+      <p:sp>
+        <p:nvSpPr>
+          <p:cNvPr id="51" name="Shape 49"/>
+          <p:cNvSpPr/>
+          <p:nvPr/>
+        </p:nvSpPr>
+        <p:spPr>
+          <a:xfrm>
+            <a:off x="7576947" y="4169664"/>
+            <a:ext cx="685800" cy="475488"/>
+          </a:xfrm>
+          <a:prstGeom prst="rect">
+            <a:avLst>
+              <a:gd name="adj" fmla="val 7692"/>
+            </a:avLst>
+          </a:prstGeom>
+          <a:solidFill>
+            <a:srgbClr val="FFFFFF"/>
+          </a:solidFill>
+          <a:ln w="12700">
+            <a:solidFill>
+              <a:srgbClr val="DB2777"/>
+            </a:solidFill>
+            <a:prstDash val="solid"/>
+          </a:ln>
+        </p:spPr>
+      </p:sp>
+      <p:sp>
+        <p:nvSpPr>
+          <p:cNvPr id="52" name="Text 50"/>
+          <p:cNvSpPr/>
+          <p:nvPr/>
+        </p:nvSpPr>
+        <p:spPr>
+          <a:xfrm>
+            <a:off x="7576947" y="4169664"/>
+            <a:ext cx="685800" cy="475488"/>
+          </a:xfrm>
+          <a:prstGeom prst="rect">
+            <a:avLst/>
+          </a:prstGeom>
+          <a:noFill/>
+          <a:ln/>
+        </p:spPr>
+        <p:txBody>
+          <a:bodyPr wrap="square" lIns="0" tIns="0" rIns="0" bIns="0" rtlCol="0" anchor="ctr"/>
+          <a:lstStyle/>
+          <a:p>
+            <a:pPr algn="ctr" indent="0" marL="0">
+              <a:buNone/>
+            </a:pPr>
+            <a:r>
+              <a:rPr lang="en-US" sz="900" b="1" dirty="0">
+                <a:solidFill>
+                  <a:srgbClr val="9D174D"/>
+                </a:solidFill>
+                <a:latin typeface="Trebuchet MS" pitchFamily="34" charset="0"/>
+                <a:ea typeface="Trebuchet MS" pitchFamily="34" charset="-122"/>
+                <a:cs typeface="Trebuchet MS" pitchFamily="34" charset="-120"/>
+              </a:rPr>
+              <a:t>gy</a:t>
             </a:r>
             <a:endParaRPr lang="en-US" sz="900" dirty="0"/>
           </a:p>
@@ -16909,7 +17041,7 @@
                 <a:ea typeface="Calibri" pitchFamily="34" charset="-122"/>
                 <a:cs typeface="Calibri" pitchFamily="34" charset="-120"/>
               </a:rPr>
-              <a:t>Word Labs  •  wordlabs.app  •  Root: 'logy' = study or science of</a:t>
+              <a:t>Word Labs  •  wordlabs.app  •  Root: 'logy' = study of</a:t>
             </a:r>
             <a:endParaRPr lang="en-US" sz="800" dirty="0"/>
           </a:p>
@@ -17243,7 +17375,7 @@
                 <a:ea typeface="Trebuchet MS" pitchFamily="34" charset="-122"/>
                 <a:cs typeface="Trebuchet MS" pitchFamily="34" charset="-120"/>
               </a:rPr>
-              <a:t>2</a:t>
+              <a:t>1</a:t>
             </a:r>
             <a:pPr algn="ctr" indent="0" marL="0">
               <a:buNone/>
@@ -17257,7 +17389,7 @@
                 <a:ea typeface="Trebuchet MS" pitchFamily="34" charset="-122"/>
                 <a:cs typeface="Trebuchet MS" pitchFamily="34" charset="-120"/>
               </a:rPr>
-              <a:t>  punctuation marks</a:t>
+              <a:t>  punctuation mark</a:t>
             </a:r>
             <a:endParaRPr lang="en-US" sz="2800" dirty="0"/>
           </a:p>
@@ -17549,7 +17681,7 @@
                 <a:ea typeface="Calibri" pitchFamily="34" charset="-122"/>
                 <a:cs typeface="Calibri" pitchFamily="34" charset="-120"/>
               </a:rPr>
-              <a:t>Word Labs  •  wordlabs.app  •  Root: 'logy' = study or science of</a:t>
+              <a:t>Word Labs  •  wordlabs.app  •  Root: 'logy' = study of</a:t>
             </a:r>
             <a:endParaRPr lang="en-US" sz="800" dirty="0"/>
           </a:p>
@@ -17661,7 +17793,7 @@
                 <a:ea typeface="Calibri" pitchFamily="34" charset="-122"/>
                 <a:cs typeface="Calibri" pitchFamily="34" charset="-120"/>
               </a:rPr>
-              <a:t>She studied </a:t>
+              <a:t>Some people read their horoscope because they believe in </a:t>
             </a:r>
             <a:pPr algn="l" indent="0" marL="0">
               <a:buNone/>
@@ -17678,7 +17810,7 @@
                 <a:ea typeface="Calibri" pitchFamily="34" charset="-122"/>
                 <a:cs typeface="Calibri" pitchFamily="34" charset="-120"/>
               </a:rPr>
-              <a:t>biology</a:t>
+              <a:t>astrology</a:t>
             </a:r>
             <a:pPr algn="l" indent="0" marL="0">
               <a:buNone/>
@@ -17692,7 +17824,7 @@
                 <a:ea typeface="Calibri" pitchFamily="34" charset="-122"/>
                 <a:cs typeface="Calibri" pitchFamily="34" charset="-120"/>
               </a:rPr>
-              <a:t> and </a:t>
+              <a:t>. She is training to become a specialist in </a:t>
             </a:r>
             <a:pPr algn="l" indent="0" marL="0">
               <a:buNone/>
@@ -17709,7 +17841,7 @@
                 <a:ea typeface="Calibri" pitchFamily="34" charset="-122"/>
                 <a:cs typeface="Calibri" pitchFamily="34" charset="-120"/>
               </a:rPr>
-              <a:t>ecology</a:t>
+              <a:t>neurology</a:t>
             </a:r>
             <a:pPr algn="l" indent="0" marL="0">
               <a:buNone/>
@@ -17723,7 +17855,7 @@
                 <a:ea typeface="Calibri" pitchFamily="34" charset="-122"/>
                 <a:cs typeface="Calibri" pitchFamily="34" charset="-120"/>
               </a:rPr>
-              <a:t> at school, and her favourite topic in </a:t>
+              <a:t>. In </a:t>
             </a:r>
             <a:pPr algn="l" indent="0" marL="0">
               <a:buNone/>
@@ -17740,7 +17872,7 @@
                 <a:ea typeface="Calibri" pitchFamily="34" charset="-122"/>
                 <a:cs typeface="Calibri" pitchFamily="34" charset="-120"/>
               </a:rPr>
-              <a:t>meteorology</a:t>
+              <a:t>sociology</a:t>
             </a:r>
             <a:pPr algn="l" indent="0" marL="0">
               <a:buNone/>
@@ -17754,7 +17886,7 @@
                 <a:ea typeface="Calibri" pitchFamily="34" charset="-122"/>
                 <a:cs typeface="Calibri" pitchFamily="34" charset="-120"/>
               </a:rPr>
-              <a:t> was thunderstorms!</a:t>
+              <a:t> class, they discussed how communities are formed.</a:t>
             </a:r>
             <a:endParaRPr lang="en-US" sz="1800" dirty="0"/>
           </a:p>
@@ -17909,7 +18041,7 @@
                 <a:ea typeface="Trebuchet MS" pitchFamily="34" charset="-122"/>
                 <a:cs typeface="Trebuchet MS" pitchFamily="34" charset="-120"/>
               </a:rPr>
-              <a:t>biology</a:t>
+              <a:t>astrology</a:t>
             </a:r>
             <a:endParaRPr lang="en-US" sz="1400" dirty="0"/>
           </a:p>
@@ -18037,7 +18169,7 @@
                 <a:ea typeface="Trebuchet MS" pitchFamily="34" charset="-122"/>
                 <a:cs typeface="Trebuchet MS" pitchFamily="34" charset="-120"/>
               </a:rPr>
-              <a:t>ecology</a:t>
+              <a:t>neurology</a:t>
             </a:r>
             <a:endParaRPr lang="en-US" sz="1400" dirty="0"/>
           </a:p>
@@ -18165,7 +18297,7 @@
                 <a:ea typeface="Trebuchet MS" pitchFamily="34" charset="-122"/>
                 <a:cs typeface="Trebuchet MS" pitchFamily="34" charset="-120"/>
               </a:rPr>
-              <a:t>meteorology</a:t>
+              <a:t>sociology</a:t>
             </a:r>
             <a:endParaRPr lang="en-US" sz="1400" dirty="0"/>
           </a:p>
@@ -18496,7 +18628,7 @@
                 <a:ea typeface="Calibri" pitchFamily="34" charset="-122"/>
                 <a:cs typeface="Calibri" pitchFamily="34" charset="-120"/>
               </a:rPr>
-              <a:t>Word Labs  •  wordlabs.app  •  Root: 'logy' = study or science of</a:t>
+              <a:t>Word Labs  •  wordlabs.app  •  Root: 'logy' = study of</a:t>
             </a:r>
             <a:endParaRPr lang="en-US" sz="800" dirty="0"/>
           </a:p>
@@ -18635,7 +18767,7 @@
                 <a:ea typeface="Trebuchet MS" pitchFamily="34" charset="-122"/>
                 <a:cs typeface="Trebuchet MS" pitchFamily="34" charset="-120"/>
               </a:rPr>
-              <a:t>biology</a:t>
+              <a:t>astrology</a:t>
             </a:r>
             <a:endParaRPr lang="en-US" sz="2800" dirty="0"/>
           </a:p>
@@ -19323,7 +19455,7 @@
                 <a:ea typeface="Calibri" pitchFamily="34" charset="-122"/>
                 <a:cs typeface="Calibri" pitchFamily="34" charset="-120"/>
               </a:rPr>
-              <a:t>Word Labs  •  wordlabs.app  •  Root: 'logy' = study or science of</a:t>
+              <a:t>Word Labs  •  wordlabs.app  •  Root: 'logy' = study of</a:t>
             </a:r>
             <a:endParaRPr lang="en-US" sz="800" dirty="0"/>
           </a:p>
@@ -19462,7 +19594,7 @@
                 <a:ea typeface="Trebuchet MS" pitchFamily="34" charset="-122"/>
                 <a:cs typeface="Trebuchet MS" pitchFamily="34" charset="-120"/>
               </a:rPr>
-              <a:t>biology</a:t>
+              <a:t>astrology</a:t>
             </a:r>
             <a:endParaRPr lang="en-US" sz="2800" dirty="0"/>
           </a:p>
@@ -19601,7 +19733,7 @@
                 <a:ea typeface="Trebuchet MS" pitchFamily="34" charset="-122"/>
                 <a:cs typeface="Trebuchet MS" pitchFamily="34" charset="-120"/>
               </a:rPr>
-              <a:t>bio</a:t>
+              <a:t>astro</a:t>
             </a:r>
             <a:endParaRPr lang="en-US" sz="1300" dirty="0"/>
           </a:p>
@@ -19640,7 +19772,7 @@
                 <a:ea typeface="Calibri" pitchFamily="34" charset="-122"/>
                 <a:cs typeface="Calibri" pitchFamily="34" charset="-120"/>
               </a:rPr>
-              <a:t>life</a:t>
+              <a:t>star; outer space</a:t>
             </a:r>
             <a:endParaRPr lang="en-US" sz="850" dirty="0"/>
           </a:p>
@@ -20308,7 +20440,7 @@
                 <a:ea typeface="Calibri" pitchFamily="34" charset="-122"/>
                 <a:cs typeface="Calibri" pitchFamily="34" charset="-120"/>
               </a:rPr>
-              <a:t>Word Labs  •  wordlabs.app  •  Root: 'logy' = study or science of</a:t>
+              <a:t>Word Labs  •  wordlabs.app  •  Root: 'logy' = study of</a:t>
             </a:r>
             <a:endParaRPr lang="en-US" sz="800" dirty="0"/>
           </a:p>
@@ -20447,7 +20579,7 @@
                 <a:ea typeface="Trebuchet MS" pitchFamily="34" charset="-122"/>
                 <a:cs typeface="Trebuchet MS" pitchFamily="34" charset="-120"/>
               </a:rPr>
-              <a:t>biology</a:t>
+              <a:t>astrology</a:t>
             </a:r>
             <a:endParaRPr lang="en-US" sz="2800" dirty="0"/>
           </a:p>
@@ -20586,7 +20718,7 @@
                 <a:ea typeface="Trebuchet MS" pitchFamily="34" charset="-122"/>
                 <a:cs typeface="Trebuchet MS" pitchFamily="34" charset="-120"/>
               </a:rPr>
-              <a:t>bio</a:t>
+              <a:t>astro</a:t>
             </a:r>
             <a:endParaRPr lang="en-US" sz="1300" dirty="0"/>
           </a:p>
@@ -20625,7 +20757,7 @@
                 <a:ea typeface="Calibri" pitchFamily="34" charset="-122"/>
                 <a:cs typeface="Calibri" pitchFamily="34" charset="-120"/>
               </a:rPr>
-              <a:t>life</a:t>
+              <a:t>star; outer space</a:t>
             </a:r>
             <a:endParaRPr lang="en-US" sz="850" dirty="0"/>
           </a:p>
@@ -20896,7 +21028,7 @@
                 <a:ea typeface="Trebuchet MS" pitchFamily="34" charset="-122"/>
                 <a:cs typeface="Trebuchet MS" pitchFamily="34" charset="-120"/>
               </a:rPr>
-              <a:t>bi</a:t>
+              <a:t>as</a:t>
             </a:r>
             <a:endParaRPr lang="en-US" sz="1400" dirty="0"/>
           </a:p>
@@ -21001,7 +21133,7 @@
                 <a:ea typeface="Trebuchet MS" pitchFamily="34" charset="-122"/>
                 <a:cs typeface="Trebuchet MS" pitchFamily="34" charset="-120"/>
               </a:rPr>
-              <a:t>ol</a:t>
+              <a:t>trol</a:t>
             </a:r>
             <a:endParaRPr lang="en-US" sz="1400" dirty="0"/>
           </a:p>
@@ -21635,7 +21767,7 @@
                 <a:ea typeface="Calibri" pitchFamily="34" charset="-122"/>
                 <a:cs typeface="Calibri" pitchFamily="34" charset="-120"/>
               </a:rPr>
-              <a:t>Word Labs  •  wordlabs.app  •  Root: 'logy' = study or science of</a:t>
+              <a:t>Word Labs  •  wordlabs.app  •  Root: 'logy' = study of</a:t>
             </a:r>
             <a:endParaRPr lang="en-US" sz="800" dirty="0"/>
           </a:p>
@@ -21774,7 +21906,7 @@
                 <a:ea typeface="Trebuchet MS" pitchFamily="34" charset="-122"/>
                 <a:cs typeface="Trebuchet MS" pitchFamily="34" charset="-120"/>
               </a:rPr>
-              <a:t>biology</a:t>
+              <a:t>astrology</a:t>
             </a:r>
             <a:endParaRPr lang="en-US" sz="2800" dirty="0"/>
           </a:p>
@@ -21913,7 +22045,7 @@
                 <a:ea typeface="Trebuchet MS" pitchFamily="34" charset="-122"/>
                 <a:cs typeface="Trebuchet MS" pitchFamily="34" charset="-120"/>
               </a:rPr>
-              <a:t>bio</a:t>
+              <a:t>astro</a:t>
             </a:r>
             <a:endParaRPr lang="en-US" sz="1300" dirty="0"/>
           </a:p>
@@ -21952,7 +22084,7 @@
                 <a:ea typeface="Calibri" pitchFamily="34" charset="-122"/>
                 <a:cs typeface="Calibri" pitchFamily="34" charset="-120"/>
               </a:rPr>
-              <a:t>life</a:t>
+              <a:t>star; outer space</a:t>
             </a:r>
             <a:endParaRPr lang="en-US" sz="850" dirty="0"/>
           </a:p>
@@ -22223,7 +22355,7 @@
                 <a:ea typeface="Trebuchet MS" pitchFamily="34" charset="-122"/>
                 <a:cs typeface="Trebuchet MS" pitchFamily="34" charset="-120"/>
               </a:rPr>
-              <a:t>bi</a:t>
+              <a:t>as</a:t>
             </a:r>
             <a:endParaRPr lang="en-US" sz="1400" dirty="0"/>
           </a:p>
@@ -22328,7 +22460,7 @@
                 <a:ea typeface="Trebuchet MS" pitchFamily="34" charset="-122"/>
                 <a:cs typeface="Trebuchet MS" pitchFamily="34" charset="-120"/>
               </a:rPr>
-              <a:t>ol</a:t>
+              <a:t>trol</a:t>
             </a:r>
             <a:endParaRPr lang="en-US" sz="1400" dirty="0"/>
           </a:p>
@@ -22645,7 +22777,7 @@
         </p:nvSpPr>
         <p:spPr>
           <a:xfrm>
-            <a:off x="2254649" y="4169664"/>
+            <a:off x="2023872" y="4169664"/>
             <a:ext cx="685800" cy="475488"/>
           </a:xfrm>
           <a:prstGeom prst="rect">
@@ -22672,7 +22804,7 @@
         </p:nvSpPr>
         <p:spPr>
           <a:xfrm>
-            <a:off x="2254649" y="4169664"/>
+            <a:off x="2023872" y="4169664"/>
             <a:ext cx="685800" cy="475488"/>
           </a:xfrm>
           <a:prstGeom prst="rect">
@@ -22697,7 +22829,7 @@
                 <a:ea typeface="Trebuchet MS" pitchFamily="34" charset="-122"/>
                 <a:cs typeface="Trebuchet MS" pitchFamily="34" charset="-120"/>
               </a:rPr>
-              <a:t>b</a:t>
+              <a:t>a</a:t>
             </a:r>
             <a:endParaRPr lang="en-US" sz="900" dirty="0"/>
           </a:p>
@@ -22711,7 +22843,7 @@
         </p:nvSpPr>
         <p:spPr>
           <a:xfrm>
-            <a:off x="3293146" y="4169664"/>
+            <a:off x="2831592" y="4169664"/>
             <a:ext cx="685800" cy="475488"/>
           </a:xfrm>
           <a:prstGeom prst="rect">
@@ -22738,7 +22870,7 @@
         </p:nvSpPr>
         <p:spPr>
           <a:xfrm>
-            <a:off x="3293146" y="4169664"/>
+            <a:off x="2831592" y="4169664"/>
             <a:ext cx="685800" cy="475488"/>
           </a:xfrm>
           <a:prstGeom prst="rect">
@@ -22763,7 +22895,7 @@
                 <a:ea typeface="Trebuchet MS" pitchFamily="34" charset="-122"/>
                 <a:cs typeface="Trebuchet MS" pitchFamily="34" charset="-120"/>
               </a:rPr>
-              <a:t>i</a:t>
+              <a:t>s</a:t>
             </a:r>
             <a:endParaRPr lang="en-US" sz="900" dirty="0"/>
           </a:p>
@@ -22777,7 +22909,7 @@
         </p:nvSpPr>
         <p:spPr>
           <a:xfrm>
-            <a:off x="4331643" y="4169664"/>
+            <a:off x="3639312" y="4169664"/>
             <a:ext cx="685800" cy="475488"/>
           </a:xfrm>
           <a:prstGeom prst="rect">
@@ -22804,7 +22936,7 @@
         </p:nvSpPr>
         <p:spPr>
           <a:xfrm>
-            <a:off x="4331643" y="4169664"/>
+            <a:off x="3639312" y="4169664"/>
             <a:ext cx="685800" cy="475488"/>
           </a:xfrm>
           <a:prstGeom prst="rect">
@@ -22829,7 +22961,7 @@
                 <a:ea typeface="Trebuchet MS" pitchFamily="34" charset="-122"/>
                 <a:cs typeface="Trebuchet MS" pitchFamily="34" charset="-120"/>
               </a:rPr>
-              <a:t>o</a:t>
+              <a:t>t</a:t>
             </a:r>
             <a:endParaRPr lang="en-US" sz="900" dirty="0"/>
           </a:p>
@@ -22843,7 +22975,7 @@
         </p:nvSpPr>
         <p:spPr>
           <a:xfrm>
-            <a:off x="5370141" y="4169664"/>
+            <a:off x="4447032" y="4169664"/>
             <a:ext cx="685800" cy="475488"/>
           </a:xfrm>
           <a:prstGeom prst="rect">
@@ -22870,7 +23002,7 @@
         </p:nvSpPr>
         <p:spPr>
           <a:xfrm>
-            <a:off x="5370141" y="4169664"/>
+            <a:off x="4447032" y="4169664"/>
             <a:ext cx="685800" cy="475488"/>
           </a:xfrm>
           <a:prstGeom prst="rect">
@@ -22895,7 +23027,7 @@
                 <a:ea typeface="Trebuchet MS" pitchFamily="34" charset="-122"/>
                 <a:cs typeface="Trebuchet MS" pitchFamily="34" charset="-120"/>
               </a:rPr>
-              <a:t>l</a:t>
+              <a:t>r</a:t>
             </a:r>
             <a:endParaRPr lang="en-US" sz="900" dirty="0"/>
           </a:p>
@@ -22909,7 +23041,7 @@
         </p:nvSpPr>
         <p:spPr>
           <a:xfrm>
-            <a:off x="6408638" y="4169664"/>
+            <a:off x="5254752" y="4169664"/>
             <a:ext cx="685800" cy="475488"/>
           </a:xfrm>
           <a:prstGeom prst="rect">
@@ -22936,7 +23068,7 @@
         </p:nvSpPr>
         <p:spPr>
           <a:xfrm>
-            <a:off x="6408638" y="4169664"/>
+            <a:off x="5254752" y="4169664"/>
             <a:ext cx="685800" cy="475488"/>
           </a:xfrm>
           <a:prstGeom prst="rect">
@@ -22975,7 +23107,7 @@
         </p:nvSpPr>
         <p:spPr>
           <a:xfrm>
-            <a:off x="7447135" y="4169664"/>
+            <a:off x="6062472" y="4169664"/>
             <a:ext cx="685800" cy="475488"/>
           </a:xfrm>
           <a:prstGeom prst="rect">
@@ -23002,7 +23134,139 @@
         </p:nvSpPr>
         <p:spPr>
           <a:xfrm>
-            <a:off x="7447135" y="4169664"/>
+            <a:off x="6062472" y="4169664"/>
+            <a:ext cx="685800" cy="475488"/>
+          </a:xfrm>
+          <a:prstGeom prst="rect">
+            <a:avLst/>
+          </a:prstGeom>
+          <a:noFill/>
+          <a:ln/>
+        </p:spPr>
+        <p:txBody>
+          <a:bodyPr wrap="square" lIns="0" tIns="0" rIns="0" bIns="0" rtlCol="0" anchor="ctr"/>
+          <a:lstStyle/>
+          <a:p>
+            <a:pPr algn="ctr" indent="0" marL="0">
+              <a:buNone/>
+            </a:pPr>
+            <a:r>
+              <a:rPr lang="en-US" sz="900" b="1" dirty="0">
+                <a:solidFill>
+                  <a:srgbClr val="9D174D"/>
+                </a:solidFill>
+                <a:latin typeface="Trebuchet MS" pitchFamily="34" charset="0"/>
+                <a:ea typeface="Trebuchet MS" pitchFamily="34" charset="-122"/>
+                <a:cs typeface="Trebuchet MS" pitchFamily="34" charset="-120"/>
+              </a:rPr>
+              <a:t>l</a:t>
+            </a:r>
+            <a:endParaRPr lang="en-US" sz="900" dirty="0"/>
+          </a:p>
+        </p:txBody>
+      </p:sp>
+      <p:sp>
+        <p:nvSpPr>
+          <p:cNvPr id="51" name="Shape 49"/>
+          <p:cNvSpPr/>
+          <p:nvPr/>
+        </p:nvSpPr>
+        <p:spPr>
+          <a:xfrm>
+            <a:off x="6870192" y="4169664"/>
+            <a:ext cx="685800" cy="475488"/>
+          </a:xfrm>
+          <a:prstGeom prst="rect">
+            <a:avLst>
+              <a:gd name="adj" fmla="val 7692"/>
+            </a:avLst>
+          </a:prstGeom>
+          <a:solidFill>
+            <a:srgbClr val="FFFFFF"/>
+          </a:solidFill>
+          <a:ln w="12700">
+            <a:solidFill>
+              <a:srgbClr val="DB2777"/>
+            </a:solidFill>
+            <a:prstDash val="solid"/>
+          </a:ln>
+        </p:spPr>
+      </p:sp>
+      <p:sp>
+        <p:nvSpPr>
+          <p:cNvPr id="52" name="Text 50"/>
+          <p:cNvSpPr/>
+          <p:nvPr/>
+        </p:nvSpPr>
+        <p:spPr>
+          <a:xfrm>
+            <a:off x="6870192" y="4169664"/>
+            <a:ext cx="685800" cy="475488"/>
+          </a:xfrm>
+          <a:prstGeom prst="rect">
+            <a:avLst/>
+          </a:prstGeom>
+          <a:noFill/>
+          <a:ln/>
+        </p:spPr>
+        <p:txBody>
+          <a:bodyPr wrap="square" lIns="0" tIns="0" rIns="0" bIns="0" rtlCol="0" anchor="ctr"/>
+          <a:lstStyle/>
+          <a:p>
+            <a:pPr algn="ctr" indent="0" marL="0">
+              <a:buNone/>
+            </a:pPr>
+            <a:r>
+              <a:rPr lang="en-US" sz="900" b="1" dirty="0">
+                <a:solidFill>
+                  <a:srgbClr val="9D174D"/>
+                </a:solidFill>
+                <a:latin typeface="Trebuchet MS" pitchFamily="34" charset="0"/>
+                <a:ea typeface="Trebuchet MS" pitchFamily="34" charset="-122"/>
+                <a:cs typeface="Trebuchet MS" pitchFamily="34" charset="-120"/>
+              </a:rPr>
+              <a:t>o</a:t>
+            </a:r>
+            <a:endParaRPr lang="en-US" sz="900" dirty="0"/>
+          </a:p>
+        </p:txBody>
+      </p:sp>
+      <p:sp>
+        <p:nvSpPr>
+          <p:cNvPr id="53" name="Shape 51"/>
+          <p:cNvSpPr/>
+          <p:nvPr/>
+        </p:nvSpPr>
+        <p:spPr>
+          <a:xfrm>
+            <a:off x="7677912" y="4169664"/>
+            <a:ext cx="685800" cy="475488"/>
+          </a:xfrm>
+          <a:prstGeom prst="rect">
+            <a:avLst>
+              <a:gd name="adj" fmla="val 7692"/>
+            </a:avLst>
+          </a:prstGeom>
+          <a:solidFill>
+            <a:srgbClr val="FFFFFF"/>
+          </a:solidFill>
+          <a:ln w="12700">
+            <a:solidFill>
+              <a:srgbClr val="DB2777"/>
+            </a:solidFill>
+            <a:prstDash val="solid"/>
+          </a:ln>
+        </p:spPr>
+      </p:sp>
+      <p:sp>
+        <p:nvSpPr>
+          <p:cNvPr id="54" name="Text 52"/>
+          <p:cNvSpPr/>
+          <p:nvPr/>
+        </p:nvSpPr>
+        <p:spPr>
+          <a:xfrm>
+            <a:off x="7677912" y="4169664"/>
             <a:ext cx="685800" cy="475488"/>
           </a:xfrm>
           <a:prstGeom prst="rect">
@@ -23319,7 +23583,7 @@
                 <a:ea typeface="Calibri" pitchFamily="34" charset="-122"/>
                 <a:cs typeface="Calibri" pitchFamily="34" charset="-120"/>
               </a:rPr>
-              <a:t>Word Labs  •  wordlabs.app  •  Root: 'logy' = study or science of</a:t>
+              <a:t>Word Labs  •  wordlabs.app  •  Root: 'logy' = study of</a:t>
             </a:r>
             <a:endParaRPr lang="en-US" sz="800" dirty="0"/>
           </a:p>
@@ -23458,7 +23722,7 @@
                 <a:ea typeface="Trebuchet MS" pitchFamily="34" charset="-122"/>
                 <a:cs typeface="Trebuchet MS" pitchFamily="34" charset="-120"/>
               </a:rPr>
-              <a:t>ecology</a:t>
+              <a:t>neurology</a:t>
             </a:r>
             <a:endParaRPr lang="en-US" sz="2800" dirty="0"/>
           </a:p>
@@ -24146,7 +24410,7 @@
                 <a:ea typeface="Calibri" pitchFamily="34" charset="-122"/>
                 <a:cs typeface="Calibri" pitchFamily="34" charset="-120"/>
               </a:rPr>
-              <a:t>Word Labs  •  wordlabs.app  •  Root: 'logy' = study or science of</a:t>
+              <a:t>Word Labs  •  wordlabs.app  •  Root: 'logy' = study of</a:t>
             </a:r>
             <a:endParaRPr lang="en-US" sz="800" dirty="0"/>
           </a:p>
@@ -24285,7 +24549,7 @@
                 <a:ea typeface="Trebuchet MS" pitchFamily="34" charset="-122"/>
                 <a:cs typeface="Trebuchet MS" pitchFamily="34" charset="-120"/>
               </a:rPr>
-              <a:t>ecology</a:t>
+              <a:t>neurology</a:t>
             </a:r>
             <a:endParaRPr lang="en-US" sz="2800" dirty="0"/>
           </a:p>
@@ -24424,7 +24688,7 @@
                 <a:ea typeface="Trebuchet MS" pitchFamily="34" charset="-122"/>
                 <a:cs typeface="Trebuchet MS" pitchFamily="34" charset="-120"/>
               </a:rPr>
-              <a:t>eco</a:t>
+              <a:t>neuro</a:t>
             </a:r>
             <a:endParaRPr lang="en-US" sz="1300" dirty="0"/>
           </a:p>
@@ -24463,7 +24727,7 @@
                 <a:ea typeface="Calibri" pitchFamily="34" charset="-122"/>
                 <a:cs typeface="Calibri" pitchFamily="34" charset="-120"/>
               </a:rPr>
-              <a:t>home, environment</a:t>
+              <a:t>nerve; nervous system</a:t>
             </a:r>
             <a:endParaRPr lang="en-US" sz="850" dirty="0"/>
           </a:p>
@@ -25131,7 +25395,7 @@
                 <a:ea typeface="Calibri" pitchFamily="34" charset="-122"/>
                 <a:cs typeface="Calibri" pitchFamily="34" charset="-120"/>
               </a:rPr>
-              <a:t>Word Labs  •  wordlabs.app  •  Root: 'logy' = study or science of</a:t>
+              <a:t>Word Labs  •  wordlabs.app  •  Root: 'logy' = study of</a:t>
             </a:r>
             <a:endParaRPr lang="en-US" sz="800" dirty="0"/>
           </a:p>
@@ -25204,7 +25468,7 @@
                 <a:ea typeface="Trebuchet MS" pitchFamily="34" charset="-122"/>
                 <a:cs typeface="Trebuchet MS" pitchFamily="34" charset="-120"/>
               </a:rPr>
-              <a:t>We are learning that the root 'logy' means 'study or science of'.</a:t>
+              <a:t>We are learning that the root 'logy' means 'study of'.</a:t>
             </a:r>
             <a:endParaRPr lang="en-US" sz="2000" dirty="0"/>
           </a:p>
@@ -25850,7 +26114,7 @@
                 <a:ea typeface="Calibri" pitchFamily="34" charset="-122"/>
                 <a:cs typeface="Calibri" pitchFamily="34" charset="-120"/>
               </a:rPr>
-              <a:t>Word Labs  •  wordlabs.app  •  Root: 'logy' = study or science of</a:t>
+              <a:t>Word Labs  •  wordlabs.app  •  Root: 'logy' = study of</a:t>
             </a:r>
             <a:endParaRPr lang="en-US" sz="800" dirty="0"/>
           </a:p>
@@ -25989,7 +26253,7 @@
                 <a:ea typeface="Trebuchet MS" pitchFamily="34" charset="-122"/>
                 <a:cs typeface="Trebuchet MS" pitchFamily="34" charset="-120"/>
               </a:rPr>
-              <a:t>ecology</a:t>
+              <a:t>neurology</a:t>
             </a:r>
             <a:endParaRPr lang="en-US" sz="2800" dirty="0"/>
           </a:p>
@@ -26128,7 +26392,7 @@
                 <a:ea typeface="Trebuchet MS" pitchFamily="34" charset="-122"/>
                 <a:cs typeface="Trebuchet MS" pitchFamily="34" charset="-120"/>
               </a:rPr>
-              <a:t>eco</a:t>
+              <a:t>neuro</a:t>
             </a:r>
             <a:endParaRPr lang="en-US" sz="1300" dirty="0"/>
           </a:p>
@@ -26167,7 +26431,7 @@
                 <a:ea typeface="Calibri" pitchFamily="34" charset="-122"/>
                 <a:cs typeface="Calibri" pitchFamily="34" charset="-120"/>
               </a:rPr>
-              <a:t>home, environment</a:t>
+              <a:t>nerve; nervous system</a:t>
             </a:r>
             <a:endParaRPr lang="en-US" sz="850" dirty="0"/>
           </a:p>
@@ -26438,7 +26702,7 @@
                 <a:ea typeface="Trebuchet MS" pitchFamily="34" charset="-122"/>
                 <a:cs typeface="Trebuchet MS" pitchFamily="34" charset="-120"/>
               </a:rPr>
-              <a:t>e</a:t>
+              <a:t>neu</a:t>
             </a:r>
             <a:endParaRPr lang="en-US" sz="1400" dirty="0"/>
           </a:p>
@@ -26543,7 +26807,7 @@
                 <a:ea typeface="Trebuchet MS" pitchFamily="34" charset="-122"/>
                 <a:cs typeface="Trebuchet MS" pitchFamily="34" charset="-120"/>
               </a:rPr>
-              <a:t>col</a:t>
+              <a:t>rol</a:t>
             </a:r>
             <a:endParaRPr lang="en-US" sz="1400" dirty="0"/>
           </a:p>
@@ -27177,7 +27441,7 @@
                 <a:ea typeface="Calibri" pitchFamily="34" charset="-122"/>
                 <a:cs typeface="Calibri" pitchFamily="34" charset="-120"/>
               </a:rPr>
-              <a:t>Word Labs  •  wordlabs.app  •  Root: 'logy' = study or science of</a:t>
+              <a:t>Word Labs  •  wordlabs.app  •  Root: 'logy' = study of</a:t>
             </a:r>
             <a:endParaRPr lang="en-US" sz="800" dirty="0"/>
           </a:p>
@@ -27316,7 +27580,7 @@
                 <a:ea typeface="Trebuchet MS" pitchFamily="34" charset="-122"/>
                 <a:cs typeface="Trebuchet MS" pitchFamily="34" charset="-120"/>
               </a:rPr>
-              <a:t>ecology</a:t>
+              <a:t>neurology</a:t>
             </a:r>
             <a:endParaRPr lang="en-US" sz="2800" dirty="0"/>
           </a:p>
@@ -27455,7 +27719,7 @@
                 <a:ea typeface="Trebuchet MS" pitchFamily="34" charset="-122"/>
                 <a:cs typeface="Trebuchet MS" pitchFamily="34" charset="-120"/>
               </a:rPr>
-              <a:t>eco</a:t>
+              <a:t>neuro</a:t>
             </a:r>
             <a:endParaRPr lang="en-US" sz="1300" dirty="0"/>
           </a:p>
@@ -27494,7 +27758,7 @@
                 <a:ea typeface="Calibri" pitchFamily="34" charset="-122"/>
                 <a:cs typeface="Calibri" pitchFamily="34" charset="-120"/>
               </a:rPr>
-              <a:t>home, environment</a:t>
+              <a:t>nerve; nervous system</a:t>
             </a:r>
             <a:endParaRPr lang="en-US" sz="850" dirty="0"/>
           </a:p>
@@ -27765,7 +28029,7 @@
                 <a:ea typeface="Trebuchet MS" pitchFamily="34" charset="-122"/>
                 <a:cs typeface="Trebuchet MS" pitchFamily="34" charset="-120"/>
               </a:rPr>
-              <a:t>e</a:t>
+              <a:t>neu</a:t>
             </a:r>
             <a:endParaRPr lang="en-US" sz="1400" dirty="0"/>
           </a:p>
@@ -27870,7 +28134,7 @@
                 <a:ea typeface="Trebuchet MS" pitchFamily="34" charset="-122"/>
                 <a:cs typeface="Trebuchet MS" pitchFamily="34" charset="-120"/>
               </a:rPr>
-              <a:t>col</a:t>
+              <a:t>rol</a:t>
             </a:r>
             <a:endParaRPr lang="en-US" sz="1400" dirty="0"/>
           </a:p>
@@ -28161,11 +28425,11 @@
         <p:spPr>
           <a:xfrm>
             <a:off x="1874520" y="4096512"/>
-            <a:ext cx="6903720" cy="804672"/>
+            <a:ext cx="6903720" cy="658368"/>
           </a:xfrm>
           <a:prstGeom prst="rect">
             <a:avLst>
-              <a:gd name="adj" fmla="val 6818"/>
+              <a:gd name="adj" fmla="val 8333"/>
             </a:avLst>
           </a:prstGeom>
           <a:solidFill>
@@ -28187,12 +28451,12 @@
         </p:nvSpPr>
         <p:spPr>
           <a:xfrm>
-            <a:off x="2254649" y="4169664"/>
-            <a:ext cx="685800" cy="384048"/>
+            <a:off x="2023872" y="4169664"/>
+            <a:ext cx="685800" cy="475488"/>
           </a:xfrm>
           <a:prstGeom prst="rect">
             <a:avLst>
-              <a:gd name="adj" fmla="val 9524"/>
+              <a:gd name="adj" fmla="val 7692"/>
             </a:avLst>
           </a:prstGeom>
           <a:solidFill>
@@ -28214,8 +28478,8 @@
         </p:nvSpPr>
         <p:spPr>
           <a:xfrm>
-            <a:off x="2254649" y="4169664"/>
-            <a:ext cx="685800" cy="384048"/>
+            <a:off x="2023872" y="4169664"/>
+            <a:ext cx="685800" cy="475488"/>
           </a:xfrm>
           <a:prstGeom prst="rect">
             <a:avLst/>
@@ -28239,7 +28503,7 @@
                 <a:ea typeface="Trebuchet MS" pitchFamily="34" charset="-122"/>
                 <a:cs typeface="Trebuchet MS" pitchFamily="34" charset="-120"/>
               </a:rPr>
-              <a:t>e</a:t>
+              <a:t>n</a:t>
             </a:r>
             <a:endParaRPr lang="en-US" sz="900" dirty="0"/>
           </a:p>
@@ -28253,12 +28517,12 @@
         </p:nvSpPr>
         <p:spPr>
           <a:xfrm>
-            <a:off x="3293146" y="4169664"/>
-            <a:ext cx="685800" cy="384048"/>
+            <a:off x="2831592" y="4169664"/>
+            <a:ext cx="685800" cy="475488"/>
           </a:xfrm>
           <a:prstGeom prst="rect">
             <a:avLst>
-              <a:gd name="adj" fmla="val 9524"/>
+              <a:gd name="adj" fmla="val 7692"/>
             </a:avLst>
           </a:prstGeom>
           <a:solidFill>
@@ -28280,8 +28544,8 @@
         </p:nvSpPr>
         <p:spPr>
           <a:xfrm>
-            <a:off x="3293146" y="4169664"/>
-            <a:ext cx="685800" cy="384048"/>
+            <a:off x="2831592" y="4169664"/>
+            <a:ext cx="685800" cy="475488"/>
           </a:xfrm>
           <a:prstGeom prst="rect">
             <a:avLst/>
@@ -28305,7 +28569,7 @@
                 <a:ea typeface="Trebuchet MS" pitchFamily="34" charset="-122"/>
                 <a:cs typeface="Trebuchet MS" pitchFamily="34" charset="-120"/>
               </a:rPr>
-              <a:t>c</a:t>
+              <a:t>eu</a:t>
             </a:r>
             <a:endParaRPr lang="en-US" sz="900" dirty="0"/>
           </a:p>
@@ -28313,57 +28577,18 @@
       </p:sp>
       <p:sp>
         <p:nvSpPr>
-          <p:cNvPr id="43" name="Text 41"/>
-          <p:cNvSpPr/>
-          <p:nvPr/>
-        </p:nvSpPr>
-        <p:spPr>
-          <a:xfrm>
-            <a:off x="3293146" y="4572000"/>
-            <a:ext cx="685800" cy="219456"/>
-          </a:xfrm>
-          <a:prstGeom prst="rect">
-            <a:avLst/>
-          </a:prstGeom>
-          <a:noFill/>
-          <a:ln/>
-        </p:spPr>
-        <p:txBody>
-          <a:bodyPr wrap="square" lIns="0" tIns="0" rIns="0" bIns="0" rtlCol="0" anchor="t"/>
-          <a:lstStyle/>
-          <a:p>
-            <a:pPr algn="ctr" indent="0" marL="0">
-              <a:buNone/>
-            </a:pPr>
-            <a:r>
-              <a:rPr lang="en-US" sz="750" i="1" dirty="0">
-                <a:solidFill>
-                  <a:srgbClr val="94A3B8"/>
-                </a:solidFill>
-                <a:latin typeface="Calibri" pitchFamily="34" charset="0"/>
-                <a:ea typeface="Calibri" pitchFamily="34" charset="-122"/>
-                <a:cs typeface="Calibri" pitchFamily="34" charset="-120"/>
-              </a:rPr>
-              <a:t>/k/</a:t>
-            </a:r>
-            <a:endParaRPr lang="en-US" sz="750" dirty="0"/>
-          </a:p>
-        </p:txBody>
-      </p:sp>
-      <p:sp>
-        <p:nvSpPr>
-          <p:cNvPr id="44" name="Shape 42"/>
-          <p:cNvSpPr/>
-          <p:nvPr/>
-        </p:nvSpPr>
-        <p:spPr>
-          <a:xfrm>
-            <a:off x="4331643" y="4169664"/>
-            <a:ext cx="685800" cy="384048"/>
+          <p:cNvPr id="43" name="Shape 41"/>
+          <p:cNvSpPr/>
+          <p:nvPr/>
+        </p:nvSpPr>
+        <p:spPr>
+          <a:xfrm>
+            <a:off x="3639312" y="4169664"/>
+            <a:ext cx="685800" cy="475488"/>
           </a:xfrm>
           <a:prstGeom prst="rect">
             <a:avLst>
-              <a:gd name="adj" fmla="val 9524"/>
+              <a:gd name="adj" fmla="val 7692"/>
             </a:avLst>
           </a:prstGeom>
           <a:solidFill>
@@ -28379,14 +28604,14 @@
       </p:sp>
       <p:sp>
         <p:nvSpPr>
-          <p:cNvPr id="45" name="Text 43"/>
-          <p:cNvSpPr/>
-          <p:nvPr/>
-        </p:nvSpPr>
-        <p:spPr>
-          <a:xfrm>
-            <a:off x="4331643" y="4169664"/>
-            <a:ext cx="685800" cy="384048"/>
+          <p:cNvPr id="44" name="Text 42"/>
+          <p:cNvSpPr/>
+          <p:nvPr/>
+        </p:nvSpPr>
+        <p:spPr>
+          <a:xfrm>
+            <a:off x="3639312" y="4169664"/>
+            <a:ext cx="685800" cy="475488"/>
           </a:xfrm>
           <a:prstGeom prst="rect">
             <a:avLst/>
@@ -28410,7 +28635,7 @@
                 <a:ea typeface="Trebuchet MS" pitchFamily="34" charset="-122"/>
                 <a:cs typeface="Trebuchet MS" pitchFamily="34" charset="-120"/>
               </a:rPr>
-              <a:t>o</a:t>
+              <a:t>r</a:t>
             </a:r>
             <a:endParaRPr lang="en-US" sz="900" dirty="0"/>
           </a:p>
@@ -28418,18 +28643,18 @@
       </p:sp>
       <p:sp>
         <p:nvSpPr>
-          <p:cNvPr id="46" name="Shape 44"/>
-          <p:cNvSpPr/>
-          <p:nvPr/>
-        </p:nvSpPr>
-        <p:spPr>
-          <a:xfrm>
-            <a:off x="5370141" y="4169664"/>
-            <a:ext cx="685800" cy="384048"/>
+          <p:cNvPr id="45" name="Shape 43"/>
+          <p:cNvSpPr/>
+          <p:nvPr/>
+        </p:nvSpPr>
+        <p:spPr>
+          <a:xfrm>
+            <a:off x="4447032" y="4169664"/>
+            <a:ext cx="685800" cy="475488"/>
           </a:xfrm>
           <a:prstGeom prst="rect">
             <a:avLst>
-              <a:gd name="adj" fmla="val 9524"/>
+              <a:gd name="adj" fmla="val 7692"/>
             </a:avLst>
           </a:prstGeom>
           <a:solidFill>
@@ -28445,14 +28670,14 @@
       </p:sp>
       <p:sp>
         <p:nvSpPr>
-          <p:cNvPr id="47" name="Text 45"/>
-          <p:cNvSpPr/>
-          <p:nvPr/>
-        </p:nvSpPr>
-        <p:spPr>
-          <a:xfrm>
-            <a:off x="5370141" y="4169664"/>
-            <a:ext cx="685800" cy="384048"/>
+          <p:cNvPr id="46" name="Text 44"/>
+          <p:cNvSpPr/>
+          <p:nvPr/>
+        </p:nvSpPr>
+        <p:spPr>
+          <a:xfrm>
+            <a:off x="4447032" y="4169664"/>
+            <a:ext cx="685800" cy="475488"/>
           </a:xfrm>
           <a:prstGeom prst="rect">
             <a:avLst/>
@@ -28476,7 +28701,7 @@
                 <a:ea typeface="Trebuchet MS" pitchFamily="34" charset="-122"/>
                 <a:cs typeface="Trebuchet MS" pitchFamily="34" charset="-120"/>
               </a:rPr>
-              <a:t>l</a:t>
+              <a:t>o</a:t>
             </a:r>
             <a:endParaRPr lang="en-US" sz="900" dirty="0"/>
           </a:p>
@@ -28484,18 +28709,18 @@
       </p:sp>
       <p:sp>
         <p:nvSpPr>
-          <p:cNvPr id="48" name="Shape 46"/>
-          <p:cNvSpPr/>
-          <p:nvPr/>
-        </p:nvSpPr>
-        <p:spPr>
-          <a:xfrm>
-            <a:off x="6408638" y="4169664"/>
-            <a:ext cx="685800" cy="384048"/>
+          <p:cNvPr id="47" name="Shape 45"/>
+          <p:cNvSpPr/>
+          <p:nvPr/>
+        </p:nvSpPr>
+        <p:spPr>
+          <a:xfrm>
+            <a:off x="5254752" y="4169664"/>
+            <a:ext cx="685800" cy="475488"/>
           </a:xfrm>
           <a:prstGeom prst="rect">
             <a:avLst>
-              <a:gd name="adj" fmla="val 9524"/>
+              <a:gd name="adj" fmla="val 7692"/>
             </a:avLst>
           </a:prstGeom>
           <a:solidFill>
@@ -28511,14 +28736,14 @@
       </p:sp>
       <p:sp>
         <p:nvSpPr>
-          <p:cNvPr id="49" name="Text 47"/>
-          <p:cNvSpPr/>
-          <p:nvPr/>
-        </p:nvSpPr>
-        <p:spPr>
-          <a:xfrm>
-            <a:off x="6408638" y="4169664"/>
-            <a:ext cx="685800" cy="384048"/>
+          <p:cNvPr id="48" name="Text 46"/>
+          <p:cNvSpPr/>
+          <p:nvPr/>
+        </p:nvSpPr>
+        <p:spPr>
+          <a:xfrm>
+            <a:off x="5254752" y="4169664"/>
+            <a:ext cx="685800" cy="475488"/>
           </a:xfrm>
           <a:prstGeom prst="rect">
             <a:avLst/>
@@ -28542,7 +28767,7 @@
                 <a:ea typeface="Trebuchet MS" pitchFamily="34" charset="-122"/>
                 <a:cs typeface="Trebuchet MS" pitchFamily="34" charset="-120"/>
               </a:rPr>
-              <a:t>o</a:t>
+              <a:t>l</a:t>
             </a:r>
             <a:endParaRPr lang="en-US" sz="900" dirty="0"/>
           </a:p>
@@ -28550,18 +28775,18 @@
       </p:sp>
       <p:sp>
         <p:nvSpPr>
-          <p:cNvPr id="50" name="Shape 48"/>
-          <p:cNvSpPr/>
-          <p:nvPr/>
-        </p:nvSpPr>
-        <p:spPr>
-          <a:xfrm>
-            <a:off x="7447135" y="4169664"/>
-            <a:ext cx="685800" cy="384048"/>
+          <p:cNvPr id="49" name="Shape 47"/>
+          <p:cNvSpPr/>
+          <p:nvPr/>
+        </p:nvSpPr>
+        <p:spPr>
+          <a:xfrm>
+            <a:off x="6062472" y="4169664"/>
+            <a:ext cx="685800" cy="475488"/>
           </a:xfrm>
           <a:prstGeom prst="rect">
             <a:avLst>
-              <a:gd name="adj" fmla="val 9524"/>
+              <a:gd name="adj" fmla="val 7692"/>
             </a:avLst>
           </a:prstGeom>
           <a:solidFill>
@@ -28577,14 +28802,14 @@
       </p:sp>
       <p:sp>
         <p:nvSpPr>
-          <p:cNvPr id="51" name="Text 49"/>
-          <p:cNvSpPr/>
-          <p:nvPr/>
-        </p:nvSpPr>
-        <p:spPr>
-          <a:xfrm>
-            <a:off x="7447135" y="4169664"/>
-            <a:ext cx="685800" cy="384048"/>
+          <p:cNvPr id="50" name="Text 48"/>
+          <p:cNvSpPr/>
+          <p:nvPr/>
+        </p:nvSpPr>
+        <p:spPr>
+          <a:xfrm>
+            <a:off x="6062472" y="4169664"/>
+            <a:ext cx="685800" cy="475488"/>
           </a:xfrm>
           <a:prstGeom prst="rect">
             <a:avLst/>
@@ -28608,7 +28833,139 @@
                 <a:ea typeface="Trebuchet MS" pitchFamily="34" charset="-122"/>
                 <a:cs typeface="Trebuchet MS" pitchFamily="34" charset="-120"/>
               </a:rPr>
-              <a:t>gy</a:t>
+              <a:t>o</a:t>
+            </a:r>
+            <a:endParaRPr lang="en-US" sz="900" dirty="0"/>
+          </a:p>
+        </p:txBody>
+      </p:sp>
+      <p:sp>
+        <p:nvSpPr>
+          <p:cNvPr id="51" name="Shape 49"/>
+          <p:cNvSpPr/>
+          <p:nvPr/>
+        </p:nvSpPr>
+        <p:spPr>
+          <a:xfrm>
+            <a:off x="6870192" y="4169664"/>
+            <a:ext cx="685800" cy="475488"/>
+          </a:xfrm>
+          <a:prstGeom prst="rect">
+            <a:avLst>
+              <a:gd name="adj" fmla="val 7692"/>
+            </a:avLst>
+          </a:prstGeom>
+          <a:solidFill>
+            <a:srgbClr val="FFFFFF"/>
+          </a:solidFill>
+          <a:ln w="12700">
+            <a:solidFill>
+              <a:srgbClr val="DB2777"/>
+            </a:solidFill>
+            <a:prstDash val="solid"/>
+          </a:ln>
+        </p:spPr>
+      </p:sp>
+      <p:sp>
+        <p:nvSpPr>
+          <p:cNvPr id="52" name="Text 50"/>
+          <p:cNvSpPr/>
+          <p:nvPr/>
+        </p:nvSpPr>
+        <p:spPr>
+          <a:xfrm>
+            <a:off x="6870192" y="4169664"/>
+            <a:ext cx="685800" cy="475488"/>
+          </a:xfrm>
+          <a:prstGeom prst="rect">
+            <a:avLst/>
+          </a:prstGeom>
+          <a:noFill/>
+          <a:ln/>
+        </p:spPr>
+        <p:txBody>
+          <a:bodyPr wrap="square" lIns="0" tIns="0" rIns="0" bIns="0" rtlCol="0" anchor="ctr"/>
+          <a:lstStyle/>
+          <a:p>
+            <a:pPr algn="ctr" indent="0" marL="0">
+              <a:buNone/>
+            </a:pPr>
+            <a:r>
+              <a:rPr lang="en-US" sz="900" b="1" dirty="0">
+                <a:solidFill>
+                  <a:srgbClr val="9D174D"/>
+                </a:solidFill>
+                <a:latin typeface="Trebuchet MS" pitchFamily="34" charset="0"/>
+                <a:ea typeface="Trebuchet MS" pitchFamily="34" charset="-122"/>
+                <a:cs typeface="Trebuchet MS" pitchFamily="34" charset="-120"/>
+              </a:rPr>
+              <a:t>g</a:t>
+            </a:r>
+            <a:endParaRPr lang="en-US" sz="900" dirty="0"/>
+          </a:p>
+        </p:txBody>
+      </p:sp>
+      <p:sp>
+        <p:nvSpPr>
+          <p:cNvPr id="53" name="Shape 51"/>
+          <p:cNvSpPr/>
+          <p:nvPr/>
+        </p:nvSpPr>
+        <p:spPr>
+          <a:xfrm>
+            <a:off x="7677912" y="4169664"/>
+            <a:ext cx="685800" cy="475488"/>
+          </a:xfrm>
+          <a:prstGeom prst="rect">
+            <a:avLst>
+              <a:gd name="adj" fmla="val 7692"/>
+            </a:avLst>
+          </a:prstGeom>
+          <a:solidFill>
+            <a:srgbClr val="FFFFFF"/>
+          </a:solidFill>
+          <a:ln w="12700">
+            <a:solidFill>
+              <a:srgbClr val="DB2777"/>
+            </a:solidFill>
+            <a:prstDash val="solid"/>
+          </a:ln>
+        </p:spPr>
+      </p:sp>
+      <p:sp>
+        <p:nvSpPr>
+          <p:cNvPr id="54" name="Text 52"/>
+          <p:cNvSpPr/>
+          <p:nvPr/>
+        </p:nvSpPr>
+        <p:spPr>
+          <a:xfrm>
+            <a:off x="7677912" y="4169664"/>
+            <a:ext cx="685800" cy="475488"/>
+          </a:xfrm>
+          <a:prstGeom prst="rect">
+            <a:avLst/>
+          </a:prstGeom>
+          <a:noFill/>
+          <a:ln/>
+        </p:spPr>
+        <p:txBody>
+          <a:bodyPr wrap="square" lIns="0" tIns="0" rIns="0" bIns="0" rtlCol="0" anchor="ctr"/>
+          <a:lstStyle/>
+          <a:p>
+            <a:pPr algn="ctr" indent="0" marL="0">
+              <a:buNone/>
+            </a:pPr>
+            <a:r>
+              <a:rPr lang="en-US" sz="900" b="1" dirty="0">
+                <a:solidFill>
+                  <a:srgbClr val="9D174D"/>
+                </a:solidFill>
+                <a:latin typeface="Trebuchet MS" pitchFamily="34" charset="0"/>
+                <a:ea typeface="Trebuchet MS" pitchFamily="34" charset="-122"/>
+                <a:cs typeface="Trebuchet MS" pitchFamily="34" charset="-120"/>
+              </a:rPr>
+              <a:t>y</a:t>
             </a:r>
             <a:endParaRPr lang="en-US" sz="900" dirty="0"/>
           </a:p>
@@ -28900,7 +29257,7 @@
                 <a:ea typeface="Calibri" pitchFamily="34" charset="-122"/>
                 <a:cs typeface="Calibri" pitchFamily="34" charset="-120"/>
               </a:rPr>
-              <a:t>Word Labs  •  wordlabs.app  •  Root: 'logy' = study or science of</a:t>
+              <a:t>Word Labs  •  wordlabs.app  •  Root: 'logy' = study of</a:t>
             </a:r>
             <a:endParaRPr lang="en-US" sz="800" dirty="0"/>
           </a:p>
@@ -29039,7 +29396,7 @@
                 <a:ea typeface="Trebuchet MS" pitchFamily="34" charset="-122"/>
                 <a:cs typeface="Trebuchet MS" pitchFamily="34" charset="-120"/>
               </a:rPr>
-              <a:t>meteorology</a:t>
+              <a:t>sociology</a:t>
             </a:r>
             <a:endParaRPr lang="en-US" sz="2800" dirty="0"/>
           </a:p>
@@ -29727,7 +30084,7 @@
                 <a:ea typeface="Calibri" pitchFamily="34" charset="-122"/>
                 <a:cs typeface="Calibri" pitchFamily="34" charset="-120"/>
               </a:rPr>
-              <a:t>Word Labs  •  wordlabs.app  •  Root: 'logy' = study or science of</a:t>
+              <a:t>Word Labs  •  wordlabs.app  •  Root: 'logy' = study of</a:t>
             </a:r>
             <a:endParaRPr lang="en-US" sz="800" dirty="0"/>
           </a:p>
@@ -29866,7 +30223,7 @@
                 <a:ea typeface="Trebuchet MS" pitchFamily="34" charset="-122"/>
                 <a:cs typeface="Trebuchet MS" pitchFamily="34" charset="-120"/>
               </a:rPr>
-              <a:t>meteorology</a:t>
+              <a:t>sociology</a:t>
             </a:r>
             <a:endParaRPr lang="en-US" sz="2800" dirty="0"/>
           </a:p>
@@ -29946,7 +30303,7 @@
         </p:nvSpPr>
         <p:spPr>
           <a:xfrm>
-            <a:off x="2221992" y="2258568"/>
+            <a:off x="2938272" y="2258568"/>
             <a:ext cx="1828800" cy="292608"/>
           </a:xfrm>
           <a:prstGeom prst="rect">
@@ -29980,7 +30337,7 @@
         </p:nvSpPr>
         <p:spPr>
           <a:xfrm>
-            <a:off x="2221992" y="2258568"/>
+            <a:off x="2938272" y="2258568"/>
             <a:ext cx="1828800" cy="292608"/>
           </a:xfrm>
           <a:prstGeom prst="rect">
@@ -30005,7 +30362,7 @@
                 <a:ea typeface="Trebuchet MS" pitchFamily="34" charset="-122"/>
                 <a:cs typeface="Trebuchet MS" pitchFamily="34" charset="-120"/>
               </a:rPr>
-              <a:t>meteor</a:t>
+              <a:t>socio</a:t>
             </a:r>
             <a:endParaRPr lang="en-US" sz="1300" dirty="0"/>
           </a:p>
@@ -30019,7 +30376,7 @@
         </p:nvSpPr>
         <p:spPr>
           <a:xfrm>
-            <a:off x="2221992" y="2569464"/>
+            <a:off x="2938272" y="2569464"/>
             <a:ext cx="1828800" cy="201168"/>
           </a:xfrm>
           <a:prstGeom prst="rect">
@@ -30044,7 +30401,7 @@
                 <a:ea typeface="Calibri" pitchFamily="34" charset="-122"/>
                 <a:cs typeface="Calibri" pitchFamily="34" charset="-120"/>
               </a:rPr>
-              <a:t>atmosphere, sky phenomenon</a:t>
+              <a:t>society; social</a:t>
             </a:r>
             <a:endParaRPr lang="en-US" sz="850" dirty="0"/>
           </a:p>
@@ -30058,7 +30415,7 @@
         </p:nvSpPr>
         <p:spPr>
           <a:xfrm>
-            <a:off x="4370832" y="2258568"/>
+            <a:off x="5803392" y="2258568"/>
             <a:ext cx="1828800" cy="292608"/>
           </a:xfrm>
           <a:prstGeom prst="rect">
@@ -30067,11 +30424,11 @@
             </a:avLst>
           </a:prstGeom>
           <a:solidFill>
-            <a:srgbClr val="FCE7F3"/>
+            <a:srgbClr val="CCFBF1"/>
           </a:solidFill>
           <a:ln w="19050">
             <a:solidFill>
-              <a:srgbClr val="DB2777"/>
+              <a:srgbClr val="0D9488"/>
             </a:solidFill>
             <a:prstDash val="solid"/>
           </a:ln>
@@ -30092,7 +30449,7 @@
         </p:nvSpPr>
         <p:spPr>
           <a:xfrm>
-            <a:off x="4370832" y="2258568"/>
+            <a:off x="5803392" y="2258568"/>
             <a:ext cx="1828800" cy="292608"/>
           </a:xfrm>
           <a:prstGeom prst="rect">
@@ -30111,13 +30468,13 @@
             <a:r>
               <a:rPr lang="en-US" sz="1300" b="1" dirty="0">
                 <a:solidFill>
-                  <a:srgbClr val="9D174D"/>
+                  <a:srgbClr val="0F766E"/>
                 </a:solidFill>
                 <a:latin typeface="Trebuchet MS" pitchFamily="34" charset="0"/>
                 <a:ea typeface="Trebuchet MS" pitchFamily="34" charset="-122"/>
                 <a:cs typeface="Trebuchet MS" pitchFamily="34" charset="-120"/>
               </a:rPr>
-              <a:t>o</a:t>
+              <a:t>logy</a:t>
             </a:r>
             <a:endParaRPr lang="en-US" sz="1300" dirty="0"/>
           </a:p>
@@ -30131,7 +30488,7 @@
         </p:nvSpPr>
         <p:spPr>
           <a:xfrm>
-            <a:off x="4370832" y="2569464"/>
+            <a:off x="5803392" y="2569464"/>
             <a:ext cx="1828800" cy="201168"/>
           </a:xfrm>
           <a:prstGeom prst="rect">
@@ -30156,7 +30513,7 @@
                 <a:ea typeface="Calibri" pitchFamily="34" charset="-122"/>
                 <a:cs typeface="Calibri" pitchFamily="34" charset="-120"/>
               </a:rPr>
-              <a:t>connecting vowel</a:t>
+              <a:t>study of</a:t>
             </a:r>
             <a:endParaRPr lang="en-US" sz="850" dirty="0"/>
           </a:p>
@@ -30164,216 +30521,197 @@
       </p:sp>
       <p:sp>
         <p:nvSpPr>
-          <p:cNvPr id="22" name="Text 20"/>
-          <p:cNvSpPr/>
-          <p:nvPr/>
-        </p:nvSpPr>
-        <p:spPr>
-          <a:xfrm>
-            <a:off x="4370832" y="2752344"/>
-            <a:ext cx="1828800" cy="182880"/>
-          </a:xfrm>
-          <a:prstGeom prst="rect">
-            <a:avLst/>
-          </a:prstGeom>
-          <a:noFill/>
-          <a:ln/>
-        </p:spPr>
-        <p:txBody>
-          <a:bodyPr wrap="square" lIns="0" tIns="0" rIns="0" bIns="0" rtlCol="0" anchor="t"/>
-          <a:lstStyle/>
-          <a:p>
-            <a:pPr algn="ctr" indent="0" marL="0">
-              <a:buNone/>
-            </a:pPr>
-            <a:r>
-              <a:rPr lang="en-US" sz="700" i="1" dirty="0">
-                <a:solidFill>
-                  <a:srgbClr val="94A3B8"/>
+          <p:cNvPr id="22" name="Shape 20"/>
+          <p:cNvSpPr/>
+          <p:nvPr/>
+        </p:nvSpPr>
+        <p:spPr>
+          <a:xfrm>
+            <a:off x="365760" y="3273552"/>
+            <a:ext cx="1371600" cy="658368"/>
+          </a:xfrm>
+          <a:prstGeom prst="rect">
+            <a:avLst>
+              <a:gd name="adj" fmla="val 8333"/>
+            </a:avLst>
+          </a:prstGeom>
+          <a:solidFill>
+            <a:srgbClr val="E2E8F0"/>
+          </a:solidFill>
+          <a:ln w="12700">
+            <a:solidFill>
+              <a:srgbClr val="E2E8F0"/>
+            </a:solidFill>
+            <a:prstDash val="solid"/>
+          </a:ln>
+        </p:spPr>
+      </p:sp>
+      <p:sp>
+        <p:nvSpPr>
+          <p:cNvPr id="23" name="Text 21"/>
+          <p:cNvSpPr/>
+          <p:nvPr/>
+        </p:nvSpPr>
+        <p:spPr>
+          <a:xfrm>
+            <a:off x="365760" y="3273552"/>
+            <a:ext cx="1371600" cy="658368"/>
+          </a:xfrm>
+          <a:prstGeom prst="rect">
+            <a:avLst/>
+          </a:prstGeom>
+          <a:noFill/>
+          <a:ln/>
+        </p:spPr>
+        <p:txBody>
+          <a:bodyPr wrap="square" lIns="0" tIns="0" rIns="0" bIns="0" rtlCol="0" anchor="ctr"/>
+          <a:lstStyle/>
+          <a:p>
+            <a:pPr algn="ctr" indent="0" marL="0">
+              <a:buNone/>
+            </a:pPr>
+            <a:r>
+              <a:rPr lang="en-US" sz="1100" b="1" dirty="0">
+                <a:solidFill>
+                  <a:srgbClr val="475569"/>
+                </a:solidFill>
+                <a:latin typeface="Trebuchet MS" pitchFamily="34" charset="0"/>
+                <a:ea typeface="Trebuchet MS" pitchFamily="34" charset="-122"/>
+                <a:cs typeface="Trebuchet MS" pitchFamily="34" charset="-120"/>
+              </a:rPr>
+              <a:t>Syllables</a:t>
+            </a:r>
+            <a:endParaRPr lang="en-US" sz="1100" dirty="0"/>
+          </a:p>
+        </p:txBody>
+      </p:sp>
+      <p:sp>
+        <p:nvSpPr>
+          <p:cNvPr id="24" name="Shape 22"/>
+          <p:cNvSpPr/>
+          <p:nvPr/>
+        </p:nvSpPr>
+        <p:spPr>
+          <a:xfrm>
+            <a:off x="1874520" y="3273552"/>
+            <a:ext cx="6903720" cy="658368"/>
+          </a:xfrm>
+          <a:prstGeom prst="rect">
+            <a:avLst>
+              <a:gd name="adj" fmla="val 8333"/>
+            </a:avLst>
+          </a:prstGeom>
+          <a:solidFill>
+            <a:srgbClr val="F8FAFC"/>
+          </a:solidFill>
+          <a:ln w="12700">
+            <a:solidFill>
+              <a:srgbClr val="E2E8F0"/>
+            </a:solidFill>
+            <a:prstDash val="dash"/>
+          </a:ln>
+        </p:spPr>
+      </p:sp>
+      <p:sp>
+        <p:nvSpPr>
+          <p:cNvPr id="25" name="Text 23"/>
+          <p:cNvSpPr/>
+          <p:nvPr/>
+        </p:nvSpPr>
+        <p:spPr>
+          <a:xfrm>
+            <a:off x="1874520" y="3273552"/>
+            <a:ext cx="6903720" cy="658368"/>
+          </a:xfrm>
+          <a:prstGeom prst="rect">
+            <a:avLst/>
+          </a:prstGeom>
+          <a:noFill/>
+          <a:ln/>
+        </p:spPr>
+        <p:txBody>
+          <a:bodyPr wrap="square" rtlCol="0" anchor="ctr"/>
+          <a:lstStyle/>
+          <a:p>
+            <a:pPr algn="ctr" indent="0" marL="0">
+              <a:buNone/>
+            </a:pPr>
+            <a:r>
+              <a:rPr lang="en-US" sz="1100" i="1" dirty="0">
+                <a:solidFill>
+                  <a:srgbClr val="CBD5E1"/>
                 </a:solidFill>
                 <a:latin typeface="Calibri" pitchFamily="34" charset="0"/>
                 <a:ea typeface="Calibri" pitchFamily="34" charset="-122"/>
                 <a:cs typeface="Calibri" pitchFamily="34" charset="-120"/>
               </a:rPr>
-              <a:t>links base to suffix</a:t>
-            </a:r>
-            <a:endParaRPr lang="en-US" sz="700" dirty="0"/>
-          </a:p>
-        </p:txBody>
-      </p:sp>
-      <p:sp>
-        <p:nvSpPr>
-          <p:cNvPr id="23" name="Shape 21"/>
-          <p:cNvSpPr/>
-          <p:nvPr/>
-        </p:nvSpPr>
-        <p:spPr>
-          <a:xfrm>
-            <a:off x="6519672" y="2258568"/>
-            <a:ext cx="1828800" cy="292608"/>
+              <a:t>Write here...</a:t>
+            </a:r>
+            <a:endParaRPr lang="en-US" sz="1100" dirty="0"/>
+          </a:p>
+        </p:txBody>
+      </p:sp>
+      <p:sp>
+        <p:nvSpPr>
+          <p:cNvPr id="26" name="Shape 24"/>
+          <p:cNvSpPr/>
+          <p:nvPr/>
+        </p:nvSpPr>
+        <p:spPr>
+          <a:xfrm>
+            <a:off x="365760" y="4096512"/>
+            <a:ext cx="1371600" cy="804672"/>
           </a:xfrm>
           <a:prstGeom prst="rect">
             <a:avLst>
-              <a:gd name="adj" fmla="val 25000"/>
+              <a:gd name="adj" fmla="val 6818"/>
             </a:avLst>
           </a:prstGeom>
           <a:solidFill>
-            <a:srgbClr val="CCFBF1"/>
-          </a:solidFill>
-          <a:ln w="19050">
-            <a:solidFill>
-              <a:srgbClr val="0D9488"/>
-            </a:solidFill>
-            <a:prstDash val="solid"/>
-          </a:ln>
-          <a:effectLst>
-            <a:outerShdw sx="100000" sy="100000" kx="0" ky="0" algn="bl" rotWithShape="0" blurRad="101600" dist="38100" dir="8100000">
-              <a:srgbClr val="000000">
-                <a:alpha val="12000"/>
-              </a:srgbClr>
-            </a:outerShdw>
-          </a:effectLst>
-        </p:spPr>
-      </p:sp>
-      <p:sp>
-        <p:nvSpPr>
-          <p:cNvPr id="24" name="Text 22"/>
-          <p:cNvSpPr/>
-          <p:nvPr/>
-        </p:nvSpPr>
-        <p:spPr>
-          <a:xfrm>
-            <a:off x="6519672" y="2258568"/>
-            <a:ext cx="1828800" cy="292608"/>
-          </a:xfrm>
-          <a:prstGeom prst="rect">
-            <a:avLst/>
-          </a:prstGeom>
-          <a:noFill/>
-          <a:ln/>
-        </p:spPr>
-        <p:txBody>
-          <a:bodyPr wrap="square" lIns="0" tIns="0" rIns="0" bIns="0" rtlCol="0" anchor="ctr"/>
-          <a:lstStyle/>
-          <a:p>
-            <a:pPr algn="ctr" indent="0" marL="0">
-              <a:buNone/>
-            </a:pPr>
-            <a:r>
-              <a:rPr lang="en-US" sz="1300" b="1" dirty="0">
-                <a:solidFill>
-                  <a:srgbClr val="0F766E"/>
+            <a:srgbClr val="E2E8F0"/>
+          </a:solidFill>
+          <a:ln w="12700">
+            <a:solidFill>
+              <a:srgbClr val="E2E8F0"/>
+            </a:solidFill>
+            <a:prstDash val="solid"/>
+          </a:ln>
+        </p:spPr>
+      </p:sp>
+      <p:sp>
+        <p:nvSpPr>
+          <p:cNvPr id="27" name="Text 25"/>
+          <p:cNvSpPr/>
+          <p:nvPr/>
+        </p:nvSpPr>
+        <p:spPr>
+          <a:xfrm>
+            <a:off x="365760" y="4096512"/>
+            <a:ext cx="1371600" cy="804672"/>
+          </a:xfrm>
+          <a:prstGeom prst="rect">
+            <a:avLst/>
+          </a:prstGeom>
+          <a:noFill/>
+          <a:ln/>
+        </p:spPr>
+        <p:txBody>
+          <a:bodyPr wrap="square" lIns="0" tIns="0" rIns="0" bIns="0" rtlCol="0" anchor="ctr"/>
+          <a:lstStyle/>
+          <a:p>
+            <a:pPr algn="ctr" indent="0" marL="0">
+              <a:buNone/>
+            </a:pPr>
+            <a:r>
+              <a:rPr lang="en-US" sz="1100" b="1" dirty="0">
+                <a:solidFill>
+                  <a:srgbClr val="475569"/>
                 </a:solidFill>
                 <a:latin typeface="Trebuchet MS" pitchFamily="34" charset="0"/>
                 <a:ea typeface="Trebuchet MS" pitchFamily="34" charset="-122"/>
                 <a:cs typeface="Trebuchet MS" pitchFamily="34" charset="-120"/>
               </a:rPr>
-              <a:t>logy</a:t>
-            </a:r>
-            <a:endParaRPr lang="en-US" sz="1300" dirty="0"/>
-          </a:p>
-        </p:txBody>
-      </p:sp>
-      <p:sp>
-        <p:nvSpPr>
-          <p:cNvPr id="25" name="Text 23"/>
-          <p:cNvSpPr/>
-          <p:nvPr/>
-        </p:nvSpPr>
-        <p:spPr>
-          <a:xfrm>
-            <a:off x="6519672" y="2569464"/>
-            <a:ext cx="1828800" cy="201168"/>
-          </a:xfrm>
-          <a:prstGeom prst="rect">
-            <a:avLst/>
-          </a:prstGeom>
-          <a:noFill/>
-          <a:ln/>
-        </p:spPr>
-        <p:txBody>
-          <a:bodyPr wrap="square" lIns="0" tIns="0" rIns="0" bIns="0" rtlCol="0" anchor="t"/>
-          <a:lstStyle/>
-          <a:p>
-            <a:pPr algn="ctr" indent="0" marL="0">
-              <a:buNone/>
-            </a:pPr>
-            <a:r>
-              <a:rPr lang="en-US" sz="850" dirty="0">
-                <a:solidFill>
-                  <a:srgbClr val="475569"/>
-                </a:solidFill>
-                <a:latin typeface="Calibri" pitchFamily="34" charset="0"/>
-                <a:ea typeface="Calibri" pitchFamily="34" charset="-122"/>
-                <a:cs typeface="Calibri" pitchFamily="34" charset="-120"/>
-              </a:rPr>
-              <a:t>study of</a:t>
-            </a:r>
-            <a:endParaRPr lang="en-US" sz="850" dirty="0"/>
-          </a:p>
-        </p:txBody>
-      </p:sp>
-      <p:sp>
-        <p:nvSpPr>
-          <p:cNvPr id="26" name="Shape 24"/>
-          <p:cNvSpPr/>
-          <p:nvPr/>
-        </p:nvSpPr>
-        <p:spPr>
-          <a:xfrm>
-            <a:off x="365760" y="3273552"/>
-            <a:ext cx="1371600" cy="658368"/>
-          </a:xfrm>
-          <a:prstGeom prst="rect">
-            <a:avLst>
-              <a:gd name="adj" fmla="val 8333"/>
-            </a:avLst>
-          </a:prstGeom>
-          <a:solidFill>
-            <a:srgbClr val="E2E8F0"/>
-          </a:solidFill>
-          <a:ln w="12700">
-            <a:solidFill>
-              <a:srgbClr val="E2E8F0"/>
-            </a:solidFill>
-            <a:prstDash val="solid"/>
-          </a:ln>
-        </p:spPr>
-      </p:sp>
-      <p:sp>
-        <p:nvSpPr>
-          <p:cNvPr id="27" name="Text 25"/>
-          <p:cNvSpPr/>
-          <p:nvPr/>
-        </p:nvSpPr>
-        <p:spPr>
-          <a:xfrm>
-            <a:off x="365760" y="3273552"/>
-            <a:ext cx="1371600" cy="658368"/>
-          </a:xfrm>
-          <a:prstGeom prst="rect">
-            <a:avLst/>
-          </a:prstGeom>
-          <a:noFill/>
-          <a:ln/>
-        </p:spPr>
-        <p:txBody>
-          <a:bodyPr wrap="square" lIns="0" tIns="0" rIns="0" bIns="0" rtlCol="0" anchor="ctr"/>
-          <a:lstStyle/>
-          <a:p>
-            <a:pPr algn="ctr" indent="0" marL="0">
-              <a:buNone/>
-            </a:pPr>
-            <a:r>
-              <a:rPr lang="en-US" sz="1100" b="1" dirty="0">
-                <a:solidFill>
-                  <a:srgbClr val="475569"/>
-                </a:solidFill>
-                <a:latin typeface="Trebuchet MS" pitchFamily="34" charset="0"/>
-                <a:ea typeface="Trebuchet MS" pitchFamily="34" charset="-122"/>
-                <a:cs typeface="Trebuchet MS" pitchFamily="34" charset="-120"/>
-              </a:rPr>
-              <a:t>Syllables</a:t>
+              <a:t>Phonemes</a:t>
             </a:r>
             <a:endParaRPr lang="en-US" sz="1100" dirty="0"/>
           </a:p>
@@ -30387,74 +30725,8 @@
         </p:nvSpPr>
         <p:spPr>
           <a:xfrm>
-            <a:off x="1874520" y="3273552"/>
-            <a:ext cx="6903720" cy="658368"/>
-          </a:xfrm>
-          <a:prstGeom prst="rect">
-            <a:avLst>
-              <a:gd name="adj" fmla="val 8333"/>
-            </a:avLst>
-          </a:prstGeom>
-          <a:solidFill>
-            <a:srgbClr val="F8FAFC"/>
-          </a:solidFill>
-          <a:ln w="12700">
-            <a:solidFill>
-              <a:srgbClr val="E2E8F0"/>
-            </a:solidFill>
-            <a:prstDash val="dash"/>
-          </a:ln>
-        </p:spPr>
-      </p:sp>
-      <p:sp>
-        <p:nvSpPr>
-          <p:cNvPr id="29" name="Text 27"/>
-          <p:cNvSpPr/>
-          <p:nvPr/>
-        </p:nvSpPr>
-        <p:spPr>
-          <a:xfrm>
-            <a:off x="1874520" y="3273552"/>
-            <a:ext cx="6903720" cy="658368"/>
-          </a:xfrm>
-          <a:prstGeom prst="rect">
-            <a:avLst/>
-          </a:prstGeom>
-          <a:noFill/>
-          <a:ln/>
-        </p:spPr>
-        <p:txBody>
-          <a:bodyPr wrap="square" rtlCol="0" anchor="ctr"/>
-          <a:lstStyle/>
-          <a:p>
-            <a:pPr algn="ctr" indent="0" marL="0">
-              <a:buNone/>
-            </a:pPr>
-            <a:r>
-              <a:rPr lang="en-US" sz="1100" i="1" dirty="0">
-                <a:solidFill>
-                  <a:srgbClr val="CBD5E1"/>
-                </a:solidFill>
-                <a:latin typeface="Calibri" pitchFamily="34" charset="0"/>
-                <a:ea typeface="Calibri" pitchFamily="34" charset="-122"/>
-                <a:cs typeface="Calibri" pitchFamily="34" charset="-120"/>
-              </a:rPr>
-              <a:t>Write here...</a:t>
-            </a:r>
-            <a:endParaRPr lang="en-US" sz="1100" dirty="0"/>
-          </a:p>
-        </p:txBody>
-      </p:sp>
-      <p:sp>
-        <p:nvSpPr>
-          <p:cNvPr id="30" name="Shape 28"/>
-          <p:cNvSpPr/>
-          <p:nvPr/>
-        </p:nvSpPr>
-        <p:spPr>
-          <a:xfrm>
-            <a:off x="365760" y="4096512"/>
-            <a:ext cx="1371600" cy="804672"/>
+            <a:off x="1874520" y="4096512"/>
+            <a:ext cx="6903720" cy="804672"/>
           </a:xfrm>
           <a:prstGeom prst="rect">
             <a:avLst>
@@ -30462,85 +30734,19 @@
             </a:avLst>
           </a:prstGeom>
           <a:solidFill>
-            <a:srgbClr val="E2E8F0"/>
+            <a:srgbClr val="F8FAFC"/>
           </a:solidFill>
           <a:ln w="12700">
             <a:solidFill>
               <a:srgbClr val="E2E8F0"/>
             </a:solidFill>
-            <a:prstDash val="solid"/>
-          </a:ln>
-        </p:spPr>
-      </p:sp>
-      <p:sp>
-        <p:nvSpPr>
-          <p:cNvPr id="31" name="Text 29"/>
-          <p:cNvSpPr/>
-          <p:nvPr/>
-        </p:nvSpPr>
-        <p:spPr>
-          <a:xfrm>
-            <a:off x="365760" y="4096512"/>
-            <a:ext cx="1371600" cy="804672"/>
-          </a:xfrm>
-          <a:prstGeom prst="rect">
-            <a:avLst/>
-          </a:prstGeom>
-          <a:noFill/>
-          <a:ln/>
-        </p:spPr>
-        <p:txBody>
-          <a:bodyPr wrap="square" lIns="0" tIns="0" rIns="0" bIns="0" rtlCol="0" anchor="ctr"/>
-          <a:lstStyle/>
-          <a:p>
-            <a:pPr algn="ctr" indent="0" marL="0">
-              <a:buNone/>
-            </a:pPr>
-            <a:r>
-              <a:rPr lang="en-US" sz="1100" b="1" dirty="0">
-                <a:solidFill>
-                  <a:srgbClr val="475569"/>
-                </a:solidFill>
-                <a:latin typeface="Trebuchet MS" pitchFamily="34" charset="0"/>
-                <a:ea typeface="Trebuchet MS" pitchFamily="34" charset="-122"/>
-                <a:cs typeface="Trebuchet MS" pitchFamily="34" charset="-120"/>
-              </a:rPr>
-              <a:t>Phonemes</a:t>
-            </a:r>
-            <a:endParaRPr lang="en-US" sz="1100" dirty="0"/>
-          </a:p>
-        </p:txBody>
-      </p:sp>
-      <p:sp>
-        <p:nvSpPr>
-          <p:cNvPr id="32" name="Shape 30"/>
-          <p:cNvSpPr/>
-          <p:nvPr/>
-        </p:nvSpPr>
-        <p:spPr>
-          <a:xfrm>
-            <a:off x="1874520" y="4096512"/>
-            <a:ext cx="6903720" cy="804672"/>
-          </a:xfrm>
-          <a:prstGeom prst="rect">
-            <a:avLst>
-              <a:gd name="adj" fmla="val 6818"/>
-            </a:avLst>
-          </a:prstGeom>
-          <a:solidFill>
-            <a:srgbClr val="F8FAFC"/>
-          </a:solidFill>
-          <a:ln w="12700">
-            <a:solidFill>
-              <a:srgbClr val="E2E8F0"/>
-            </a:solidFill>
             <a:prstDash val="dash"/>
           </a:ln>
         </p:spPr>
       </p:sp>
       <p:sp>
         <p:nvSpPr>
-          <p:cNvPr id="33" name="Text 31"/>
+          <p:cNvPr id="29" name="Text 27"/>
           <p:cNvSpPr/>
           <p:nvPr/>
         </p:nvSpPr>
@@ -30863,7 +31069,7 @@
                 <a:ea typeface="Calibri" pitchFamily="34" charset="-122"/>
                 <a:cs typeface="Calibri" pitchFamily="34" charset="-120"/>
               </a:rPr>
-              <a:t>Word Labs  •  wordlabs.app  •  Root: 'logy' = study or science of</a:t>
+              <a:t>Word Labs  •  wordlabs.app  •  Root: 'logy' = study of</a:t>
             </a:r>
             <a:endParaRPr lang="en-US" sz="800" dirty="0"/>
           </a:p>
@@ -31002,7 +31208,7 @@
                 <a:ea typeface="Trebuchet MS" pitchFamily="34" charset="-122"/>
                 <a:cs typeface="Trebuchet MS" pitchFamily="34" charset="-120"/>
               </a:rPr>
-              <a:t>meteorology</a:t>
+              <a:t>sociology</a:t>
             </a:r>
             <a:endParaRPr lang="en-US" sz="2800" dirty="0"/>
           </a:p>
@@ -31082,7 +31288,7 @@
         </p:nvSpPr>
         <p:spPr>
           <a:xfrm>
-            <a:off x="2221992" y="2258568"/>
+            <a:off x="2938272" y="2258568"/>
             <a:ext cx="1828800" cy="292608"/>
           </a:xfrm>
           <a:prstGeom prst="rect">
@@ -31116,7 +31322,7 @@
         </p:nvSpPr>
         <p:spPr>
           <a:xfrm>
-            <a:off x="2221992" y="2258568"/>
+            <a:off x="2938272" y="2258568"/>
             <a:ext cx="1828800" cy="292608"/>
           </a:xfrm>
           <a:prstGeom prst="rect">
@@ -31141,7 +31347,7 @@
                 <a:ea typeface="Trebuchet MS" pitchFamily="34" charset="-122"/>
                 <a:cs typeface="Trebuchet MS" pitchFamily="34" charset="-120"/>
               </a:rPr>
-              <a:t>meteor</a:t>
+              <a:t>socio</a:t>
             </a:r>
             <a:endParaRPr lang="en-US" sz="1300" dirty="0"/>
           </a:p>
@@ -31155,7 +31361,7 @@
         </p:nvSpPr>
         <p:spPr>
           <a:xfrm>
-            <a:off x="2221992" y="2569464"/>
+            <a:off x="2938272" y="2569464"/>
             <a:ext cx="1828800" cy="201168"/>
           </a:xfrm>
           <a:prstGeom prst="rect">
@@ -31180,7 +31386,7 @@
                 <a:ea typeface="Calibri" pitchFamily="34" charset="-122"/>
                 <a:cs typeface="Calibri" pitchFamily="34" charset="-120"/>
               </a:rPr>
-              <a:t>atmosphere, sky phenomenon</a:t>
+              <a:t>society; social</a:t>
             </a:r>
             <a:endParaRPr lang="en-US" sz="850" dirty="0"/>
           </a:p>
@@ -31194,7 +31400,7 @@
         </p:nvSpPr>
         <p:spPr>
           <a:xfrm>
-            <a:off x="4370832" y="2258568"/>
+            <a:off x="5803392" y="2258568"/>
             <a:ext cx="1828800" cy="292608"/>
           </a:xfrm>
           <a:prstGeom prst="rect">
@@ -31203,11 +31409,11 @@
             </a:avLst>
           </a:prstGeom>
           <a:solidFill>
-            <a:srgbClr val="FCE7F3"/>
+            <a:srgbClr val="CCFBF1"/>
           </a:solidFill>
           <a:ln w="19050">
             <a:solidFill>
-              <a:srgbClr val="DB2777"/>
+              <a:srgbClr val="0D9488"/>
             </a:solidFill>
             <a:prstDash val="solid"/>
           </a:ln>
@@ -31228,7 +31434,7 @@
         </p:nvSpPr>
         <p:spPr>
           <a:xfrm>
-            <a:off x="4370832" y="2258568"/>
+            <a:off x="5803392" y="2258568"/>
             <a:ext cx="1828800" cy="292608"/>
           </a:xfrm>
           <a:prstGeom prst="rect">
@@ -31247,13 +31453,13 @@
             <a:r>
               <a:rPr lang="en-US" sz="1300" b="1" dirty="0">
                 <a:solidFill>
-                  <a:srgbClr val="9D174D"/>
+                  <a:srgbClr val="0F766E"/>
                 </a:solidFill>
                 <a:latin typeface="Trebuchet MS" pitchFamily="34" charset="0"/>
                 <a:ea typeface="Trebuchet MS" pitchFamily="34" charset="-122"/>
                 <a:cs typeface="Trebuchet MS" pitchFamily="34" charset="-120"/>
               </a:rPr>
-              <a:t>o</a:t>
+              <a:t>logy</a:t>
             </a:r>
             <a:endParaRPr lang="en-US" sz="1300" dirty="0"/>
           </a:p>
@@ -31267,7 +31473,7 @@
         </p:nvSpPr>
         <p:spPr>
           <a:xfrm>
-            <a:off x="4370832" y="2569464"/>
+            <a:off x="5803392" y="2569464"/>
             <a:ext cx="1828800" cy="201168"/>
           </a:xfrm>
           <a:prstGeom prst="rect">
@@ -31292,7 +31498,7 @@
                 <a:ea typeface="Calibri" pitchFamily="34" charset="-122"/>
                 <a:cs typeface="Calibri" pitchFamily="34" charset="-120"/>
               </a:rPr>
-              <a:t>connecting vowel</a:t>
+              <a:t>study of</a:t>
             </a:r>
             <a:endParaRPr lang="en-US" sz="850" dirty="0"/>
           </a:p>
@@ -31300,165 +31506,80 @@
       </p:sp>
       <p:sp>
         <p:nvSpPr>
-          <p:cNvPr id="22" name="Text 20"/>
-          <p:cNvSpPr/>
-          <p:nvPr/>
-        </p:nvSpPr>
-        <p:spPr>
-          <a:xfrm>
-            <a:off x="4370832" y="2752344"/>
-            <a:ext cx="1828800" cy="182880"/>
-          </a:xfrm>
-          <a:prstGeom prst="rect">
-            <a:avLst/>
-          </a:prstGeom>
-          <a:noFill/>
-          <a:ln/>
-        </p:spPr>
-        <p:txBody>
-          <a:bodyPr wrap="square" lIns="0" tIns="0" rIns="0" bIns="0" rtlCol="0" anchor="t"/>
-          <a:lstStyle/>
-          <a:p>
-            <a:pPr algn="ctr" indent="0" marL="0">
-              <a:buNone/>
-            </a:pPr>
-            <a:r>
-              <a:rPr lang="en-US" sz="700" i="1" dirty="0">
-                <a:solidFill>
-                  <a:srgbClr val="94A3B8"/>
-                </a:solidFill>
-                <a:latin typeface="Calibri" pitchFamily="34" charset="0"/>
-                <a:ea typeface="Calibri" pitchFamily="34" charset="-122"/>
-                <a:cs typeface="Calibri" pitchFamily="34" charset="-120"/>
-              </a:rPr>
-              <a:t>links base to suffix</a:t>
-            </a:r>
-            <a:endParaRPr lang="en-US" sz="700" dirty="0"/>
-          </a:p>
-        </p:txBody>
-      </p:sp>
-      <p:sp>
-        <p:nvSpPr>
-          <p:cNvPr id="23" name="Shape 21"/>
-          <p:cNvSpPr/>
-          <p:nvPr/>
-        </p:nvSpPr>
-        <p:spPr>
-          <a:xfrm>
-            <a:off x="6519672" y="2258568"/>
-            <a:ext cx="1828800" cy="292608"/>
+          <p:cNvPr id="22" name="Shape 20"/>
+          <p:cNvSpPr/>
+          <p:nvPr/>
+        </p:nvSpPr>
+        <p:spPr>
+          <a:xfrm>
+            <a:off x="365760" y="3273552"/>
+            <a:ext cx="1371600" cy="658368"/>
           </a:xfrm>
           <a:prstGeom prst="rect">
             <a:avLst>
-              <a:gd name="adj" fmla="val 25000"/>
+              <a:gd name="adj" fmla="val 8333"/>
             </a:avLst>
           </a:prstGeom>
           <a:solidFill>
-            <a:srgbClr val="CCFBF1"/>
-          </a:solidFill>
-          <a:ln w="19050">
-            <a:solidFill>
-              <a:srgbClr val="0D9488"/>
-            </a:solidFill>
-            <a:prstDash val="solid"/>
-          </a:ln>
-          <a:effectLst>
-            <a:outerShdw sx="100000" sy="100000" kx="0" ky="0" algn="bl" rotWithShape="0" blurRad="101600" dist="38100" dir="8100000">
-              <a:srgbClr val="000000">
-                <a:alpha val="12000"/>
-              </a:srgbClr>
-            </a:outerShdw>
-          </a:effectLst>
-        </p:spPr>
-      </p:sp>
-      <p:sp>
-        <p:nvSpPr>
-          <p:cNvPr id="24" name="Text 22"/>
-          <p:cNvSpPr/>
-          <p:nvPr/>
-        </p:nvSpPr>
-        <p:spPr>
-          <a:xfrm>
-            <a:off x="6519672" y="2258568"/>
-            <a:ext cx="1828800" cy="292608"/>
-          </a:xfrm>
-          <a:prstGeom prst="rect">
-            <a:avLst/>
-          </a:prstGeom>
-          <a:noFill/>
-          <a:ln/>
-        </p:spPr>
-        <p:txBody>
-          <a:bodyPr wrap="square" lIns="0" tIns="0" rIns="0" bIns="0" rtlCol="0" anchor="ctr"/>
-          <a:lstStyle/>
-          <a:p>
-            <a:pPr algn="ctr" indent="0" marL="0">
-              <a:buNone/>
-            </a:pPr>
-            <a:r>
-              <a:rPr lang="en-US" sz="1300" b="1" dirty="0">
-                <a:solidFill>
-                  <a:srgbClr val="0F766E"/>
+            <a:srgbClr val="E2E8F0"/>
+          </a:solidFill>
+          <a:ln w="12700">
+            <a:solidFill>
+              <a:srgbClr val="E2E8F0"/>
+            </a:solidFill>
+            <a:prstDash val="solid"/>
+          </a:ln>
+        </p:spPr>
+      </p:sp>
+      <p:sp>
+        <p:nvSpPr>
+          <p:cNvPr id="23" name="Text 21"/>
+          <p:cNvSpPr/>
+          <p:nvPr/>
+        </p:nvSpPr>
+        <p:spPr>
+          <a:xfrm>
+            <a:off x="365760" y="3273552"/>
+            <a:ext cx="1371600" cy="658368"/>
+          </a:xfrm>
+          <a:prstGeom prst="rect">
+            <a:avLst/>
+          </a:prstGeom>
+          <a:noFill/>
+          <a:ln/>
+        </p:spPr>
+        <p:txBody>
+          <a:bodyPr wrap="square" lIns="0" tIns="0" rIns="0" bIns="0" rtlCol="0" anchor="ctr"/>
+          <a:lstStyle/>
+          <a:p>
+            <a:pPr algn="ctr" indent="0" marL="0">
+              <a:buNone/>
+            </a:pPr>
+            <a:r>
+              <a:rPr lang="en-US" sz="1100" b="1" dirty="0">
+                <a:solidFill>
+                  <a:srgbClr val="475569"/>
                 </a:solidFill>
                 <a:latin typeface="Trebuchet MS" pitchFamily="34" charset="0"/>
                 <a:ea typeface="Trebuchet MS" pitchFamily="34" charset="-122"/>
                 <a:cs typeface="Trebuchet MS" pitchFamily="34" charset="-120"/>
               </a:rPr>
-              <a:t>logy</a:t>
-            </a:r>
-            <a:endParaRPr lang="en-US" sz="1300" dirty="0"/>
-          </a:p>
-        </p:txBody>
-      </p:sp>
-      <p:sp>
-        <p:nvSpPr>
-          <p:cNvPr id="25" name="Text 23"/>
-          <p:cNvSpPr/>
-          <p:nvPr/>
-        </p:nvSpPr>
-        <p:spPr>
-          <a:xfrm>
-            <a:off x="6519672" y="2569464"/>
-            <a:ext cx="1828800" cy="201168"/>
-          </a:xfrm>
-          <a:prstGeom prst="rect">
-            <a:avLst/>
-          </a:prstGeom>
-          <a:noFill/>
-          <a:ln/>
-        </p:spPr>
-        <p:txBody>
-          <a:bodyPr wrap="square" lIns="0" tIns="0" rIns="0" bIns="0" rtlCol="0" anchor="t"/>
-          <a:lstStyle/>
-          <a:p>
-            <a:pPr algn="ctr" indent="0" marL="0">
-              <a:buNone/>
-            </a:pPr>
-            <a:r>
-              <a:rPr lang="en-US" sz="850" dirty="0">
-                <a:solidFill>
-                  <a:srgbClr val="475569"/>
-                </a:solidFill>
-                <a:latin typeface="Calibri" pitchFamily="34" charset="0"/>
-                <a:ea typeface="Calibri" pitchFamily="34" charset="-122"/>
-                <a:cs typeface="Calibri" pitchFamily="34" charset="-120"/>
-              </a:rPr>
-              <a:t>study of</a:t>
-            </a:r>
-            <a:endParaRPr lang="en-US" sz="850" dirty="0"/>
-          </a:p>
-        </p:txBody>
-      </p:sp>
-      <p:sp>
-        <p:nvSpPr>
-          <p:cNvPr id="26" name="Shape 24"/>
-          <p:cNvSpPr/>
-          <p:nvPr/>
-        </p:nvSpPr>
-        <p:spPr>
-          <a:xfrm>
-            <a:off x="365760" y="3273552"/>
-            <a:ext cx="1371600" cy="658368"/>
+              <a:t>Syllables</a:t>
+            </a:r>
+            <a:endParaRPr lang="en-US" sz="1100" dirty="0"/>
+          </a:p>
+        </p:txBody>
+      </p:sp>
+      <p:sp>
+        <p:nvSpPr>
+          <p:cNvPr id="24" name="Shape 22"/>
+          <p:cNvSpPr/>
+          <p:nvPr/>
+        </p:nvSpPr>
+        <p:spPr>
+          <a:xfrm>
+            <a:off x="1874520" y="3273552"/>
+            <a:ext cx="6903720" cy="658368"/>
           </a:xfrm>
           <a:prstGeom prst="rect">
             <a:avLst>
@@ -31466,52 +31587,118 @@
             </a:avLst>
           </a:prstGeom>
           <a:solidFill>
-            <a:srgbClr val="E2E8F0"/>
-          </a:solidFill>
-          <a:ln w="12700">
-            <a:solidFill>
-              <a:srgbClr val="E2E8F0"/>
-            </a:solidFill>
-            <a:prstDash val="solid"/>
-          </a:ln>
-        </p:spPr>
-      </p:sp>
-      <p:sp>
-        <p:nvSpPr>
-          <p:cNvPr id="27" name="Text 25"/>
-          <p:cNvSpPr/>
-          <p:nvPr/>
-        </p:nvSpPr>
-        <p:spPr>
-          <a:xfrm>
-            <a:off x="365760" y="3273552"/>
-            <a:ext cx="1371600" cy="658368"/>
-          </a:xfrm>
-          <a:prstGeom prst="rect">
-            <a:avLst/>
-          </a:prstGeom>
-          <a:noFill/>
-          <a:ln/>
-        </p:spPr>
-        <p:txBody>
-          <a:bodyPr wrap="square" lIns="0" tIns="0" rIns="0" bIns="0" rtlCol="0" anchor="ctr"/>
-          <a:lstStyle/>
-          <a:p>
-            <a:pPr algn="ctr" indent="0" marL="0">
-              <a:buNone/>
-            </a:pPr>
-            <a:r>
-              <a:rPr lang="en-US" sz="1100" b="1" dirty="0">
-                <a:solidFill>
-                  <a:srgbClr val="475569"/>
+            <a:srgbClr val="CCFBF1"/>
+          </a:solidFill>
+          <a:ln w="12700">
+            <a:solidFill>
+              <a:srgbClr val="0D9488"/>
+            </a:solidFill>
+            <a:prstDash val="solid"/>
+          </a:ln>
+        </p:spPr>
+      </p:sp>
+      <p:sp>
+        <p:nvSpPr>
+          <p:cNvPr id="25" name="Shape 23"/>
+          <p:cNvSpPr/>
+          <p:nvPr/>
+        </p:nvSpPr>
+        <p:spPr>
+          <a:xfrm>
+            <a:off x="1978152" y="3364992"/>
+            <a:ext cx="1225296" cy="475488"/>
+          </a:xfrm>
+          <a:prstGeom prst="rect">
+            <a:avLst>
+              <a:gd name="adj" fmla="val 9615"/>
+            </a:avLst>
+          </a:prstGeom>
+          <a:solidFill>
+            <a:srgbClr val="FFFFFF"/>
+          </a:solidFill>
+          <a:ln w="12700">
+            <a:solidFill>
+              <a:srgbClr val="0D9488"/>
+            </a:solidFill>
+            <a:prstDash val="solid"/>
+          </a:ln>
+        </p:spPr>
+      </p:sp>
+      <p:sp>
+        <p:nvSpPr>
+          <p:cNvPr id="26" name="Text 24"/>
+          <p:cNvSpPr/>
+          <p:nvPr/>
+        </p:nvSpPr>
+        <p:spPr>
+          <a:xfrm>
+            <a:off x="1978152" y="3364992"/>
+            <a:ext cx="1225296" cy="475488"/>
+          </a:xfrm>
+          <a:prstGeom prst="rect">
+            <a:avLst/>
+          </a:prstGeom>
+          <a:noFill/>
+          <a:ln/>
+        </p:spPr>
+        <p:txBody>
+          <a:bodyPr wrap="square" lIns="0" tIns="0" rIns="0" bIns="0" rtlCol="0" anchor="ctr"/>
+          <a:lstStyle/>
+          <a:p>
+            <a:pPr algn="ctr" indent="0" marL="0">
+              <a:buNone/>
+            </a:pPr>
+            <a:r>
+              <a:rPr lang="en-US" sz="1400" b="1" dirty="0">
+                <a:solidFill>
+                  <a:srgbClr val="0D9488"/>
                 </a:solidFill>
                 <a:latin typeface="Trebuchet MS" pitchFamily="34" charset="0"/>
                 <a:ea typeface="Trebuchet MS" pitchFamily="34" charset="-122"/>
                 <a:cs typeface="Trebuchet MS" pitchFamily="34" charset="-120"/>
               </a:rPr>
-              <a:t>Syllables</a:t>
-            </a:r>
-            <a:endParaRPr lang="en-US" sz="1100" dirty="0"/>
+              <a:t>so</a:t>
+            </a:r>
+            <a:endParaRPr lang="en-US" sz="1400" dirty="0"/>
+          </a:p>
+        </p:txBody>
+      </p:sp>
+      <p:sp>
+        <p:nvSpPr>
+          <p:cNvPr id="27" name="Text 25"/>
+          <p:cNvSpPr/>
+          <p:nvPr/>
+        </p:nvSpPr>
+        <p:spPr>
+          <a:xfrm>
+            <a:off x="3203448" y="3364992"/>
+            <a:ext cx="76200" cy="475488"/>
+          </a:xfrm>
+          <a:prstGeom prst="rect">
+            <a:avLst/>
+          </a:prstGeom>
+          <a:noFill/>
+          <a:ln/>
+        </p:spPr>
+        <p:txBody>
+          <a:bodyPr wrap="square" lIns="0" tIns="0" rIns="0" bIns="0" rtlCol="0" anchor="ctr"/>
+          <a:lstStyle/>
+          <a:p>
+            <a:pPr algn="ctr" indent="0" marL="0">
+              <a:buNone/>
+            </a:pPr>
+            <a:r>
+              <a:rPr lang="en-US" sz="1600" b="1" dirty="0">
+                <a:solidFill>
+                  <a:srgbClr val="0D9488"/>
+                </a:solidFill>
+                <a:latin typeface="Trebuchet MS" pitchFamily="34" charset="0"/>
+                <a:ea typeface="Trebuchet MS" pitchFamily="34" charset="-122"/>
+                <a:cs typeface="Trebuchet MS" pitchFamily="34" charset="-120"/>
+              </a:rPr>
+              <a:t>·</a:t>
+            </a:r>
+            <a:endParaRPr lang="en-US" sz="1600" dirty="0"/>
           </a:p>
         </p:txBody>
       </p:sp>
@@ -31523,35 +31710,8 @@
         </p:nvSpPr>
         <p:spPr>
           <a:xfrm>
-            <a:off x="1874520" y="3273552"/>
-            <a:ext cx="6903720" cy="658368"/>
-          </a:xfrm>
-          <a:prstGeom prst="rect">
-            <a:avLst>
-              <a:gd name="adj" fmla="val 8333"/>
-            </a:avLst>
-          </a:prstGeom>
-          <a:solidFill>
-            <a:srgbClr val="CCFBF1"/>
-          </a:solidFill>
-          <a:ln w="12700">
-            <a:solidFill>
-              <a:srgbClr val="0D9488"/>
-            </a:solidFill>
-            <a:prstDash val="solid"/>
-          </a:ln>
-        </p:spPr>
-      </p:sp>
-      <p:sp>
-        <p:nvSpPr>
-          <p:cNvPr id="29" name="Shape 27"/>
-          <p:cNvSpPr/>
-          <p:nvPr/>
-        </p:nvSpPr>
-        <p:spPr>
-          <a:xfrm>
-            <a:off x="1980329" y="3364992"/>
-            <a:ext cx="1005840" cy="475488"/>
+            <a:off x="3279648" y="3364992"/>
+            <a:ext cx="1225296" cy="475488"/>
           </a:xfrm>
           <a:prstGeom prst="rect">
             <a:avLst>
@@ -31571,14 +31731,14 @@
       </p:sp>
       <p:sp>
         <p:nvSpPr>
-          <p:cNvPr id="30" name="Text 28"/>
-          <p:cNvSpPr/>
-          <p:nvPr/>
-        </p:nvSpPr>
-        <p:spPr>
-          <a:xfrm>
-            <a:off x="1980329" y="3364992"/>
-            <a:ext cx="1005840" cy="475488"/>
+          <p:cNvPr id="29" name="Text 27"/>
+          <p:cNvSpPr/>
+          <p:nvPr/>
+        </p:nvSpPr>
+        <p:spPr>
+          <a:xfrm>
+            <a:off x="3279648" y="3364992"/>
+            <a:ext cx="1225296" cy="475488"/>
           </a:xfrm>
           <a:prstGeom prst="rect">
             <a:avLst/>
@@ -31602,7 +31762,7 @@
                 <a:ea typeface="Trebuchet MS" pitchFamily="34" charset="-122"/>
                 <a:cs typeface="Trebuchet MS" pitchFamily="34" charset="-120"/>
               </a:rPr>
-              <a:t>me</a:t>
+              <a:t>ci</a:t>
             </a:r>
             <a:endParaRPr lang="en-US" sz="1400" dirty="0"/>
           </a:p>
@@ -31610,14 +31770,14 @@
       </p:sp>
       <p:sp>
         <p:nvSpPr>
-          <p:cNvPr id="31" name="Text 29"/>
-          <p:cNvSpPr/>
-          <p:nvPr/>
-        </p:nvSpPr>
-        <p:spPr>
-          <a:xfrm>
-            <a:off x="2986169" y="3364992"/>
-            <a:ext cx="78377" cy="475488"/>
+          <p:cNvPr id="30" name="Text 28"/>
+          <p:cNvSpPr/>
+          <p:nvPr/>
+        </p:nvSpPr>
+        <p:spPr>
+          <a:xfrm>
+            <a:off x="4504944" y="3364992"/>
+            <a:ext cx="76200" cy="475488"/>
           </a:xfrm>
           <a:prstGeom prst="rect">
             <a:avLst/>
@@ -31649,14 +31809,14 @@
       </p:sp>
       <p:sp>
         <p:nvSpPr>
-          <p:cNvPr id="32" name="Shape 30"/>
-          <p:cNvSpPr/>
-          <p:nvPr/>
-        </p:nvSpPr>
-        <p:spPr>
-          <a:xfrm>
-            <a:off x="3064546" y="3364992"/>
-            <a:ext cx="1005840" cy="475488"/>
+          <p:cNvPr id="31" name="Shape 29"/>
+          <p:cNvSpPr/>
+          <p:nvPr/>
+        </p:nvSpPr>
+        <p:spPr>
+          <a:xfrm>
+            <a:off x="4581144" y="3364992"/>
+            <a:ext cx="1225296" cy="475488"/>
           </a:xfrm>
           <a:prstGeom prst="rect">
             <a:avLst>
@@ -31676,14 +31836,14 @@
       </p:sp>
       <p:sp>
         <p:nvSpPr>
-          <p:cNvPr id="33" name="Text 31"/>
-          <p:cNvSpPr/>
-          <p:nvPr/>
-        </p:nvSpPr>
-        <p:spPr>
-          <a:xfrm>
-            <a:off x="3064546" y="3364992"/>
-            <a:ext cx="1005840" cy="475488"/>
+          <p:cNvPr id="32" name="Text 30"/>
+          <p:cNvSpPr/>
+          <p:nvPr/>
+        </p:nvSpPr>
+        <p:spPr>
+          <a:xfrm>
+            <a:off x="4581144" y="3364992"/>
+            <a:ext cx="1225296" cy="475488"/>
           </a:xfrm>
           <a:prstGeom prst="rect">
             <a:avLst/>
@@ -31707,7 +31867,7 @@
                 <a:ea typeface="Trebuchet MS" pitchFamily="34" charset="-122"/>
                 <a:cs typeface="Trebuchet MS" pitchFamily="34" charset="-120"/>
               </a:rPr>
-              <a:t>te</a:t>
+              <a:t>ol</a:t>
             </a:r>
             <a:endParaRPr lang="en-US" sz="1400" dirty="0"/>
           </a:p>
@@ -31715,14 +31875,14 @@
       </p:sp>
       <p:sp>
         <p:nvSpPr>
-          <p:cNvPr id="34" name="Text 32"/>
-          <p:cNvSpPr/>
-          <p:nvPr/>
-        </p:nvSpPr>
-        <p:spPr>
-          <a:xfrm>
-            <a:off x="4070386" y="3364992"/>
-            <a:ext cx="78377" cy="475488"/>
+          <p:cNvPr id="33" name="Text 31"/>
+          <p:cNvSpPr/>
+          <p:nvPr/>
+        </p:nvSpPr>
+        <p:spPr>
+          <a:xfrm>
+            <a:off x="5806440" y="3364992"/>
+            <a:ext cx="76200" cy="475488"/>
           </a:xfrm>
           <a:prstGeom prst="rect">
             <a:avLst/>
@@ -31754,14 +31914,14 @@
       </p:sp>
       <p:sp>
         <p:nvSpPr>
-          <p:cNvPr id="35" name="Shape 33"/>
-          <p:cNvSpPr/>
-          <p:nvPr/>
-        </p:nvSpPr>
-        <p:spPr>
-          <a:xfrm>
-            <a:off x="4148763" y="3364992"/>
-            <a:ext cx="1005840" cy="475488"/>
+          <p:cNvPr id="34" name="Shape 32"/>
+          <p:cNvSpPr/>
+          <p:nvPr/>
+        </p:nvSpPr>
+        <p:spPr>
+          <a:xfrm>
+            <a:off x="5882640" y="3364992"/>
+            <a:ext cx="1225296" cy="475488"/>
           </a:xfrm>
           <a:prstGeom prst="rect">
             <a:avLst>
@@ -31781,14 +31941,14 @@
       </p:sp>
       <p:sp>
         <p:nvSpPr>
-          <p:cNvPr id="36" name="Text 34"/>
-          <p:cNvSpPr/>
-          <p:nvPr/>
-        </p:nvSpPr>
-        <p:spPr>
-          <a:xfrm>
-            <a:off x="4148763" y="3364992"/>
-            <a:ext cx="1005840" cy="475488"/>
+          <p:cNvPr id="35" name="Text 33"/>
+          <p:cNvSpPr/>
+          <p:nvPr/>
+        </p:nvSpPr>
+        <p:spPr>
+          <a:xfrm>
+            <a:off x="5882640" y="3364992"/>
+            <a:ext cx="1225296" cy="475488"/>
           </a:xfrm>
           <a:prstGeom prst="rect">
             <a:avLst/>
@@ -31812,7 +31972,7 @@
                 <a:ea typeface="Trebuchet MS" pitchFamily="34" charset="-122"/>
                 <a:cs typeface="Trebuchet MS" pitchFamily="34" charset="-120"/>
               </a:rPr>
-              <a:t>or</a:t>
+              <a:t>o</a:t>
             </a:r>
             <a:endParaRPr lang="en-US" sz="1400" dirty="0"/>
           </a:p>
@@ -31820,14 +31980,14 @@
       </p:sp>
       <p:sp>
         <p:nvSpPr>
-          <p:cNvPr id="37" name="Text 35"/>
-          <p:cNvSpPr/>
-          <p:nvPr/>
-        </p:nvSpPr>
-        <p:spPr>
-          <a:xfrm>
-            <a:off x="5154603" y="3364992"/>
-            <a:ext cx="78377" cy="475488"/>
+          <p:cNvPr id="36" name="Text 34"/>
+          <p:cNvSpPr/>
+          <p:nvPr/>
+        </p:nvSpPr>
+        <p:spPr>
+          <a:xfrm>
+            <a:off x="7107936" y="3364992"/>
+            <a:ext cx="76200" cy="475488"/>
           </a:xfrm>
           <a:prstGeom prst="rect">
             <a:avLst/>
@@ -31859,14 +32019,14 @@
       </p:sp>
       <p:sp>
         <p:nvSpPr>
-          <p:cNvPr id="38" name="Shape 36"/>
-          <p:cNvSpPr/>
-          <p:nvPr/>
-        </p:nvSpPr>
-        <p:spPr>
-          <a:xfrm>
-            <a:off x="5232981" y="3364992"/>
-            <a:ext cx="1005840" cy="475488"/>
+          <p:cNvPr id="37" name="Shape 35"/>
+          <p:cNvSpPr/>
+          <p:nvPr/>
+        </p:nvSpPr>
+        <p:spPr>
+          <a:xfrm>
+            <a:off x="7184136" y="3364992"/>
+            <a:ext cx="1225296" cy="475488"/>
           </a:xfrm>
           <a:prstGeom prst="rect">
             <a:avLst>
@@ -31886,14 +32046,14 @@
       </p:sp>
       <p:sp>
         <p:nvSpPr>
-          <p:cNvPr id="39" name="Text 37"/>
-          <p:cNvSpPr/>
-          <p:nvPr/>
-        </p:nvSpPr>
-        <p:spPr>
-          <a:xfrm>
-            <a:off x="5232981" y="3364992"/>
-            <a:ext cx="1005840" cy="475488"/>
+          <p:cNvPr id="38" name="Text 36"/>
+          <p:cNvSpPr/>
+          <p:nvPr/>
+        </p:nvSpPr>
+        <p:spPr>
+          <a:xfrm>
+            <a:off x="7184136" y="3364992"/>
+            <a:ext cx="1225296" cy="475488"/>
           </a:xfrm>
           <a:prstGeom prst="rect">
             <a:avLst/>
@@ -31917,7 +32077,7 @@
                 <a:ea typeface="Trebuchet MS" pitchFamily="34" charset="-122"/>
                 <a:cs typeface="Trebuchet MS" pitchFamily="34" charset="-120"/>
               </a:rPr>
-              <a:t>ol</a:t>
+              <a:t>gy</a:t>
             </a:r>
             <a:endParaRPr lang="en-US" sz="1400" dirty="0"/>
           </a:p>
@@ -31925,40 +32085,67 @@
       </p:sp>
       <p:sp>
         <p:nvSpPr>
+          <p:cNvPr id="39" name="Shape 37"/>
+          <p:cNvSpPr/>
+          <p:nvPr/>
+        </p:nvSpPr>
+        <p:spPr>
+          <a:xfrm>
+            <a:off x="365760" y="4096512"/>
+            <a:ext cx="1371600" cy="804672"/>
+          </a:xfrm>
+          <a:prstGeom prst="rect">
+            <a:avLst>
+              <a:gd name="adj" fmla="val 6818"/>
+            </a:avLst>
+          </a:prstGeom>
+          <a:solidFill>
+            <a:srgbClr val="E2E8F0"/>
+          </a:solidFill>
+          <a:ln w="12700">
+            <a:solidFill>
+              <a:srgbClr val="E2E8F0"/>
+            </a:solidFill>
+            <a:prstDash val="solid"/>
+          </a:ln>
+        </p:spPr>
+      </p:sp>
+      <p:sp>
+        <p:nvSpPr>
           <p:cNvPr id="40" name="Text 38"/>
           <p:cNvSpPr/>
           <p:nvPr/>
         </p:nvSpPr>
         <p:spPr>
           <a:xfrm>
-            <a:off x="6238821" y="3364992"/>
-            <a:ext cx="78377" cy="475488"/>
-          </a:xfrm>
-          <a:prstGeom prst="rect">
-            <a:avLst/>
-          </a:prstGeom>
-          <a:noFill/>
-          <a:ln/>
-        </p:spPr>
-        <p:txBody>
-          <a:bodyPr wrap="square" lIns="0" tIns="0" rIns="0" bIns="0" rtlCol="0" anchor="ctr"/>
-          <a:lstStyle/>
-          <a:p>
-            <a:pPr algn="ctr" indent="0" marL="0">
-              <a:buNone/>
-            </a:pPr>
-            <a:r>
-              <a:rPr lang="en-US" sz="1600" b="1" dirty="0">
-                <a:solidFill>
-                  <a:srgbClr val="0D9488"/>
+            <a:off x="365760" y="4096512"/>
+            <a:ext cx="1371600" cy="804672"/>
+          </a:xfrm>
+          <a:prstGeom prst="rect">
+            <a:avLst/>
+          </a:prstGeom>
+          <a:noFill/>
+          <a:ln/>
+        </p:spPr>
+        <p:txBody>
+          <a:bodyPr wrap="square" lIns="0" tIns="0" rIns="0" bIns="0" rtlCol="0" anchor="ctr"/>
+          <a:lstStyle/>
+          <a:p>
+            <a:pPr algn="ctr" indent="0" marL="0">
+              <a:buNone/>
+            </a:pPr>
+            <a:r>
+              <a:rPr lang="en-US" sz="1100" b="1" dirty="0">
+                <a:solidFill>
+                  <a:srgbClr val="475569"/>
                 </a:solidFill>
                 <a:latin typeface="Trebuchet MS" pitchFamily="34" charset="0"/>
                 <a:ea typeface="Trebuchet MS" pitchFamily="34" charset="-122"/>
                 <a:cs typeface="Trebuchet MS" pitchFamily="34" charset="-120"/>
               </a:rPr>
-              <a:t>·</a:t>
-            </a:r>
-            <a:endParaRPr lang="en-US" sz="1600" dirty="0"/>
+              <a:t>Phonemes</a:t>
+            </a:r>
+            <a:endParaRPr lang="en-US" sz="1100" dirty="0"/>
           </a:p>
         </p:txBody>
       </p:sp>
@@ -31970,179 +32157,8 @@
         </p:nvSpPr>
         <p:spPr>
           <a:xfrm>
-            <a:off x="6317198" y="3364992"/>
-            <a:ext cx="1005840" cy="475488"/>
-          </a:xfrm>
-          <a:prstGeom prst="rect">
-            <a:avLst>
-              <a:gd name="adj" fmla="val 9615"/>
-            </a:avLst>
-          </a:prstGeom>
-          <a:solidFill>
-            <a:srgbClr val="FFFFFF"/>
-          </a:solidFill>
-          <a:ln w="12700">
-            <a:solidFill>
-              <a:srgbClr val="0D9488"/>
-            </a:solidFill>
-            <a:prstDash val="solid"/>
-          </a:ln>
-        </p:spPr>
-      </p:sp>
-      <p:sp>
-        <p:nvSpPr>
-          <p:cNvPr id="42" name="Text 40"/>
-          <p:cNvSpPr/>
-          <p:nvPr/>
-        </p:nvSpPr>
-        <p:spPr>
-          <a:xfrm>
-            <a:off x="6317198" y="3364992"/>
-            <a:ext cx="1005840" cy="475488"/>
-          </a:xfrm>
-          <a:prstGeom prst="rect">
-            <a:avLst/>
-          </a:prstGeom>
-          <a:noFill/>
-          <a:ln/>
-        </p:spPr>
-        <p:txBody>
-          <a:bodyPr wrap="square" lIns="0" tIns="0" rIns="0" bIns="0" rtlCol="0" anchor="ctr"/>
-          <a:lstStyle/>
-          <a:p>
-            <a:pPr algn="ctr" indent="0" marL="0">
-              <a:buNone/>
-            </a:pPr>
-            <a:r>
-              <a:rPr lang="en-US" sz="1400" b="1" dirty="0">
-                <a:solidFill>
-                  <a:srgbClr val="0D9488"/>
-                </a:solidFill>
-                <a:latin typeface="Trebuchet MS" pitchFamily="34" charset="0"/>
-                <a:ea typeface="Trebuchet MS" pitchFamily="34" charset="-122"/>
-                <a:cs typeface="Trebuchet MS" pitchFamily="34" charset="-120"/>
-              </a:rPr>
-              <a:t>o</a:t>
-            </a:r>
-            <a:endParaRPr lang="en-US" sz="1400" dirty="0"/>
-          </a:p>
-        </p:txBody>
-      </p:sp>
-      <p:sp>
-        <p:nvSpPr>
-          <p:cNvPr id="43" name="Text 41"/>
-          <p:cNvSpPr/>
-          <p:nvPr/>
-        </p:nvSpPr>
-        <p:spPr>
-          <a:xfrm>
-            <a:off x="7323038" y="3364992"/>
-            <a:ext cx="78377" cy="475488"/>
-          </a:xfrm>
-          <a:prstGeom prst="rect">
-            <a:avLst/>
-          </a:prstGeom>
-          <a:noFill/>
-          <a:ln/>
-        </p:spPr>
-        <p:txBody>
-          <a:bodyPr wrap="square" lIns="0" tIns="0" rIns="0" bIns="0" rtlCol="0" anchor="ctr"/>
-          <a:lstStyle/>
-          <a:p>
-            <a:pPr algn="ctr" indent="0" marL="0">
-              <a:buNone/>
-            </a:pPr>
-            <a:r>
-              <a:rPr lang="en-US" sz="1600" b="1" dirty="0">
-                <a:solidFill>
-                  <a:srgbClr val="0D9488"/>
-                </a:solidFill>
-                <a:latin typeface="Trebuchet MS" pitchFamily="34" charset="0"/>
-                <a:ea typeface="Trebuchet MS" pitchFamily="34" charset="-122"/>
-                <a:cs typeface="Trebuchet MS" pitchFamily="34" charset="-120"/>
-              </a:rPr>
-              <a:t>·</a:t>
-            </a:r>
-            <a:endParaRPr lang="en-US" sz="1600" dirty="0"/>
-          </a:p>
-        </p:txBody>
-      </p:sp>
-      <p:sp>
-        <p:nvSpPr>
-          <p:cNvPr id="44" name="Shape 42"/>
-          <p:cNvSpPr/>
-          <p:nvPr/>
-        </p:nvSpPr>
-        <p:spPr>
-          <a:xfrm>
-            <a:off x="7401415" y="3364992"/>
-            <a:ext cx="1005840" cy="475488"/>
-          </a:xfrm>
-          <a:prstGeom prst="rect">
-            <a:avLst>
-              <a:gd name="adj" fmla="val 9615"/>
-            </a:avLst>
-          </a:prstGeom>
-          <a:solidFill>
-            <a:srgbClr val="FFFFFF"/>
-          </a:solidFill>
-          <a:ln w="12700">
-            <a:solidFill>
-              <a:srgbClr val="0D9488"/>
-            </a:solidFill>
-            <a:prstDash val="solid"/>
-          </a:ln>
-        </p:spPr>
-      </p:sp>
-      <p:sp>
-        <p:nvSpPr>
-          <p:cNvPr id="45" name="Text 43"/>
-          <p:cNvSpPr/>
-          <p:nvPr/>
-        </p:nvSpPr>
-        <p:spPr>
-          <a:xfrm>
-            <a:off x="7401415" y="3364992"/>
-            <a:ext cx="1005840" cy="475488"/>
-          </a:xfrm>
-          <a:prstGeom prst="rect">
-            <a:avLst/>
-          </a:prstGeom>
-          <a:noFill/>
-          <a:ln/>
-        </p:spPr>
-        <p:txBody>
-          <a:bodyPr wrap="square" lIns="0" tIns="0" rIns="0" bIns="0" rtlCol="0" anchor="ctr"/>
-          <a:lstStyle/>
-          <a:p>
-            <a:pPr algn="ctr" indent="0" marL="0">
-              <a:buNone/>
-            </a:pPr>
-            <a:r>
-              <a:rPr lang="en-US" sz="1400" b="1" dirty="0">
-                <a:solidFill>
-                  <a:srgbClr val="0D9488"/>
-                </a:solidFill>
-                <a:latin typeface="Trebuchet MS" pitchFamily="34" charset="0"/>
-                <a:ea typeface="Trebuchet MS" pitchFamily="34" charset="-122"/>
-                <a:cs typeface="Trebuchet MS" pitchFamily="34" charset="-120"/>
-              </a:rPr>
-              <a:t>gy</a:t>
-            </a:r>
-            <a:endParaRPr lang="en-US" sz="1400" dirty="0"/>
-          </a:p>
-        </p:txBody>
-      </p:sp>
-      <p:sp>
-        <p:nvSpPr>
-          <p:cNvPr id="46" name="Shape 44"/>
-          <p:cNvSpPr/>
-          <p:nvPr/>
-        </p:nvSpPr>
-        <p:spPr>
-          <a:xfrm>
-            <a:off x="365760" y="4096512"/>
-            <a:ext cx="1371600" cy="804672"/>
+            <a:off x="1874520" y="4096512"/>
+            <a:ext cx="6903720" cy="804672"/>
           </a:xfrm>
           <a:prstGeom prst="rect">
             <a:avLst>
@@ -32150,85 +32166,19 @@
             </a:avLst>
           </a:prstGeom>
           <a:solidFill>
-            <a:srgbClr val="E2E8F0"/>
+            <a:srgbClr val="F8FAFC"/>
           </a:solidFill>
           <a:ln w="12700">
             <a:solidFill>
               <a:srgbClr val="E2E8F0"/>
             </a:solidFill>
-            <a:prstDash val="solid"/>
-          </a:ln>
-        </p:spPr>
-      </p:sp>
-      <p:sp>
-        <p:nvSpPr>
-          <p:cNvPr id="47" name="Text 45"/>
-          <p:cNvSpPr/>
-          <p:nvPr/>
-        </p:nvSpPr>
-        <p:spPr>
-          <a:xfrm>
-            <a:off x="365760" y="4096512"/>
-            <a:ext cx="1371600" cy="804672"/>
-          </a:xfrm>
-          <a:prstGeom prst="rect">
-            <a:avLst/>
-          </a:prstGeom>
-          <a:noFill/>
-          <a:ln/>
-        </p:spPr>
-        <p:txBody>
-          <a:bodyPr wrap="square" lIns="0" tIns="0" rIns="0" bIns="0" rtlCol="0" anchor="ctr"/>
-          <a:lstStyle/>
-          <a:p>
-            <a:pPr algn="ctr" indent="0" marL="0">
-              <a:buNone/>
-            </a:pPr>
-            <a:r>
-              <a:rPr lang="en-US" sz="1100" b="1" dirty="0">
-                <a:solidFill>
-                  <a:srgbClr val="475569"/>
-                </a:solidFill>
-                <a:latin typeface="Trebuchet MS" pitchFamily="34" charset="0"/>
-                <a:ea typeface="Trebuchet MS" pitchFamily="34" charset="-122"/>
-                <a:cs typeface="Trebuchet MS" pitchFamily="34" charset="-120"/>
-              </a:rPr>
-              <a:t>Phonemes</a:t>
-            </a:r>
-            <a:endParaRPr lang="en-US" sz="1100" dirty="0"/>
-          </a:p>
-        </p:txBody>
-      </p:sp>
-      <p:sp>
-        <p:nvSpPr>
-          <p:cNvPr id="48" name="Shape 46"/>
-          <p:cNvSpPr/>
-          <p:nvPr/>
-        </p:nvSpPr>
-        <p:spPr>
-          <a:xfrm>
-            <a:off x="1874520" y="4096512"/>
-            <a:ext cx="6903720" cy="804672"/>
-          </a:xfrm>
-          <a:prstGeom prst="rect">
-            <a:avLst>
-              <a:gd name="adj" fmla="val 6818"/>
-            </a:avLst>
-          </a:prstGeom>
-          <a:solidFill>
-            <a:srgbClr val="F8FAFC"/>
-          </a:solidFill>
-          <a:ln w="12700">
-            <a:solidFill>
-              <a:srgbClr val="E2E8F0"/>
-            </a:solidFill>
             <a:prstDash val="dash"/>
           </a:ln>
         </p:spPr>
       </p:sp>
       <p:sp>
         <p:nvSpPr>
-          <p:cNvPr id="49" name="Text 47"/>
+          <p:cNvPr id="42" name="Text 40"/>
           <p:cNvSpPr/>
           <p:nvPr/>
         </p:nvSpPr>
@@ -32551,7 +32501,7 @@
                 <a:ea typeface="Calibri" pitchFamily="34" charset="-122"/>
                 <a:cs typeface="Calibri" pitchFamily="34" charset="-120"/>
               </a:rPr>
-              <a:t>Word Labs  •  wordlabs.app  •  Root: 'logy' = study or science of</a:t>
+              <a:t>Word Labs  •  wordlabs.app  •  Root: 'logy' = study of</a:t>
             </a:r>
             <a:endParaRPr lang="en-US" sz="800" dirty="0"/>
           </a:p>
@@ -32690,7 +32640,7 @@
                 <a:ea typeface="Trebuchet MS" pitchFamily="34" charset="-122"/>
                 <a:cs typeface="Trebuchet MS" pitchFamily="34" charset="-120"/>
               </a:rPr>
-              <a:t>meteorology</a:t>
+              <a:t>sociology</a:t>
             </a:r>
             <a:endParaRPr lang="en-US" sz="2800" dirty="0"/>
           </a:p>
@@ -32770,7 +32720,7 @@
         </p:nvSpPr>
         <p:spPr>
           <a:xfrm>
-            <a:off x="2221992" y="2258568"/>
+            <a:off x="2938272" y="2258568"/>
             <a:ext cx="1828800" cy="292608"/>
           </a:xfrm>
           <a:prstGeom prst="rect">
@@ -32804,7 +32754,7 @@
         </p:nvSpPr>
         <p:spPr>
           <a:xfrm>
-            <a:off x="2221992" y="2258568"/>
+            <a:off x="2938272" y="2258568"/>
             <a:ext cx="1828800" cy="292608"/>
           </a:xfrm>
           <a:prstGeom prst="rect">
@@ -32829,7 +32779,7 @@
                 <a:ea typeface="Trebuchet MS" pitchFamily="34" charset="-122"/>
                 <a:cs typeface="Trebuchet MS" pitchFamily="34" charset="-120"/>
               </a:rPr>
-              <a:t>meteor</a:t>
+              <a:t>socio</a:t>
             </a:r>
             <a:endParaRPr lang="en-US" sz="1300" dirty="0"/>
           </a:p>
@@ -32843,7 +32793,7 @@
         </p:nvSpPr>
         <p:spPr>
           <a:xfrm>
-            <a:off x="2221992" y="2569464"/>
+            <a:off x="2938272" y="2569464"/>
             <a:ext cx="1828800" cy="201168"/>
           </a:xfrm>
           <a:prstGeom prst="rect">
@@ -32868,7 +32818,7 @@
                 <a:ea typeface="Calibri" pitchFamily="34" charset="-122"/>
                 <a:cs typeface="Calibri" pitchFamily="34" charset="-120"/>
               </a:rPr>
-              <a:t>atmosphere, sky phenomenon</a:t>
+              <a:t>society; social</a:t>
             </a:r>
             <a:endParaRPr lang="en-US" sz="850" dirty="0"/>
           </a:p>
@@ -32882,7 +32832,7 @@
         </p:nvSpPr>
         <p:spPr>
           <a:xfrm>
-            <a:off x="4370832" y="2258568"/>
+            <a:off x="5803392" y="2258568"/>
             <a:ext cx="1828800" cy="292608"/>
           </a:xfrm>
           <a:prstGeom prst="rect">
@@ -32891,11 +32841,11 @@
             </a:avLst>
           </a:prstGeom>
           <a:solidFill>
-            <a:srgbClr val="FCE7F3"/>
+            <a:srgbClr val="CCFBF1"/>
           </a:solidFill>
           <a:ln w="19050">
             <a:solidFill>
-              <a:srgbClr val="DB2777"/>
+              <a:srgbClr val="0D9488"/>
             </a:solidFill>
             <a:prstDash val="solid"/>
           </a:ln>
@@ -32916,7 +32866,7 @@
         </p:nvSpPr>
         <p:spPr>
           <a:xfrm>
-            <a:off x="4370832" y="2258568"/>
+            <a:off x="5803392" y="2258568"/>
             <a:ext cx="1828800" cy="292608"/>
           </a:xfrm>
           <a:prstGeom prst="rect">
@@ -32935,13 +32885,13 @@
             <a:r>
               <a:rPr lang="en-US" sz="1300" b="1" dirty="0">
                 <a:solidFill>
-                  <a:srgbClr val="9D174D"/>
+                  <a:srgbClr val="0F766E"/>
                 </a:solidFill>
                 <a:latin typeface="Trebuchet MS" pitchFamily="34" charset="0"/>
                 <a:ea typeface="Trebuchet MS" pitchFamily="34" charset="-122"/>
                 <a:cs typeface="Trebuchet MS" pitchFamily="34" charset="-120"/>
               </a:rPr>
-              <a:t>o</a:t>
+              <a:t>logy</a:t>
             </a:r>
             <a:endParaRPr lang="en-US" sz="1300" dirty="0"/>
           </a:p>
@@ -32955,7 +32905,7 @@
         </p:nvSpPr>
         <p:spPr>
           <a:xfrm>
-            <a:off x="4370832" y="2569464"/>
+            <a:off x="5803392" y="2569464"/>
             <a:ext cx="1828800" cy="201168"/>
           </a:xfrm>
           <a:prstGeom prst="rect">
@@ -32980,7 +32930,7 @@
                 <a:ea typeface="Calibri" pitchFamily="34" charset="-122"/>
                 <a:cs typeface="Calibri" pitchFamily="34" charset="-120"/>
               </a:rPr>
-              <a:t>connecting vowel</a:t>
+              <a:t>study of</a:t>
             </a:r>
             <a:endParaRPr lang="en-US" sz="850" dirty="0"/>
           </a:p>
@@ -32988,165 +32938,80 @@
       </p:sp>
       <p:sp>
         <p:nvSpPr>
-          <p:cNvPr id="22" name="Text 20"/>
-          <p:cNvSpPr/>
-          <p:nvPr/>
-        </p:nvSpPr>
-        <p:spPr>
-          <a:xfrm>
-            <a:off x="4370832" y="2752344"/>
-            <a:ext cx="1828800" cy="182880"/>
-          </a:xfrm>
-          <a:prstGeom prst="rect">
-            <a:avLst/>
-          </a:prstGeom>
-          <a:noFill/>
-          <a:ln/>
-        </p:spPr>
-        <p:txBody>
-          <a:bodyPr wrap="square" lIns="0" tIns="0" rIns="0" bIns="0" rtlCol="0" anchor="t"/>
-          <a:lstStyle/>
-          <a:p>
-            <a:pPr algn="ctr" indent="0" marL="0">
-              <a:buNone/>
-            </a:pPr>
-            <a:r>
-              <a:rPr lang="en-US" sz="700" i="1" dirty="0">
-                <a:solidFill>
-                  <a:srgbClr val="94A3B8"/>
-                </a:solidFill>
-                <a:latin typeface="Calibri" pitchFamily="34" charset="0"/>
-                <a:ea typeface="Calibri" pitchFamily="34" charset="-122"/>
-                <a:cs typeface="Calibri" pitchFamily="34" charset="-120"/>
-              </a:rPr>
-              <a:t>links base to suffix</a:t>
-            </a:r>
-            <a:endParaRPr lang="en-US" sz="700" dirty="0"/>
-          </a:p>
-        </p:txBody>
-      </p:sp>
-      <p:sp>
-        <p:nvSpPr>
-          <p:cNvPr id="23" name="Shape 21"/>
-          <p:cNvSpPr/>
-          <p:nvPr/>
-        </p:nvSpPr>
-        <p:spPr>
-          <a:xfrm>
-            <a:off x="6519672" y="2258568"/>
-            <a:ext cx="1828800" cy="292608"/>
+          <p:cNvPr id="22" name="Shape 20"/>
+          <p:cNvSpPr/>
+          <p:nvPr/>
+        </p:nvSpPr>
+        <p:spPr>
+          <a:xfrm>
+            <a:off x="365760" y="3273552"/>
+            <a:ext cx="1371600" cy="658368"/>
           </a:xfrm>
           <a:prstGeom prst="rect">
             <a:avLst>
-              <a:gd name="adj" fmla="val 25000"/>
+              <a:gd name="adj" fmla="val 8333"/>
             </a:avLst>
           </a:prstGeom>
           <a:solidFill>
-            <a:srgbClr val="CCFBF1"/>
-          </a:solidFill>
-          <a:ln w="19050">
-            <a:solidFill>
-              <a:srgbClr val="0D9488"/>
-            </a:solidFill>
-            <a:prstDash val="solid"/>
-          </a:ln>
-          <a:effectLst>
-            <a:outerShdw sx="100000" sy="100000" kx="0" ky="0" algn="bl" rotWithShape="0" blurRad="101600" dist="38100" dir="8100000">
-              <a:srgbClr val="000000">
-                <a:alpha val="12000"/>
-              </a:srgbClr>
-            </a:outerShdw>
-          </a:effectLst>
-        </p:spPr>
-      </p:sp>
-      <p:sp>
-        <p:nvSpPr>
-          <p:cNvPr id="24" name="Text 22"/>
-          <p:cNvSpPr/>
-          <p:nvPr/>
-        </p:nvSpPr>
-        <p:spPr>
-          <a:xfrm>
-            <a:off x="6519672" y="2258568"/>
-            <a:ext cx="1828800" cy="292608"/>
-          </a:xfrm>
-          <a:prstGeom prst="rect">
-            <a:avLst/>
-          </a:prstGeom>
-          <a:noFill/>
-          <a:ln/>
-        </p:spPr>
-        <p:txBody>
-          <a:bodyPr wrap="square" lIns="0" tIns="0" rIns="0" bIns="0" rtlCol="0" anchor="ctr"/>
-          <a:lstStyle/>
-          <a:p>
-            <a:pPr algn="ctr" indent="0" marL="0">
-              <a:buNone/>
-            </a:pPr>
-            <a:r>
-              <a:rPr lang="en-US" sz="1300" b="1" dirty="0">
-                <a:solidFill>
-                  <a:srgbClr val="0F766E"/>
+            <a:srgbClr val="E2E8F0"/>
+          </a:solidFill>
+          <a:ln w="12700">
+            <a:solidFill>
+              <a:srgbClr val="E2E8F0"/>
+            </a:solidFill>
+            <a:prstDash val="solid"/>
+          </a:ln>
+        </p:spPr>
+      </p:sp>
+      <p:sp>
+        <p:nvSpPr>
+          <p:cNvPr id="23" name="Text 21"/>
+          <p:cNvSpPr/>
+          <p:nvPr/>
+        </p:nvSpPr>
+        <p:spPr>
+          <a:xfrm>
+            <a:off x="365760" y="3273552"/>
+            <a:ext cx="1371600" cy="658368"/>
+          </a:xfrm>
+          <a:prstGeom prst="rect">
+            <a:avLst/>
+          </a:prstGeom>
+          <a:noFill/>
+          <a:ln/>
+        </p:spPr>
+        <p:txBody>
+          <a:bodyPr wrap="square" lIns="0" tIns="0" rIns="0" bIns="0" rtlCol="0" anchor="ctr"/>
+          <a:lstStyle/>
+          <a:p>
+            <a:pPr algn="ctr" indent="0" marL="0">
+              <a:buNone/>
+            </a:pPr>
+            <a:r>
+              <a:rPr lang="en-US" sz="1100" b="1" dirty="0">
+                <a:solidFill>
+                  <a:srgbClr val="475569"/>
                 </a:solidFill>
                 <a:latin typeface="Trebuchet MS" pitchFamily="34" charset="0"/>
                 <a:ea typeface="Trebuchet MS" pitchFamily="34" charset="-122"/>
                 <a:cs typeface="Trebuchet MS" pitchFamily="34" charset="-120"/>
               </a:rPr>
-              <a:t>logy</a:t>
-            </a:r>
-            <a:endParaRPr lang="en-US" sz="1300" dirty="0"/>
-          </a:p>
-        </p:txBody>
-      </p:sp>
-      <p:sp>
-        <p:nvSpPr>
-          <p:cNvPr id="25" name="Text 23"/>
-          <p:cNvSpPr/>
-          <p:nvPr/>
-        </p:nvSpPr>
-        <p:spPr>
-          <a:xfrm>
-            <a:off x="6519672" y="2569464"/>
-            <a:ext cx="1828800" cy="201168"/>
-          </a:xfrm>
-          <a:prstGeom prst="rect">
-            <a:avLst/>
-          </a:prstGeom>
-          <a:noFill/>
-          <a:ln/>
-        </p:spPr>
-        <p:txBody>
-          <a:bodyPr wrap="square" lIns="0" tIns="0" rIns="0" bIns="0" rtlCol="0" anchor="t"/>
-          <a:lstStyle/>
-          <a:p>
-            <a:pPr algn="ctr" indent="0" marL="0">
-              <a:buNone/>
-            </a:pPr>
-            <a:r>
-              <a:rPr lang="en-US" sz="850" dirty="0">
-                <a:solidFill>
-                  <a:srgbClr val="475569"/>
-                </a:solidFill>
-                <a:latin typeface="Calibri" pitchFamily="34" charset="0"/>
-                <a:ea typeface="Calibri" pitchFamily="34" charset="-122"/>
-                <a:cs typeface="Calibri" pitchFamily="34" charset="-120"/>
-              </a:rPr>
-              <a:t>study of</a:t>
-            </a:r>
-            <a:endParaRPr lang="en-US" sz="850" dirty="0"/>
-          </a:p>
-        </p:txBody>
-      </p:sp>
-      <p:sp>
-        <p:nvSpPr>
-          <p:cNvPr id="26" name="Shape 24"/>
-          <p:cNvSpPr/>
-          <p:nvPr/>
-        </p:nvSpPr>
-        <p:spPr>
-          <a:xfrm>
-            <a:off x="365760" y="3273552"/>
-            <a:ext cx="1371600" cy="658368"/>
+              <a:t>Syllables</a:t>
+            </a:r>
+            <a:endParaRPr lang="en-US" sz="1100" dirty="0"/>
+          </a:p>
+        </p:txBody>
+      </p:sp>
+      <p:sp>
+        <p:nvSpPr>
+          <p:cNvPr id="24" name="Shape 22"/>
+          <p:cNvSpPr/>
+          <p:nvPr/>
+        </p:nvSpPr>
+        <p:spPr>
+          <a:xfrm>
+            <a:off x="1874520" y="3273552"/>
+            <a:ext cx="6903720" cy="658368"/>
           </a:xfrm>
           <a:prstGeom prst="rect">
             <a:avLst>
@@ -33154,50 +33019,563 @@
             </a:avLst>
           </a:prstGeom>
           <a:solidFill>
-            <a:srgbClr val="E2E8F0"/>
-          </a:solidFill>
-          <a:ln w="12700">
-            <a:solidFill>
-              <a:srgbClr val="E2E8F0"/>
-            </a:solidFill>
-            <a:prstDash val="solid"/>
-          </a:ln>
-        </p:spPr>
-      </p:sp>
-      <p:sp>
-        <p:nvSpPr>
-          <p:cNvPr id="27" name="Text 25"/>
-          <p:cNvSpPr/>
-          <p:nvPr/>
-        </p:nvSpPr>
-        <p:spPr>
-          <a:xfrm>
-            <a:off x="365760" y="3273552"/>
-            <a:ext cx="1371600" cy="658368"/>
-          </a:xfrm>
-          <a:prstGeom prst="rect">
-            <a:avLst/>
-          </a:prstGeom>
-          <a:noFill/>
-          <a:ln/>
-        </p:spPr>
-        <p:txBody>
-          <a:bodyPr wrap="square" lIns="0" tIns="0" rIns="0" bIns="0" rtlCol="0" anchor="ctr"/>
-          <a:lstStyle/>
-          <a:p>
-            <a:pPr algn="ctr" indent="0" marL="0">
-              <a:buNone/>
-            </a:pPr>
-            <a:r>
-              <a:rPr lang="en-US" sz="1100" b="1" dirty="0">
-                <a:solidFill>
-                  <a:srgbClr val="475569"/>
+            <a:srgbClr val="CCFBF1"/>
+          </a:solidFill>
+          <a:ln w="12700">
+            <a:solidFill>
+              <a:srgbClr val="0D9488"/>
+            </a:solidFill>
+            <a:prstDash val="solid"/>
+          </a:ln>
+        </p:spPr>
+      </p:sp>
+      <p:sp>
+        <p:nvSpPr>
+          <p:cNvPr id="25" name="Shape 23"/>
+          <p:cNvSpPr/>
+          <p:nvPr/>
+        </p:nvSpPr>
+        <p:spPr>
+          <a:xfrm>
+            <a:off x="1978152" y="3364992"/>
+            <a:ext cx="1225296" cy="475488"/>
+          </a:xfrm>
+          <a:prstGeom prst="rect">
+            <a:avLst>
+              <a:gd name="adj" fmla="val 9615"/>
+            </a:avLst>
+          </a:prstGeom>
+          <a:solidFill>
+            <a:srgbClr val="FFFFFF"/>
+          </a:solidFill>
+          <a:ln w="12700">
+            <a:solidFill>
+              <a:srgbClr val="0D9488"/>
+            </a:solidFill>
+            <a:prstDash val="solid"/>
+          </a:ln>
+        </p:spPr>
+      </p:sp>
+      <p:sp>
+        <p:nvSpPr>
+          <p:cNvPr id="26" name="Text 24"/>
+          <p:cNvSpPr/>
+          <p:nvPr/>
+        </p:nvSpPr>
+        <p:spPr>
+          <a:xfrm>
+            <a:off x="1978152" y="3364992"/>
+            <a:ext cx="1225296" cy="475488"/>
+          </a:xfrm>
+          <a:prstGeom prst="rect">
+            <a:avLst/>
+          </a:prstGeom>
+          <a:noFill/>
+          <a:ln/>
+        </p:spPr>
+        <p:txBody>
+          <a:bodyPr wrap="square" lIns="0" tIns="0" rIns="0" bIns="0" rtlCol="0" anchor="ctr"/>
+          <a:lstStyle/>
+          <a:p>
+            <a:pPr algn="ctr" indent="0" marL="0">
+              <a:buNone/>
+            </a:pPr>
+            <a:r>
+              <a:rPr lang="en-US" sz="1400" b="1" dirty="0">
+                <a:solidFill>
+                  <a:srgbClr val="0D9488"/>
                 </a:solidFill>
                 <a:latin typeface="Trebuchet MS" pitchFamily="34" charset="0"/>
                 <a:ea typeface="Trebuchet MS" pitchFamily="34" charset="-122"/>
                 <a:cs typeface="Trebuchet MS" pitchFamily="34" charset="-120"/>
               </a:rPr>
-              <a:t>Syllables</a:t>
+              <a:t>so</a:t>
+            </a:r>
+            <a:endParaRPr lang="en-US" sz="1400" dirty="0"/>
+          </a:p>
+        </p:txBody>
+      </p:sp>
+      <p:sp>
+        <p:nvSpPr>
+          <p:cNvPr id="27" name="Text 25"/>
+          <p:cNvSpPr/>
+          <p:nvPr/>
+        </p:nvSpPr>
+        <p:spPr>
+          <a:xfrm>
+            <a:off x="3203448" y="3364992"/>
+            <a:ext cx="76200" cy="475488"/>
+          </a:xfrm>
+          <a:prstGeom prst="rect">
+            <a:avLst/>
+          </a:prstGeom>
+          <a:noFill/>
+          <a:ln/>
+        </p:spPr>
+        <p:txBody>
+          <a:bodyPr wrap="square" lIns="0" tIns="0" rIns="0" bIns="0" rtlCol="0" anchor="ctr"/>
+          <a:lstStyle/>
+          <a:p>
+            <a:pPr algn="ctr" indent="0" marL="0">
+              <a:buNone/>
+            </a:pPr>
+            <a:r>
+              <a:rPr lang="en-US" sz="1600" b="1" dirty="0">
+                <a:solidFill>
+                  <a:srgbClr val="0D9488"/>
+                </a:solidFill>
+                <a:latin typeface="Trebuchet MS" pitchFamily="34" charset="0"/>
+                <a:ea typeface="Trebuchet MS" pitchFamily="34" charset="-122"/>
+                <a:cs typeface="Trebuchet MS" pitchFamily="34" charset="-120"/>
+              </a:rPr>
+              <a:t>·</a:t>
+            </a:r>
+            <a:endParaRPr lang="en-US" sz="1600" dirty="0"/>
+          </a:p>
+        </p:txBody>
+      </p:sp>
+      <p:sp>
+        <p:nvSpPr>
+          <p:cNvPr id="28" name="Shape 26"/>
+          <p:cNvSpPr/>
+          <p:nvPr/>
+        </p:nvSpPr>
+        <p:spPr>
+          <a:xfrm>
+            <a:off x="3279648" y="3364992"/>
+            <a:ext cx="1225296" cy="475488"/>
+          </a:xfrm>
+          <a:prstGeom prst="rect">
+            <a:avLst>
+              <a:gd name="adj" fmla="val 9615"/>
+            </a:avLst>
+          </a:prstGeom>
+          <a:solidFill>
+            <a:srgbClr val="FFFFFF"/>
+          </a:solidFill>
+          <a:ln w="12700">
+            <a:solidFill>
+              <a:srgbClr val="0D9488"/>
+            </a:solidFill>
+            <a:prstDash val="solid"/>
+          </a:ln>
+        </p:spPr>
+      </p:sp>
+      <p:sp>
+        <p:nvSpPr>
+          <p:cNvPr id="29" name="Text 27"/>
+          <p:cNvSpPr/>
+          <p:nvPr/>
+        </p:nvSpPr>
+        <p:spPr>
+          <a:xfrm>
+            <a:off x="3279648" y="3364992"/>
+            <a:ext cx="1225296" cy="475488"/>
+          </a:xfrm>
+          <a:prstGeom prst="rect">
+            <a:avLst/>
+          </a:prstGeom>
+          <a:noFill/>
+          <a:ln/>
+        </p:spPr>
+        <p:txBody>
+          <a:bodyPr wrap="square" lIns="0" tIns="0" rIns="0" bIns="0" rtlCol="0" anchor="ctr"/>
+          <a:lstStyle/>
+          <a:p>
+            <a:pPr algn="ctr" indent="0" marL="0">
+              <a:buNone/>
+            </a:pPr>
+            <a:r>
+              <a:rPr lang="en-US" sz="1400" b="1" dirty="0">
+                <a:solidFill>
+                  <a:srgbClr val="0D9488"/>
+                </a:solidFill>
+                <a:latin typeface="Trebuchet MS" pitchFamily="34" charset="0"/>
+                <a:ea typeface="Trebuchet MS" pitchFamily="34" charset="-122"/>
+                <a:cs typeface="Trebuchet MS" pitchFamily="34" charset="-120"/>
+              </a:rPr>
+              <a:t>ci</a:t>
+            </a:r>
+            <a:endParaRPr lang="en-US" sz="1400" dirty="0"/>
+          </a:p>
+        </p:txBody>
+      </p:sp>
+      <p:sp>
+        <p:nvSpPr>
+          <p:cNvPr id="30" name="Text 28"/>
+          <p:cNvSpPr/>
+          <p:nvPr/>
+        </p:nvSpPr>
+        <p:spPr>
+          <a:xfrm>
+            <a:off x="4504944" y="3364992"/>
+            <a:ext cx="76200" cy="475488"/>
+          </a:xfrm>
+          <a:prstGeom prst="rect">
+            <a:avLst/>
+          </a:prstGeom>
+          <a:noFill/>
+          <a:ln/>
+        </p:spPr>
+        <p:txBody>
+          <a:bodyPr wrap="square" lIns="0" tIns="0" rIns="0" bIns="0" rtlCol="0" anchor="ctr"/>
+          <a:lstStyle/>
+          <a:p>
+            <a:pPr algn="ctr" indent="0" marL="0">
+              <a:buNone/>
+            </a:pPr>
+            <a:r>
+              <a:rPr lang="en-US" sz="1600" b="1" dirty="0">
+                <a:solidFill>
+                  <a:srgbClr val="0D9488"/>
+                </a:solidFill>
+                <a:latin typeface="Trebuchet MS" pitchFamily="34" charset="0"/>
+                <a:ea typeface="Trebuchet MS" pitchFamily="34" charset="-122"/>
+                <a:cs typeface="Trebuchet MS" pitchFamily="34" charset="-120"/>
+              </a:rPr>
+              <a:t>·</a:t>
+            </a:r>
+            <a:endParaRPr lang="en-US" sz="1600" dirty="0"/>
+          </a:p>
+        </p:txBody>
+      </p:sp>
+      <p:sp>
+        <p:nvSpPr>
+          <p:cNvPr id="31" name="Shape 29"/>
+          <p:cNvSpPr/>
+          <p:nvPr/>
+        </p:nvSpPr>
+        <p:spPr>
+          <a:xfrm>
+            <a:off x="4581144" y="3364992"/>
+            <a:ext cx="1225296" cy="475488"/>
+          </a:xfrm>
+          <a:prstGeom prst="rect">
+            <a:avLst>
+              <a:gd name="adj" fmla="val 9615"/>
+            </a:avLst>
+          </a:prstGeom>
+          <a:solidFill>
+            <a:srgbClr val="FFFFFF"/>
+          </a:solidFill>
+          <a:ln w="12700">
+            <a:solidFill>
+              <a:srgbClr val="0D9488"/>
+            </a:solidFill>
+            <a:prstDash val="solid"/>
+          </a:ln>
+        </p:spPr>
+      </p:sp>
+      <p:sp>
+        <p:nvSpPr>
+          <p:cNvPr id="32" name="Text 30"/>
+          <p:cNvSpPr/>
+          <p:nvPr/>
+        </p:nvSpPr>
+        <p:spPr>
+          <a:xfrm>
+            <a:off x="4581144" y="3364992"/>
+            <a:ext cx="1225296" cy="475488"/>
+          </a:xfrm>
+          <a:prstGeom prst="rect">
+            <a:avLst/>
+          </a:prstGeom>
+          <a:noFill/>
+          <a:ln/>
+        </p:spPr>
+        <p:txBody>
+          <a:bodyPr wrap="square" lIns="0" tIns="0" rIns="0" bIns="0" rtlCol="0" anchor="ctr"/>
+          <a:lstStyle/>
+          <a:p>
+            <a:pPr algn="ctr" indent="0" marL="0">
+              <a:buNone/>
+            </a:pPr>
+            <a:r>
+              <a:rPr lang="en-US" sz="1400" b="1" dirty="0">
+                <a:solidFill>
+                  <a:srgbClr val="0D9488"/>
+                </a:solidFill>
+                <a:latin typeface="Trebuchet MS" pitchFamily="34" charset="0"/>
+                <a:ea typeface="Trebuchet MS" pitchFamily="34" charset="-122"/>
+                <a:cs typeface="Trebuchet MS" pitchFamily="34" charset="-120"/>
+              </a:rPr>
+              <a:t>ol</a:t>
+            </a:r>
+            <a:endParaRPr lang="en-US" sz="1400" dirty="0"/>
+          </a:p>
+        </p:txBody>
+      </p:sp>
+      <p:sp>
+        <p:nvSpPr>
+          <p:cNvPr id="33" name="Text 31"/>
+          <p:cNvSpPr/>
+          <p:nvPr/>
+        </p:nvSpPr>
+        <p:spPr>
+          <a:xfrm>
+            <a:off x="5806440" y="3364992"/>
+            <a:ext cx="76200" cy="475488"/>
+          </a:xfrm>
+          <a:prstGeom prst="rect">
+            <a:avLst/>
+          </a:prstGeom>
+          <a:noFill/>
+          <a:ln/>
+        </p:spPr>
+        <p:txBody>
+          <a:bodyPr wrap="square" lIns="0" tIns="0" rIns="0" bIns="0" rtlCol="0" anchor="ctr"/>
+          <a:lstStyle/>
+          <a:p>
+            <a:pPr algn="ctr" indent="0" marL="0">
+              <a:buNone/>
+            </a:pPr>
+            <a:r>
+              <a:rPr lang="en-US" sz="1600" b="1" dirty="0">
+                <a:solidFill>
+                  <a:srgbClr val="0D9488"/>
+                </a:solidFill>
+                <a:latin typeface="Trebuchet MS" pitchFamily="34" charset="0"/>
+                <a:ea typeface="Trebuchet MS" pitchFamily="34" charset="-122"/>
+                <a:cs typeface="Trebuchet MS" pitchFamily="34" charset="-120"/>
+              </a:rPr>
+              <a:t>·</a:t>
+            </a:r>
+            <a:endParaRPr lang="en-US" sz="1600" dirty="0"/>
+          </a:p>
+        </p:txBody>
+      </p:sp>
+      <p:sp>
+        <p:nvSpPr>
+          <p:cNvPr id="34" name="Shape 32"/>
+          <p:cNvSpPr/>
+          <p:nvPr/>
+        </p:nvSpPr>
+        <p:spPr>
+          <a:xfrm>
+            <a:off x="5882640" y="3364992"/>
+            <a:ext cx="1225296" cy="475488"/>
+          </a:xfrm>
+          <a:prstGeom prst="rect">
+            <a:avLst>
+              <a:gd name="adj" fmla="val 9615"/>
+            </a:avLst>
+          </a:prstGeom>
+          <a:solidFill>
+            <a:srgbClr val="FFFFFF"/>
+          </a:solidFill>
+          <a:ln w="12700">
+            <a:solidFill>
+              <a:srgbClr val="0D9488"/>
+            </a:solidFill>
+            <a:prstDash val="solid"/>
+          </a:ln>
+        </p:spPr>
+      </p:sp>
+      <p:sp>
+        <p:nvSpPr>
+          <p:cNvPr id="35" name="Text 33"/>
+          <p:cNvSpPr/>
+          <p:nvPr/>
+        </p:nvSpPr>
+        <p:spPr>
+          <a:xfrm>
+            <a:off x="5882640" y="3364992"/>
+            <a:ext cx="1225296" cy="475488"/>
+          </a:xfrm>
+          <a:prstGeom prst="rect">
+            <a:avLst/>
+          </a:prstGeom>
+          <a:noFill/>
+          <a:ln/>
+        </p:spPr>
+        <p:txBody>
+          <a:bodyPr wrap="square" lIns="0" tIns="0" rIns="0" bIns="0" rtlCol="0" anchor="ctr"/>
+          <a:lstStyle/>
+          <a:p>
+            <a:pPr algn="ctr" indent="0" marL="0">
+              <a:buNone/>
+            </a:pPr>
+            <a:r>
+              <a:rPr lang="en-US" sz="1400" b="1" dirty="0">
+                <a:solidFill>
+                  <a:srgbClr val="0D9488"/>
+                </a:solidFill>
+                <a:latin typeface="Trebuchet MS" pitchFamily="34" charset="0"/>
+                <a:ea typeface="Trebuchet MS" pitchFamily="34" charset="-122"/>
+                <a:cs typeface="Trebuchet MS" pitchFamily="34" charset="-120"/>
+              </a:rPr>
+              <a:t>o</a:t>
+            </a:r>
+            <a:endParaRPr lang="en-US" sz="1400" dirty="0"/>
+          </a:p>
+        </p:txBody>
+      </p:sp>
+      <p:sp>
+        <p:nvSpPr>
+          <p:cNvPr id="36" name="Text 34"/>
+          <p:cNvSpPr/>
+          <p:nvPr/>
+        </p:nvSpPr>
+        <p:spPr>
+          <a:xfrm>
+            <a:off x="7107936" y="3364992"/>
+            <a:ext cx="76200" cy="475488"/>
+          </a:xfrm>
+          <a:prstGeom prst="rect">
+            <a:avLst/>
+          </a:prstGeom>
+          <a:noFill/>
+          <a:ln/>
+        </p:spPr>
+        <p:txBody>
+          <a:bodyPr wrap="square" lIns="0" tIns="0" rIns="0" bIns="0" rtlCol="0" anchor="ctr"/>
+          <a:lstStyle/>
+          <a:p>
+            <a:pPr algn="ctr" indent="0" marL="0">
+              <a:buNone/>
+            </a:pPr>
+            <a:r>
+              <a:rPr lang="en-US" sz="1600" b="1" dirty="0">
+                <a:solidFill>
+                  <a:srgbClr val="0D9488"/>
+                </a:solidFill>
+                <a:latin typeface="Trebuchet MS" pitchFamily="34" charset="0"/>
+                <a:ea typeface="Trebuchet MS" pitchFamily="34" charset="-122"/>
+                <a:cs typeface="Trebuchet MS" pitchFamily="34" charset="-120"/>
+              </a:rPr>
+              <a:t>·</a:t>
+            </a:r>
+            <a:endParaRPr lang="en-US" sz="1600" dirty="0"/>
+          </a:p>
+        </p:txBody>
+      </p:sp>
+      <p:sp>
+        <p:nvSpPr>
+          <p:cNvPr id="37" name="Shape 35"/>
+          <p:cNvSpPr/>
+          <p:nvPr/>
+        </p:nvSpPr>
+        <p:spPr>
+          <a:xfrm>
+            <a:off x="7184136" y="3364992"/>
+            <a:ext cx="1225296" cy="475488"/>
+          </a:xfrm>
+          <a:prstGeom prst="rect">
+            <a:avLst>
+              <a:gd name="adj" fmla="val 9615"/>
+            </a:avLst>
+          </a:prstGeom>
+          <a:solidFill>
+            <a:srgbClr val="FFFFFF"/>
+          </a:solidFill>
+          <a:ln w="12700">
+            <a:solidFill>
+              <a:srgbClr val="0D9488"/>
+            </a:solidFill>
+            <a:prstDash val="solid"/>
+          </a:ln>
+        </p:spPr>
+      </p:sp>
+      <p:sp>
+        <p:nvSpPr>
+          <p:cNvPr id="38" name="Text 36"/>
+          <p:cNvSpPr/>
+          <p:nvPr/>
+        </p:nvSpPr>
+        <p:spPr>
+          <a:xfrm>
+            <a:off x="7184136" y="3364992"/>
+            <a:ext cx="1225296" cy="475488"/>
+          </a:xfrm>
+          <a:prstGeom prst="rect">
+            <a:avLst/>
+          </a:prstGeom>
+          <a:noFill/>
+          <a:ln/>
+        </p:spPr>
+        <p:txBody>
+          <a:bodyPr wrap="square" lIns="0" tIns="0" rIns="0" bIns="0" rtlCol="0" anchor="ctr"/>
+          <a:lstStyle/>
+          <a:p>
+            <a:pPr algn="ctr" indent="0" marL="0">
+              <a:buNone/>
+            </a:pPr>
+            <a:r>
+              <a:rPr lang="en-US" sz="1400" b="1" dirty="0">
+                <a:solidFill>
+                  <a:srgbClr val="0D9488"/>
+                </a:solidFill>
+                <a:latin typeface="Trebuchet MS" pitchFamily="34" charset="0"/>
+                <a:ea typeface="Trebuchet MS" pitchFamily="34" charset="-122"/>
+                <a:cs typeface="Trebuchet MS" pitchFamily="34" charset="-120"/>
+              </a:rPr>
+              <a:t>gy</a:t>
+            </a:r>
+            <a:endParaRPr lang="en-US" sz="1400" dirty="0"/>
+          </a:p>
+        </p:txBody>
+      </p:sp>
+      <p:sp>
+        <p:nvSpPr>
+          <p:cNvPr id="39" name="Shape 37"/>
+          <p:cNvSpPr/>
+          <p:nvPr/>
+        </p:nvSpPr>
+        <p:spPr>
+          <a:xfrm>
+            <a:off x="365760" y="4096512"/>
+            <a:ext cx="1371600" cy="804672"/>
+          </a:xfrm>
+          <a:prstGeom prst="rect">
+            <a:avLst>
+              <a:gd name="adj" fmla="val 6818"/>
+            </a:avLst>
+          </a:prstGeom>
+          <a:solidFill>
+            <a:srgbClr val="E2E8F0"/>
+          </a:solidFill>
+          <a:ln w="12700">
+            <a:solidFill>
+              <a:srgbClr val="E2E8F0"/>
+            </a:solidFill>
+            <a:prstDash val="solid"/>
+          </a:ln>
+        </p:spPr>
+      </p:sp>
+      <p:sp>
+        <p:nvSpPr>
+          <p:cNvPr id="40" name="Text 38"/>
+          <p:cNvSpPr/>
+          <p:nvPr/>
+        </p:nvSpPr>
+        <p:spPr>
+          <a:xfrm>
+            <a:off x="365760" y="4096512"/>
+            <a:ext cx="1371600" cy="804672"/>
+          </a:xfrm>
+          <a:prstGeom prst="rect">
+            <a:avLst/>
+          </a:prstGeom>
+          <a:noFill/>
+          <a:ln/>
+        </p:spPr>
+        <p:txBody>
+          <a:bodyPr wrap="square" lIns="0" tIns="0" rIns="0" bIns="0" rtlCol="0" anchor="ctr"/>
+          <a:lstStyle/>
+          <a:p>
+            <a:pPr algn="ctr" indent="0" marL="0">
+              <a:buNone/>
+            </a:pPr>
+            <a:r>
+              <a:rPr lang="en-US" sz="1100" b="1" dirty="0">
+                <a:solidFill>
+                  <a:srgbClr val="475569"/>
+                </a:solidFill>
+                <a:latin typeface="Trebuchet MS" pitchFamily="34" charset="0"/>
+                <a:ea typeface="Trebuchet MS" pitchFamily="34" charset="-122"/>
+                <a:cs typeface="Trebuchet MS" pitchFamily="34" charset="-120"/>
+              </a:rPr>
+              <a:t>Phonemes</a:t>
             </a:r>
             <a:endParaRPr lang="en-US" sz="1100" dirty="0"/>
           </a:p>
@@ -33205,13 +33583,13 @@
       </p:sp>
       <p:sp>
         <p:nvSpPr>
-          <p:cNvPr id="28" name="Shape 26"/>
-          <p:cNvSpPr/>
-          <p:nvPr/>
-        </p:nvSpPr>
-        <p:spPr>
-          <a:xfrm>
-            <a:off x="1874520" y="3273552"/>
+          <p:cNvPr id="41" name="Shape 39"/>
+          <p:cNvSpPr/>
+          <p:nvPr/>
+        </p:nvSpPr>
+        <p:spPr>
+          <a:xfrm>
+            <a:off x="1874520" y="4096512"/>
             <a:ext cx="6903720" cy="658368"/>
           </a:xfrm>
           <a:prstGeom prst="rect">
@@ -33220,30 +33598,30 @@
             </a:avLst>
           </a:prstGeom>
           <a:solidFill>
-            <a:srgbClr val="CCFBF1"/>
-          </a:solidFill>
-          <a:ln w="12700">
-            <a:solidFill>
-              <a:srgbClr val="0D9488"/>
-            </a:solidFill>
-            <a:prstDash val="solid"/>
-          </a:ln>
-        </p:spPr>
-      </p:sp>
-      <p:sp>
-        <p:nvSpPr>
-          <p:cNvPr id="29" name="Shape 27"/>
-          <p:cNvSpPr/>
-          <p:nvPr/>
-        </p:nvSpPr>
-        <p:spPr>
-          <a:xfrm>
-            <a:off x="1980329" y="3364992"/>
-            <a:ext cx="1005840" cy="475488"/>
+            <a:srgbClr val="FCE7F3"/>
+          </a:solidFill>
+          <a:ln w="12700">
+            <a:solidFill>
+              <a:srgbClr val="DB2777"/>
+            </a:solidFill>
+            <a:prstDash val="solid"/>
+          </a:ln>
+        </p:spPr>
+      </p:sp>
+      <p:sp>
+        <p:nvSpPr>
+          <p:cNvPr id="42" name="Shape 40"/>
+          <p:cNvSpPr/>
+          <p:nvPr/>
+        </p:nvSpPr>
+        <p:spPr>
+          <a:xfrm>
+            <a:off x="2023872" y="4169664"/>
+            <a:ext cx="685800" cy="475488"/>
           </a:xfrm>
           <a:prstGeom prst="rect">
             <a:avLst>
-              <a:gd name="adj" fmla="val 9615"/>
+              <a:gd name="adj" fmla="val 7692"/>
             </a:avLst>
           </a:prstGeom>
           <a:solidFill>
@@ -33251,104 +33629,131 @@
           </a:solidFill>
           <a:ln w="12700">
             <a:solidFill>
-              <a:srgbClr val="0D9488"/>
-            </a:solidFill>
-            <a:prstDash val="solid"/>
-          </a:ln>
-        </p:spPr>
-      </p:sp>
-      <p:sp>
-        <p:nvSpPr>
-          <p:cNvPr id="30" name="Text 28"/>
-          <p:cNvSpPr/>
-          <p:nvPr/>
-        </p:nvSpPr>
-        <p:spPr>
-          <a:xfrm>
-            <a:off x="1980329" y="3364992"/>
-            <a:ext cx="1005840" cy="475488"/>
-          </a:xfrm>
-          <a:prstGeom prst="rect">
-            <a:avLst/>
-          </a:prstGeom>
-          <a:noFill/>
-          <a:ln/>
-        </p:spPr>
-        <p:txBody>
-          <a:bodyPr wrap="square" lIns="0" tIns="0" rIns="0" bIns="0" rtlCol="0" anchor="ctr"/>
-          <a:lstStyle/>
-          <a:p>
-            <a:pPr algn="ctr" indent="0" marL="0">
-              <a:buNone/>
-            </a:pPr>
-            <a:r>
-              <a:rPr lang="en-US" sz="1400" b="1" dirty="0">
-                <a:solidFill>
-                  <a:srgbClr val="0D9488"/>
+              <a:srgbClr val="DB2777"/>
+            </a:solidFill>
+            <a:prstDash val="solid"/>
+          </a:ln>
+        </p:spPr>
+      </p:sp>
+      <p:sp>
+        <p:nvSpPr>
+          <p:cNvPr id="43" name="Text 41"/>
+          <p:cNvSpPr/>
+          <p:nvPr/>
+        </p:nvSpPr>
+        <p:spPr>
+          <a:xfrm>
+            <a:off x="2023872" y="4169664"/>
+            <a:ext cx="685800" cy="475488"/>
+          </a:xfrm>
+          <a:prstGeom prst="rect">
+            <a:avLst/>
+          </a:prstGeom>
+          <a:noFill/>
+          <a:ln/>
+        </p:spPr>
+        <p:txBody>
+          <a:bodyPr wrap="square" lIns="0" tIns="0" rIns="0" bIns="0" rtlCol="0" anchor="ctr"/>
+          <a:lstStyle/>
+          <a:p>
+            <a:pPr algn="ctr" indent="0" marL="0">
+              <a:buNone/>
+            </a:pPr>
+            <a:r>
+              <a:rPr lang="en-US" sz="900" b="1" dirty="0">
+                <a:solidFill>
+                  <a:srgbClr val="9D174D"/>
                 </a:solidFill>
                 <a:latin typeface="Trebuchet MS" pitchFamily="34" charset="0"/>
                 <a:ea typeface="Trebuchet MS" pitchFamily="34" charset="-122"/>
                 <a:cs typeface="Trebuchet MS" pitchFamily="34" charset="-120"/>
               </a:rPr>
-              <a:t>me</a:t>
-            </a:r>
-            <a:endParaRPr lang="en-US" sz="1400" dirty="0"/>
-          </a:p>
-        </p:txBody>
-      </p:sp>
-      <p:sp>
-        <p:nvSpPr>
-          <p:cNvPr id="31" name="Text 29"/>
-          <p:cNvSpPr/>
-          <p:nvPr/>
-        </p:nvSpPr>
-        <p:spPr>
-          <a:xfrm>
-            <a:off x="2986169" y="3364992"/>
-            <a:ext cx="78377" cy="475488"/>
-          </a:xfrm>
-          <a:prstGeom prst="rect">
-            <a:avLst/>
-          </a:prstGeom>
-          <a:noFill/>
-          <a:ln/>
-        </p:spPr>
-        <p:txBody>
-          <a:bodyPr wrap="square" lIns="0" tIns="0" rIns="0" bIns="0" rtlCol="0" anchor="ctr"/>
-          <a:lstStyle/>
-          <a:p>
-            <a:pPr algn="ctr" indent="0" marL="0">
-              <a:buNone/>
-            </a:pPr>
-            <a:r>
-              <a:rPr lang="en-US" sz="1600" b="1" dirty="0">
-                <a:solidFill>
-                  <a:srgbClr val="0D9488"/>
+              <a:t>s</a:t>
+            </a:r>
+            <a:endParaRPr lang="en-US" sz="900" dirty="0"/>
+          </a:p>
+        </p:txBody>
+      </p:sp>
+      <p:sp>
+        <p:nvSpPr>
+          <p:cNvPr id="44" name="Shape 42"/>
+          <p:cNvSpPr/>
+          <p:nvPr/>
+        </p:nvSpPr>
+        <p:spPr>
+          <a:xfrm>
+            <a:off x="2831592" y="4169664"/>
+            <a:ext cx="685800" cy="475488"/>
+          </a:xfrm>
+          <a:prstGeom prst="rect">
+            <a:avLst>
+              <a:gd name="adj" fmla="val 7692"/>
+            </a:avLst>
+          </a:prstGeom>
+          <a:solidFill>
+            <a:srgbClr val="FFFFFF"/>
+          </a:solidFill>
+          <a:ln w="12700">
+            <a:solidFill>
+              <a:srgbClr val="DB2777"/>
+            </a:solidFill>
+            <a:prstDash val="solid"/>
+          </a:ln>
+        </p:spPr>
+      </p:sp>
+      <p:sp>
+        <p:nvSpPr>
+          <p:cNvPr id="45" name="Text 43"/>
+          <p:cNvSpPr/>
+          <p:nvPr/>
+        </p:nvSpPr>
+        <p:spPr>
+          <a:xfrm>
+            <a:off x="2831592" y="4169664"/>
+            <a:ext cx="685800" cy="475488"/>
+          </a:xfrm>
+          <a:prstGeom prst="rect">
+            <a:avLst/>
+          </a:prstGeom>
+          <a:noFill/>
+          <a:ln/>
+        </p:spPr>
+        <p:txBody>
+          <a:bodyPr wrap="square" lIns="0" tIns="0" rIns="0" bIns="0" rtlCol="0" anchor="ctr"/>
+          <a:lstStyle/>
+          <a:p>
+            <a:pPr algn="ctr" indent="0" marL="0">
+              <a:buNone/>
+            </a:pPr>
+            <a:r>
+              <a:rPr lang="en-US" sz="900" b="1" dirty="0">
+                <a:solidFill>
+                  <a:srgbClr val="9D174D"/>
                 </a:solidFill>
                 <a:latin typeface="Trebuchet MS" pitchFamily="34" charset="0"/>
                 <a:ea typeface="Trebuchet MS" pitchFamily="34" charset="-122"/>
                 <a:cs typeface="Trebuchet MS" pitchFamily="34" charset="-120"/>
               </a:rPr>
-              <a:t>·</a:t>
-            </a:r>
-            <a:endParaRPr lang="en-US" sz="1600" dirty="0"/>
-          </a:p>
-        </p:txBody>
-      </p:sp>
-      <p:sp>
-        <p:nvSpPr>
-          <p:cNvPr id="32" name="Shape 30"/>
-          <p:cNvSpPr/>
-          <p:nvPr/>
-        </p:nvSpPr>
-        <p:spPr>
-          <a:xfrm>
-            <a:off x="3064546" y="3364992"/>
-            <a:ext cx="1005840" cy="475488"/>
+              <a:t>o</a:t>
+            </a:r>
+            <a:endParaRPr lang="en-US" sz="900" dirty="0"/>
+          </a:p>
+        </p:txBody>
+      </p:sp>
+      <p:sp>
+        <p:nvSpPr>
+          <p:cNvPr id="46" name="Shape 44"/>
+          <p:cNvSpPr/>
+          <p:nvPr/>
+        </p:nvSpPr>
+        <p:spPr>
+          <a:xfrm>
+            <a:off x="3639312" y="4169664"/>
+            <a:ext cx="685800" cy="475488"/>
           </a:xfrm>
           <a:prstGeom prst="rect">
             <a:avLst>
-              <a:gd name="adj" fmla="val 9615"/>
+              <a:gd name="adj" fmla="val 7692"/>
             </a:avLst>
           </a:prstGeom>
           <a:solidFill>
@@ -33356,104 +33761,131 @@
           </a:solidFill>
           <a:ln w="12700">
             <a:solidFill>
-              <a:srgbClr val="0D9488"/>
-            </a:solidFill>
-            <a:prstDash val="solid"/>
-          </a:ln>
-        </p:spPr>
-      </p:sp>
-      <p:sp>
-        <p:nvSpPr>
-          <p:cNvPr id="33" name="Text 31"/>
-          <p:cNvSpPr/>
-          <p:nvPr/>
-        </p:nvSpPr>
-        <p:spPr>
-          <a:xfrm>
-            <a:off x="3064546" y="3364992"/>
-            <a:ext cx="1005840" cy="475488"/>
-          </a:xfrm>
-          <a:prstGeom prst="rect">
-            <a:avLst/>
-          </a:prstGeom>
-          <a:noFill/>
-          <a:ln/>
-        </p:spPr>
-        <p:txBody>
-          <a:bodyPr wrap="square" lIns="0" tIns="0" rIns="0" bIns="0" rtlCol="0" anchor="ctr"/>
-          <a:lstStyle/>
-          <a:p>
-            <a:pPr algn="ctr" indent="0" marL="0">
-              <a:buNone/>
-            </a:pPr>
-            <a:r>
-              <a:rPr lang="en-US" sz="1400" b="1" dirty="0">
-                <a:solidFill>
-                  <a:srgbClr val="0D9488"/>
+              <a:srgbClr val="DB2777"/>
+            </a:solidFill>
+            <a:prstDash val="solid"/>
+          </a:ln>
+        </p:spPr>
+      </p:sp>
+      <p:sp>
+        <p:nvSpPr>
+          <p:cNvPr id="47" name="Text 45"/>
+          <p:cNvSpPr/>
+          <p:nvPr/>
+        </p:nvSpPr>
+        <p:spPr>
+          <a:xfrm>
+            <a:off x="3639312" y="4169664"/>
+            <a:ext cx="685800" cy="475488"/>
+          </a:xfrm>
+          <a:prstGeom prst="rect">
+            <a:avLst/>
+          </a:prstGeom>
+          <a:noFill/>
+          <a:ln/>
+        </p:spPr>
+        <p:txBody>
+          <a:bodyPr wrap="square" lIns="0" tIns="0" rIns="0" bIns="0" rtlCol="0" anchor="ctr"/>
+          <a:lstStyle/>
+          <a:p>
+            <a:pPr algn="ctr" indent="0" marL="0">
+              <a:buNone/>
+            </a:pPr>
+            <a:r>
+              <a:rPr lang="en-US" sz="900" b="1" dirty="0">
+                <a:solidFill>
+                  <a:srgbClr val="9D174D"/>
                 </a:solidFill>
                 <a:latin typeface="Trebuchet MS" pitchFamily="34" charset="0"/>
                 <a:ea typeface="Trebuchet MS" pitchFamily="34" charset="-122"/>
                 <a:cs typeface="Trebuchet MS" pitchFamily="34" charset="-120"/>
               </a:rPr>
-              <a:t>te</a:t>
-            </a:r>
-            <a:endParaRPr lang="en-US" sz="1400" dirty="0"/>
-          </a:p>
-        </p:txBody>
-      </p:sp>
-      <p:sp>
-        <p:nvSpPr>
-          <p:cNvPr id="34" name="Text 32"/>
-          <p:cNvSpPr/>
-          <p:nvPr/>
-        </p:nvSpPr>
-        <p:spPr>
-          <a:xfrm>
-            <a:off x="4070386" y="3364992"/>
-            <a:ext cx="78377" cy="475488"/>
-          </a:xfrm>
-          <a:prstGeom prst="rect">
-            <a:avLst/>
-          </a:prstGeom>
-          <a:noFill/>
-          <a:ln/>
-        </p:spPr>
-        <p:txBody>
-          <a:bodyPr wrap="square" lIns="0" tIns="0" rIns="0" bIns="0" rtlCol="0" anchor="ctr"/>
-          <a:lstStyle/>
-          <a:p>
-            <a:pPr algn="ctr" indent="0" marL="0">
-              <a:buNone/>
-            </a:pPr>
-            <a:r>
-              <a:rPr lang="en-US" sz="1600" b="1" dirty="0">
-                <a:solidFill>
-                  <a:srgbClr val="0D9488"/>
+              <a:t>ci</a:t>
+            </a:r>
+            <a:endParaRPr lang="en-US" sz="900" dirty="0"/>
+          </a:p>
+        </p:txBody>
+      </p:sp>
+      <p:sp>
+        <p:nvSpPr>
+          <p:cNvPr id="48" name="Shape 46"/>
+          <p:cNvSpPr/>
+          <p:nvPr/>
+        </p:nvSpPr>
+        <p:spPr>
+          <a:xfrm>
+            <a:off x="4447032" y="4169664"/>
+            <a:ext cx="685800" cy="475488"/>
+          </a:xfrm>
+          <a:prstGeom prst="rect">
+            <a:avLst>
+              <a:gd name="adj" fmla="val 7692"/>
+            </a:avLst>
+          </a:prstGeom>
+          <a:solidFill>
+            <a:srgbClr val="FFFFFF"/>
+          </a:solidFill>
+          <a:ln w="12700">
+            <a:solidFill>
+              <a:srgbClr val="DB2777"/>
+            </a:solidFill>
+            <a:prstDash val="solid"/>
+          </a:ln>
+        </p:spPr>
+      </p:sp>
+      <p:sp>
+        <p:nvSpPr>
+          <p:cNvPr id="49" name="Text 47"/>
+          <p:cNvSpPr/>
+          <p:nvPr/>
+        </p:nvSpPr>
+        <p:spPr>
+          <a:xfrm>
+            <a:off x="4447032" y="4169664"/>
+            <a:ext cx="685800" cy="475488"/>
+          </a:xfrm>
+          <a:prstGeom prst="rect">
+            <a:avLst/>
+          </a:prstGeom>
+          <a:noFill/>
+          <a:ln/>
+        </p:spPr>
+        <p:txBody>
+          <a:bodyPr wrap="square" lIns="0" tIns="0" rIns="0" bIns="0" rtlCol="0" anchor="ctr"/>
+          <a:lstStyle/>
+          <a:p>
+            <a:pPr algn="ctr" indent="0" marL="0">
+              <a:buNone/>
+            </a:pPr>
+            <a:r>
+              <a:rPr lang="en-US" sz="900" b="1" dirty="0">
+                <a:solidFill>
+                  <a:srgbClr val="9D174D"/>
                 </a:solidFill>
                 <a:latin typeface="Trebuchet MS" pitchFamily="34" charset="0"/>
                 <a:ea typeface="Trebuchet MS" pitchFamily="34" charset="-122"/>
                 <a:cs typeface="Trebuchet MS" pitchFamily="34" charset="-120"/>
               </a:rPr>
-              <a:t>·</a:t>
-            </a:r>
-            <a:endParaRPr lang="en-US" sz="1600" dirty="0"/>
-          </a:p>
-        </p:txBody>
-      </p:sp>
-      <p:sp>
-        <p:nvSpPr>
-          <p:cNvPr id="35" name="Shape 33"/>
-          <p:cNvSpPr/>
-          <p:nvPr/>
-        </p:nvSpPr>
-        <p:spPr>
-          <a:xfrm>
-            <a:off x="4148763" y="3364992"/>
-            <a:ext cx="1005840" cy="475488"/>
+              <a:t>o</a:t>
+            </a:r>
+            <a:endParaRPr lang="en-US" sz="900" dirty="0"/>
+          </a:p>
+        </p:txBody>
+      </p:sp>
+      <p:sp>
+        <p:nvSpPr>
+          <p:cNvPr id="50" name="Shape 48"/>
+          <p:cNvSpPr/>
+          <p:nvPr/>
+        </p:nvSpPr>
+        <p:spPr>
+          <a:xfrm>
+            <a:off x="5254752" y="4169664"/>
+            <a:ext cx="685800" cy="475488"/>
           </a:xfrm>
           <a:prstGeom prst="rect">
             <a:avLst>
-              <a:gd name="adj" fmla="val 9615"/>
+              <a:gd name="adj" fmla="val 7692"/>
             </a:avLst>
           </a:prstGeom>
           <a:solidFill>
@@ -33461,104 +33893,131 @@
           </a:solidFill>
           <a:ln w="12700">
             <a:solidFill>
-              <a:srgbClr val="0D9488"/>
-            </a:solidFill>
-            <a:prstDash val="solid"/>
-          </a:ln>
-        </p:spPr>
-      </p:sp>
-      <p:sp>
-        <p:nvSpPr>
-          <p:cNvPr id="36" name="Text 34"/>
-          <p:cNvSpPr/>
-          <p:nvPr/>
-        </p:nvSpPr>
-        <p:spPr>
-          <a:xfrm>
-            <a:off x="4148763" y="3364992"/>
-            <a:ext cx="1005840" cy="475488"/>
-          </a:xfrm>
-          <a:prstGeom prst="rect">
-            <a:avLst/>
-          </a:prstGeom>
-          <a:noFill/>
-          <a:ln/>
-        </p:spPr>
-        <p:txBody>
-          <a:bodyPr wrap="square" lIns="0" tIns="0" rIns="0" bIns="0" rtlCol="0" anchor="ctr"/>
-          <a:lstStyle/>
-          <a:p>
-            <a:pPr algn="ctr" indent="0" marL="0">
-              <a:buNone/>
-            </a:pPr>
-            <a:r>
-              <a:rPr lang="en-US" sz="1400" b="1" dirty="0">
-                <a:solidFill>
-                  <a:srgbClr val="0D9488"/>
+              <a:srgbClr val="DB2777"/>
+            </a:solidFill>
+            <a:prstDash val="solid"/>
+          </a:ln>
+        </p:spPr>
+      </p:sp>
+      <p:sp>
+        <p:nvSpPr>
+          <p:cNvPr id="51" name="Text 49"/>
+          <p:cNvSpPr/>
+          <p:nvPr/>
+        </p:nvSpPr>
+        <p:spPr>
+          <a:xfrm>
+            <a:off x="5254752" y="4169664"/>
+            <a:ext cx="685800" cy="475488"/>
+          </a:xfrm>
+          <a:prstGeom prst="rect">
+            <a:avLst/>
+          </a:prstGeom>
+          <a:noFill/>
+          <a:ln/>
+        </p:spPr>
+        <p:txBody>
+          <a:bodyPr wrap="square" lIns="0" tIns="0" rIns="0" bIns="0" rtlCol="0" anchor="ctr"/>
+          <a:lstStyle/>
+          <a:p>
+            <a:pPr algn="ctr" indent="0" marL="0">
+              <a:buNone/>
+            </a:pPr>
+            <a:r>
+              <a:rPr lang="en-US" sz="900" b="1" dirty="0">
+                <a:solidFill>
+                  <a:srgbClr val="9D174D"/>
                 </a:solidFill>
                 <a:latin typeface="Trebuchet MS" pitchFamily="34" charset="0"/>
                 <a:ea typeface="Trebuchet MS" pitchFamily="34" charset="-122"/>
                 <a:cs typeface="Trebuchet MS" pitchFamily="34" charset="-120"/>
               </a:rPr>
-              <a:t>or</a:t>
-            </a:r>
-            <a:endParaRPr lang="en-US" sz="1400" dirty="0"/>
-          </a:p>
-        </p:txBody>
-      </p:sp>
-      <p:sp>
-        <p:nvSpPr>
-          <p:cNvPr id="37" name="Text 35"/>
-          <p:cNvSpPr/>
-          <p:nvPr/>
-        </p:nvSpPr>
-        <p:spPr>
-          <a:xfrm>
-            <a:off x="5154603" y="3364992"/>
-            <a:ext cx="78377" cy="475488"/>
-          </a:xfrm>
-          <a:prstGeom prst="rect">
-            <a:avLst/>
-          </a:prstGeom>
-          <a:noFill/>
-          <a:ln/>
-        </p:spPr>
-        <p:txBody>
-          <a:bodyPr wrap="square" lIns="0" tIns="0" rIns="0" bIns="0" rtlCol="0" anchor="ctr"/>
-          <a:lstStyle/>
-          <a:p>
-            <a:pPr algn="ctr" indent="0" marL="0">
-              <a:buNone/>
-            </a:pPr>
-            <a:r>
-              <a:rPr lang="en-US" sz="1600" b="1" dirty="0">
-                <a:solidFill>
-                  <a:srgbClr val="0D9488"/>
+              <a:t>l</a:t>
+            </a:r>
+            <a:endParaRPr lang="en-US" sz="900" dirty="0"/>
+          </a:p>
+        </p:txBody>
+      </p:sp>
+      <p:sp>
+        <p:nvSpPr>
+          <p:cNvPr id="52" name="Shape 50"/>
+          <p:cNvSpPr/>
+          <p:nvPr/>
+        </p:nvSpPr>
+        <p:spPr>
+          <a:xfrm>
+            <a:off x="6062472" y="4169664"/>
+            <a:ext cx="685800" cy="475488"/>
+          </a:xfrm>
+          <a:prstGeom prst="rect">
+            <a:avLst>
+              <a:gd name="adj" fmla="val 7692"/>
+            </a:avLst>
+          </a:prstGeom>
+          <a:solidFill>
+            <a:srgbClr val="FFFFFF"/>
+          </a:solidFill>
+          <a:ln w="12700">
+            <a:solidFill>
+              <a:srgbClr val="DB2777"/>
+            </a:solidFill>
+            <a:prstDash val="solid"/>
+          </a:ln>
+        </p:spPr>
+      </p:sp>
+      <p:sp>
+        <p:nvSpPr>
+          <p:cNvPr id="53" name="Text 51"/>
+          <p:cNvSpPr/>
+          <p:nvPr/>
+        </p:nvSpPr>
+        <p:spPr>
+          <a:xfrm>
+            <a:off x="6062472" y="4169664"/>
+            <a:ext cx="685800" cy="475488"/>
+          </a:xfrm>
+          <a:prstGeom prst="rect">
+            <a:avLst/>
+          </a:prstGeom>
+          <a:noFill/>
+          <a:ln/>
+        </p:spPr>
+        <p:txBody>
+          <a:bodyPr wrap="square" lIns="0" tIns="0" rIns="0" bIns="0" rtlCol="0" anchor="ctr"/>
+          <a:lstStyle/>
+          <a:p>
+            <a:pPr algn="ctr" indent="0" marL="0">
+              <a:buNone/>
+            </a:pPr>
+            <a:r>
+              <a:rPr lang="en-US" sz="900" b="1" dirty="0">
+                <a:solidFill>
+                  <a:srgbClr val="9D174D"/>
                 </a:solidFill>
                 <a:latin typeface="Trebuchet MS" pitchFamily="34" charset="0"/>
                 <a:ea typeface="Trebuchet MS" pitchFamily="34" charset="-122"/>
                 <a:cs typeface="Trebuchet MS" pitchFamily="34" charset="-120"/>
               </a:rPr>
-              <a:t>·</a:t>
-            </a:r>
-            <a:endParaRPr lang="en-US" sz="1600" dirty="0"/>
-          </a:p>
-        </p:txBody>
-      </p:sp>
-      <p:sp>
-        <p:nvSpPr>
-          <p:cNvPr id="38" name="Shape 36"/>
-          <p:cNvSpPr/>
-          <p:nvPr/>
-        </p:nvSpPr>
-        <p:spPr>
-          <a:xfrm>
-            <a:off x="5232981" y="3364992"/>
-            <a:ext cx="1005840" cy="475488"/>
+              <a:t>o</a:t>
+            </a:r>
+            <a:endParaRPr lang="en-US" sz="900" dirty="0"/>
+          </a:p>
+        </p:txBody>
+      </p:sp>
+      <p:sp>
+        <p:nvSpPr>
+          <p:cNvPr id="54" name="Shape 52"/>
+          <p:cNvSpPr/>
+          <p:nvPr/>
+        </p:nvSpPr>
+        <p:spPr>
+          <a:xfrm>
+            <a:off x="6870192" y="4169664"/>
+            <a:ext cx="685800" cy="475488"/>
           </a:xfrm>
           <a:prstGeom prst="rect">
             <a:avLst>
-              <a:gd name="adj" fmla="val 9615"/>
+              <a:gd name="adj" fmla="val 7692"/>
             </a:avLst>
           </a:prstGeom>
           <a:solidFill>
@@ -33566,943 +34025,112 @@
           </a:solidFill>
           <a:ln w="12700">
             <a:solidFill>
-              <a:srgbClr val="0D9488"/>
-            </a:solidFill>
-            <a:prstDash val="solid"/>
-          </a:ln>
-        </p:spPr>
-      </p:sp>
-      <p:sp>
-        <p:nvSpPr>
-          <p:cNvPr id="39" name="Text 37"/>
-          <p:cNvSpPr/>
-          <p:nvPr/>
-        </p:nvSpPr>
-        <p:spPr>
-          <a:xfrm>
-            <a:off x="5232981" y="3364992"/>
-            <a:ext cx="1005840" cy="475488"/>
-          </a:xfrm>
-          <a:prstGeom prst="rect">
-            <a:avLst/>
-          </a:prstGeom>
-          <a:noFill/>
-          <a:ln/>
-        </p:spPr>
-        <p:txBody>
-          <a:bodyPr wrap="square" lIns="0" tIns="0" rIns="0" bIns="0" rtlCol="0" anchor="ctr"/>
-          <a:lstStyle/>
-          <a:p>
-            <a:pPr algn="ctr" indent="0" marL="0">
-              <a:buNone/>
-            </a:pPr>
-            <a:r>
-              <a:rPr lang="en-US" sz="1400" b="1" dirty="0">
-                <a:solidFill>
-                  <a:srgbClr val="0D9488"/>
+              <a:srgbClr val="DB2777"/>
+            </a:solidFill>
+            <a:prstDash val="solid"/>
+          </a:ln>
+        </p:spPr>
+      </p:sp>
+      <p:sp>
+        <p:nvSpPr>
+          <p:cNvPr id="55" name="Text 53"/>
+          <p:cNvSpPr/>
+          <p:nvPr/>
+        </p:nvSpPr>
+        <p:spPr>
+          <a:xfrm>
+            <a:off x="6870192" y="4169664"/>
+            <a:ext cx="685800" cy="475488"/>
+          </a:xfrm>
+          <a:prstGeom prst="rect">
+            <a:avLst/>
+          </a:prstGeom>
+          <a:noFill/>
+          <a:ln/>
+        </p:spPr>
+        <p:txBody>
+          <a:bodyPr wrap="square" lIns="0" tIns="0" rIns="0" bIns="0" rtlCol="0" anchor="ctr"/>
+          <a:lstStyle/>
+          <a:p>
+            <a:pPr algn="ctr" indent="0" marL="0">
+              <a:buNone/>
+            </a:pPr>
+            <a:r>
+              <a:rPr lang="en-US" sz="900" b="1" dirty="0">
+                <a:solidFill>
+                  <a:srgbClr val="9D174D"/>
                 </a:solidFill>
                 <a:latin typeface="Trebuchet MS" pitchFamily="34" charset="0"/>
                 <a:ea typeface="Trebuchet MS" pitchFamily="34" charset="-122"/>
                 <a:cs typeface="Trebuchet MS" pitchFamily="34" charset="-120"/>
               </a:rPr>
-              <a:t>ol</a:t>
-            </a:r>
-            <a:endParaRPr lang="en-US" sz="1400" dirty="0"/>
-          </a:p>
-        </p:txBody>
-      </p:sp>
-      <p:sp>
-        <p:nvSpPr>
-          <p:cNvPr id="40" name="Text 38"/>
-          <p:cNvSpPr/>
-          <p:nvPr/>
-        </p:nvSpPr>
-        <p:spPr>
-          <a:xfrm>
-            <a:off x="6238821" y="3364992"/>
-            <a:ext cx="78377" cy="475488"/>
-          </a:xfrm>
-          <a:prstGeom prst="rect">
-            <a:avLst/>
-          </a:prstGeom>
-          <a:noFill/>
-          <a:ln/>
-        </p:spPr>
-        <p:txBody>
-          <a:bodyPr wrap="square" lIns="0" tIns="0" rIns="0" bIns="0" rtlCol="0" anchor="ctr"/>
-          <a:lstStyle/>
-          <a:p>
-            <a:pPr algn="ctr" indent="0" marL="0">
-              <a:buNone/>
-            </a:pPr>
-            <a:r>
-              <a:rPr lang="en-US" sz="1600" b="1" dirty="0">
-                <a:solidFill>
-                  <a:srgbClr val="0D9488"/>
+              <a:t>g</a:t>
+            </a:r>
+            <a:endParaRPr lang="en-US" sz="900" dirty="0"/>
+          </a:p>
+        </p:txBody>
+      </p:sp>
+      <p:sp>
+        <p:nvSpPr>
+          <p:cNvPr id="56" name="Shape 54"/>
+          <p:cNvSpPr/>
+          <p:nvPr/>
+        </p:nvSpPr>
+        <p:spPr>
+          <a:xfrm>
+            <a:off x="7677912" y="4169664"/>
+            <a:ext cx="685800" cy="475488"/>
+          </a:xfrm>
+          <a:prstGeom prst="rect">
+            <a:avLst>
+              <a:gd name="adj" fmla="val 7692"/>
+            </a:avLst>
+          </a:prstGeom>
+          <a:solidFill>
+            <a:srgbClr val="FFFFFF"/>
+          </a:solidFill>
+          <a:ln w="12700">
+            <a:solidFill>
+              <a:srgbClr val="DB2777"/>
+            </a:solidFill>
+            <a:prstDash val="solid"/>
+          </a:ln>
+        </p:spPr>
+      </p:sp>
+      <p:sp>
+        <p:nvSpPr>
+          <p:cNvPr id="57" name="Text 55"/>
+          <p:cNvSpPr/>
+          <p:nvPr/>
+        </p:nvSpPr>
+        <p:spPr>
+          <a:xfrm>
+            <a:off x="7677912" y="4169664"/>
+            <a:ext cx="685800" cy="475488"/>
+          </a:xfrm>
+          <a:prstGeom prst="rect">
+            <a:avLst/>
+          </a:prstGeom>
+          <a:noFill/>
+          <a:ln/>
+        </p:spPr>
+        <p:txBody>
+          <a:bodyPr wrap="square" lIns="0" tIns="0" rIns="0" bIns="0" rtlCol="0" anchor="ctr"/>
+          <a:lstStyle/>
+          <a:p>
+            <a:pPr algn="ctr" indent="0" marL="0">
+              <a:buNone/>
+            </a:pPr>
+            <a:r>
+              <a:rPr lang="en-US" sz="900" b="1" dirty="0">
+                <a:solidFill>
+                  <a:srgbClr val="9D174D"/>
                 </a:solidFill>
                 <a:latin typeface="Trebuchet MS" pitchFamily="34" charset="0"/>
                 <a:ea typeface="Trebuchet MS" pitchFamily="34" charset="-122"/>
                 <a:cs typeface="Trebuchet MS" pitchFamily="34" charset="-120"/>
               </a:rPr>
-              <a:t>·</a:t>
-            </a:r>
-            <a:endParaRPr lang="en-US" sz="1600" dirty="0"/>
-          </a:p>
-        </p:txBody>
-      </p:sp>
-      <p:sp>
-        <p:nvSpPr>
-          <p:cNvPr id="41" name="Shape 39"/>
-          <p:cNvSpPr/>
-          <p:nvPr/>
-        </p:nvSpPr>
-        <p:spPr>
-          <a:xfrm>
-            <a:off x="6317198" y="3364992"/>
-            <a:ext cx="1005840" cy="475488"/>
-          </a:xfrm>
-          <a:prstGeom prst="rect">
-            <a:avLst>
-              <a:gd name="adj" fmla="val 9615"/>
-            </a:avLst>
-          </a:prstGeom>
-          <a:solidFill>
-            <a:srgbClr val="FFFFFF"/>
-          </a:solidFill>
-          <a:ln w="12700">
-            <a:solidFill>
-              <a:srgbClr val="0D9488"/>
-            </a:solidFill>
-            <a:prstDash val="solid"/>
-          </a:ln>
-        </p:spPr>
-      </p:sp>
-      <p:sp>
-        <p:nvSpPr>
-          <p:cNvPr id="42" name="Text 40"/>
-          <p:cNvSpPr/>
-          <p:nvPr/>
-        </p:nvSpPr>
-        <p:spPr>
-          <a:xfrm>
-            <a:off x="6317198" y="3364992"/>
-            <a:ext cx="1005840" cy="475488"/>
-          </a:xfrm>
-          <a:prstGeom prst="rect">
-            <a:avLst/>
-          </a:prstGeom>
-          <a:noFill/>
-          <a:ln/>
-        </p:spPr>
-        <p:txBody>
-          <a:bodyPr wrap="square" lIns="0" tIns="0" rIns="0" bIns="0" rtlCol="0" anchor="ctr"/>
-          <a:lstStyle/>
-          <a:p>
-            <a:pPr algn="ctr" indent="0" marL="0">
-              <a:buNone/>
-            </a:pPr>
-            <a:r>
-              <a:rPr lang="en-US" sz="1400" b="1" dirty="0">
-                <a:solidFill>
-                  <a:srgbClr val="0D9488"/>
-                </a:solidFill>
-                <a:latin typeface="Trebuchet MS" pitchFamily="34" charset="0"/>
-                <a:ea typeface="Trebuchet MS" pitchFamily="34" charset="-122"/>
-                <a:cs typeface="Trebuchet MS" pitchFamily="34" charset="-120"/>
-              </a:rPr>
-              <a:t>o</a:t>
-            </a:r>
-            <a:endParaRPr lang="en-US" sz="1400" dirty="0"/>
-          </a:p>
-        </p:txBody>
-      </p:sp>
-      <p:sp>
-        <p:nvSpPr>
-          <p:cNvPr id="43" name="Text 41"/>
-          <p:cNvSpPr/>
-          <p:nvPr/>
-        </p:nvSpPr>
-        <p:spPr>
-          <a:xfrm>
-            <a:off x="7323038" y="3364992"/>
-            <a:ext cx="78377" cy="475488"/>
-          </a:xfrm>
-          <a:prstGeom prst="rect">
-            <a:avLst/>
-          </a:prstGeom>
-          <a:noFill/>
-          <a:ln/>
-        </p:spPr>
-        <p:txBody>
-          <a:bodyPr wrap="square" lIns="0" tIns="0" rIns="0" bIns="0" rtlCol="0" anchor="ctr"/>
-          <a:lstStyle/>
-          <a:p>
-            <a:pPr algn="ctr" indent="0" marL="0">
-              <a:buNone/>
-            </a:pPr>
-            <a:r>
-              <a:rPr lang="en-US" sz="1600" b="1" dirty="0">
-                <a:solidFill>
-                  <a:srgbClr val="0D9488"/>
-                </a:solidFill>
-                <a:latin typeface="Trebuchet MS" pitchFamily="34" charset="0"/>
-                <a:ea typeface="Trebuchet MS" pitchFamily="34" charset="-122"/>
-                <a:cs typeface="Trebuchet MS" pitchFamily="34" charset="-120"/>
-              </a:rPr>
-              <a:t>·</a:t>
-            </a:r>
-            <a:endParaRPr lang="en-US" sz="1600" dirty="0"/>
-          </a:p>
-        </p:txBody>
-      </p:sp>
-      <p:sp>
-        <p:nvSpPr>
-          <p:cNvPr id="44" name="Shape 42"/>
-          <p:cNvSpPr/>
-          <p:nvPr/>
-        </p:nvSpPr>
-        <p:spPr>
-          <a:xfrm>
-            <a:off x="7401415" y="3364992"/>
-            <a:ext cx="1005840" cy="475488"/>
-          </a:xfrm>
-          <a:prstGeom prst="rect">
-            <a:avLst>
-              <a:gd name="adj" fmla="val 9615"/>
-            </a:avLst>
-          </a:prstGeom>
-          <a:solidFill>
-            <a:srgbClr val="FFFFFF"/>
-          </a:solidFill>
-          <a:ln w="12700">
-            <a:solidFill>
-              <a:srgbClr val="0D9488"/>
-            </a:solidFill>
-            <a:prstDash val="solid"/>
-          </a:ln>
-        </p:spPr>
-      </p:sp>
-      <p:sp>
-        <p:nvSpPr>
-          <p:cNvPr id="45" name="Text 43"/>
-          <p:cNvSpPr/>
-          <p:nvPr/>
-        </p:nvSpPr>
-        <p:spPr>
-          <a:xfrm>
-            <a:off x="7401415" y="3364992"/>
-            <a:ext cx="1005840" cy="475488"/>
-          </a:xfrm>
-          <a:prstGeom prst="rect">
-            <a:avLst/>
-          </a:prstGeom>
-          <a:noFill/>
-          <a:ln/>
-        </p:spPr>
-        <p:txBody>
-          <a:bodyPr wrap="square" lIns="0" tIns="0" rIns="0" bIns="0" rtlCol="0" anchor="ctr"/>
-          <a:lstStyle/>
-          <a:p>
-            <a:pPr algn="ctr" indent="0" marL="0">
-              <a:buNone/>
-            </a:pPr>
-            <a:r>
-              <a:rPr lang="en-US" sz="1400" b="1" dirty="0">
-                <a:solidFill>
-                  <a:srgbClr val="0D9488"/>
-                </a:solidFill>
-                <a:latin typeface="Trebuchet MS" pitchFamily="34" charset="0"/>
-                <a:ea typeface="Trebuchet MS" pitchFamily="34" charset="-122"/>
-                <a:cs typeface="Trebuchet MS" pitchFamily="34" charset="-120"/>
-              </a:rPr>
-              <a:t>gy</a:t>
-            </a:r>
-            <a:endParaRPr lang="en-US" sz="1400" dirty="0"/>
-          </a:p>
-        </p:txBody>
-      </p:sp>
-      <p:sp>
-        <p:nvSpPr>
-          <p:cNvPr id="46" name="Shape 44"/>
-          <p:cNvSpPr/>
-          <p:nvPr/>
-        </p:nvSpPr>
-        <p:spPr>
-          <a:xfrm>
-            <a:off x="365760" y="4096512"/>
-            <a:ext cx="1371600" cy="804672"/>
-          </a:xfrm>
-          <a:prstGeom prst="rect">
-            <a:avLst>
-              <a:gd name="adj" fmla="val 6818"/>
-            </a:avLst>
-          </a:prstGeom>
-          <a:solidFill>
-            <a:srgbClr val="E2E8F0"/>
-          </a:solidFill>
-          <a:ln w="12700">
-            <a:solidFill>
-              <a:srgbClr val="E2E8F0"/>
-            </a:solidFill>
-            <a:prstDash val="solid"/>
-          </a:ln>
-        </p:spPr>
-      </p:sp>
-      <p:sp>
-        <p:nvSpPr>
-          <p:cNvPr id="47" name="Text 45"/>
-          <p:cNvSpPr/>
-          <p:nvPr/>
-        </p:nvSpPr>
-        <p:spPr>
-          <a:xfrm>
-            <a:off x="365760" y="4096512"/>
-            <a:ext cx="1371600" cy="804672"/>
-          </a:xfrm>
-          <a:prstGeom prst="rect">
-            <a:avLst/>
-          </a:prstGeom>
-          <a:noFill/>
-          <a:ln/>
-        </p:spPr>
-        <p:txBody>
-          <a:bodyPr wrap="square" lIns="0" tIns="0" rIns="0" bIns="0" rtlCol="0" anchor="ctr"/>
-          <a:lstStyle/>
-          <a:p>
-            <a:pPr algn="ctr" indent="0" marL="0">
-              <a:buNone/>
-            </a:pPr>
-            <a:r>
-              <a:rPr lang="en-US" sz="1100" b="1" dirty="0">
-                <a:solidFill>
-                  <a:srgbClr val="475569"/>
-                </a:solidFill>
-                <a:latin typeface="Trebuchet MS" pitchFamily="34" charset="0"/>
-                <a:ea typeface="Trebuchet MS" pitchFamily="34" charset="-122"/>
-                <a:cs typeface="Trebuchet MS" pitchFamily="34" charset="-120"/>
-              </a:rPr>
-              <a:t>Phonemes</a:t>
-            </a:r>
-            <a:endParaRPr lang="en-US" sz="1100" dirty="0"/>
-          </a:p>
-        </p:txBody>
-      </p:sp>
-      <p:sp>
-        <p:nvSpPr>
-          <p:cNvPr id="48" name="Shape 46"/>
-          <p:cNvSpPr/>
-          <p:nvPr/>
-        </p:nvSpPr>
-        <p:spPr>
-          <a:xfrm>
-            <a:off x="1874520" y="4096512"/>
-            <a:ext cx="6903720" cy="658368"/>
-          </a:xfrm>
-          <a:prstGeom prst="rect">
-            <a:avLst>
-              <a:gd name="adj" fmla="val 8333"/>
-            </a:avLst>
-          </a:prstGeom>
-          <a:solidFill>
-            <a:srgbClr val="FCE7F3"/>
-          </a:solidFill>
-          <a:ln w="12700">
-            <a:solidFill>
-              <a:srgbClr val="DB2777"/>
-            </a:solidFill>
-            <a:prstDash val="solid"/>
-          </a:ln>
-        </p:spPr>
-      </p:sp>
-      <p:sp>
-        <p:nvSpPr>
-          <p:cNvPr id="49" name="Shape 47"/>
-          <p:cNvSpPr/>
-          <p:nvPr/>
-        </p:nvSpPr>
-        <p:spPr>
-          <a:xfrm>
-            <a:off x="1951330" y="4169664"/>
-            <a:ext cx="676656" cy="475488"/>
-          </a:xfrm>
-          <a:prstGeom prst="rect">
-            <a:avLst>
-              <a:gd name="adj" fmla="val 7692"/>
-            </a:avLst>
-          </a:prstGeom>
-          <a:solidFill>
-            <a:srgbClr val="FFFFFF"/>
-          </a:solidFill>
-          <a:ln w="12700">
-            <a:solidFill>
-              <a:srgbClr val="DB2777"/>
-            </a:solidFill>
-            <a:prstDash val="solid"/>
-          </a:ln>
-        </p:spPr>
-      </p:sp>
-      <p:sp>
-        <p:nvSpPr>
-          <p:cNvPr id="50" name="Text 48"/>
-          <p:cNvSpPr/>
-          <p:nvPr/>
-        </p:nvSpPr>
-        <p:spPr>
-          <a:xfrm>
-            <a:off x="1951330" y="4169664"/>
-            <a:ext cx="676656" cy="475488"/>
-          </a:xfrm>
-          <a:prstGeom prst="rect">
-            <a:avLst/>
-          </a:prstGeom>
-          <a:noFill/>
-          <a:ln/>
-        </p:spPr>
-        <p:txBody>
-          <a:bodyPr wrap="square" lIns="0" tIns="0" rIns="0" bIns="0" rtlCol="0" anchor="ctr"/>
-          <a:lstStyle/>
-          <a:p>
-            <a:pPr algn="ctr" indent="0" marL="0">
-              <a:buNone/>
-            </a:pPr>
-            <a:r>
-              <a:rPr lang="en-US" sz="900" b="1" dirty="0">
-                <a:solidFill>
-                  <a:srgbClr val="9D174D"/>
-                </a:solidFill>
-                <a:latin typeface="Trebuchet MS" pitchFamily="34" charset="0"/>
-                <a:ea typeface="Trebuchet MS" pitchFamily="34" charset="-122"/>
-                <a:cs typeface="Trebuchet MS" pitchFamily="34" charset="-120"/>
-              </a:rPr>
-              <a:t>m</a:t>
-            </a:r>
-            <a:endParaRPr lang="en-US" sz="900" dirty="0"/>
-          </a:p>
-        </p:txBody>
-      </p:sp>
-      <p:sp>
-        <p:nvSpPr>
-          <p:cNvPr id="51" name="Shape 49"/>
-          <p:cNvSpPr/>
-          <p:nvPr/>
-        </p:nvSpPr>
-        <p:spPr>
-          <a:xfrm>
-            <a:off x="2677363" y="4169664"/>
-            <a:ext cx="676656" cy="475488"/>
-          </a:xfrm>
-          <a:prstGeom prst="rect">
-            <a:avLst>
-              <a:gd name="adj" fmla="val 7692"/>
-            </a:avLst>
-          </a:prstGeom>
-          <a:solidFill>
-            <a:srgbClr val="FFFFFF"/>
-          </a:solidFill>
-          <a:ln w="12700">
-            <a:solidFill>
-              <a:srgbClr val="DB2777"/>
-            </a:solidFill>
-            <a:prstDash val="solid"/>
-          </a:ln>
-        </p:spPr>
-      </p:sp>
-      <p:sp>
-        <p:nvSpPr>
-          <p:cNvPr id="52" name="Text 50"/>
-          <p:cNvSpPr/>
-          <p:nvPr/>
-        </p:nvSpPr>
-        <p:spPr>
-          <a:xfrm>
-            <a:off x="2677363" y="4169664"/>
-            <a:ext cx="676656" cy="475488"/>
-          </a:xfrm>
-          <a:prstGeom prst="rect">
-            <a:avLst/>
-          </a:prstGeom>
-          <a:noFill/>
-          <a:ln/>
-        </p:spPr>
-        <p:txBody>
-          <a:bodyPr wrap="square" lIns="0" tIns="0" rIns="0" bIns="0" rtlCol="0" anchor="ctr"/>
-          <a:lstStyle/>
-          <a:p>
-            <a:pPr algn="ctr" indent="0" marL="0">
-              <a:buNone/>
-            </a:pPr>
-            <a:r>
-              <a:rPr lang="en-US" sz="900" b="1" dirty="0">
-                <a:solidFill>
-                  <a:srgbClr val="9D174D"/>
-                </a:solidFill>
-                <a:latin typeface="Trebuchet MS" pitchFamily="34" charset="0"/>
-                <a:ea typeface="Trebuchet MS" pitchFamily="34" charset="-122"/>
-                <a:cs typeface="Trebuchet MS" pitchFamily="34" charset="-120"/>
-              </a:rPr>
-              <a:t>e</a:t>
-            </a:r>
-            <a:endParaRPr lang="en-US" sz="900" dirty="0"/>
-          </a:p>
-        </p:txBody>
-      </p:sp>
-      <p:sp>
-        <p:nvSpPr>
-          <p:cNvPr id="53" name="Shape 51"/>
-          <p:cNvSpPr/>
-          <p:nvPr/>
-        </p:nvSpPr>
-        <p:spPr>
-          <a:xfrm>
-            <a:off x="3403397" y="4169664"/>
-            <a:ext cx="676656" cy="475488"/>
-          </a:xfrm>
-          <a:prstGeom prst="rect">
-            <a:avLst>
-              <a:gd name="adj" fmla="val 7692"/>
-            </a:avLst>
-          </a:prstGeom>
-          <a:solidFill>
-            <a:srgbClr val="FFFFFF"/>
-          </a:solidFill>
-          <a:ln w="12700">
-            <a:solidFill>
-              <a:srgbClr val="DB2777"/>
-            </a:solidFill>
-            <a:prstDash val="solid"/>
-          </a:ln>
-        </p:spPr>
-      </p:sp>
-      <p:sp>
-        <p:nvSpPr>
-          <p:cNvPr id="54" name="Text 52"/>
-          <p:cNvSpPr/>
-          <p:nvPr/>
-        </p:nvSpPr>
-        <p:spPr>
-          <a:xfrm>
-            <a:off x="3403397" y="4169664"/>
-            <a:ext cx="676656" cy="475488"/>
-          </a:xfrm>
-          <a:prstGeom prst="rect">
-            <a:avLst/>
-          </a:prstGeom>
-          <a:noFill/>
-          <a:ln/>
-        </p:spPr>
-        <p:txBody>
-          <a:bodyPr wrap="square" lIns="0" tIns="0" rIns="0" bIns="0" rtlCol="0" anchor="ctr"/>
-          <a:lstStyle/>
-          <a:p>
-            <a:pPr algn="ctr" indent="0" marL="0">
-              <a:buNone/>
-            </a:pPr>
-            <a:r>
-              <a:rPr lang="en-US" sz="900" b="1" dirty="0">
-                <a:solidFill>
-                  <a:srgbClr val="9D174D"/>
-                </a:solidFill>
-                <a:latin typeface="Trebuchet MS" pitchFamily="34" charset="0"/>
-                <a:ea typeface="Trebuchet MS" pitchFamily="34" charset="-122"/>
-                <a:cs typeface="Trebuchet MS" pitchFamily="34" charset="-120"/>
-              </a:rPr>
-              <a:t>t</a:t>
-            </a:r>
-            <a:endParaRPr lang="en-US" sz="900" dirty="0"/>
-          </a:p>
-        </p:txBody>
-      </p:sp>
-      <p:sp>
-        <p:nvSpPr>
-          <p:cNvPr id="55" name="Shape 53"/>
-          <p:cNvSpPr/>
-          <p:nvPr/>
-        </p:nvSpPr>
-        <p:spPr>
-          <a:xfrm>
-            <a:off x="4129430" y="4169664"/>
-            <a:ext cx="676656" cy="475488"/>
-          </a:xfrm>
-          <a:prstGeom prst="rect">
-            <a:avLst>
-              <a:gd name="adj" fmla="val 7692"/>
-            </a:avLst>
-          </a:prstGeom>
-          <a:solidFill>
-            <a:srgbClr val="FFFFFF"/>
-          </a:solidFill>
-          <a:ln w="12700">
-            <a:solidFill>
-              <a:srgbClr val="DB2777"/>
-            </a:solidFill>
-            <a:prstDash val="solid"/>
-          </a:ln>
-        </p:spPr>
-      </p:sp>
-      <p:sp>
-        <p:nvSpPr>
-          <p:cNvPr id="56" name="Text 54"/>
-          <p:cNvSpPr/>
-          <p:nvPr/>
-        </p:nvSpPr>
-        <p:spPr>
-          <a:xfrm>
-            <a:off x="4129430" y="4169664"/>
-            <a:ext cx="676656" cy="475488"/>
-          </a:xfrm>
-          <a:prstGeom prst="rect">
-            <a:avLst/>
-          </a:prstGeom>
-          <a:noFill/>
-          <a:ln/>
-        </p:spPr>
-        <p:txBody>
-          <a:bodyPr wrap="square" lIns="0" tIns="0" rIns="0" bIns="0" rtlCol="0" anchor="ctr"/>
-          <a:lstStyle/>
-          <a:p>
-            <a:pPr algn="ctr" indent="0" marL="0">
-              <a:buNone/>
-            </a:pPr>
-            <a:r>
-              <a:rPr lang="en-US" sz="900" b="1" dirty="0">
-                <a:solidFill>
-                  <a:srgbClr val="9D174D"/>
-                </a:solidFill>
-                <a:latin typeface="Trebuchet MS" pitchFamily="34" charset="0"/>
-                <a:ea typeface="Trebuchet MS" pitchFamily="34" charset="-122"/>
-                <a:cs typeface="Trebuchet MS" pitchFamily="34" charset="-120"/>
-              </a:rPr>
-              <a:t>e</a:t>
-            </a:r>
-            <a:endParaRPr lang="en-US" sz="900" dirty="0"/>
-          </a:p>
-        </p:txBody>
-      </p:sp>
-      <p:sp>
-        <p:nvSpPr>
-          <p:cNvPr id="57" name="Shape 55"/>
-          <p:cNvSpPr/>
-          <p:nvPr/>
-        </p:nvSpPr>
-        <p:spPr>
-          <a:xfrm>
-            <a:off x="4855464" y="4169664"/>
-            <a:ext cx="676656" cy="475488"/>
-          </a:xfrm>
-          <a:prstGeom prst="rect">
-            <a:avLst>
-              <a:gd name="adj" fmla="val 7692"/>
-            </a:avLst>
-          </a:prstGeom>
-          <a:solidFill>
-            <a:srgbClr val="FFFFFF"/>
-          </a:solidFill>
-          <a:ln w="12700">
-            <a:solidFill>
-              <a:srgbClr val="DB2777"/>
-            </a:solidFill>
-            <a:prstDash val="solid"/>
-          </a:ln>
-        </p:spPr>
-      </p:sp>
-      <p:sp>
-        <p:nvSpPr>
-          <p:cNvPr id="58" name="Text 56"/>
-          <p:cNvSpPr/>
-          <p:nvPr/>
-        </p:nvSpPr>
-        <p:spPr>
-          <a:xfrm>
-            <a:off x="4855464" y="4169664"/>
-            <a:ext cx="676656" cy="475488"/>
-          </a:xfrm>
-          <a:prstGeom prst="rect">
-            <a:avLst/>
-          </a:prstGeom>
-          <a:noFill/>
-          <a:ln/>
-        </p:spPr>
-        <p:txBody>
-          <a:bodyPr wrap="square" lIns="0" tIns="0" rIns="0" bIns="0" rtlCol="0" anchor="ctr"/>
-          <a:lstStyle/>
-          <a:p>
-            <a:pPr algn="ctr" indent="0" marL="0">
-              <a:buNone/>
-            </a:pPr>
-            <a:r>
-              <a:rPr lang="en-US" sz="900" b="1" dirty="0">
-                <a:solidFill>
-                  <a:srgbClr val="9D174D"/>
-                </a:solidFill>
-                <a:latin typeface="Trebuchet MS" pitchFamily="34" charset="0"/>
-                <a:ea typeface="Trebuchet MS" pitchFamily="34" charset="-122"/>
-                <a:cs typeface="Trebuchet MS" pitchFamily="34" charset="-120"/>
-              </a:rPr>
-              <a:t>or</a:t>
-            </a:r>
-            <a:endParaRPr lang="en-US" sz="900" dirty="0"/>
-          </a:p>
-        </p:txBody>
-      </p:sp>
-      <p:sp>
-        <p:nvSpPr>
-          <p:cNvPr id="59" name="Shape 57"/>
-          <p:cNvSpPr/>
-          <p:nvPr/>
-        </p:nvSpPr>
-        <p:spPr>
-          <a:xfrm>
-            <a:off x="5581498" y="4169664"/>
-            <a:ext cx="676656" cy="475488"/>
-          </a:xfrm>
-          <a:prstGeom prst="rect">
-            <a:avLst>
-              <a:gd name="adj" fmla="val 7692"/>
-            </a:avLst>
-          </a:prstGeom>
-          <a:solidFill>
-            <a:srgbClr val="FFFFFF"/>
-          </a:solidFill>
-          <a:ln w="12700">
-            <a:solidFill>
-              <a:srgbClr val="DB2777"/>
-            </a:solidFill>
-            <a:prstDash val="solid"/>
-          </a:ln>
-        </p:spPr>
-      </p:sp>
-      <p:sp>
-        <p:nvSpPr>
-          <p:cNvPr id="60" name="Text 58"/>
-          <p:cNvSpPr/>
-          <p:nvPr/>
-        </p:nvSpPr>
-        <p:spPr>
-          <a:xfrm>
-            <a:off x="5581498" y="4169664"/>
-            <a:ext cx="676656" cy="475488"/>
-          </a:xfrm>
-          <a:prstGeom prst="rect">
-            <a:avLst/>
-          </a:prstGeom>
-          <a:noFill/>
-          <a:ln/>
-        </p:spPr>
-        <p:txBody>
-          <a:bodyPr wrap="square" lIns="0" tIns="0" rIns="0" bIns="0" rtlCol="0" anchor="ctr"/>
-          <a:lstStyle/>
-          <a:p>
-            <a:pPr algn="ctr" indent="0" marL="0">
-              <a:buNone/>
-            </a:pPr>
-            <a:r>
-              <a:rPr lang="en-US" sz="900" b="1" dirty="0">
-                <a:solidFill>
-                  <a:srgbClr val="9D174D"/>
-                </a:solidFill>
-                <a:latin typeface="Trebuchet MS" pitchFamily="34" charset="0"/>
-                <a:ea typeface="Trebuchet MS" pitchFamily="34" charset="-122"/>
-                <a:cs typeface="Trebuchet MS" pitchFamily="34" charset="-120"/>
-              </a:rPr>
-              <a:t>o</a:t>
-            </a:r>
-            <a:endParaRPr lang="en-US" sz="900" dirty="0"/>
-          </a:p>
-        </p:txBody>
-      </p:sp>
-      <p:sp>
-        <p:nvSpPr>
-          <p:cNvPr id="61" name="Shape 59"/>
-          <p:cNvSpPr/>
-          <p:nvPr/>
-        </p:nvSpPr>
-        <p:spPr>
-          <a:xfrm>
-            <a:off x="6307531" y="4169664"/>
-            <a:ext cx="676656" cy="475488"/>
-          </a:xfrm>
-          <a:prstGeom prst="rect">
-            <a:avLst>
-              <a:gd name="adj" fmla="val 7692"/>
-            </a:avLst>
-          </a:prstGeom>
-          <a:solidFill>
-            <a:srgbClr val="FFFFFF"/>
-          </a:solidFill>
-          <a:ln w="12700">
-            <a:solidFill>
-              <a:srgbClr val="DB2777"/>
-            </a:solidFill>
-            <a:prstDash val="solid"/>
-          </a:ln>
-        </p:spPr>
-      </p:sp>
-      <p:sp>
-        <p:nvSpPr>
-          <p:cNvPr id="62" name="Text 60"/>
-          <p:cNvSpPr/>
-          <p:nvPr/>
-        </p:nvSpPr>
-        <p:spPr>
-          <a:xfrm>
-            <a:off x="6307531" y="4169664"/>
-            <a:ext cx="676656" cy="475488"/>
-          </a:xfrm>
-          <a:prstGeom prst="rect">
-            <a:avLst/>
-          </a:prstGeom>
-          <a:noFill/>
-          <a:ln/>
-        </p:spPr>
-        <p:txBody>
-          <a:bodyPr wrap="square" lIns="0" tIns="0" rIns="0" bIns="0" rtlCol="0" anchor="ctr"/>
-          <a:lstStyle/>
-          <a:p>
-            <a:pPr algn="ctr" indent="0" marL="0">
-              <a:buNone/>
-            </a:pPr>
-            <a:r>
-              <a:rPr lang="en-US" sz="900" b="1" dirty="0">
-                <a:solidFill>
-                  <a:srgbClr val="9D174D"/>
-                </a:solidFill>
-                <a:latin typeface="Trebuchet MS" pitchFamily="34" charset="0"/>
-                <a:ea typeface="Trebuchet MS" pitchFamily="34" charset="-122"/>
-                <a:cs typeface="Trebuchet MS" pitchFamily="34" charset="-120"/>
-              </a:rPr>
-              <a:t>l</a:t>
-            </a:r>
-            <a:endParaRPr lang="en-US" sz="900" dirty="0"/>
-          </a:p>
-        </p:txBody>
-      </p:sp>
-      <p:sp>
-        <p:nvSpPr>
-          <p:cNvPr id="63" name="Shape 61"/>
-          <p:cNvSpPr/>
-          <p:nvPr/>
-        </p:nvSpPr>
-        <p:spPr>
-          <a:xfrm>
-            <a:off x="7033565" y="4169664"/>
-            <a:ext cx="676656" cy="475488"/>
-          </a:xfrm>
-          <a:prstGeom prst="rect">
-            <a:avLst>
-              <a:gd name="adj" fmla="val 7692"/>
-            </a:avLst>
-          </a:prstGeom>
-          <a:solidFill>
-            <a:srgbClr val="FFFFFF"/>
-          </a:solidFill>
-          <a:ln w="12700">
-            <a:solidFill>
-              <a:srgbClr val="DB2777"/>
-            </a:solidFill>
-            <a:prstDash val="solid"/>
-          </a:ln>
-        </p:spPr>
-      </p:sp>
-      <p:sp>
-        <p:nvSpPr>
-          <p:cNvPr id="64" name="Text 62"/>
-          <p:cNvSpPr/>
-          <p:nvPr/>
-        </p:nvSpPr>
-        <p:spPr>
-          <a:xfrm>
-            <a:off x="7033565" y="4169664"/>
-            <a:ext cx="676656" cy="475488"/>
-          </a:xfrm>
-          <a:prstGeom prst="rect">
-            <a:avLst/>
-          </a:prstGeom>
-          <a:noFill/>
-          <a:ln/>
-        </p:spPr>
-        <p:txBody>
-          <a:bodyPr wrap="square" lIns="0" tIns="0" rIns="0" bIns="0" rtlCol="0" anchor="ctr"/>
-          <a:lstStyle/>
-          <a:p>
-            <a:pPr algn="ctr" indent="0" marL="0">
-              <a:buNone/>
-            </a:pPr>
-            <a:r>
-              <a:rPr lang="en-US" sz="900" b="1" dirty="0">
-                <a:solidFill>
-                  <a:srgbClr val="9D174D"/>
-                </a:solidFill>
-                <a:latin typeface="Trebuchet MS" pitchFamily="34" charset="0"/>
-                <a:ea typeface="Trebuchet MS" pitchFamily="34" charset="-122"/>
-                <a:cs typeface="Trebuchet MS" pitchFamily="34" charset="-120"/>
-              </a:rPr>
-              <a:t>o</a:t>
-            </a:r>
-            <a:endParaRPr lang="en-US" sz="900" dirty="0"/>
-          </a:p>
-        </p:txBody>
-      </p:sp>
-      <p:sp>
-        <p:nvSpPr>
-          <p:cNvPr id="65" name="Shape 63"/>
-          <p:cNvSpPr/>
-          <p:nvPr/>
-        </p:nvSpPr>
-        <p:spPr>
-          <a:xfrm>
-            <a:off x="7759598" y="4169664"/>
-            <a:ext cx="676656" cy="475488"/>
-          </a:xfrm>
-          <a:prstGeom prst="rect">
-            <a:avLst>
-              <a:gd name="adj" fmla="val 7692"/>
-            </a:avLst>
-          </a:prstGeom>
-          <a:solidFill>
-            <a:srgbClr val="FFFFFF"/>
-          </a:solidFill>
-          <a:ln w="12700">
-            <a:solidFill>
-              <a:srgbClr val="DB2777"/>
-            </a:solidFill>
-            <a:prstDash val="solid"/>
-          </a:ln>
-        </p:spPr>
-      </p:sp>
-      <p:sp>
-        <p:nvSpPr>
-          <p:cNvPr id="66" name="Text 64"/>
-          <p:cNvSpPr/>
-          <p:nvPr/>
-        </p:nvSpPr>
-        <p:spPr>
-          <a:xfrm>
-            <a:off x="7759598" y="4169664"/>
-            <a:ext cx="676656" cy="475488"/>
-          </a:xfrm>
-          <a:prstGeom prst="rect">
-            <a:avLst/>
-          </a:prstGeom>
-          <a:noFill/>
-          <a:ln/>
-        </p:spPr>
-        <p:txBody>
-          <a:bodyPr wrap="square" lIns="0" tIns="0" rIns="0" bIns="0" rtlCol="0" anchor="ctr"/>
-          <a:lstStyle/>
-          <a:p>
-            <a:pPr algn="ctr" indent="0" marL="0">
-              <a:buNone/>
-            </a:pPr>
-            <a:r>
-              <a:rPr lang="en-US" sz="900" b="1" dirty="0">
-                <a:solidFill>
-                  <a:srgbClr val="9D174D"/>
-                </a:solidFill>
-                <a:latin typeface="Trebuchet MS" pitchFamily="34" charset="0"/>
-                <a:ea typeface="Trebuchet MS" pitchFamily="34" charset="-122"/>
-                <a:cs typeface="Trebuchet MS" pitchFamily="34" charset="-120"/>
-              </a:rPr>
-              <a:t>gy</a:t>
+              <a:t>y</a:t>
             </a:r>
             <a:endParaRPr lang="en-US" sz="900" dirty="0"/>
           </a:p>
@@ -34794,7 +34422,7 @@
                 <a:ea typeface="Calibri" pitchFamily="34" charset="-122"/>
                 <a:cs typeface="Calibri" pitchFamily="34" charset="-120"/>
               </a:rPr>
-              <a:t>Word Labs  •  wordlabs.app  •  Root: 'logy' = study or science of</a:t>
+              <a:t>Word Labs  •  wordlabs.app  •  Root: 'logy' = study of</a:t>
             </a:r>
             <a:endParaRPr lang="en-US" sz="800" dirty="0"/>
           </a:p>
@@ -35963,7 +35591,7 @@
                 <a:ea typeface="Calibri" pitchFamily="34" charset="-122"/>
                 <a:cs typeface="Calibri" pitchFamily="34" charset="-120"/>
               </a:rPr>
-              <a:t>Word Labs  •  wordlabs.app  •  Root: 'logy' = study or science of</a:t>
+              <a:t>Word Labs  •  wordlabs.app  •  Root: 'logy' = study of</a:t>
             </a:r>
             <a:endParaRPr lang="en-US" sz="800" dirty="0"/>
           </a:p>
@@ -36264,7 +35892,7 @@
                 <a:ea typeface="Trebuchet MS" pitchFamily="34" charset="-122"/>
                 <a:cs typeface="Trebuchet MS" pitchFamily="34" charset="-120"/>
               </a:rPr>
-              <a:t>bio-</a:t>
+              <a:t>apo-</a:t>
             </a:r>
             <a:endParaRPr lang="en-US" sz="1300" dirty="0"/>
           </a:p>
@@ -36392,7 +36020,7 @@
                 <a:ea typeface="Trebuchet MS" pitchFamily="34" charset="-122"/>
                 <a:cs typeface="Trebuchet MS" pitchFamily="34" charset="-120"/>
               </a:rPr>
-              <a:t>-ist</a:t>
+              <a:t>-es</a:t>
             </a:r>
             <a:endParaRPr lang="en-US" sz="1300" dirty="0"/>
           </a:p>
@@ -36456,7 +36084,7 @@
                 <a:ea typeface="Trebuchet MS" pitchFamily="34" charset="-122"/>
                 <a:cs typeface="Trebuchet MS" pitchFamily="34" charset="-120"/>
               </a:rPr>
-              <a:t>geo-</a:t>
+              <a:t>astro-</a:t>
             </a:r>
             <a:endParaRPr lang="en-US" sz="1300" dirty="0"/>
           </a:p>
@@ -36502,7 +36130,7 @@
             <a:avLst/>
           </a:prstGeom>
           <a:solidFill>
-            <a:srgbClr val="FCE7F3"/>
+            <a:srgbClr val="F1F5F9"/>
           </a:solidFill>
           <a:ln w="12700">
             <a:solidFill>
@@ -36514,14 +36142,39 @@
       </p:sp>
       <p:sp>
         <p:nvSpPr>
-          <p:cNvPr id="27" name="Text 25"/>
-          <p:cNvSpPr/>
-          <p:nvPr/>
-        </p:nvSpPr>
-        <p:spPr>
-          <a:xfrm>
-            <a:off x="5943600" y="1984248"/>
-            <a:ext cx="2834640" cy="402336"/>
+          <p:cNvPr id="27" name="Shape 25"/>
+          <p:cNvSpPr/>
+          <p:nvPr/>
+        </p:nvSpPr>
+        <p:spPr>
+          <a:xfrm>
+            <a:off x="365760" y="2404872"/>
+            <a:ext cx="2468880" cy="402336"/>
+          </a:xfrm>
+          <a:prstGeom prst="rect">
+            <a:avLst/>
+          </a:prstGeom>
+          <a:solidFill>
+            <a:srgbClr val="DDD6FE"/>
+          </a:solidFill>
+          <a:ln w="12700">
+            <a:solidFill>
+              <a:srgbClr val="E2E8F0"/>
+            </a:solidFill>
+            <a:prstDash val="solid"/>
+          </a:ln>
+        </p:spPr>
+      </p:sp>
+      <p:sp>
+        <p:nvSpPr>
+          <p:cNvPr id="28" name="Text 26"/>
+          <p:cNvSpPr/>
+          <p:nvPr/>
+        </p:nvSpPr>
+        <p:spPr>
+          <a:xfrm>
+            <a:off x="365760" y="2404872"/>
+            <a:ext cx="2468880" cy="402336"/>
           </a:xfrm>
           <a:prstGeom prst="rect">
             <a:avLst/>
@@ -36539,13 +36192,13 @@
             <a:r>
               <a:rPr lang="en-US" sz="1300" b="1" dirty="0">
                 <a:solidFill>
-                  <a:srgbClr val="9D174D"/>
+                  <a:srgbClr val="4C1D95"/>
                 </a:solidFill>
                 <a:latin typeface="Trebuchet MS" pitchFamily="34" charset="0"/>
                 <a:ea typeface="Trebuchet MS" pitchFamily="34" charset="-122"/>
                 <a:cs typeface="Trebuchet MS" pitchFamily="34" charset="-120"/>
               </a:rPr>
-              <a:t>-ical</a:t>
+              <a:t>bio-</a:t>
             </a:r>
             <a:endParaRPr lang="en-US" sz="1300" dirty="0"/>
           </a:p>
@@ -36553,13 +36206,63 @@
       </p:sp>
       <p:sp>
         <p:nvSpPr>
-          <p:cNvPr id="28" name="Shape 26"/>
-          <p:cNvSpPr/>
-          <p:nvPr/>
-        </p:nvSpPr>
-        <p:spPr>
-          <a:xfrm>
-            <a:off x="365760" y="2404872"/>
+          <p:cNvPr id="29" name="Shape 27"/>
+          <p:cNvSpPr/>
+          <p:nvPr/>
+        </p:nvSpPr>
+        <p:spPr>
+          <a:xfrm>
+            <a:off x="2971800" y="2404872"/>
+            <a:ext cx="2834640" cy="402336"/>
+          </a:xfrm>
+          <a:prstGeom prst="rect">
+            <a:avLst/>
+          </a:prstGeom>
+          <a:solidFill>
+            <a:srgbClr val="F8FAFC"/>
+          </a:solidFill>
+          <a:ln w="12700">
+            <a:solidFill>
+              <a:srgbClr val="E2E8F0"/>
+            </a:solidFill>
+            <a:prstDash val="solid"/>
+          </a:ln>
+        </p:spPr>
+      </p:sp>
+      <p:sp>
+        <p:nvSpPr>
+          <p:cNvPr id="30" name="Shape 28"/>
+          <p:cNvSpPr/>
+          <p:nvPr/>
+        </p:nvSpPr>
+        <p:spPr>
+          <a:xfrm>
+            <a:off x="5943600" y="2404872"/>
+            <a:ext cx="2834640" cy="402336"/>
+          </a:xfrm>
+          <a:prstGeom prst="rect">
+            <a:avLst/>
+          </a:prstGeom>
+          <a:solidFill>
+            <a:srgbClr val="F8FAFC"/>
+          </a:solidFill>
+          <a:ln w="12700">
+            <a:solidFill>
+              <a:srgbClr val="E2E8F0"/>
+            </a:solidFill>
+            <a:prstDash val="solid"/>
+          </a:ln>
+        </p:spPr>
+      </p:sp>
+      <p:sp>
+        <p:nvSpPr>
+          <p:cNvPr id="31" name="Shape 29"/>
+          <p:cNvSpPr/>
+          <p:nvPr/>
+        </p:nvSpPr>
+        <p:spPr>
+          <a:xfrm>
+            <a:off x="365760" y="2825496"/>
             <a:ext cx="2468880" cy="402336"/>
           </a:xfrm>
           <a:prstGeom prst="rect">
@@ -36578,13 +36281,13 @@
       </p:sp>
       <p:sp>
         <p:nvSpPr>
-          <p:cNvPr id="29" name="Text 27"/>
-          <p:cNvSpPr/>
-          <p:nvPr/>
-        </p:nvSpPr>
-        <p:spPr>
-          <a:xfrm>
-            <a:off x="365760" y="2404872"/>
+          <p:cNvPr id="32" name="Text 30"/>
+          <p:cNvSpPr/>
+          <p:nvPr/>
+        </p:nvSpPr>
+        <p:spPr>
+          <a:xfrm>
+            <a:off x="365760" y="2825496"/>
             <a:ext cx="2468880" cy="402336"/>
           </a:xfrm>
           <a:prstGeom prst="rect">
@@ -36609,7 +36312,7 @@
                 <a:ea typeface="Trebuchet MS" pitchFamily="34" charset="-122"/>
                 <a:cs typeface="Trebuchet MS" pitchFamily="34" charset="-120"/>
               </a:rPr>
-              <a:t>zoo-</a:t>
+              <a:t>cardio-</a:t>
             </a:r>
             <a:endParaRPr lang="en-US" sz="1300" dirty="0"/>
           </a:p>
@@ -36617,20 +36320,20 @@
       </p:sp>
       <p:sp>
         <p:nvSpPr>
-          <p:cNvPr id="30" name="Shape 28"/>
-          <p:cNvSpPr/>
-          <p:nvPr/>
-        </p:nvSpPr>
-        <p:spPr>
-          <a:xfrm>
-            <a:off x="2971800" y="2404872"/>
+          <p:cNvPr id="33" name="Shape 31"/>
+          <p:cNvSpPr/>
+          <p:nvPr/>
+        </p:nvSpPr>
+        <p:spPr>
+          <a:xfrm>
+            <a:off x="2971800" y="2825496"/>
             <a:ext cx="2834640" cy="402336"/>
           </a:xfrm>
           <a:prstGeom prst="rect">
             <a:avLst/>
           </a:prstGeom>
           <a:solidFill>
-            <a:srgbClr val="F8FAFC"/>
+            <a:srgbClr val="F1F5F9"/>
           </a:solidFill>
           <a:ln w="12700">
             <a:solidFill>
@@ -36642,20 +36345,20 @@
       </p:sp>
       <p:sp>
         <p:nvSpPr>
-          <p:cNvPr id="31" name="Shape 29"/>
-          <p:cNvSpPr/>
-          <p:nvPr/>
-        </p:nvSpPr>
-        <p:spPr>
-          <a:xfrm>
-            <a:off x="5943600" y="2404872"/>
+          <p:cNvPr id="34" name="Shape 32"/>
+          <p:cNvSpPr/>
+          <p:nvPr/>
+        </p:nvSpPr>
+        <p:spPr>
+          <a:xfrm>
+            <a:off x="5943600" y="2825496"/>
             <a:ext cx="2834640" cy="402336"/>
           </a:xfrm>
           <a:prstGeom prst="rect">
             <a:avLst/>
           </a:prstGeom>
           <a:solidFill>
-            <a:srgbClr val="FCE7F3"/>
+            <a:srgbClr val="F1F5F9"/>
           </a:solidFill>
           <a:ln w="12700">
             <a:solidFill>
@@ -36667,14 +36370,39 @@
       </p:sp>
       <p:sp>
         <p:nvSpPr>
-          <p:cNvPr id="32" name="Text 30"/>
-          <p:cNvSpPr/>
-          <p:nvPr/>
-        </p:nvSpPr>
-        <p:spPr>
-          <a:xfrm>
-            <a:off x="5943600" y="2404872"/>
-            <a:ext cx="2834640" cy="402336"/>
+          <p:cNvPr id="35" name="Shape 33"/>
+          <p:cNvSpPr/>
+          <p:nvPr/>
+        </p:nvSpPr>
+        <p:spPr>
+          <a:xfrm>
+            <a:off x="365760" y="3246120"/>
+            <a:ext cx="2468880" cy="402336"/>
+          </a:xfrm>
+          <a:prstGeom prst="rect">
+            <a:avLst/>
+          </a:prstGeom>
+          <a:solidFill>
+            <a:srgbClr val="DDD6FE"/>
+          </a:solidFill>
+          <a:ln w="12700">
+            <a:solidFill>
+              <a:srgbClr val="E2E8F0"/>
+            </a:solidFill>
+            <a:prstDash val="solid"/>
+          </a:ln>
+        </p:spPr>
+      </p:sp>
+      <p:sp>
+        <p:nvSpPr>
+          <p:cNvPr id="36" name="Text 34"/>
+          <p:cNvSpPr/>
+          <p:nvPr/>
+        </p:nvSpPr>
+        <p:spPr>
+          <a:xfrm>
+            <a:off x="365760" y="3246120"/>
+            <a:ext cx="2468880" cy="402336"/>
           </a:xfrm>
           <a:prstGeom prst="rect">
             <a:avLst/>
@@ -36692,13 +36420,13 @@
             <a:r>
               <a:rPr lang="en-US" sz="1300" b="1" dirty="0">
                 <a:solidFill>
-                  <a:srgbClr val="9D174D"/>
+                  <a:srgbClr val="4C1D95"/>
                 </a:solidFill>
                 <a:latin typeface="Trebuchet MS" pitchFamily="34" charset="0"/>
                 <a:ea typeface="Trebuchet MS" pitchFamily="34" charset="-122"/>
                 <a:cs typeface="Trebuchet MS" pitchFamily="34" charset="-120"/>
               </a:rPr>
-              <a:t>-ically</a:t>
+              <a:t>chrono-</a:t>
             </a:r>
             <a:endParaRPr lang="en-US" sz="1300" dirty="0"/>
           </a:p>
@@ -36706,13 +36434,63 @@
       </p:sp>
       <p:sp>
         <p:nvSpPr>
-          <p:cNvPr id="33" name="Shape 31"/>
-          <p:cNvSpPr/>
-          <p:nvPr/>
-        </p:nvSpPr>
-        <p:spPr>
-          <a:xfrm>
-            <a:off x="365760" y="2825496"/>
+          <p:cNvPr id="37" name="Shape 35"/>
+          <p:cNvSpPr/>
+          <p:nvPr/>
+        </p:nvSpPr>
+        <p:spPr>
+          <a:xfrm>
+            <a:off x="2971800" y="3246120"/>
+            <a:ext cx="2834640" cy="402336"/>
+          </a:xfrm>
+          <a:prstGeom prst="rect">
+            <a:avLst/>
+          </a:prstGeom>
+          <a:solidFill>
+            <a:srgbClr val="F8FAFC"/>
+          </a:solidFill>
+          <a:ln w="12700">
+            <a:solidFill>
+              <a:srgbClr val="E2E8F0"/>
+            </a:solidFill>
+            <a:prstDash val="solid"/>
+          </a:ln>
+        </p:spPr>
+      </p:sp>
+      <p:sp>
+        <p:nvSpPr>
+          <p:cNvPr id="38" name="Shape 36"/>
+          <p:cNvSpPr/>
+          <p:nvPr/>
+        </p:nvSpPr>
+        <p:spPr>
+          <a:xfrm>
+            <a:off x="5943600" y="3246120"/>
+            <a:ext cx="2834640" cy="402336"/>
+          </a:xfrm>
+          <a:prstGeom prst="rect">
+            <a:avLst/>
+          </a:prstGeom>
+          <a:solidFill>
+            <a:srgbClr val="F8FAFC"/>
+          </a:solidFill>
+          <a:ln w="12700">
+            <a:solidFill>
+              <a:srgbClr val="E2E8F0"/>
+            </a:solidFill>
+            <a:prstDash val="solid"/>
+          </a:ln>
+        </p:spPr>
+      </p:sp>
+      <p:sp>
+        <p:nvSpPr>
+          <p:cNvPr id="39" name="Shape 37"/>
+          <p:cNvSpPr/>
+          <p:nvPr/>
+        </p:nvSpPr>
+        <p:spPr>
+          <a:xfrm>
+            <a:off x="365760" y="3666744"/>
             <a:ext cx="2468880" cy="402336"/>
           </a:xfrm>
           <a:prstGeom prst="rect">
@@ -36731,13 +36509,13 @@
       </p:sp>
       <p:sp>
         <p:nvSpPr>
-          <p:cNvPr id="34" name="Text 32"/>
-          <p:cNvSpPr/>
-          <p:nvPr/>
-        </p:nvSpPr>
-        <p:spPr>
-          <a:xfrm>
-            <a:off x="365760" y="2825496"/>
+          <p:cNvPr id="40" name="Text 38"/>
+          <p:cNvSpPr/>
+          <p:nvPr/>
+        </p:nvSpPr>
+        <p:spPr>
+          <a:xfrm>
+            <a:off x="365760" y="3666744"/>
             <a:ext cx="2468880" cy="402336"/>
           </a:xfrm>
           <a:prstGeom prst="rect">
@@ -36762,7 +36540,7 @@
                 <a:ea typeface="Trebuchet MS" pitchFamily="34" charset="-122"/>
                 <a:cs typeface="Trebuchet MS" pitchFamily="34" charset="-120"/>
               </a:rPr>
-              <a:t>techno-</a:t>
+              <a:t>eco-</a:t>
             </a:r>
             <a:endParaRPr lang="en-US" sz="1300" dirty="0"/>
           </a:p>
@@ -36770,13 +36548,13 @@
       </p:sp>
       <p:sp>
         <p:nvSpPr>
-          <p:cNvPr id="35" name="Shape 33"/>
-          <p:cNvSpPr/>
-          <p:nvPr/>
-        </p:nvSpPr>
-        <p:spPr>
-          <a:xfrm>
-            <a:off x="2971800" y="2825496"/>
+          <p:cNvPr id="41" name="Shape 39"/>
+          <p:cNvSpPr/>
+          <p:nvPr/>
+        </p:nvSpPr>
+        <p:spPr>
+          <a:xfrm>
+            <a:off x="2971800" y="3666744"/>
             <a:ext cx="2834640" cy="402336"/>
           </a:xfrm>
           <a:prstGeom prst="rect">
@@ -36795,20 +36573,20 @@
       </p:sp>
       <p:sp>
         <p:nvSpPr>
-          <p:cNvPr id="36" name="Shape 34"/>
-          <p:cNvSpPr/>
-          <p:nvPr/>
-        </p:nvSpPr>
-        <p:spPr>
-          <a:xfrm>
-            <a:off x="5943600" y="2825496"/>
+          <p:cNvPr id="42" name="Shape 40"/>
+          <p:cNvSpPr/>
+          <p:nvPr/>
+        </p:nvSpPr>
+        <p:spPr>
+          <a:xfrm>
+            <a:off x="5943600" y="3666744"/>
             <a:ext cx="2834640" cy="402336"/>
           </a:xfrm>
           <a:prstGeom prst="rect">
             <a:avLst/>
           </a:prstGeom>
           <a:solidFill>
-            <a:srgbClr val="FCE7F3"/>
+            <a:srgbClr val="F1F5F9"/>
           </a:solidFill>
           <a:ln w="12700">
             <a:solidFill>
@@ -36820,230 +36598,236 @@
       </p:sp>
       <p:sp>
         <p:nvSpPr>
-          <p:cNvPr id="37" name="Text 35"/>
-          <p:cNvSpPr/>
-          <p:nvPr/>
-        </p:nvSpPr>
-        <p:spPr>
-          <a:xfrm>
-            <a:off x="5943600" y="2825496"/>
-            <a:ext cx="2834640" cy="402336"/>
-          </a:xfrm>
-          <a:prstGeom prst="rect">
-            <a:avLst/>
-          </a:prstGeom>
-          <a:noFill/>
-          <a:ln/>
-        </p:spPr>
-        <p:txBody>
-          <a:bodyPr wrap="square" lIns="0" tIns="0" rIns="0" bIns="0" rtlCol="0" anchor="ctr"/>
-          <a:lstStyle/>
-          <a:p>
-            <a:pPr algn="ctr" indent="0" marL="0">
-              <a:buNone/>
-            </a:pPr>
-            <a:r>
-              <a:rPr lang="en-US" sz="1300" b="1" dirty="0">
-                <a:solidFill>
-                  <a:srgbClr val="9D174D"/>
+          <p:cNvPr id="43" name="Text 41"/>
+          <p:cNvSpPr/>
+          <p:nvPr/>
+        </p:nvSpPr>
+        <p:spPr>
+          <a:xfrm>
+            <a:off x="365760" y="3611880"/>
+            <a:ext cx="1828800" cy="347472"/>
+          </a:xfrm>
+          <a:prstGeom prst="rect">
+            <a:avLst/>
+          </a:prstGeom>
+          <a:noFill/>
+          <a:ln/>
+        </p:spPr>
+        <p:txBody>
+          <a:bodyPr wrap="square" lIns="0" tIns="0" rIns="0" bIns="0" rtlCol="0" anchor="ctr"/>
+          <a:lstStyle/>
+          <a:p>
+            <a:pPr algn="l" indent="0" marL="0">
+              <a:buNone/>
+            </a:pPr>
+            <a:r>
+              <a:rPr lang="en-US" sz="1200" b="1" dirty="0">
+                <a:solidFill>
+                  <a:srgbClr val="0F172A"/>
                 </a:solidFill>
                 <a:latin typeface="Trebuchet MS" pitchFamily="34" charset="0"/>
                 <a:ea typeface="Trebuchet MS" pitchFamily="34" charset="-122"/>
                 <a:cs typeface="Trebuchet MS" pitchFamily="34" charset="-120"/>
               </a:rPr>
-              <a:t>-ists</a:t>
-            </a:r>
-            <a:endParaRPr lang="en-US" sz="1300" dirty="0"/>
-          </a:p>
-        </p:txBody>
-      </p:sp>
-      <p:sp>
-        <p:nvSpPr>
-          <p:cNvPr id="38" name="Shape 36"/>
-          <p:cNvSpPr/>
-          <p:nvPr/>
-        </p:nvSpPr>
-        <p:spPr>
-          <a:xfrm>
-            <a:off x="365760" y="3246120"/>
-            <a:ext cx="2468880" cy="402336"/>
-          </a:xfrm>
-          <a:prstGeom prst="rect">
-            <a:avLst/>
-          </a:prstGeom>
-          <a:solidFill>
-            <a:srgbClr val="DDD6FE"/>
-          </a:solidFill>
-          <a:ln w="12700">
-            <a:solidFill>
-              <a:srgbClr val="E2E8F0"/>
-            </a:solidFill>
-            <a:prstDash val="solid"/>
-          </a:ln>
-        </p:spPr>
-      </p:sp>
-      <p:sp>
-        <p:nvSpPr>
-          <p:cNvPr id="39" name="Text 37"/>
-          <p:cNvSpPr/>
-          <p:nvPr/>
-        </p:nvSpPr>
-        <p:spPr>
-          <a:xfrm>
-            <a:off x="365760" y="3246120"/>
-            <a:ext cx="2468880" cy="402336"/>
-          </a:xfrm>
-          <a:prstGeom prst="rect">
-            <a:avLst/>
-          </a:prstGeom>
-          <a:noFill/>
-          <a:ln/>
-        </p:spPr>
-        <p:txBody>
-          <a:bodyPr wrap="square" lIns="0" tIns="0" rIns="0" bIns="0" rtlCol="0" anchor="ctr"/>
-          <a:lstStyle/>
-          <a:p>
-            <a:pPr algn="ctr" indent="0" marL="0">
-              <a:buNone/>
-            </a:pPr>
-            <a:r>
-              <a:rPr lang="en-US" sz="1300" b="1" dirty="0">
-                <a:solidFill>
-                  <a:srgbClr val="4C1D95"/>
+              <a:t>Sample words:</a:t>
+            </a:r>
+            <a:endParaRPr lang="en-US" sz="1200" dirty="0"/>
+          </a:p>
+        </p:txBody>
+      </p:sp>
+      <p:sp>
+        <p:nvSpPr>
+          <p:cNvPr id="44" name="Shape 42"/>
+          <p:cNvSpPr/>
+          <p:nvPr/>
+        </p:nvSpPr>
+        <p:spPr>
+          <a:xfrm>
+            <a:off x="365760" y="4023360"/>
+            <a:ext cx="2011680" cy="402336"/>
+          </a:xfrm>
+          <a:prstGeom prst="rect">
+            <a:avLst>
+              <a:gd name="adj" fmla="val 13636"/>
+            </a:avLst>
+          </a:prstGeom>
+          <a:solidFill>
+            <a:srgbClr val="EEF2FF"/>
+          </a:solidFill>
+          <a:ln w="12700">
+            <a:solidFill>
+              <a:srgbClr val="6366F1"/>
+            </a:solidFill>
+            <a:prstDash val="solid"/>
+          </a:ln>
+        </p:spPr>
+      </p:sp>
+      <p:sp>
+        <p:nvSpPr>
+          <p:cNvPr id="45" name="Text 43"/>
+          <p:cNvSpPr/>
+          <p:nvPr/>
+        </p:nvSpPr>
+        <p:spPr>
+          <a:xfrm>
+            <a:off x="365760" y="4023360"/>
+            <a:ext cx="2011680" cy="402336"/>
+          </a:xfrm>
+          <a:prstGeom prst="rect">
+            <a:avLst/>
+          </a:prstGeom>
+          <a:noFill/>
+          <a:ln/>
+        </p:spPr>
+        <p:txBody>
+          <a:bodyPr wrap="square" lIns="0" tIns="0" rIns="0" bIns="0" rtlCol="0" anchor="ctr"/>
+          <a:lstStyle/>
+          <a:p>
+            <a:pPr algn="ctr" indent="0" marL="0">
+              <a:buNone/>
+            </a:pPr>
+            <a:r>
+              <a:rPr lang="en-US" sz="1200" b="1" dirty="0">
+                <a:solidFill>
+                  <a:srgbClr val="4338CA"/>
                 </a:solidFill>
                 <a:latin typeface="Trebuchet MS" pitchFamily="34" charset="0"/>
                 <a:ea typeface="Trebuchet MS" pitchFamily="34" charset="-122"/>
                 <a:cs typeface="Trebuchet MS" pitchFamily="34" charset="-120"/>
               </a:rPr>
-              <a:t>chrono-</a:t>
-            </a:r>
-            <a:endParaRPr lang="en-US" sz="1300" dirty="0"/>
-          </a:p>
-        </p:txBody>
-      </p:sp>
-      <p:sp>
-        <p:nvSpPr>
-          <p:cNvPr id="40" name="Shape 38"/>
-          <p:cNvSpPr/>
-          <p:nvPr/>
-        </p:nvSpPr>
-        <p:spPr>
-          <a:xfrm>
-            <a:off x="2971800" y="3246120"/>
-            <a:ext cx="2834640" cy="402336"/>
-          </a:xfrm>
-          <a:prstGeom prst="rect">
-            <a:avLst/>
-          </a:prstGeom>
-          <a:solidFill>
-            <a:srgbClr val="F8FAFC"/>
-          </a:solidFill>
-          <a:ln w="12700">
-            <a:solidFill>
-              <a:srgbClr val="E2E8F0"/>
-            </a:solidFill>
-            <a:prstDash val="solid"/>
-          </a:ln>
-        </p:spPr>
-      </p:sp>
-      <p:sp>
-        <p:nvSpPr>
-          <p:cNvPr id="41" name="Shape 39"/>
-          <p:cNvSpPr/>
-          <p:nvPr/>
-        </p:nvSpPr>
-        <p:spPr>
-          <a:xfrm>
-            <a:off x="5943600" y="3246120"/>
-            <a:ext cx="2834640" cy="402336"/>
-          </a:xfrm>
-          <a:prstGeom prst="rect">
-            <a:avLst/>
-          </a:prstGeom>
-          <a:solidFill>
-            <a:srgbClr val="FCE7F3"/>
-          </a:solidFill>
-          <a:ln w="12700">
-            <a:solidFill>
-              <a:srgbClr val="E2E8F0"/>
-            </a:solidFill>
-            <a:prstDash val="solid"/>
-          </a:ln>
-        </p:spPr>
-      </p:sp>
-      <p:sp>
-        <p:nvSpPr>
-          <p:cNvPr id="42" name="Text 40"/>
-          <p:cNvSpPr/>
-          <p:nvPr/>
-        </p:nvSpPr>
-        <p:spPr>
-          <a:xfrm>
-            <a:off x="5943600" y="3246120"/>
-            <a:ext cx="2834640" cy="402336"/>
-          </a:xfrm>
-          <a:prstGeom prst="rect">
-            <a:avLst/>
-          </a:prstGeom>
-          <a:noFill/>
-          <a:ln/>
-        </p:spPr>
-        <p:txBody>
-          <a:bodyPr wrap="square" lIns="0" tIns="0" rIns="0" bIns="0" rtlCol="0" anchor="ctr"/>
-          <a:lstStyle/>
-          <a:p>
-            <a:pPr algn="ctr" indent="0" marL="0">
-              <a:buNone/>
-            </a:pPr>
-            <a:r>
-              <a:rPr lang="en-US" sz="1300" b="1" dirty="0">
-                <a:solidFill>
-                  <a:srgbClr val="9D174D"/>
+              <a:t>apology</a:t>
+            </a:r>
+            <a:endParaRPr lang="en-US" sz="1200" dirty="0"/>
+          </a:p>
+        </p:txBody>
+      </p:sp>
+      <p:sp>
+        <p:nvSpPr>
+          <p:cNvPr id="46" name="Shape 44"/>
+          <p:cNvSpPr/>
+          <p:nvPr/>
+        </p:nvSpPr>
+        <p:spPr>
+          <a:xfrm>
+            <a:off x="2542032" y="4023360"/>
+            <a:ext cx="2011680" cy="402336"/>
+          </a:xfrm>
+          <a:prstGeom prst="rect">
+            <a:avLst>
+              <a:gd name="adj" fmla="val 13636"/>
+            </a:avLst>
+          </a:prstGeom>
+          <a:solidFill>
+            <a:srgbClr val="EEF2FF"/>
+          </a:solidFill>
+          <a:ln w="12700">
+            <a:solidFill>
+              <a:srgbClr val="6366F1"/>
+            </a:solidFill>
+            <a:prstDash val="solid"/>
+          </a:ln>
+        </p:spPr>
+      </p:sp>
+      <p:sp>
+        <p:nvSpPr>
+          <p:cNvPr id="47" name="Text 45"/>
+          <p:cNvSpPr/>
+          <p:nvPr/>
+        </p:nvSpPr>
+        <p:spPr>
+          <a:xfrm>
+            <a:off x="2542032" y="4023360"/>
+            <a:ext cx="2011680" cy="402336"/>
+          </a:xfrm>
+          <a:prstGeom prst="rect">
+            <a:avLst/>
+          </a:prstGeom>
+          <a:noFill/>
+          <a:ln/>
+        </p:spPr>
+        <p:txBody>
+          <a:bodyPr wrap="square" lIns="0" tIns="0" rIns="0" bIns="0" rtlCol="0" anchor="ctr"/>
+          <a:lstStyle/>
+          <a:p>
+            <a:pPr algn="ctr" indent="0" marL="0">
+              <a:buNone/>
+            </a:pPr>
+            <a:r>
+              <a:rPr lang="en-US" sz="1200" b="1" dirty="0">
+                <a:solidFill>
+                  <a:srgbClr val="4338CA"/>
                 </a:solidFill>
                 <a:latin typeface="Trebuchet MS" pitchFamily="34" charset="0"/>
                 <a:ea typeface="Trebuchet MS" pitchFamily="34" charset="-122"/>
                 <a:cs typeface="Trebuchet MS" pitchFamily="34" charset="-120"/>
               </a:rPr>
-              <a:t>-ies</a:t>
-            </a:r>
-            <a:endParaRPr lang="en-US" sz="1300" dirty="0"/>
-          </a:p>
-        </p:txBody>
-      </p:sp>
-      <p:sp>
-        <p:nvSpPr>
-          <p:cNvPr id="43" name="Text 41"/>
-          <p:cNvSpPr/>
-          <p:nvPr/>
-        </p:nvSpPr>
-        <p:spPr>
-          <a:xfrm>
-            <a:off x="365760" y="3611880"/>
-            <a:ext cx="1828800" cy="347472"/>
-          </a:xfrm>
-          <a:prstGeom prst="rect">
-            <a:avLst/>
-          </a:prstGeom>
-          <a:noFill/>
-          <a:ln/>
-        </p:spPr>
-        <p:txBody>
-          <a:bodyPr wrap="square" lIns="0" tIns="0" rIns="0" bIns="0" rtlCol="0" anchor="ctr"/>
-          <a:lstStyle/>
-          <a:p>
-            <a:pPr algn="l" indent="0" marL="0">
+              <a:t>ecology</a:t>
+            </a:r>
+            <a:endParaRPr lang="en-US" sz="1200" dirty="0"/>
+          </a:p>
+        </p:txBody>
+      </p:sp>
+      <p:sp>
+        <p:nvSpPr>
+          <p:cNvPr id="48" name="Shape 46"/>
+          <p:cNvSpPr/>
+          <p:nvPr/>
+        </p:nvSpPr>
+        <p:spPr>
+          <a:xfrm>
+            <a:off x="4718304" y="4023360"/>
+            <a:ext cx="2011680" cy="402336"/>
+          </a:xfrm>
+          <a:prstGeom prst="rect">
+            <a:avLst>
+              <a:gd name="adj" fmla="val 13636"/>
+            </a:avLst>
+          </a:prstGeom>
+          <a:solidFill>
+            <a:srgbClr val="EEF2FF"/>
+          </a:solidFill>
+          <a:ln w="12700">
+            <a:solidFill>
+              <a:srgbClr val="6366F1"/>
+            </a:solidFill>
+            <a:prstDash val="solid"/>
+          </a:ln>
+        </p:spPr>
+      </p:sp>
+      <p:sp>
+        <p:nvSpPr>
+          <p:cNvPr id="49" name="Text 47"/>
+          <p:cNvSpPr/>
+          <p:nvPr/>
+        </p:nvSpPr>
+        <p:spPr>
+          <a:xfrm>
+            <a:off x="4718304" y="4023360"/>
+            <a:ext cx="2011680" cy="402336"/>
+          </a:xfrm>
+          <a:prstGeom prst="rect">
+            <a:avLst/>
+          </a:prstGeom>
+          <a:noFill/>
+          <a:ln/>
+        </p:spPr>
+        <p:txBody>
+          <a:bodyPr wrap="square" lIns="0" tIns="0" rIns="0" bIns="0" rtlCol="0" anchor="ctr"/>
+          <a:lstStyle/>
+          <a:p>
+            <a:pPr algn="ctr" indent="0" marL="0">
               <a:buNone/>
             </a:pPr>
             <a:r>
               <a:rPr lang="en-US" sz="1200" b="1" dirty="0">
                 <a:solidFill>
-                  <a:srgbClr val="0F172A"/>
+                  <a:srgbClr val="4338CA"/>
                 </a:solidFill>
                 <a:latin typeface="Trebuchet MS" pitchFamily="34" charset="0"/>
                 <a:ea typeface="Trebuchet MS" pitchFamily="34" charset="-122"/>
                 <a:cs typeface="Trebuchet MS" pitchFamily="34" charset="-120"/>
               </a:rPr>
-              <a:t>Sample words:</a:t>
+              <a:t>trilogy</a:t>
             </a:r>
             <a:endParaRPr lang="en-US" sz="1200" dirty="0"/>
           </a:p>
@@ -37051,13 +36835,13 @@
       </p:sp>
       <p:sp>
         <p:nvSpPr>
-          <p:cNvPr id="44" name="Shape 42"/>
-          <p:cNvSpPr/>
-          <p:nvPr/>
-        </p:nvSpPr>
-        <p:spPr>
-          <a:xfrm>
-            <a:off x="365760" y="4023360"/>
+          <p:cNvPr id="50" name="Shape 48"/>
+          <p:cNvSpPr/>
+          <p:nvPr/>
+        </p:nvSpPr>
+        <p:spPr>
+          <a:xfrm>
+            <a:off x="6894576" y="4023360"/>
             <a:ext cx="2011680" cy="402336"/>
           </a:xfrm>
           <a:prstGeom prst="rect">
@@ -37078,13 +36862,13 @@
       </p:sp>
       <p:sp>
         <p:nvSpPr>
-          <p:cNvPr id="45" name="Text 43"/>
-          <p:cNvSpPr/>
-          <p:nvPr/>
-        </p:nvSpPr>
-        <p:spPr>
-          <a:xfrm>
-            <a:off x="365760" y="4023360"/>
+          <p:cNvPr id="51" name="Text 49"/>
+          <p:cNvSpPr/>
+          <p:nvPr/>
+        </p:nvSpPr>
+        <p:spPr>
+          <a:xfrm>
+            <a:off x="6894576" y="4023360"/>
             <a:ext cx="2011680" cy="402336"/>
           </a:xfrm>
           <a:prstGeom prst="rect">
@@ -37109,7 +36893,7 @@
                 <a:ea typeface="Trebuchet MS" pitchFamily="34" charset="-122"/>
                 <a:cs typeface="Trebuchet MS" pitchFamily="34" charset="-120"/>
               </a:rPr>
-              <a:t>biology</a:t>
+              <a:t>apologies</a:t>
             </a:r>
             <a:endParaRPr lang="en-US" sz="1200" dirty="0"/>
           </a:p>
@@ -37117,13 +36901,13 @@
       </p:sp>
       <p:sp>
         <p:nvSpPr>
-          <p:cNvPr id="46" name="Shape 44"/>
-          <p:cNvSpPr/>
-          <p:nvPr/>
-        </p:nvSpPr>
-        <p:spPr>
-          <a:xfrm>
-            <a:off x="2542032" y="4023360"/>
+          <p:cNvPr id="52" name="Shape 50"/>
+          <p:cNvSpPr/>
+          <p:nvPr/>
+        </p:nvSpPr>
+        <p:spPr>
+          <a:xfrm>
+            <a:off x="365760" y="4498848"/>
             <a:ext cx="2011680" cy="402336"/>
           </a:xfrm>
           <a:prstGeom prst="rect">
@@ -37144,13 +36928,13 @@
       </p:sp>
       <p:sp>
         <p:nvSpPr>
-          <p:cNvPr id="47" name="Text 45"/>
-          <p:cNvSpPr/>
-          <p:nvPr/>
-        </p:nvSpPr>
-        <p:spPr>
-          <a:xfrm>
-            <a:off x="2542032" y="4023360"/>
+          <p:cNvPr id="53" name="Text 51"/>
+          <p:cNvSpPr/>
+          <p:nvPr/>
+        </p:nvSpPr>
+        <p:spPr>
+          <a:xfrm>
+            <a:off x="365760" y="4498848"/>
             <a:ext cx="2011680" cy="402336"/>
           </a:xfrm>
           <a:prstGeom prst="rect">
@@ -37175,7 +36959,7 @@
                 <a:ea typeface="Trebuchet MS" pitchFamily="34" charset="-122"/>
                 <a:cs typeface="Trebuchet MS" pitchFamily="34" charset="-120"/>
               </a:rPr>
-              <a:t>geology</a:t>
+              <a:t>pathology</a:t>
             </a:r>
             <a:endParaRPr lang="en-US" sz="1200" dirty="0"/>
           </a:p>
@@ -37183,13 +36967,13 @@
       </p:sp>
       <p:sp>
         <p:nvSpPr>
-          <p:cNvPr id="48" name="Shape 46"/>
-          <p:cNvSpPr/>
-          <p:nvPr/>
-        </p:nvSpPr>
-        <p:spPr>
-          <a:xfrm>
-            <a:off x="4718304" y="4023360"/>
+          <p:cNvPr id="54" name="Shape 52"/>
+          <p:cNvSpPr/>
+          <p:nvPr/>
+        </p:nvSpPr>
+        <p:spPr>
+          <a:xfrm>
+            <a:off x="2542032" y="4498848"/>
             <a:ext cx="2011680" cy="402336"/>
           </a:xfrm>
           <a:prstGeom prst="rect">
@@ -37210,13 +36994,13 @@
       </p:sp>
       <p:sp>
         <p:nvSpPr>
-          <p:cNvPr id="49" name="Text 47"/>
-          <p:cNvSpPr/>
-          <p:nvPr/>
-        </p:nvSpPr>
-        <p:spPr>
-          <a:xfrm>
-            <a:off x="4718304" y="4023360"/>
+          <p:cNvPr id="55" name="Text 53"/>
+          <p:cNvSpPr/>
+          <p:nvPr/>
+        </p:nvSpPr>
+        <p:spPr>
+          <a:xfrm>
+            <a:off x="2542032" y="4498848"/>
             <a:ext cx="2011680" cy="402336"/>
           </a:xfrm>
           <a:prstGeom prst="rect">
@@ -37241,7 +37025,7 @@
                 <a:ea typeface="Trebuchet MS" pitchFamily="34" charset="-122"/>
                 <a:cs typeface="Trebuchet MS" pitchFamily="34" charset="-120"/>
               </a:rPr>
-              <a:t>zoology</a:t>
+              <a:t>cardiology</a:t>
             </a:r>
             <a:endParaRPr lang="en-US" sz="1200" dirty="0"/>
           </a:p>
@@ -37249,13 +37033,13 @@
       </p:sp>
       <p:sp>
         <p:nvSpPr>
-          <p:cNvPr id="50" name="Shape 48"/>
-          <p:cNvSpPr/>
-          <p:nvPr/>
-        </p:nvSpPr>
-        <p:spPr>
-          <a:xfrm>
-            <a:off x="6894576" y="4023360"/>
+          <p:cNvPr id="56" name="Shape 54"/>
+          <p:cNvSpPr/>
+          <p:nvPr/>
+        </p:nvSpPr>
+        <p:spPr>
+          <a:xfrm>
+            <a:off x="4718304" y="4498848"/>
             <a:ext cx="2011680" cy="402336"/>
           </a:xfrm>
           <a:prstGeom prst="rect">
@@ -37276,13 +37060,13 @@
       </p:sp>
       <p:sp>
         <p:nvSpPr>
-          <p:cNvPr id="51" name="Text 49"/>
-          <p:cNvSpPr/>
-          <p:nvPr/>
-        </p:nvSpPr>
-        <p:spPr>
-          <a:xfrm>
-            <a:off x="6894576" y="4023360"/>
+          <p:cNvPr id="57" name="Text 55"/>
+          <p:cNvSpPr/>
+          <p:nvPr/>
+        </p:nvSpPr>
+        <p:spPr>
+          <a:xfrm>
+            <a:off x="4718304" y="4498848"/>
             <a:ext cx="2011680" cy="402336"/>
           </a:xfrm>
           <a:prstGeom prst="rect">
@@ -37307,271 +37091,7 @@
                 <a:ea typeface="Trebuchet MS" pitchFamily="34" charset="-122"/>
                 <a:cs typeface="Trebuchet MS" pitchFamily="34" charset="-120"/>
               </a:rPr>
-              <a:t>technology</a:t>
-            </a:r>
-            <a:endParaRPr lang="en-US" sz="1200" dirty="0"/>
-          </a:p>
-        </p:txBody>
-      </p:sp>
-      <p:sp>
-        <p:nvSpPr>
-          <p:cNvPr id="52" name="Shape 50"/>
-          <p:cNvSpPr/>
-          <p:nvPr/>
-        </p:nvSpPr>
-        <p:spPr>
-          <a:xfrm>
-            <a:off x="365760" y="4498848"/>
-            <a:ext cx="2011680" cy="402336"/>
-          </a:xfrm>
-          <a:prstGeom prst="rect">
-            <a:avLst>
-              <a:gd name="adj" fmla="val 13636"/>
-            </a:avLst>
-          </a:prstGeom>
-          <a:solidFill>
-            <a:srgbClr val="EEF2FF"/>
-          </a:solidFill>
-          <a:ln w="12700">
-            <a:solidFill>
-              <a:srgbClr val="6366F1"/>
-            </a:solidFill>
-            <a:prstDash val="solid"/>
-          </a:ln>
-        </p:spPr>
-      </p:sp>
-      <p:sp>
-        <p:nvSpPr>
-          <p:cNvPr id="53" name="Text 51"/>
-          <p:cNvSpPr/>
-          <p:nvPr/>
-        </p:nvSpPr>
-        <p:spPr>
-          <a:xfrm>
-            <a:off x="365760" y="4498848"/>
-            <a:ext cx="2011680" cy="402336"/>
-          </a:xfrm>
-          <a:prstGeom prst="rect">
-            <a:avLst/>
-          </a:prstGeom>
-          <a:noFill/>
-          <a:ln/>
-        </p:spPr>
-        <p:txBody>
-          <a:bodyPr wrap="square" lIns="0" tIns="0" rIns="0" bIns="0" rtlCol="0" anchor="ctr"/>
-          <a:lstStyle/>
-          <a:p>
-            <a:pPr algn="ctr" indent="0" marL="0">
-              <a:buNone/>
-            </a:pPr>
-            <a:r>
-              <a:rPr lang="en-US" sz="1200" b="1" dirty="0">
-                <a:solidFill>
-                  <a:srgbClr val="4338CA"/>
-                </a:solidFill>
-                <a:latin typeface="Trebuchet MS" pitchFamily="34" charset="0"/>
-                <a:ea typeface="Trebuchet MS" pitchFamily="34" charset="-122"/>
-                <a:cs typeface="Trebuchet MS" pitchFamily="34" charset="-120"/>
-              </a:rPr>
-              <a:t>psychology</a:t>
-            </a:r>
-            <a:endParaRPr lang="en-US" sz="1200" dirty="0"/>
-          </a:p>
-        </p:txBody>
-      </p:sp>
-      <p:sp>
-        <p:nvSpPr>
-          <p:cNvPr id="54" name="Shape 52"/>
-          <p:cNvSpPr/>
-          <p:nvPr/>
-        </p:nvSpPr>
-        <p:spPr>
-          <a:xfrm>
-            <a:off x="2542032" y="4498848"/>
-            <a:ext cx="2011680" cy="402336"/>
-          </a:xfrm>
-          <a:prstGeom prst="rect">
-            <a:avLst>
-              <a:gd name="adj" fmla="val 13636"/>
-            </a:avLst>
-          </a:prstGeom>
-          <a:solidFill>
-            <a:srgbClr val="EEF2FF"/>
-          </a:solidFill>
-          <a:ln w="12700">
-            <a:solidFill>
-              <a:srgbClr val="6366F1"/>
-            </a:solidFill>
-            <a:prstDash val="solid"/>
-          </a:ln>
-        </p:spPr>
-      </p:sp>
-      <p:sp>
-        <p:nvSpPr>
-          <p:cNvPr id="55" name="Text 53"/>
-          <p:cNvSpPr/>
-          <p:nvPr/>
-        </p:nvSpPr>
-        <p:spPr>
-          <a:xfrm>
-            <a:off x="2542032" y="4498848"/>
-            <a:ext cx="2011680" cy="402336"/>
-          </a:xfrm>
-          <a:prstGeom prst="rect">
-            <a:avLst/>
-          </a:prstGeom>
-          <a:noFill/>
-          <a:ln/>
-        </p:spPr>
-        <p:txBody>
-          <a:bodyPr wrap="square" lIns="0" tIns="0" rIns="0" bIns="0" rtlCol="0" anchor="ctr"/>
-          <a:lstStyle/>
-          <a:p>
-            <a:pPr algn="ctr" indent="0" marL="0">
-              <a:buNone/>
-            </a:pPr>
-            <a:r>
-              <a:rPr lang="en-US" sz="1200" b="1" dirty="0">
-                <a:solidFill>
-                  <a:srgbClr val="4338CA"/>
-                </a:solidFill>
-                <a:latin typeface="Trebuchet MS" pitchFamily="34" charset="0"/>
-                <a:ea typeface="Trebuchet MS" pitchFamily="34" charset="-122"/>
-                <a:cs typeface="Trebuchet MS" pitchFamily="34" charset="-120"/>
-              </a:rPr>
-              <a:t>ecology</a:t>
-            </a:r>
-            <a:endParaRPr lang="en-US" sz="1200" dirty="0"/>
-          </a:p>
-        </p:txBody>
-      </p:sp>
-      <p:sp>
-        <p:nvSpPr>
-          <p:cNvPr id="56" name="Shape 54"/>
-          <p:cNvSpPr/>
-          <p:nvPr/>
-        </p:nvSpPr>
-        <p:spPr>
-          <a:xfrm>
-            <a:off x="4718304" y="4498848"/>
-            <a:ext cx="2011680" cy="402336"/>
-          </a:xfrm>
-          <a:prstGeom prst="rect">
-            <a:avLst>
-              <a:gd name="adj" fmla="val 13636"/>
-            </a:avLst>
-          </a:prstGeom>
-          <a:solidFill>
-            <a:srgbClr val="EEF2FF"/>
-          </a:solidFill>
-          <a:ln w="12700">
-            <a:solidFill>
-              <a:srgbClr val="6366F1"/>
-            </a:solidFill>
-            <a:prstDash val="solid"/>
-          </a:ln>
-        </p:spPr>
-      </p:sp>
-      <p:sp>
-        <p:nvSpPr>
-          <p:cNvPr id="57" name="Text 55"/>
-          <p:cNvSpPr/>
-          <p:nvPr/>
-        </p:nvSpPr>
-        <p:spPr>
-          <a:xfrm>
-            <a:off x="4718304" y="4498848"/>
-            <a:ext cx="2011680" cy="402336"/>
-          </a:xfrm>
-          <a:prstGeom prst="rect">
-            <a:avLst/>
-          </a:prstGeom>
-          <a:noFill/>
-          <a:ln/>
-        </p:spPr>
-        <p:txBody>
-          <a:bodyPr wrap="square" lIns="0" tIns="0" rIns="0" bIns="0" rtlCol="0" anchor="ctr"/>
-          <a:lstStyle/>
-          <a:p>
-            <a:pPr algn="ctr" indent="0" marL="0">
-              <a:buNone/>
-            </a:pPr>
-            <a:r>
-              <a:rPr lang="en-US" sz="1200" b="1" dirty="0">
-                <a:solidFill>
-                  <a:srgbClr val="4338CA"/>
-                </a:solidFill>
-                <a:latin typeface="Trebuchet MS" pitchFamily="34" charset="0"/>
-                <a:ea typeface="Trebuchet MS" pitchFamily="34" charset="-122"/>
-                <a:cs typeface="Trebuchet MS" pitchFamily="34" charset="-120"/>
-              </a:rPr>
-              <a:t>archaeology</a:t>
-            </a:r>
-            <a:endParaRPr lang="en-US" sz="1200" dirty="0"/>
-          </a:p>
-        </p:txBody>
-      </p:sp>
-      <p:sp>
-        <p:nvSpPr>
-          <p:cNvPr id="58" name="Shape 56"/>
-          <p:cNvSpPr/>
-          <p:nvPr/>
-        </p:nvSpPr>
-        <p:spPr>
-          <a:xfrm>
-            <a:off x="6894576" y="4498848"/>
-            <a:ext cx="2011680" cy="402336"/>
-          </a:xfrm>
-          <a:prstGeom prst="rect">
-            <a:avLst>
-              <a:gd name="adj" fmla="val 13636"/>
-            </a:avLst>
-          </a:prstGeom>
-          <a:solidFill>
-            <a:srgbClr val="EEF2FF"/>
-          </a:solidFill>
-          <a:ln w="12700">
-            <a:solidFill>
-              <a:srgbClr val="6366F1"/>
-            </a:solidFill>
-            <a:prstDash val="solid"/>
-          </a:ln>
-        </p:spPr>
-      </p:sp>
-      <p:sp>
-        <p:nvSpPr>
-          <p:cNvPr id="59" name="Text 57"/>
-          <p:cNvSpPr/>
-          <p:nvPr/>
-        </p:nvSpPr>
-        <p:spPr>
-          <a:xfrm>
-            <a:off x="6894576" y="4498848"/>
-            <a:ext cx="2011680" cy="402336"/>
-          </a:xfrm>
-          <a:prstGeom prst="rect">
-            <a:avLst/>
-          </a:prstGeom>
-          <a:noFill/>
-          <a:ln/>
-        </p:spPr>
-        <p:txBody>
-          <a:bodyPr wrap="square" lIns="0" tIns="0" rIns="0" bIns="0" rtlCol="0" anchor="ctr"/>
-          <a:lstStyle/>
-          <a:p>
-            <a:pPr algn="ctr" indent="0" marL="0">
-              <a:buNone/>
-            </a:pPr>
-            <a:r>
-              <a:rPr lang="en-US" sz="1200" b="1" dirty="0">
-                <a:solidFill>
-                  <a:srgbClr val="4338CA"/>
-                </a:solidFill>
-                <a:latin typeface="Trebuchet MS" pitchFamily="34" charset="0"/>
-                <a:ea typeface="Trebuchet MS" pitchFamily="34" charset="-122"/>
-                <a:cs typeface="Trebuchet MS" pitchFamily="34" charset="-120"/>
-              </a:rPr>
-              <a:t>meteorology</a:t>
+              <a:t>chronology</a:t>
             </a:r>
             <a:endParaRPr lang="en-US" sz="1200" dirty="0"/>
           </a:p>
@@ -37863,7 +37383,7 @@
                 <a:ea typeface="Calibri" pitchFamily="34" charset="-122"/>
                 <a:cs typeface="Calibri" pitchFamily="34" charset="-120"/>
               </a:rPr>
-              <a:t>Word Labs  •  wordlabs.app  •  Root: 'logy' = study or science of</a:t>
+              <a:t>Word Labs  •  wordlabs.app  •  Root: 'logy' = study of</a:t>
             </a:r>
             <a:endParaRPr lang="en-US" sz="800" dirty="0"/>
           </a:p>
@@ -38027,7 +37547,7 @@
                 <a:ea typeface="Calibri" pitchFamily="34" charset="-122"/>
                 <a:cs typeface="Calibri" pitchFamily="34" charset="-120"/>
               </a:rPr>
-              <a:t>The core part of a word carrying its basic meaning. For example, 'logy' means 'study or science of'.</a:t>
+              <a:t>The core part of a word carrying its basic meaning. For example, 'logy' means 'study of'.</a:t>
             </a:r>
             <a:endParaRPr lang="en-US" sz="1350" dirty="0"/>
           </a:p>
@@ -38647,7 +38167,7 @@
                 <a:ea typeface="Calibri" pitchFamily="34" charset="-122"/>
                 <a:cs typeface="Calibri" pitchFamily="34" charset="-120"/>
               </a:rPr>
-              <a:t>Word Labs  •  wordlabs.app  •  Root: 'logy' = study or science of</a:t>
+              <a:t>Word Labs  •  wordlabs.app  •  Root: 'logy' = study of</a:t>
             </a:r>
             <a:endParaRPr lang="en-US" sz="800" dirty="0"/>
           </a:p>
@@ -38759,7 +38279,7 @@
                 <a:ea typeface="Calibri" pitchFamily="34" charset="-122"/>
                 <a:cs typeface="Calibri" pitchFamily="34" charset="-120"/>
               </a:rPr>
-              <a:t>1.  The morpheme 'logy' means to move or travel quickly.</a:t>
+              <a:t>1.  'apology' means 'a statement expressing regret for a mistake'.</a:t>
             </a:r>
             <a:endParaRPr lang="en-US" sz="1300" dirty="0"/>
           </a:p>
@@ -38782,11 +38302,11 @@
             </a:avLst>
           </a:prstGeom>
           <a:solidFill>
-            <a:srgbClr val="FEE2E2"/>
-          </a:solidFill>
-          <a:ln w="12700">
-            <a:solidFill>
-              <a:srgbClr val="DC2626"/>
+            <a:srgbClr val="DCFCE7"/>
+          </a:solidFill>
+          <a:ln w="12700">
+            <a:solidFill>
+              <a:srgbClr val="16A34A"/>
             </a:solidFill>
             <a:prstDash val="solid"/>
           </a:ln>
@@ -38819,13 +38339,13 @@
             <a:r>
               <a:rPr lang="en-US" sz="1100" b="1" dirty="0">
                 <a:solidFill>
-                  <a:srgbClr val="DC2626"/>
+                  <a:srgbClr val="16A34A"/>
                 </a:solidFill>
                 <a:latin typeface="Trebuchet MS" pitchFamily="34" charset="0"/>
                 <a:ea typeface="Trebuchet MS" pitchFamily="34" charset="-122"/>
                 <a:cs typeface="Trebuchet MS" pitchFamily="34" charset="-120"/>
               </a:rPr>
-              <a:t>FALSE</a:t>
+              <a:t>TRUE</a:t>
             </a:r>
             <a:endParaRPr lang="en-US" sz="1100" dirty="0"/>
           </a:p>
@@ -38898,7 +38418,7 @@
                 <a:ea typeface="Calibri" pitchFamily="34" charset="-122"/>
                 <a:cs typeface="Calibri" pitchFamily="34" charset="-120"/>
               </a:rPr>
-              <a:t>2.  A person who studies zoology is learning about animals.</a:t>
+              <a:t>2.  'logy' means 'study of'.</a:t>
             </a:r>
             <a:endParaRPr lang="en-US" sz="1300" dirty="0"/>
           </a:p>
@@ -39037,7 +38557,7 @@
                 <a:ea typeface="Calibri" pitchFamily="34" charset="-122"/>
                 <a:cs typeface="Calibri" pitchFamily="34" charset="-120"/>
               </a:rPr>
-              <a:t>3.  The morpheme 'logy' can be found in the word 'meteorology'.</a:t>
+              <a:t>3.  'ecology' means 'the scientific study of how living things interact with their environment'.</a:t>
             </a:r>
             <a:endParaRPr lang="en-US" sz="1300" dirty="0"/>
           </a:p>
@@ -39176,7 +38696,7 @@
                 <a:ea typeface="Calibri" pitchFamily="34" charset="-122"/>
                 <a:cs typeface="Calibri" pitchFamily="34" charset="-120"/>
               </a:rPr>
-              <a:t>4.  The morpheme 'logy' comes from Greek and means the study of something.</a:t>
+              <a:t>4.  'apology' means 'a formal request for money'.</a:t>
             </a:r>
             <a:endParaRPr lang="en-US" sz="1300" dirty="0"/>
           </a:p>
@@ -39199,11 +38719,11 @@
             </a:avLst>
           </a:prstGeom>
           <a:solidFill>
-            <a:srgbClr val="DCFCE7"/>
-          </a:solidFill>
-          <a:ln w="12700">
-            <a:solidFill>
-              <a:srgbClr val="16A34A"/>
+            <a:srgbClr val="FEE2E2"/>
+          </a:solidFill>
+          <a:ln w="12700">
+            <a:solidFill>
+              <a:srgbClr val="DC2626"/>
             </a:solidFill>
             <a:prstDash val="solid"/>
           </a:ln>
@@ -39236,13 +38756,13 @@
             <a:r>
               <a:rPr lang="en-US" sz="1100" b="1" dirty="0">
                 <a:solidFill>
-                  <a:srgbClr val="16A34A"/>
+                  <a:srgbClr val="DC2626"/>
                 </a:solidFill>
                 <a:latin typeface="Trebuchet MS" pitchFamily="34" charset="0"/>
                 <a:ea typeface="Trebuchet MS" pitchFamily="34" charset="-122"/>
                 <a:cs typeface="Trebuchet MS" pitchFamily="34" charset="-120"/>
               </a:rPr>
-              <a:t>TRUE</a:t>
+              <a:t>FALSE</a:t>
             </a:r>
             <a:endParaRPr lang="en-US" sz="1100" dirty="0"/>
           </a:p>
@@ -39315,7 +38835,7 @@
                 <a:ea typeface="Calibri" pitchFamily="34" charset="-122"/>
                 <a:cs typeface="Calibri" pitchFamily="34" charset="-120"/>
               </a:rPr>
-              <a:t>5.  The word 'biology' means the study of rocks and minerals.</a:t>
+              <a:t>5.  'ecology' means 'the study of ancient buildings and ruins'.</a:t>
             </a:r>
             <a:endParaRPr lang="en-US" sz="1300" dirty="0"/>
           </a:p>
@@ -39673,7 +39193,7 @@
                 <a:ea typeface="Calibri" pitchFamily="34" charset="-122"/>
                 <a:cs typeface="Calibri" pitchFamily="34" charset="-120"/>
               </a:rPr>
-              <a:t>Word Labs  •  wordlabs.app  •  Root: 'logy' = study or science of</a:t>
+              <a:t>Word Labs  •  wordlabs.app  •  Root: 'logy' = study of</a:t>
             </a:r>
             <a:endParaRPr lang="en-US" sz="800" dirty="0"/>
           </a:p>
@@ -39810,7 +39330,7 @@
                 <a:ea typeface="Trebuchet MS" pitchFamily="34" charset="-122"/>
                 <a:cs typeface="Trebuchet MS" pitchFamily="34" charset="-120"/>
               </a:rPr>
-              <a:t>study or science of</a:t>
+              <a:t>study of</a:t>
             </a:r>
             <a:endParaRPr lang="en-US" sz="2000" dirty="0"/>
           </a:p>
@@ -39849,7 +39369,7 @@
                 <a:ea typeface="Calibri" pitchFamily="34" charset="-122"/>
                 <a:cs typeface="Calibri" pitchFamily="34" charset="-120"/>
               </a:rPr>
-              <a:t>Origin: Greek: logos</a:t>
+              <a:t>Origin: Greek root</a:t>
             </a:r>
             <a:endParaRPr lang="en-US" sz="1100" dirty="0"/>
           </a:p>
@@ -39954,7 +39474,7 @@
                 <a:ea typeface="Trebuchet MS" pitchFamily="34" charset="-122"/>
                 <a:cs typeface="Trebuchet MS" pitchFamily="34" charset="-120"/>
               </a:rPr>
-              <a:t>biology</a:t>
+              <a:t>apology</a:t>
             </a:r>
             <a:endParaRPr lang="en-US" sz="1300" dirty="0"/>
           </a:p>
@@ -40020,7 +39540,7 @@
                 <a:ea typeface="Trebuchet MS" pitchFamily="34" charset="-122"/>
                 <a:cs typeface="Trebuchet MS" pitchFamily="34" charset="-120"/>
               </a:rPr>
-              <a:t>geology</a:t>
+              <a:t>ecology</a:t>
             </a:r>
             <a:endParaRPr lang="en-US" sz="1300" dirty="0"/>
           </a:p>
@@ -40086,7 +39606,7 @@
                 <a:ea typeface="Trebuchet MS" pitchFamily="34" charset="-122"/>
                 <a:cs typeface="Trebuchet MS" pitchFamily="34" charset="-120"/>
               </a:rPr>
-              <a:t>zoology</a:t>
+              <a:t>trilogy</a:t>
             </a:r>
             <a:endParaRPr lang="en-US" sz="1300" dirty="0"/>
           </a:p>
@@ -40152,7 +39672,7 @@
                 <a:ea typeface="Trebuchet MS" pitchFamily="34" charset="-122"/>
                 <a:cs typeface="Trebuchet MS" pitchFamily="34" charset="-120"/>
               </a:rPr>
-              <a:t>technology</a:t>
+              <a:t>apologies</a:t>
             </a:r>
             <a:endParaRPr lang="en-US" sz="1300" dirty="0"/>
           </a:p>
@@ -40218,7 +39738,7 @@
                 <a:ea typeface="Trebuchet MS" pitchFamily="34" charset="-122"/>
                 <a:cs typeface="Trebuchet MS" pitchFamily="34" charset="-120"/>
               </a:rPr>
-              <a:t>psychology</a:t>
+              <a:t>pathology</a:t>
             </a:r>
             <a:endParaRPr lang="en-US" sz="1300" dirty="0"/>
           </a:p>
@@ -40284,7 +39804,7 @@
                 <a:ea typeface="Trebuchet MS" pitchFamily="34" charset="-122"/>
                 <a:cs typeface="Trebuchet MS" pitchFamily="34" charset="-120"/>
               </a:rPr>
-              <a:t>ecology</a:t>
+              <a:t>cardiology</a:t>
             </a:r>
             <a:endParaRPr lang="en-US" sz="1300" dirty="0"/>
           </a:p>
@@ -40350,7 +39870,7 @@
                 <a:ea typeface="Trebuchet MS" pitchFamily="34" charset="-122"/>
                 <a:cs typeface="Trebuchet MS" pitchFamily="34" charset="-120"/>
               </a:rPr>
-              <a:t>archaeology</a:t>
+              <a:t>chronology</a:t>
             </a:r>
             <a:endParaRPr lang="en-US" sz="1300" dirty="0"/>
           </a:p>
@@ -40642,7 +40162,7 @@
                 <a:ea typeface="Calibri" pitchFamily="34" charset="-122"/>
                 <a:cs typeface="Calibri" pitchFamily="34" charset="-120"/>
               </a:rPr>
-              <a:t>Word Labs  •  wordlabs.app  •  Root: 'logy' = study or science of</a:t>
+              <a:t>Word Labs  •  wordlabs.app  •  Root: 'logy' = study of</a:t>
             </a:r>
             <a:endParaRPr lang="en-US" sz="800" dirty="0"/>
           </a:p>
@@ -40943,7 +40463,7 @@
                 <a:ea typeface="Trebuchet MS" pitchFamily="34" charset="-122"/>
                 <a:cs typeface="Trebuchet MS" pitchFamily="34" charset="-120"/>
               </a:rPr>
-              <a:t>bio-</a:t>
+              <a:t>apo-</a:t>
             </a:r>
             <a:endParaRPr lang="en-US" sz="1300" dirty="0"/>
           </a:p>
@@ -41071,7 +40591,7 @@
                 <a:ea typeface="Trebuchet MS" pitchFamily="34" charset="-122"/>
                 <a:cs typeface="Trebuchet MS" pitchFamily="34" charset="-120"/>
               </a:rPr>
-              <a:t>-ist</a:t>
+              <a:t>-es</a:t>
             </a:r>
             <a:endParaRPr lang="en-US" sz="1300" dirty="0"/>
           </a:p>
@@ -41135,7 +40655,7 @@
                 <a:ea typeface="Trebuchet MS" pitchFamily="34" charset="-122"/>
                 <a:cs typeface="Trebuchet MS" pitchFamily="34" charset="-120"/>
               </a:rPr>
-              <a:t>geo-</a:t>
+              <a:t>astro-</a:t>
             </a:r>
             <a:endParaRPr lang="en-US" sz="1300" dirty="0"/>
           </a:p>
@@ -41181,7 +40701,7 @@
             <a:avLst/>
           </a:prstGeom>
           <a:solidFill>
-            <a:srgbClr val="FCE7F3"/>
+            <a:srgbClr val="F1F5F9"/>
           </a:solidFill>
           <a:ln w="12700">
             <a:solidFill>
@@ -41193,18 +40713,43 @@
       </p:sp>
       <p:sp>
         <p:nvSpPr>
-          <p:cNvPr id="27" name="Text 25"/>
-          <p:cNvSpPr/>
-          <p:nvPr/>
-        </p:nvSpPr>
-        <p:spPr>
-          <a:xfrm>
-            <a:off x="5943600" y="2212848"/>
+          <p:cNvPr id="27" name="Shape 25"/>
+          <p:cNvSpPr/>
+          <p:nvPr/>
+        </p:nvSpPr>
+        <p:spPr>
+          <a:xfrm>
+            <a:off x="640080" y="2670048"/>
             <a:ext cx="1463040" cy="420624"/>
           </a:xfrm>
           <a:prstGeom prst="rect">
             <a:avLst/>
           </a:prstGeom>
+          <a:solidFill>
+            <a:srgbClr val="DDD6FE"/>
+          </a:solidFill>
+          <a:ln w="12700">
+            <a:solidFill>
+              <a:srgbClr val="E5E7EB"/>
+            </a:solidFill>
+            <a:prstDash val="solid"/>
+          </a:ln>
+        </p:spPr>
+      </p:sp>
+      <p:sp>
+        <p:nvSpPr>
+          <p:cNvPr id="28" name="Text 26"/>
+          <p:cNvSpPr/>
+          <p:nvPr/>
+        </p:nvSpPr>
+        <p:spPr>
+          <a:xfrm>
+            <a:off x="640080" y="2670048"/>
+            <a:ext cx="1463040" cy="420624"/>
+          </a:xfrm>
+          <a:prstGeom prst="rect">
+            <a:avLst/>
+          </a:prstGeom>
           <a:noFill/>
           <a:ln/>
         </p:spPr>
@@ -41218,13 +40763,13 @@
             <a:r>
               <a:rPr lang="en-US" sz="1300" b="1" dirty="0">
                 <a:solidFill>
-                  <a:srgbClr val="9D174D"/>
+                  <a:srgbClr val="4C1D95"/>
                 </a:solidFill>
                 <a:latin typeface="Trebuchet MS" pitchFamily="34" charset="0"/>
                 <a:ea typeface="Trebuchet MS" pitchFamily="34" charset="-122"/>
                 <a:cs typeface="Trebuchet MS" pitchFamily="34" charset="-120"/>
               </a:rPr>
-              <a:t>-ical</a:t>
+              <a:t>bio-</a:t>
             </a:r>
             <a:endParaRPr lang="en-US" sz="1300" dirty="0"/>
           </a:p>
@@ -41232,19 +40777,69 @@
       </p:sp>
       <p:sp>
         <p:nvSpPr>
-          <p:cNvPr id="28" name="Shape 26"/>
-          <p:cNvSpPr/>
-          <p:nvPr/>
-        </p:nvSpPr>
-        <p:spPr>
-          <a:xfrm>
-            <a:off x="640080" y="2670048"/>
+          <p:cNvPr id="29" name="Shape 27"/>
+          <p:cNvSpPr/>
+          <p:nvPr/>
+        </p:nvSpPr>
+        <p:spPr>
+          <a:xfrm>
+            <a:off x="3291840" y="2670048"/>
+            <a:ext cx="1645920" cy="420624"/>
+          </a:xfrm>
+          <a:prstGeom prst="rect">
+            <a:avLst/>
+          </a:prstGeom>
+          <a:solidFill>
+            <a:srgbClr val="F8FAFC"/>
+          </a:solidFill>
+          <a:ln w="12700">
+            <a:solidFill>
+              <a:srgbClr val="E5E7EB"/>
+            </a:solidFill>
+            <a:prstDash val="solid"/>
+          </a:ln>
+        </p:spPr>
+      </p:sp>
+      <p:sp>
+        <p:nvSpPr>
+          <p:cNvPr id="30" name="Shape 28"/>
+          <p:cNvSpPr/>
+          <p:nvPr/>
+        </p:nvSpPr>
+        <p:spPr>
+          <a:xfrm>
+            <a:off x="5943600" y="2670048"/>
             <a:ext cx="1463040" cy="420624"/>
           </a:xfrm>
           <a:prstGeom prst="rect">
             <a:avLst/>
           </a:prstGeom>
           <a:solidFill>
+            <a:srgbClr val="F8FAFC"/>
+          </a:solidFill>
+          <a:ln w="12700">
+            <a:solidFill>
+              <a:srgbClr val="E5E7EB"/>
+            </a:solidFill>
+            <a:prstDash val="solid"/>
+          </a:ln>
+        </p:spPr>
+      </p:sp>
+      <p:sp>
+        <p:nvSpPr>
+          <p:cNvPr id="31" name="Shape 29"/>
+          <p:cNvSpPr/>
+          <p:nvPr/>
+        </p:nvSpPr>
+        <p:spPr>
+          <a:xfrm>
+            <a:off x="640080" y="3127248"/>
+            <a:ext cx="1463040" cy="420624"/>
+          </a:xfrm>
+          <a:prstGeom prst="rect">
+            <a:avLst/>
+          </a:prstGeom>
+          <a:solidFill>
             <a:srgbClr val="DDD6FE"/>
           </a:solidFill>
           <a:ln w="12700">
@@ -41257,13 +40852,13 @@
       </p:sp>
       <p:sp>
         <p:nvSpPr>
-          <p:cNvPr id="29" name="Text 27"/>
-          <p:cNvSpPr/>
-          <p:nvPr/>
-        </p:nvSpPr>
-        <p:spPr>
-          <a:xfrm>
-            <a:off x="640080" y="2670048"/>
+          <p:cNvPr id="32" name="Text 30"/>
+          <p:cNvSpPr/>
+          <p:nvPr/>
+        </p:nvSpPr>
+        <p:spPr>
+          <a:xfrm>
+            <a:off x="640080" y="3127248"/>
             <a:ext cx="1463040" cy="420624"/>
           </a:xfrm>
           <a:prstGeom prst="rect">
@@ -41288,7 +40883,7 @@
                 <a:ea typeface="Trebuchet MS" pitchFamily="34" charset="-122"/>
                 <a:cs typeface="Trebuchet MS" pitchFamily="34" charset="-120"/>
               </a:rPr>
-              <a:t>zoo-</a:t>
+              <a:t>cardio-</a:t>
             </a:r>
             <a:endParaRPr lang="en-US" sz="1300" dirty="0"/>
           </a:p>
@@ -41296,20 +40891,20 @@
       </p:sp>
       <p:sp>
         <p:nvSpPr>
-          <p:cNvPr id="30" name="Shape 28"/>
-          <p:cNvSpPr/>
-          <p:nvPr/>
-        </p:nvSpPr>
-        <p:spPr>
-          <a:xfrm>
-            <a:off x="3291840" y="2670048"/>
+          <p:cNvPr id="33" name="Shape 31"/>
+          <p:cNvSpPr/>
+          <p:nvPr/>
+        </p:nvSpPr>
+        <p:spPr>
+          <a:xfrm>
+            <a:off x="3291840" y="3127248"/>
             <a:ext cx="1645920" cy="420624"/>
           </a:xfrm>
           <a:prstGeom prst="rect">
             <a:avLst/>
           </a:prstGeom>
           <a:solidFill>
-            <a:srgbClr val="F8FAFC"/>
+            <a:srgbClr val="F1F5F9"/>
           </a:solidFill>
           <a:ln w="12700">
             <a:solidFill>
@@ -41321,20 +40916,20 @@
       </p:sp>
       <p:sp>
         <p:nvSpPr>
-          <p:cNvPr id="31" name="Shape 29"/>
-          <p:cNvSpPr/>
-          <p:nvPr/>
-        </p:nvSpPr>
-        <p:spPr>
-          <a:xfrm>
-            <a:off x="5943600" y="2670048"/>
+          <p:cNvPr id="34" name="Shape 32"/>
+          <p:cNvSpPr/>
+          <p:nvPr/>
+        </p:nvSpPr>
+        <p:spPr>
+          <a:xfrm>
+            <a:off x="5943600" y="3127248"/>
             <a:ext cx="1463040" cy="420624"/>
           </a:xfrm>
           <a:prstGeom prst="rect">
             <a:avLst/>
           </a:prstGeom>
           <a:solidFill>
-            <a:srgbClr val="FCE7F3"/>
+            <a:srgbClr val="F1F5F9"/>
           </a:solidFill>
           <a:ln w="12700">
             <a:solidFill>
@@ -41346,18 +40941,43 @@
       </p:sp>
       <p:sp>
         <p:nvSpPr>
-          <p:cNvPr id="32" name="Text 30"/>
-          <p:cNvSpPr/>
-          <p:nvPr/>
-        </p:nvSpPr>
-        <p:spPr>
-          <a:xfrm>
-            <a:off x="5943600" y="2670048"/>
+          <p:cNvPr id="35" name="Shape 33"/>
+          <p:cNvSpPr/>
+          <p:nvPr/>
+        </p:nvSpPr>
+        <p:spPr>
+          <a:xfrm>
+            <a:off x="640080" y="3584448"/>
             <a:ext cx="1463040" cy="420624"/>
           </a:xfrm>
           <a:prstGeom prst="rect">
             <a:avLst/>
           </a:prstGeom>
+          <a:solidFill>
+            <a:srgbClr val="DDD6FE"/>
+          </a:solidFill>
+          <a:ln w="12700">
+            <a:solidFill>
+              <a:srgbClr val="E5E7EB"/>
+            </a:solidFill>
+            <a:prstDash val="solid"/>
+          </a:ln>
+        </p:spPr>
+      </p:sp>
+      <p:sp>
+        <p:nvSpPr>
+          <p:cNvPr id="36" name="Text 34"/>
+          <p:cNvSpPr/>
+          <p:nvPr/>
+        </p:nvSpPr>
+        <p:spPr>
+          <a:xfrm>
+            <a:off x="640080" y="3584448"/>
+            <a:ext cx="1463040" cy="420624"/>
+          </a:xfrm>
+          <a:prstGeom prst="rect">
+            <a:avLst/>
+          </a:prstGeom>
           <a:noFill/>
           <a:ln/>
         </p:spPr>
@@ -41371,13 +40991,13 @@
             <a:r>
               <a:rPr lang="en-US" sz="1300" b="1" dirty="0">
                 <a:solidFill>
-                  <a:srgbClr val="9D174D"/>
+                  <a:srgbClr val="4C1D95"/>
                 </a:solidFill>
                 <a:latin typeface="Trebuchet MS" pitchFamily="34" charset="0"/>
                 <a:ea typeface="Trebuchet MS" pitchFamily="34" charset="-122"/>
                 <a:cs typeface="Trebuchet MS" pitchFamily="34" charset="-120"/>
               </a:rPr>
-              <a:t>-ically</a:t>
+              <a:t>chrono-</a:t>
             </a:r>
             <a:endParaRPr lang="en-US" sz="1300" dirty="0"/>
           </a:p>
@@ -41385,19 +41005,69 @@
       </p:sp>
       <p:sp>
         <p:nvSpPr>
-          <p:cNvPr id="33" name="Shape 31"/>
-          <p:cNvSpPr/>
-          <p:nvPr/>
-        </p:nvSpPr>
-        <p:spPr>
-          <a:xfrm>
-            <a:off x="640080" y="3127248"/>
+          <p:cNvPr id="37" name="Shape 35"/>
+          <p:cNvSpPr/>
+          <p:nvPr/>
+        </p:nvSpPr>
+        <p:spPr>
+          <a:xfrm>
+            <a:off x="3291840" y="3584448"/>
+            <a:ext cx="1645920" cy="420624"/>
+          </a:xfrm>
+          <a:prstGeom prst="rect">
+            <a:avLst/>
+          </a:prstGeom>
+          <a:solidFill>
+            <a:srgbClr val="F8FAFC"/>
+          </a:solidFill>
+          <a:ln w="12700">
+            <a:solidFill>
+              <a:srgbClr val="E5E7EB"/>
+            </a:solidFill>
+            <a:prstDash val="solid"/>
+          </a:ln>
+        </p:spPr>
+      </p:sp>
+      <p:sp>
+        <p:nvSpPr>
+          <p:cNvPr id="38" name="Shape 36"/>
+          <p:cNvSpPr/>
+          <p:nvPr/>
+        </p:nvSpPr>
+        <p:spPr>
+          <a:xfrm>
+            <a:off x="5943600" y="3584448"/>
             <a:ext cx="1463040" cy="420624"/>
           </a:xfrm>
           <a:prstGeom prst="rect">
             <a:avLst/>
           </a:prstGeom>
           <a:solidFill>
+            <a:srgbClr val="F8FAFC"/>
+          </a:solidFill>
+          <a:ln w="12700">
+            <a:solidFill>
+              <a:srgbClr val="E5E7EB"/>
+            </a:solidFill>
+            <a:prstDash val="solid"/>
+          </a:ln>
+        </p:spPr>
+      </p:sp>
+      <p:sp>
+        <p:nvSpPr>
+          <p:cNvPr id="39" name="Shape 37"/>
+          <p:cNvSpPr/>
+          <p:nvPr/>
+        </p:nvSpPr>
+        <p:spPr>
+          <a:xfrm>
+            <a:off x="640080" y="4041648"/>
+            <a:ext cx="1463040" cy="420624"/>
+          </a:xfrm>
+          <a:prstGeom prst="rect">
+            <a:avLst/>
+          </a:prstGeom>
+          <a:solidFill>
             <a:srgbClr val="DDD6FE"/>
           </a:solidFill>
           <a:ln w="12700">
@@ -41410,13 +41080,13 @@
       </p:sp>
       <p:sp>
         <p:nvSpPr>
-          <p:cNvPr id="34" name="Text 32"/>
-          <p:cNvSpPr/>
-          <p:nvPr/>
-        </p:nvSpPr>
-        <p:spPr>
-          <a:xfrm>
-            <a:off x="640080" y="3127248"/>
+          <p:cNvPr id="40" name="Text 38"/>
+          <p:cNvSpPr/>
+          <p:nvPr/>
+        </p:nvSpPr>
+        <p:spPr>
+          <a:xfrm>
+            <a:off x="640080" y="4041648"/>
             <a:ext cx="1463040" cy="420624"/>
           </a:xfrm>
           <a:prstGeom prst="rect">
@@ -41441,7 +41111,7 @@
                 <a:ea typeface="Trebuchet MS" pitchFamily="34" charset="-122"/>
                 <a:cs typeface="Trebuchet MS" pitchFamily="34" charset="-120"/>
               </a:rPr>
-              <a:t>techno-</a:t>
+              <a:t>eco-</a:t>
             </a:r>
             <a:endParaRPr lang="en-US" sz="1300" dirty="0"/>
           </a:p>
@@ -41449,13 +41119,13 @@
       </p:sp>
       <p:sp>
         <p:nvSpPr>
-          <p:cNvPr id="35" name="Shape 33"/>
-          <p:cNvSpPr/>
-          <p:nvPr/>
-        </p:nvSpPr>
-        <p:spPr>
-          <a:xfrm>
-            <a:off x="3291840" y="3127248"/>
+          <p:cNvPr id="41" name="Shape 39"/>
+          <p:cNvSpPr/>
+          <p:nvPr/>
+        </p:nvSpPr>
+        <p:spPr>
+          <a:xfrm>
+            <a:off x="3291840" y="4041648"/>
             <a:ext cx="1645920" cy="420624"/>
           </a:xfrm>
           <a:prstGeom prst="rect">
@@ -41474,20 +41144,20 @@
       </p:sp>
       <p:sp>
         <p:nvSpPr>
-          <p:cNvPr id="36" name="Shape 34"/>
-          <p:cNvSpPr/>
-          <p:nvPr/>
-        </p:nvSpPr>
-        <p:spPr>
-          <a:xfrm>
-            <a:off x="5943600" y="3127248"/>
+          <p:cNvPr id="42" name="Shape 40"/>
+          <p:cNvSpPr/>
+          <p:nvPr/>
+        </p:nvSpPr>
+        <p:spPr>
+          <a:xfrm>
+            <a:off x="5943600" y="4041648"/>
             <a:ext cx="1463040" cy="420624"/>
           </a:xfrm>
           <a:prstGeom prst="rect">
             <a:avLst/>
           </a:prstGeom>
           <a:solidFill>
-            <a:srgbClr val="FCE7F3"/>
+            <a:srgbClr val="F1F5F9"/>
           </a:solidFill>
           <a:ln w="12700">
             <a:solidFill>
@@ -41499,205 +41169,13 @@
       </p:sp>
       <p:sp>
         <p:nvSpPr>
-          <p:cNvPr id="37" name="Text 35"/>
-          <p:cNvSpPr/>
-          <p:nvPr/>
-        </p:nvSpPr>
-        <p:spPr>
-          <a:xfrm>
-            <a:off x="5943600" y="3127248"/>
-            <a:ext cx="1463040" cy="420624"/>
-          </a:xfrm>
-          <a:prstGeom prst="rect">
-            <a:avLst/>
-          </a:prstGeom>
-          <a:noFill/>
-          <a:ln/>
-        </p:spPr>
-        <p:txBody>
-          <a:bodyPr wrap="square" lIns="0" tIns="0" rIns="0" bIns="0" rtlCol="0" anchor="ctr"/>
-          <a:lstStyle/>
-          <a:p>
-            <a:pPr algn="ctr" indent="0" marL="0">
-              <a:buNone/>
-            </a:pPr>
-            <a:r>
-              <a:rPr lang="en-US" sz="1300" b="1" dirty="0">
-                <a:solidFill>
-                  <a:srgbClr val="9D174D"/>
-                </a:solidFill>
-                <a:latin typeface="Trebuchet MS" pitchFamily="34" charset="0"/>
-                <a:ea typeface="Trebuchet MS" pitchFamily="34" charset="-122"/>
-                <a:cs typeface="Trebuchet MS" pitchFamily="34" charset="-120"/>
-              </a:rPr>
-              <a:t>-ists</a:t>
-            </a:r>
-            <a:endParaRPr lang="en-US" sz="1300" dirty="0"/>
-          </a:p>
-        </p:txBody>
-      </p:sp>
-      <p:sp>
-        <p:nvSpPr>
-          <p:cNvPr id="38" name="Shape 36"/>
-          <p:cNvSpPr/>
-          <p:nvPr/>
-        </p:nvSpPr>
-        <p:spPr>
-          <a:xfrm>
-            <a:off x="640080" y="3584448"/>
-            <a:ext cx="1463040" cy="420624"/>
-          </a:xfrm>
-          <a:prstGeom prst="rect">
-            <a:avLst/>
-          </a:prstGeom>
-          <a:solidFill>
-            <a:srgbClr val="DDD6FE"/>
-          </a:solidFill>
-          <a:ln w="12700">
-            <a:solidFill>
-              <a:srgbClr val="E5E7EB"/>
-            </a:solidFill>
-            <a:prstDash val="solid"/>
-          </a:ln>
-        </p:spPr>
-      </p:sp>
-      <p:sp>
-        <p:nvSpPr>
-          <p:cNvPr id="39" name="Text 37"/>
-          <p:cNvSpPr/>
-          <p:nvPr/>
-        </p:nvSpPr>
-        <p:spPr>
-          <a:xfrm>
-            <a:off x="640080" y="3584448"/>
-            <a:ext cx="1463040" cy="420624"/>
-          </a:xfrm>
-          <a:prstGeom prst="rect">
-            <a:avLst/>
-          </a:prstGeom>
-          <a:noFill/>
-          <a:ln/>
-        </p:spPr>
-        <p:txBody>
-          <a:bodyPr wrap="square" lIns="0" tIns="0" rIns="0" bIns="0" rtlCol="0" anchor="ctr"/>
-          <a:lstStyle/>
-          <a:p>
-            <a:pPr algn="ctr" indent="0" marL="0">
-              <a:buNone/>
-            </a:pPr>
-            <a:r>
-              <a:rPr lang="en-US" sz="1300" b="1" dirty="0">
-                <a:solidFill>
-                  <a:srgbClr val="4C1D95"/>
-                </a:solidFill>
-                <a:latin typeface="Trebuchet MS" pitchFamily="34" charset="0"/>
-                <a:ea typeface="Trebuchet MS" pitchFamily="34" charset="-122"/>
-                <a:cs typeface="Trebuchet MS" pitchFamily="34" charset="-120"/>
-              </a:rPr>
-              <a:t>chrono-</a:t>
-            </a:r>
-            <a:endParaRPr lang="en-US" sz="1300" dirty="0"/>
-          </a:p>
-        </p:txBody>
-      </p:sp>
-      <p:sp>
-        <p:nvSpPr>
-          <p:cNvPr id="40" name="Shape 38"/>
-          <p:cNvSpPr/>
-          <p:nvPr/>
-        </p:nvSpPr>
-        <p:spPr>
-          <a:xfrm>
-            <a:off x="3291840" y="3584448"/>
-            <a:ext cx="1645920" cy="420624"/>
-          </a:xfrm>
-          <a:prstGeom prst="rect">
-            <a:avLst/>
-          </a:prstGeom>
-          <a:solidFill>
-            <a:srgbClr val="F8FAFC"/>
-          </a:solidFill>
-          <a:ln w="12700">
-            <a:solidFill>
-              <a:srgbClr val="E5E7EB"/>
-            </a:solidFill>
-            <a:prstDash val="solid"/>
-          </a:ln>
-        </p:spPr>
-      </p:sp>
-      <p:sp>
-        <p:nvSpPr>
-          <p:cNvPr id="41" name="Shape 39"/>
-          <p:cNvSpPr/>
-          <p:nvPr/>
-        </p:nvSpPr>
-        <p:spPr>
-          <a:xfrm>
-            <a:off x="5943600" y="3584448"/>
-            <a:ext cx="1463040" cy="420624"/>
-          </a:xfrm>
-          <a:prstGeom prst="rect">
-            <a:avLst/>
-          </a:prstGeom>
-          <a:solidFill>
-            <a:srgbClr val="FCE7F3"/>
-          </a:solidFill>
-          <a:ln w="12700">
-            <a:solidFill>
-              <a:srgbClr val="E5E7EB"/>
-            </a:solidFill>
-            <a:prstDash val="solid"/>
-          </a:ln>
-        </p:spPr>
-      </p:sp>
-      <p:sp>
-        <p:nvSpPr>
-          <p:cNvPr id="42" name="Text 40"/>
-          <p:cNvSpPr/>
-          <p:nvPr/>
-        </p:nvSpPr>
-        <p:spPr>
-          <a:xfrm>
-            <a:off x="5943600" y="3584448"/>
-            <a:ext cx="1463040" cy="420624"/>
-          </a:xfrm>
-          <a:prstGeom prst="rect">
-            <a:avLst/>
-          </a:prstGeom>
-          <a:noFill/>
-          <a:ln/>
-        </p:spPr>
-        <p:txBody>
-          <a:bodyPr wrap="square" lIns="0" tIns="0" rIns="0" bIns="0" rtlCol="0" anchor="ctr"/>
-          <a:lstStyle/>
-          <a:p>
-            <a:pPr algn="ctr" indent="0" marL="0">
-              <a:buNone/>
-            </a:pPr>
-            <a:r>
-              <a:rPr lang="en-US" sz="1300" b="1" dirty="0">
-                <a:solidFill>
-                  <a:srgbClr val="9D174D"/>
-                </a:solidFill>
-                <a:latin typeface="Trebuchet MS" pitchFamily="34" charset="0"/>
-                <a:ea typeface="Trebuchet MS" pitchFamily="34" charset="-122"/>
-                <a:cs typeface="Trebuchet MS" pitchFamily="34" charset="-120"/>
-              </a:rPr>
-              <a:t>-ies</a:t>
-            </a:r>
-            <a:endParaRPr lang="en-US" sz="1300" dirty="0"/>
-          </a:p>
-        </p:txBody>
-      </p:sp>
-      <p:sp>
-        <p:nvSpPr>
           <p:cNvPr id="43" name="Text 41"/>
           <p:cNvSpPr/>
           <p:nvPr/>
         </p:nvSpPr>
         <p:spPr>
           <a:xfrm>
-            <a:off x="365760" y="4178808"/>
+            <a:off x="365760" y="4636008"/>
             <a:ext cx="1097280" cy="420624"/>
           </a:xfrm>
           <a:prstGeom prst="rect">
@@ -41736,7 +41214,7 @@
         </p:nvSpPr>
         <p:spPr>
           <a:xfrm>
-            <a:off x="1508760" y="4178808"/>
+            <a:off x="1508760" y="4636008"/>
             <a:ext cx="950976" cy="420624"/>
           </a:xfrm>
           <a:prstGeom prst="rect">
@@ -41770,7 +41248,7 @@
         </p:nvSpPr>
         <p:spPr>
           <a:xfrm>
-            <a:off x="1508760" y="4178808"/>
+            <a:off x="1508760" y="4636008"/>
             <a:ext cx="950976" cy="420624"/>
           </a:xfrm>
           <a:prstGeom prst="rect">
@@ -41795,7 +41273,7 @@
                 <a:ea typeface="Trebuchet MS" pitchFamily="34" charset="-122"/>
                 <a:cs typeface="Trebuchet MS" pitchFamily="34" charset="-120"/>
               </a:rPr>
-              <a:t>bio-</a:t>
+              <a:t>apo-</a:t>
             </a:r>
             <a:endParaRPr lang="en-US" sz="1300" dirty="0"/>
           </a:p>
@@ -41809,7 +41287,7 @@
         </p:nvSpPr>
         <p:spPr>
           <a:xfrm>
-            <a:off x="2487168" y="4178808"/>
+            <a:off x="2487168" y="4636008"/>
             <a:ext cx="320040" cy="420624"/>
           </a:xfrm>
           <a:prstGeom prst="rect">
@@ -41848,7 +41326,7 @@
         </p:nvSpPr>
         <p:spPr>
           <a:xfrm>
-            <a:off x="2834640" y="4178808"/>
+            <a:off x="2834640" y="4636008"/>
             <a:ext cx="1243584" cy="420624"/>
           </a:xfrm>
           <a:prstGeom prst="rect">
@@ -41882,7 +41360,7 @@
         </p:nvSpPr>
         <p:spPr>
           <a:xfrm>
-            <a:off x="2834640" y="4178808"/>
+            <a:off x="2834640" y="4636008"/>
             <a:ext cx="1243584" cy="420624"/>
           </a:xfrm>
           <a:prstGeom prst="rect">
@@ -41921,7 +41399,7 @@
         </p:nvSpPr>
         <p:spPr>
           <a:xfrm>
-            <a:off x="4105656" y="4178808"/>
+            <a:off x="4105656" y="4636008"/>
             <a:ext cx="320040" cy="420624"/>
           </a:xfrm>
           <a:prstGeom prst="rect">
@@ -41960,8 +41438,8 @@
         </p:nvSpPr>
         <p:spPr>
           <a:xfrm>
-            <a:off x="4453128" y="4178808"/>
-            <a:ext cx="950976" cy="420624"/>
+            <a:off x="4453128" y="4636008"/>
+            <a:ext cx="822960" cy="420624"/>
           </a:xfrm>
           <a:prstGeom prst="rect">
             <a:avLst>
@@ -41994,8 +41472,8 @@
         </p:nvSpPr>
         <p:spPr>
           <a:xfrm>
-            <a:off x="4453128" y="4178808"/>
-            <a:ext cx="950976" cy="420624"/>
+            <a:off x="4453128" y="4636008"/>
+            <a:ext cx="822960" cy="420624"/>
           </a:xfrm>
           <a:prstGeom prst="rect">
             <a:avLst/>
@@ -42019,7 +41497,7 @@
                 <a:ea typeface="Trebuchet MS" pitchFamily="34" charset="-122"/>
                 <a:cs typeface="Trebuchet MS" pitchFamily="34" charset="-120"/>
               </a:rPr>
-              <a:t>-ist</a:t>
+              <a:t>-es</a:t>
             </a:r>
             <a:endParaRPr lang="en-US" sz="1300" dirty="0"/>
           </a:p>
@@ -42033,7 +41511,7 @@
         </p:nvSpPr>
         <p:spPr>
           <a:xfrm>
-            <a:off x="5477256" y="4178808"/>
+            <a:off x="5349240" y="4636008"/>
             <a:ext cx="365760" cy="420624"/>
           </a:xfrm>
           <a:prstGeom prst="rect">
@@ -42072,7 +41550,7 @@
         </p:nvSpPr>
         <p:spPr>
           <a:xfrm>
-            <a:off x="5888736" y="4178808"/>
+            <a:off x="5760720" y="4636008"/>
             <a:ext cx="2194560" cy="420624"/>
           </a:xfrm>
           <a:prstGeom prst="rect">
@@ -42099,7 +41577,7 @@
         </p:nvSpPr>
         <p:spPr>
           <a:xfrm>
-            <a:off x="5888736" y="4178808"/>
+            <a:off x="5760720" y="4636008"/>
             <a:ext cx="2194560" cy="420624"/>
           </a:xfrm>
           <a:prstGeom prst="rect">
@@ -42124,7 +41602,7 @@
                 <a:ea typeface="Trebuchet MS" pitchFamily="34" charset="-122"/>
                 <a:cs typeface="Trebuchet MS" pitchFamily="34" charset="-120"/>
               </a:rPr>
-              <a:t>biology</a:t>
+              <a:t>apology</a:t>
             </a:r>
             <a:endParaRPr lang="en-US" sz="1400" dirty="0"/>
           </a:p>
@@ -42416,7 +41894,7 @@
                 <a:ea typeface="Calibri" pitchFamily="34" charset="-122"/>
                 <a:cs typeface="Calibri" pitchFamily="34" charset="-120"/>
               </a:rPr>
-              <a:t>Word Labs  •  wordlabs.app  •  Root: 'logy' = study or science of</a:t>
+              <a:t>Word Labs  •  wordlabs.app  •  Root: 'logy' = study of</a:t>
             </a:r>
             <a:endParaRPr lang="en-US" sz="800" dirty="0"/>
           </a:p>
@@ -42528,7 +42006,7 @@
                 <a:ea typeface="Trebuchet MS" pitchFamily="34" charset="-122"/>
                 <a:cs typeface="Trebuchet MS" pitchFamily="34" charset="-120"/>
               </a:rPr>
-              <a:t>biology</a:t>
+              <a:t>apology</a:t>
             </a:r>
             <a:endParaRPr lang="en-US" sz="1200" dirty="0"/>
           </a:p>
@@ -42594,7 +42072,7 @@
                 <a:ea typeface="Calibri" pitchFamily="34" charset="-122"/>
                 <a:cs typeface="Calibri" pitchFamily="34" charset="-120"/>
               </a:rPr>
-              <a:t>The study of living things, including plants, animals, and tiny organisms.</a:t>
+              <a:t>a statement expressing regret for a mistake</a:t>
             </a:r>
             <a:endParaRPr lang="en-US" sz="1200" dirty="0"/>
           </a:p>
@@ -42667,7 +42145,7 @@
                 <a:ea typeface="Trebuchet MS" pitchFamily="34" charset="-122"/>
                 <a:cs typeface="Trebuchet MS" pitchFamily="34" charset="-120"/>
               </a:rPr>
-              <a:t>geology</a:t>
+              <a:t>ecology</a:t>
             </a:r>
             <a:endParaRPr lang="en-US" sz="1200" dirty="0"/>
           </a:p>
@@ -42733,7 +42211,7 @@
                 <a:ea typeface="Calibri" pitchFamily="34" charset="-122"/>
                 <a:cs typeface="Calibri" pitchFamily="34" charset="-120"/>
               </a:rPr>
-              <a:t>The study of ancient people and civilisations by digging up and examining old objects.</a:t>
+              <a:t>the order in which events happened, or a record of events arranged in that order</a:t>
             </a:r>
             <a:endParaRPr lang="en-US" sz="1200" dirty="0"/>
           </a:p>
@@ -42806,7 +42284,7 @@
                 <a:ea typeface="Trebuchet MS" pitchFamily="34" charset="-122"/>
                 <a:cs typeface="Trebuchet MS" pitchFamily="34" charset="-120"/>
               </a:rPr>
-              <a:t>zoology</a:t>
+              <a:t>trilogy</a:t>
             </a:r>
             <a:endParaRPr lang="en-US" sz="1200" dirty="0"/>
           </a:p>
@@ -42872,7 +42350,7 @@
                 <a:ea typeface="Calibri" pitchFamily="34" charset="-122"/>
                 <a:cs typeface="Calibri" pitchFamily="34" charset="-120"/>
               </a:rPr>
-              <a:t>The study of animals and how they live and behave.</a:t>
+              <a:t>a set of three related books, films, or stories</a:t>
             </a:r>
             <a:endParaRPr lang="en-US" sz="1200" dirty="0"/>
           </a:p>
@@ -42945,7 +42423,7 @@
                 <a:ea typeface="Trebuchet MS" pitchFamily="34" charset="-122"/>
                 <a:cs typeface="Trebuchet MS" pitchFamily="34" charset="-120"/>
               </a:rPr>
-              <a:t>technology</a:t>
+              <a:t>apologies</a:t>
             </a:r>
             <a:endParaRPr lang="en-US" sz="1200" dirty="0"/>
           </a:p>
@@ -43011,7 +42489,7 @@
                 <a:ea typeface="Calibri" pitchFamily="34" charset="-122"/>
                 <a:cs typeface="Calibri" pitchFamily="34" charset="-120"/>
               </a:rPr>
-              <a:t>The study of how people think, feel, and behave.</a:t>
+              <a:t>the scientific study of diseases and what causes them</a:t>
             </a:r>
             <a:endParaRPr lang="en-US" sz="1200" dirty="0"/>
           </a:p>
@@ -43084,7 +42562,7 @@
                 <a:ea typeface="Trebuchet MS" pitchFamily="34" charset="-122"/>
                 <a:cs typeface="Trebuchet MS" pitchFamily="34" charset="-120"/>
               </a:rPr>
-              <a:t>psychology</a:t>
+              <a:t>pathology</a:t>
             </a:r>
             <a:endParaRPr lang="en-US" sz="1200" dirty="0"/>
           </a:p>
@@ -43150,7 +42628,7 @@
                 <a:ea typeface="Calibri" pitchFamily="34" charset="-122"/>
                 <a:cs typeface="Calibri" pitchFamily="34" charset="-120"/>
               </a:rPr>
-              <a:t>The study and use of tools, machines, and inventions to solve problems.</a:t>
+              <a:t>expressions of regret for having done something wrong</a:t>
             </a:r>
             <a:endParaRPr lang="en-US" sz="1200" dirty="0"/>
           </a:p>
@@ -43223,7 +42701,7 @@
                 <a:ea typeface="Trebuchet MS" pitchFamily="34" charset="-122"/>
                 <a:cs typeface="Trebuchet MS" pitchFamily="34" charset="-120"/>
               </a:rPr>
-              <a:t>ecology</a:t>
+              <a:t>cardiology</a:t>
             </a:r>
             <a:endParaRPr lang="en-US" sz="1200" dirty="0"/>
           </a:p>
@@ -43289,7 +42767,7 @@
                 <a:ea typeface="Calibri" pitchFamily="34" charset="-122"/>
                 <a:cs typeface="Calibri" pitchFamily="34" charset="-120"/>
               </a:rPr>
-              <a:t>The study of how living things interact with each other and their environment.</a:t>
+              <a:t>the branch of medicine that studies and treats the heart</a:t>
             </a:r>
             <a:endParaRPr lang="en-US" sz="1200" dirty="0"/>
           </a:p>
@@ -43362,7 +42840,7 @@
                 <a:ea typeface="Trebuchet MS" pitchFamily="34" charset="-122"/>
                 <a:cs typeface="Trebuchet MS" pitchFamily="34" charset="-120"/>
               </a:rPr>
-              <a:t>archaeology</a:t>
+              <a:t>chronology</a:t>
             </a:r>
             <a:endParaRPr lang="en-US" sz="1200" dirty="0"/>
           </a:p>
@@ -43428,7 +42906,7 @@
                 <a:ea typeface="Calibri" pitchFamily="34" charset="-122"/>
                 <a:cs typeface="Calibri" pitchFamily="34" charset="-120"/>
               </a:rPr>
-              <a:t>The study of rocks, minerals, and how the Earth was formed.</a:t>
+              <a:t>the scientific study of how living things interact with their environment</a:t>
             </a:r>
             <a:endParaRPr lang="en-US" sz="1200" dirty="0"/>
           </a:p>
@@ -43720,7 +43198,7 @@
                 <a:ea typeface="Calibri" pitchFamily="34" charset="-122"/>
                 <a:cs typeface="Calibri" pitchFamily="34" charset="-120"/>
               </a:rPr>
-              <a:t>Word Labs  •  wordlabs.app  •  Root: 'logy' = study or science of</a:t>
+              <a:t>Word Labs  •  wordlabs.app  •  Root: 'logy' = study of</a:t>
             </a:r>
             <a:endParaRPr lang="en-US" sz="800" dirty="0"/>
           </a:p>
@@ -43923,7 +43401,7 @@
                 <a:ea typeface="Calibri" pitchFamily="34" charset="-122"/>
                 <a:cs typeface="Calibri" pitchFamily="34" charset="-120"/>
               </a:rPr>
-              <a:t>In biology class, we learned how plants make their own food using sunlight.</a:t>
+              <a:t>She wrote a sincere apology to her friend after the argument.</a:t>
             </a:r>
             <a:endParaRPr lang="en-US" sz="1500" dirty="0"/>
           </a:p>
@@ -44087,7 +43565,7 @@
                 <a:ea typeface="Calibri" pitchFamily="34" charset="-122"/>
                 <a:cs typeface="Calibri" pitchFamily="34" charset="-120"/>
               </a:rPr>
-              <a:t>The meteorology report warned that a big storm was heading towards the coast.</a:t>
+              <a:t>We learned about ecology when we studied the rainforest.</a:t>
             </a:r>
             <a:endParaRPr lang="en-US" sz="1500" dirty="0"/>
           </a:p>
@@ -44251,7 +43729,7 @@
                 <a:ea typeface="Calibri" pitchFamily="34" charset="-122"/>
                 <a:cs typeface="Calibri" pitchFamily="34" charset="-120"/>
               </a:rPr>
-              <a:t>Our teacher said that ecology helps us understand why we need to protect forests and rivers.</a:t>
+              <a:t>She has read the whole trilogy of fantasy novels.</a:t>
             </a:r>
             <a:endParaRPr lang="en-US" sz="1500" dirty="0"/>
           </a:p>
